--- a/docs/presentation/CareChain_Presentation.pptx
+++ b/docs/presentation/CareChain_Presentation.pptx
@@ -19,8 +19,8 @@
   <p:notesMasterIdLst>
     <p:notesMasterId r:id="rId12"/>
   </p:notesMasterIdLst>
-  <p:sldSz cx="9144000" cy="5143500"/>
-  <p:notesSz cx="5143500" cy="9144000"/>
+  <p:sldSz cx="12191695" cy="6858000"/>
+  <p:notesSz cx="6858000" cy="12191695"/>
   <p:defaultTextStyle>
     <a:lvl1pPr marL="0" algn="l" defTabSz="914400" rtl="0" eaLnBrk="1" latinLnBrk="0" hangingPunct="1">
       <a:defRPr sz="1800" kern="1200">
@@ -1684,12 +1684,12 @@
         </p:nvSpPr>
         <p:spPr>
           <a:xfrm>
-            <a:off x="731520" y="594360"/>
-            <a:ext cx="10725912" cy="5669280"/>
+            <a:off x="603504" y="457200"/>
+            <a:ext cx="10972800" cy="5852160"/>
           </a:xfrm>
           <a:prstGeom prst="roundRect">
             <a:avLst>
-              <a:gd name="adj" fmla="val 2419"/>
+              <a:gd name="adj" fmla="val 1875"/>
             </a:avLst>
           </a:prstGeom>
           <a:solidFill>
@@ -1711,12 +1711,12 @@
         </p:nvSpPr>
         <p:spPr>
           <a:xfrm>
-            <a:off x="3200400" y="868680"/>
-            <a:ext cx="5788152" cy="347472"/>
+            <a:off x="3346704" y="685800"/>
+            <a:ext cx="5486400" cy="320040"/>
           </a:xfrm>
           <a:prstGeom prst="roundRect">
             <a:avLst>
-              <a:gd name="adj" fmla="val 26316"/>
+              <a:gd name="adj" fmla="val 22857"/>
             </a:avLst>
           </a:prstGeom>
           <a:solidFill>
@@ -1738,8 +1738,8 @@
         </p:nvSpPr>
         <p:spPr>
           <a:xfrm>
-            <a:off x="3200400" y="896112"/>
-            <a:ext cx="5788152" cy="292608"/>
+            <a:off x="3346704" y="713232"/>
+            <a:ext cx="5486400" cy="256032"/>
           </a:xfrm>
           <a:prstGeom prst="rect">
             <a:avLst/>
@@ -1755,7 +1755,7 @@
               <a:buNone/>
             </a:pPr>
             <a:r>
-              <a:rPr lang="en-US" sz="1050" b="1" spc="120" kern="0" dirty="0">
+              <a:rPr lang="en-US" sz="1000" b="1" spc="120" kern="0" dirty="0">
                 <a:solidFill>
                   <a:srgbClr val="0369A1"/>
                 </a:solidFill>
@@ -1765,7 +1765,7 @@
               </a:rPr>
               <a:t>FALL SEMESTER 2026-27  •  BCSE497J - PROJECT - I</a:t>
             </a:r>
-            <a:endParaRPr lang="en-US" sz="1050" dirty="0"/>
+            <a:endParaRPr lang="en-US" sz="1000" dirty="0"/>
           </a:p>
         </p:txBody>
       </p:sp>
@@ -1777,8 +1777,8 @@
         </p:nvSpPr>
         <p:spPr>
           <a:xfrm>
-            <a:off x="1097280" y="1325880"/>
-            <a:ext cx="9994392" cy="868680"/>
+            <a:off x="914400" y="1097280"/>
+            <a:ext cx="10360152" cy="777240"/>
           </a:xfrm>
           <a:prstGeom prst="rect">
             <a:avLst/>
@@ -1794,7 +1794,7 @@
               <a:buNone/>
             </a:pPr>
             <a:r>
-              <a:rPr lang="en-US" sz="4400" b="1" dirty="0">
+              <a:rPr lang="en-US" sz="4000" b="1" dirty="0">
                 <a:solidFill>
                   <a:srgbClr val="0F172A"/>
                 </a:solidFill>
@@ -1804,7 +1804,7 @@
               </a:rPr>
               <a:t>CareChain</a:t>
             </a:r>
-            <a:endParaRPr lang="en-US" sz="4400" dirty="0"/>
+            <a:endParaRPr lang="en-US" sz="4000" dirty="0"/>
           </a:p>
         </p:txBody>
       </p:sp>
@@ -1816,8 +1816,8 @@
         </p:nvSpPr>
         <p:spPr>
           <a:xfrm>
-            <a:off x="1097280" y="2176272"/>
-            <a:ext cx="9994392" cy="384048"/>
+            <a:off x="914400" y="1874520"/>
+            <a:ext cx="10360152" cy="347472"/>
           </a:xfrm>
           <a:prstGeom prst="rect">
             <a:avLst/>
@@ -1833,7 +1833,7 @@
               <a:buNone/>
             </a:pPr>
             <a:r>
-              <a:rPr lang="en-US" sz="1700" b="1" dirty="0">
+              <a:rPr lang="en-US" sz="1600" b="1" dirty="0">
                 <a:solidFill>
                   <a:srgbClr val="0369A1"/>
                 </a:solidFill>
@@ -1843,7 +1843,7 @@
               </a:rPr>
               <a:t>Decentralized, Patient-Centric Electronic Health Record (EHR) Protocol</a:t>
             </a:r>
-            <a:endParaRPr lang="en-US" sz="1700" dirty="0"/>
+            <a:endParaRPr lang="en-US" sz="1600" dirty="0"/>
           </a:p>
         </p:txBody>
       </p:sp>
@@ -1855,8 +1855,8 @@
         </p:nvSpPr>
         <p:spPr>
           <a:xfrm>
-            <a:off x="1645920" y="2606040"/>
-            <a:ext cx="8897112" cy="502920"/>
+            <a:off x="1371600" y="2240280"/>
+            <a:ext cx="9445752" cy="411480"/>
           </a:xfrm>
           <a:prstGeom prst="rect">
             <a:avLst/>
@@ -1872,7 +1872,7 @@
               <a:buNone/>
             </a:pPr>
             <a:r>
-              <a:rPr lang="en-US" sz="1200" dirty="0">
+              <a:rPr lang="en-US" sz="1150" dirty="0">
                 <a:solidFill>
                   <a:srgbClr val="64748B"/>
                 </a:solidFill>
@@ -1882,7 +1882,7 @@
               </a:rPr>
               <a:t>Empowering patient data ownership through Ethereum Smart Contracts, AES-256 Client-Side Encryption, and Decentralized IPFS Storage.</a:t>
             </a:r>
-            <a:endParaRPr lang="en-US" sz="1200" dirty="0"/>
+            <a:endParaRPr lang="en-US" sz="1150" dirty="0"/>
           </a:p>
         </p:txBody>
       </p:sp>
@@ -1894,12 +1894,12 @@
         </p:nvSpPr>
         <p:spPr>
           <a:xfrm>
-            <a:off x="1371600" y="3337560"/>
-            <a:ext cx="4480560" cy="2468880"/>
+            <a:off x="1280160" y="2834640"/>
+            <a:ext cx="4572000" cy="2651760"/>
           </a:xfrm>
           <a:prstGeom prst="roundRect">
             <a:avLst>
-              <a:gd name="adj" fmla="val 4444"/>
+              <a:gd name="adj" fmla="val 3448"/>
             </a:avLst>
           </a:prstGeom>
           <a:solidFill>
@@ -1921,24 +1921,24 @@
         </p:nvSpPr>
         <p:spPr>
           <a:xfrm>
-            <a:off x="1600200" y="3520440"/>
-            <a:ext cx="4023360" cy="228600"/>
-          </a:xfrm>
-          <a:prstGeom prst="rect">
-            <a:avLst/>
-          </a:prstGeom>
-          <a:noFill/>
-          <a:ln/>
-        </p:spPr>
-        <p:txBody>
-          <a:bodyPr wrap="square" rtlCol="0" anchor="ctr"/>
-          <a:lstStyle/>
-          <a:p>
-            <a:pPr indent="0" marL="0">
-              <a:buNone/>
-            </a:pPr>
-            <a:r>
-              <a:rPr lang="en-US" sz="950" b="1" spc="100" kern="0" dirty="0">
+            <a:off x="1508760" y="3017520"/>
+            <a:ext cx="4114800" cy="201168"/>
+          </a:xfrm>
+          <a:prstGeom prst="rect">
+            <a:avLst/>
+          </a:prstGeom>
+          <a:noFill/>
+          <a:ln/>
+        </p:spPr>
+        <p:txBody>
+          <a:bodyPr wrap="square" rtlCol="0" anchor="ctr"/>
+          <a:lstStyle/>
+          <a:p>
+            <a:pPr indent="0" marL="0">
+              <a:buNone/>
+            </a:pPr>
+            <a:r>
+              <a:rPr lang="en-US" sz="900" b="1" spc="100" kern="0" dirty="0">
                 <a:solidFill>
                   <a:srgbClr val="0369A1"/>
                 </a:solidFill>
@@ -1948,7 +1948,7 @@
               </a:rPr>
               <a:t>SUBMITTED BY</a:t>
             </a:r>
-            <a:endParaRPr lang="en-US" sz="950" dirty="0"/>
+            <a:endParaRPr lang="en-US" sz="900" dirty="0"/>
           </a:p>
         </p:txBody>
       </p:sp>
@@ -1960,8 +1960,8 @@
         </p:nvSpPr>
         <p:spPr>
           <a:xfrm>
-            <a:off x="1600200" y="3767328"/>
-            <a:ext cx="4023360" cy="365760"/>
+            <a:off x="1508760" y="3246120"/>
+            <a:ext cx="4114800" cy="347472"/>
           </a:xfrm>
           <a:prstGeom prst="rect">
             <a:avLst/>
@@ -1999,8 +1999,8 @@
         </p:nvSpPr>
         <p:spPr>
           <a:xfrm>
-            <a:off x="1600200" y="4187952"/>
-            <a:ext cx="4023360" cy="1325880"/>
+            <a:off x="1508760" y="3657600"/>
+            <a:ext cx="4114800" cy="1554480"/>
           </a:xfrm>
           <a:prstGeom prst="rect">
             <a:avLst/>
@@ -2072,12 +2072,12 @@
         </p:nvSpPr>
         <p:spPr>
           <a:xfrm>
-            <a:off x="6336792" y="3337560"/>
-            <a:ext cx="4480560" cy="2468880"/>
+            <a:off x="6336792" y="2834640"/>
+            <a:ext cx="4572000" cy="2651760"/>
           </a:xfrm>
           <a:prstGeom prst="roundRect">
             <a:avLst>
-              <a:gd name="adj" fmla="val 4444"/>
+              <a:gd name="adj" fmla="val 3448"/>
             </a:avLst>
           </a:prstGeom>
           <a:solidFill>
@@ -2099,24 +2099,24 @@
         </p:nvSpPr>
         <p:spPr>
           <a:xfrm>
-            <a:off x="6565392" y="3520440"/>
-            <a:ext cx="4023360" cy="228600"/>
-          </a:xfrm>
-          <a:prstGeom prst="rect">
-            <a:avLst/>
-          </a:prstGeom>
-          <a:noFill/>
-          <a:ln/>
-        </p:spPr>
-        <p:txBody>
-          <a:bodyPr wrap="square" rtlCol="0" anchor="ctr"/>
-          <a:lstStyle/>
-          <a:p>
-            <a:pPr indent="0" marL="0">
-              <a:buNone/>
-            </a:pPr>
-            <a:r>
-              <a:rPr lang="en-US" sz="950" b="1" spc="100" kern="0" dirty="0">
+            <a:off x="6565392" y="3017520"/>
+            <a:ext cx="4114800" cy="201168"/>
+          </a:xfrm>
+          <a:prstGeom prst="rect">
+            <a:avLst/>
+          </a:prstGeom>
+          <a:noFill/>
+          <a:ln/>
+        </p:spPr>
+        <p:txBody>
+          <a:bodyPr wrap="square" rtlCol="0" anchor="ctr"/>
+          <a:lstStyle/>
+          <a:p>
+            <a:pPr indent="0" marL="0">
+              <a:buNone/>
+            </a:pPr>
+            <a:r>
+              <a:rPr lang="en-US" sz="900" b="1" spc="100" kern="0" dirty="0">
                 <a:solidFill>
                   <a:srgbClr val="6366F1"/>
                 </a:solidFill>
@@ -2126,7 +2126,7 @@
               </a:rPr>
               <a:t>UNDER THE GUIDANCE OF</a:t>
             </a:r>
-            <a:endParaRPr lang="en-US" sz="950" dirty="0"/>
+            <a:endParaRPr lang="en-US" sz="900" dirty="0"/>
           </a:p>
         </p:txBody>
       </p:sp>
@@ -2138,8 +2138,8 @@
         </p:nvSpPr>
         <p:spPr>
           <a:xfrm>
-            <a:off x="6565392" y="3767328"/>
-            <a:ext cx="4023360" cy="365760"/>
+            <a:off x="6565392" y="3246120"/>
+            <a:ext cx="4114800" cy="347472"/>
           </a:xfrm>
           <a:prstGeom prst="rect">
             <a:avLst/>
@@ -2177,8 +2177,8 @@
         </p:nvSpPr>
         <p:spPr>
           <a:xfrm>
-            <a:off x="6565392" y="4187952"/>
-            <a:ext cx="4023360" cy="1417320"/>
+            <a:off x="6565392" y="3657600"/>
+            <a:ext cx="4114800" cy="1554480"/>
           </a:xfrm>
           <a:prstGeom prst="rect">
             <a:avLst/>
@@ -2299,12 +2299,12 @@
         </p:nvSpPr>
         <p:spPr>
           <a:xfrm>
-            <a:off x="731520" y="594360"/>
-            <a:ext cx="10725912" cy="5669280"/>
+            <a:off x="603504" y="457200"/>
+            <a:ext cx="10972800" cy="5852160"/>
           </a:xfrm>
           <a:prstGeom prst="roundRect">
             <a:avLst>
-              <a:gd name="adj" fmla="val 2419"/>
+              <a:gd name="adj" fmla="val 1875"/>
             </a:avLst>
           </a:prstGeom>
           <a:solidFill>
@@ -2326,8 +2326,8 @@
         </p:nvSpPr>
         <p:spPr>
           <a:xfrm>
-            <a:off x="1097280" y="868680"/>
-            <a:ext cx="9994392" cy="320040"/>
+            <a:off x="914400" y="731520"/>
+            <a:ext cx="10360152" cy="274320"/>
           </a:xfrm>
           <a:prstGeom prst="rect">
             <a:avLst/>
@@ -2343,7 +2343,7 @@
               <a:buNone/>
             </a:pPr>
             <a:r>
-              <a:rPr lang="en-US" sz="1100" b="1" spc="150" kern="0" dirty="0">
+              <a:rPr lang="en-US" sz="1000" b="1" spc="150" kern="0" dirty="0">
                 <a:solidFill>
                   <a:srgbClr val="0369A1"/>
                 </a:solidFill>
@@ -2353,7 +2353,7 @@
               </a:rPr>
               <a:t>CONCLUSION &amp; ACADEMIC DEFENSE</a:t>
             </a:r>
-            <a:endParaRPr lang="en-US" sz="1100" dirty="0"/>
+            <a:endParaRPr lang="en-US" sz="1000" dirty="0"/>
           </a:p>
         </p:txBody>
       </p:sp>
@@ -2365,8 +2365,8 @@
         </p:nvSpPr>
         <p:spPr>
           <a:xfrm>
-            <a:off x="1097280" y="1234440"/>
-            <a:ext cx="9994392" cy="685800"/>
+            <a:off x="914400" y="1051560"/>
+            <a:ext cx="10360152" cy="640080"/>
           </a:xfrm>
           <a:prstGeom prst="rect">
             <a:avLst/>
@@ -2382,7 +2382,7 @@
               <a:buNone/>
             </a:pPr>
             <a:r>
-              <a:rPr lang="en-US" sz="3400" b="1" dirty="0">
+              <a:rPr lang="en-US" sz="3000" b="1" dirty="0">
                 <a:solidFill>
                   <a:srgbClr val="0F172A"/>
                 </a:solidFill>
@@ -2392,7 +2392,7 @@
               </a:rPr>
               <a:t>CareChain: Redefining Sovereign Healthcare</a:t>
             </a:r>
-            <a:endParaRPr lang="en-US" sz="3400" dirty="0"/>
+            <a:endParaRPr lang="en-US" sz="3000" dirty="0"/>
           </a:p>
         </p:txBody>
       </p:sp>
@@ -2404,8 +2404,8 @@
         </p:nvSpPr>
         <p:spPr>
           <a:xfrm>
-            <a:off x="1645920" y="1965960"/>
-            <a:ext cx="8897112" cy="685800"/>
+            <a:off x="1371600" y="1691640"/>
+            <a:ext cx="9445752" cy="594360"/>
           </a:xfrm>
           <a:prstGeom prst="rect">
             <a:avLst/>
@@ -2421,7 +2421,7 @@
               <a:buNone/>
             </a:pPr>
             <a:r>
-              <a:rPr lang="en-US" sz="1250" dirty="0">
+              <a:rPr lang="en-US" sz="1150" dirty="0">
                 <a:solidFill>
                   <a:srgbClr val="334155"/>
                 </a:solidFill>
@@ -2431,7 +2431,7 @@
               </a:rPr>
               <a:t>CareChain delivers a verified, production-grade protocol for patient-governed electronic health records. Validated with 100% automated test coverage, zero-trust cryptographic security, and mapped against UN SDGs and TRL progression.</a:t>
             </a:r>
-            <a:endParaRPr lang="en-US" sz="1250" dirty="0"/>
+            <a:endParaRPr lang="en-US" sz="1150" dirty="0"/>
           </a:p>
         </p:txBody>
       </p:sp>
@@ -2443,12 +2443,12 @@
         </p:nvSpPr>
         <p:spPr>
           <a:xfrm>
-            <a:off x="1371600" y="2834640"/>
-            <a:ext cx="9445752" cy="3017520"/>
+            <a:off x="1097280" y="2468880"/>
+            <a:ext cx="9994392" cy="3474720"/>
           </a:xfrm>
           <a:prstGeom prst="roundRect">
             <a:avLst>
-              <a:gd name="adj" fmla="val 3636"/>
+              <a:gd name="adj" fmla="val 2632"/>
             </a:avLst>
           </a:prstGeom>
           <a:solidFill>
@@ -2470,12 +2470,12 @@
         </p:nvSpPr>
         <p:spPr>
           <a:xfrm>
-            <a:off x="1645920" y="3063240"/>
-            <a:ext cx="4206240" cy="731520"/>
+            <a:off x="1371600" y="2743200"/>
+            <a:ext cx="4572000" cy="822960"/>
           </a:xfrm>
           <a:prstGeom prst="roundRect">
             <a:avLst>
-              <a:gd name="adj" fmla="val 10000"/>
+              <a:gd name="adj" fmla="val 8889"/>
             </a:avLst>
           </a:prstGeom>
           <a:solidFill>
@@ -2497,8 +2497,8 @@
         </p:nvSpPr>
         <p:spPr>
           <a:xfrm>
-            <a:off x="1783080" y="3154680"/>
-            <a:ext cx="3931920" cy="182880"/>
+            <a:off x="1554480" y="2852928"/>
+            <a:ext cx="4206240" cy="182880"/>
           </a:xfrm>
           <a:prstGeom prst="rect">
             <a:avLst/>
@@ -2536,8 +2536,8 @@
         </p:nvSpPr>
         <p:spPr>
           <a:xfrm>
-            <a:off x="1783080" y="3355848"/>
-            <a:ext cx="3931920" cy="347472"/>
+            <a:off x="1554480" y="3090672"/>
+            <a:ext cx="4206240" cy="384048"/>
           </a:xfrm>
           <a:prstGeom prst="rect">
             <a:avLst/>
@@ -2575,12 +2575,12 @@
         </p:nvSpPr>
         <p:spPr>
           <a:xfrm>
-            <a:off x="6126480" y="3063240"/>
-            <a:ext cx="4206240" cy="731520"/>
+            <a:off x="6217920" y="2743200"/>
+            <a:ext cx="4572000" cy="822960"/>
           </a:xfrm>
           <a:prstGeom prst="roundRect">
             <a:avLst>
-              <a:gd name="adj" fmla="val 10000"/>
+              <a:gd name="adj" fmla="val 8889"/>
             </a:avLst>
           </a:prstGeom>
           <a:solidFill>
@@ -2602,8 +2602,8 @@
         </p:nvSpPr>
         <p:spPr>
           <a:xfrm>
-            <a:off x="6263640" y="3154680"/>
-            <a:ext cx="3931920" cy="182880"/>
+            <a:off x="6400800" y="2852928"/>
+            <a:ext cx="4206240" cy="182880"/>
           </a:xfrm>
           <a:prstGeom prst="rect">
             <a:avLst/>
@@ -2641,8 +2641,8 @@
         </p:nvSpPr>
         <p:spPr>
           <a:xfrm>
-            <a:off x="6263640" y="3355848"/>
-            <a:ext cx="3931920" cy="347472"/>
+            <a:off x="6400800" y="3090672"/>
+            <a:ext cx="4206240" cy="384048"/>
           </a:xfrm>
           <a:prstGeom prst="rect">
             <a:avLst/>
@@ -2680,12 +2680,12 @@
         </p:nvSpPr>
         <p:spPr>
           <a:xfrm>
-            <a:off x="1645920" y="3931920"/>
-            <a:ext cx="4206240" cy="731520"/>
+            <a:off x="1371600" y="3749040"/>
+            <a:ext cx="4572000" cy="822960"/>
           </a:xfrm>
           <a:prstGeom prst="roundRect">
             <a:avLst>
-              <a:gd name="adj" fmla="val 10000"/>
+              <a:gd name="adj" fmla="val 8889"/>
             </a:avLst>
           </a:prstGeom>
           <a:solidFill>
@@ -2707,8 +2707,8 @@
         </p:nvSpPr>
         <p:spPr>
           <a:xfrm>
-            <a:off x="1783080" y="4023360"/>
-            <a:ext cx="3931920" cy="182880"/>
+            <a:off x="1554480" y="3858768"/>
+            <a:ext cx="4206240" cy="182880"/>
           </a:xfrm>
           <a:prstGeom prst="rect">
             <a:avLst/>
@@ -2746,8 +2746,8 @@
         </p:nvSpPr>
         <p:spPr>
           <a:xfrm>
-            <a:off x="1783080" y="4224528"/>
-            <a:ext cx="3931920" cy="347472"/>
+            <a:off x="1554480" y="4096512"/>
+            <a:ext cx="4206240" cy="384048"/>
           </a:xfrm>
           <a:prstGeom prst="rect">
             <a:avLst/>
@@ -2785,12 +2785,12 @@
         </p:nvSpPr>
         <p:spPr>
           <a:xfrm>
-            <a:off x="6126480" y="3931920"/>
-            <a:ext cx="4206240" cy="731520"/>
+            <a:off x="6217920" y="3749040"/>
+            <a:ext cx="4572000" cy="822960"/>
           </a:xfrm>
           <a:prstGeom prst="roundRect">
             <a:avLst>
-              <a:gd name="adj" fmla="val 10000"/>
+              <a:gd name="adj" fmla="val 8889"/>
             </a:avLst>
           </a:prstGeom>
           <a:solidFill>
@@ -2812,8 +2812,8 @@
         </p:nvSpPr>
         <p:spPr>
           <a:xfrm>
-            <a:off x="6263640" y="4023360"/>
-            <a:ext cx="3931920" cy="182880"/>
+            <a:off x="6400800" y="3858768"/>
+            <a:ext cx="4206240" cy="182880"/>
           </a:xfrm>
           <a:prstGeom prst="rect">
             <a:avLst/>
@@ -2851,8 +2851,8 @@
         </p:nvSpPr>
         <p:spPr>
           <a:xfrm>
-            <a:off x="6263640" y="4224528"/>
-            <a:ext cx="3931920" cy="347472"/>
+            <a:off x="6400800" y="4096512"/>
+            <a:ext cx="4206240" cy="384048"/>
           </a:xfrm>
           <a:prstGeom prst="rect">
             <a:avLst/>
@@ -2890,12 +2890,12 @@
         </p:nvSpPr>
         <p:spPr>
           <a:xfrm>
-            <a:off x="1645920" y="4800600"/>
-            <a:ext cx="4206240" cy="731520"/>
+            <a:off x="1371600" y="4754880"/>
+            <a:ext cx="4572000" cy="822960"/>
           </a:xfrm>
           <a:prstGeom prst="roundRect">
             <a:avLst>
-              <a:gd name="adj" fmla="val 10000"/>
+              <a:gd name="adj" fmla="val 8889"/>
             </a:avLst>
           </a:prstGeom>
           <a:solidFill>
@@ -2917,8 +2917,8 @@
         </p:nvSpPr>
         <p:spPr>
           <a:xfrm>
-            <a:off x="1783080" y="4892040"/>
-            <a:ext cx="3931920" cy="182880"/>
+            <a:off x="1554480" y="4864608"/>
+            <a:ext cx="4206240" cy="182880"/>
           </a:xfrm>
           <a:prstGeom prst="rect">
             <a:avLst/>
@@ -2956,8 +2956,8 @@
         </p:nvSpPr>
         <p:spPr>
           <a:xfrm>
-            <a:off x="1783080" y="5093208"/>
-            <a:ext cx="3931920" cy="347472"/>
+            <a:off x="1554480" y="5102352"/>
+            <a:ext cx="4206240" cy="384048"/>
           </a:xfrm>
           <a:prstGeom prst="rect">
             <a:avLst/>
@@ -2995,12 +2995,12 @@
         </p:nvSpPr>
         <p:spPr>
           <a:xfrm>
-            <a:off x="6126480" y="4800600"/>
-            <a:ext cx="4206240" cy="731520"/>
+            <a:off x="6217920" y="4754880"/>
+            <a:ext cx="4572000" cy="822960"/>
           </a:xfrm>
           <a:prstGeom prst="roundRect">
             <a:avLst>
-              <a:gd name="adj" fmla="val 10000"/>
+              <a:gd name="adj" fmla="val 8889"/>
             </a:avLst>
           </a:prstGeom>
           <a:solidFill>
@@ -3022,8 +3022,8 @@
         </p:nvSpPr>
         <p:spPr>
           <a:xfrm>
-            <a:off x="6263640" y="4892040"/>
-            <a:ext cx="3931920" cy="182880"/>
+            <a:off x="6400800" y="4864608"/>
+            <a:ext cx="4206240" cy="182880"/>
           </a:xfrm>
           <a:prstGeom prst="rect">
             <a:avLst/>
@@ -3061,8 +3061,8 @@
         </p:nvSpPr>
         <p:spPr>
           <a:xfrm>
-            <a:off x="6263640" y="5093208"/>
-            <a:ext cx="3931920" cy="347472"/>
+            <a:off x="6400800" y="5102352"/>
+            <a:ext cx="4206240" cy="384048"/>
           </a:xfrm>
           <a:prstGeom prst="rect">
             <a:avLst/>
@@ -3132,8 +3132,8 @@
         </p:nvSpPr>
         <p:spPr>
           <a:xfrm>
-            <a:off x="548640" y="320040"/>
-            <a:ext cx="11091672" cy="27432"/>
+            <a:off x="603504" y="320040"/>
+            <a:ext cx="10972800" cy="27432"/>
           </a:xfrm>
           <a:prstGeom prst="rect">
             <a:avLst/>
@@ -3152,24 +3152,24 @@
         </p:nvSpPr>
         <p:spPr>
           <a:xfrm>
-            <a:off x="548640" y="384048"/>
-            <a:ext cx="7315200" cy="274320"/>
-          </a:xfrm>
-          <a:prstGeom prst="rect">
-            <a:avLst/>
-          </a:prstGeom>
-          <a:noFill/>
-          <a:ln/>
-        </p:spPr>
-        <p:txBody>
-          <a:bodyPr wrap="square" rtlCol="0" anchor="ctr"/>
-          <a:lstStyle/>
-          <a:p>
-            <a:pPr indent="0" marL="0">
-              <a:buNone/>
-            </a:pPr>
-            <a:r>
-              <a:rPr lang="en-US" sz="1000" b="1" spc="150" kern="0" dirty="0">
+            <a:off x="603504" y="384048"/>
+            <a:ext cx="7315200" cy="256032"/>
+          </a:xfrm>
+          <a:prstGeom prst="rect">
+            <a:avLst/>
+          </a:prstGeom>
+          <a:noFill/>
+          <a:ln/>
+        </p:spPr>
+        <p:txBody>
+          <a:bodyPr wrap="square" rtlCol="0" anchor="ctr"/>
+          <a:lstStyle/>
+          <a:p>
+            <a:pPr indent="0" marL="0">
+              <a:buNone/>
+            </a:pPr>
+            <a:r>
+              <a:rPr lang="en-US" sz="950" b="1" spc="150" kern="0" dirty="0">
                 <a:solidFill>
                   <a:srgbClr val="0369A1"/>
                 </a:solidFill>
@@ -3179,7 +3179,7 @@
               </a:rPr>
               <a:t>ACADEMIC FRAMEWORK • BCSE497J PROJECT PROFILE</a:t>
             </a:r>
-            <a:endParaRPr lang="en-US" sz="1000" dirty="0"/>
+            <a:endParaRPr lang="en-US" sz="950" dirty="0"/>
           </a:p>
         </p:txBody>
       </p:sp>
@@ -3191,8 +3191,8 @@
         </p:nvSpPr>
         <p:spPr>
           <a:xfrm>
-            <a:off x="548640" y="685800"/>
-            <a:ext cx="11091672" cy="9144"/>
+            <a:off x="603504" y="658368"/>
+            <a:ext cx="10972800" cy="9144"/>
           </a:xfrm>
           <a:prstGeom prst="rect">
             <a:avLst/>
@@ -3211,8 +3211,8 @@
         </p:nvSpPr>
         <p:spPr>
           <a:xfrm>
-            <a:off x="548640" y="6355080"/>
-            <a:ext cx="11091672" cy="9144"/>
+            <a:off x="603504" y="6263640"/>
+            <a:ext cx="10972800" cy="9144"/>
           </a:xfrm>
           <a:prstGeom prst="rect">
             <a:avLst/>
@@ -3231,24 +3231,24 @@
         </p:nvSpPr>
         <p:spPr>
           <a:xfrm>
-            <a:off x="548640" y="6419088"/>
-            <a:ext cx="7315200" cy="274320"/>
-          </a:xfrm>
-          <a:prstGeom prst="rect">
-            <a:avLst/>
-          </a:prstGeom>
-          <a:noFill/>
-          <a:ln/>
-        </p:spPr>
-        <p:txBody>
-          <a:bodyPr wrap="square" rtlCol="0" anchor="ctr"/>
-          <a:lstStyle/>
-          <a:p>
-            <a:pPr indent="0" marL="0">
-              <a:buNone/>
-            </a:pPr>
-            <a:r>
-              <a:rPr lang="en-US" sz="950" dirty="0">
+            <a:off x="603504" y="6327648"/>
+            <a:ext cx="6858000" cy="274320"/>
+          </a:xfrm>
+          <a:prstGeom prst="rect">
+            <a:avLst/>
+          </a:prstGeom>
+          <a:noFill/>
+          <a:ln/>
+        </p:spPr>
+        <p:txBody>
+          <a:bodyPr wrap="square" rtlCol="0" anchor="ctr"/>
+          <a:lstStyle/>
+          <a:p>
+            <a:pPr indent="0" marL="0">
+              <a:buNone/>
+            </a:pPr>
+            <a:r>
+              <a:rPr lang="en-US" sz="900" dirty="0">
                 <a:solidFill>
                   <a:srgbClr val="64748B"/>
                 </a:solidFill>
@@ -3258,7 +3258,7 @@
               </a:rPr>
               <a:t>Ashish Anil Sikaria (23BCI0218) • Faculty Guide: Prof. SELVI M • SCOPE</a:t>
             </a:r>
-            <a:endParaRPr lang="en-US" sz="950" dirty="0"/>
+            <a:endParaRPr lang="en-US" sz="900" dirty="0"/>
           </a:p>
         </p:txBody>
       </p:sp>
@@ -3270,8 +3270,8 @@
         </p:nvSpPr>
         <p:spPr>
           <a:xfrm>
-            <a:off x="8686800" y="6419088"/>
-            <a:ext cx="2953512" cy="274320"/>
+            <a:off x="7772400" y="6327648"/>
+            <a:ext cx="3803904" cy="274320"/>
           </a:xfrm>
           <a:prstGeom prst="rect">
             <a:avLst/>
@@ -3287,7 +3287,7 @@
               <a:buNone/>
             </a:pPr>
             <a:r>
-              <a:rPr lang="en-US" sz="950" dirty="0">
+              <a:rPr lang="en-US" sz="900" dirty="0">
                 <a:solidFill>
                   <a:srgbClr val="64748B"/>
                 </a:solidFill>
@@ -3297,7 +3297,7 @@
               </a:rPr>
               <a:t>Fall Semester 2026-27</a:t>
             </a:r>
-            <a:endParaRPr lang="en-US" sz="950" dirty="0"/>
+            <a:endParaRPr lang="en-US" sz="900" dirty="0"/>
           </a:p>
         </p:txBody>
       </p:sp>
@@ -3309,24 +3309,24 @@
         </p:nvSpPr>
         <p:spPr>
           <a:xfrm>
-            <a:off x="548640" y="777240"/>
-            <a:ext cx="10972800" cy="457200"/>
-          </a:xfrm>
-          <a:prstGeom prst="rect">
-            <a:avLst/>
-          </a:prstGeom>
-          <a:noFill/>
-          <a:ln/>
-        </p:spPr>
-        <p:txBody>
-          <a:bodyPr wrap="square" rtlCol="0" anchor="ctr"/>
-          <a:lstStyle/>
-          <a:p>
-            <a:pPr indent="0" marL="0">
-              <a:buNone/>
-            </a:pPr>
-            <a:r>
-              <a:rPr lang="en-US" sz="2400" b="1" dirty="0">
+            <a:off x="603504" y="731520"/>
+            <a:ext cx="10972800" cy="411480"/>
+          </a:xfrm>
+          <a:prstGeom prst="rect">
+            <a:avLst/>
+          </a:prstGeom>
+          <a:noFill/>
+          <a:ln/>
+        </p:spPr>
+        <p:txBody>
+          <a:bodyPr wrap="square" rtlCol="0" anchor="ctr"/>
+          <a:lstStyle/>
+          <a:p>
+            <a:pPr indent="0" marL="0">
+              <a:buNone/>
+            </a:pPr>
+            <a:r>
+              <a:rPr lang="en-US" sz="2200" b="1" dirty="0">
                 <a:solidFill>
                   <a:srgbClr val="0F172A"/>
                 </a:solidFill>
@@ -3336,7 +3336,7 @@
               </a:rPr>
               <a:t>Academic Registration &amp; Governance</a:t>
             </a:r>
-            <a:endParaRPr lang="en-US" sz="2400" dirty="0"/>
+            <a:endParaRPr lang="en-US" sz="2200" dirty="0"/>
           </a:p>
         </p:txBody>
       </p:sp>
@@ -3348,12 +3348,12 @@
         </p:nvSpPr>
         <p:spPr>
           <a:xfrm>
-            <a:off x="548640" y="1371600"/>
-            <a:ext cx="3566160" cy="1280160"/>
+            <a:off x="603504" y="1234440"/>
+            <a:ext cx="3474720" cy="1188720"/>
           </a:xfrm>
           <a:prstGeom prst="roundRect">
             <a:avLst>
-              <a:gd name="adj" fmla="val 7143"/>
+              <a:gd name="adj" fmla="val 6154"/>
             </a:avLst>
           </a:prstGeom>
           <a:solidFill>
@@ -3375,24 +3375,24 @@
         </p:nvSpPr>
         <p:spPr>
           <a:xfrm>
-            <a:off x="777240" y="1554480"/>
-            <a:ext cx="3108960" cy="228600"/>
-          </a:xfrm>
-          <a:prstGeom prst="rect">
-            <a:avLst/>
-          </a:prstGeom>
-          <a:noFill/>
-          <a:ln/>
-        </p:spPr>
-        <p:txBody>
-          <a:bodyPr wrap="square" rtlCol="0" anchor="ctr"/>
-          <a:lstStyle/>
-          <a:p>
-            <a:pPr indent="0" marL="0">
-              <a:buNone/>
-            </a:pPr>
-            <a:r>
-              <a:rPr lang="en-US" sz="950" b="1" spc="100" kern="0" dirty="0">
+            <a:off x="786384" y="1371600"/>
+            <a:ext cx="3108960" cy="201168"/>
+          </a:xfrm>
+          <a:prstGeom prst="rect">
+            <a:avLst/>
+          </a:prstGeom>
+          <a:noFill/>
+          <a:ln/>
+        </p:spPr>
+        <p:txBody>
+          <a:bodyPr wrap="square" rtlCol="0" anchor="ctr"/>
+          <a:lstStyle/>
+          <a:p>
+            <a:pPr indent="0" marL="0">
+              <a:buNone/>
+            </a:pPr>
+            <a:r>
+              <a:rPr lang="en-US" sz="900" b="1" spc="100" kern="0" dirty="0">
                 <a:solidFill>
                   <a:srgbClr val="64748B"/>
                 </a:solidFill>
@@ -3402,7 +3402,7 @@
               </a:rPr>
               <a:t>PROJECT TITLE</a:t>
             </a:r>
-            <a:endParaRPr lang="en-US" sz="950" dirty="0"/>
+            <a:endParaRPr lang="en-US" sz="900" dirty="0"/>
           </a:p>
         </p:txBody>
       </p:sp>
@@ -3414,7 +3414,7 @@
         </p:nvSpPr>
         <p:spPr>
           <a:xfrm>
-            <a:off x="777240" y="1828800"/>
+            <a:off x="786384" y="1618488"/>
             <a:ext cx="3108960" cy="594360"/>
           </a:xfrm>
           <a:prstGeom prst="rect">
@@ -3431,7 +3431,7 @@
               <a:buNone/>
             </a:pPr>
             <a:r>
-              <a:rPr lang="en-US" sz="1350" b="1" dirty="0">
+              <a:rPr lang="en-US" sz="1300" b="1" dirty="0">
                 <a:solidFill>
                   <a:srgbClr val="0369A1"/>
                 </a:solidFill>
@@ -3441,7 +3441,7 @@
               </a:rPr>
               <a:t>CareChain</a:t>
             </a:r>
-            <a:endParaRPr lang="en-US" sz="1350" dirty="0"/>
+            <a:endParaRPr lang="en-US" sz="1300" dirty="0"/>
           </a:p>
         </p:txBody>
       </p:sp>
@@ -3453,12 +3453,12 @@
         </p:nvSpPr>
         <p:spPr>
           <a:xfrm>
-            <a:off x="4297680" y="1371600"/>
-            <a:ext cx="3566160" cy="1280160"/>
+            <a:off x="4352544" y="1234440"/>
+            <a:ext cx="3474720" cy="1188720"/>
           </a:xfrm>
           <a:prstGeom prst="roundRect">
             <a:avLst>
-              <a:gd name="adj" fmla="val 7143"/>
+              <a:gd name="adj" fmla="val 6154"/>
             </a:avLst>
           </a:prstGeom>
           <a:solidFill>
@@ -3480,24 +3480,24 @@
         </p:nvSpPr>
         <p:spPr>
           <a:xfrm>
-            <a:off x="4526280" y="1554480"/>
-            <a:ext cx="3108960" cy="228600"/>
-          </a:xfrm>
-          <a:prstGeom prst="rect">
-            <a:avLst/>
-          </a:prstGeom>
-          <a:noFill/>
-          <a:ln/>
-        </p:spPr>
-        <p:txBody>
-          <a:bodyPr wrap="square" rtlCol="0" anchor="ctr"/>
-          <a:lstStyle/>
-          <a:p>
-            <a:pPr indent="0" marL="0">
-              <a:buNone/>
-            </a:pPr>
-            <a:r>
-              <a:rPr lang="en-US" sz="950" b="1" spc="100" kern="0" dirty="0">
+            <a:off x="4535424" y="1371600"/>
+            <a:ext cx="3108960" cy="201168"/>
+          </a:xfrm>
+          <a:prstGeom prst="rect">
+            <a:avLst/>
+          </a:prstGeom>
+          <a:noFill/>
+          <a:ln/>
+        </p:spPr>
+        <p:txBody>
+          <a:bodyPr wrap="square" rtlCol="0" anchor="ctr"/>
+          <a:lstStyle/>
+          <a:p>
+            <a:pPr indent="0" marL="0">
+              <a:buNone/>
+            </a:pPr>
+            <a:r>
+              <a:rPr lang="en-US" sz="900" b="1" spc="100" kern="0" dirty="0">
                 <a:solidFill>
                   <a:srgbClr val="64748B"/>
                 </a:solidFill>
@@ -3507,7 +3507,7 @@
               </a:rPr>
               <a:t>COURSE CODE &amp; NAME</a:t>
             </a:r>
-            <a:endParaRPr lang="en-US" sz="950" dirty="0"/>
+            <a:endParaRPr lang="en-US" sz="900" dirty="0"/>
           </a:p>
         </p:txBody>
       </p:sp>
@@ -3519,7 +3519,7 @@
         </p:nvSpPr>
         <p:spPr>
           <a:xfrm>
-            <a:off x="4526280" y="1828800"/>
+            <a:off x="4535424" y="1618488"/>
             <a:ext cx="3108960" cy="594360"/>
           </a:xfrm>
           <a:prstGeom prst="rect">
@@ -3536,7 +3536,7 @@
               <a:buNone/>
             </a:pPr>
             <a:r>
-              <a:rPr lang="en-US" sz="1350" b="1" dirty="0">
+              <a:rPr lang="en-US" sz="1300" b="1" dirty="0">
                 <a:solidFill>
                   <a:srgbClr val="0F172A"/>
                 </a:solidFill>
@@ -3546,7 +3546,7 @@
               </a:rPr>
               <a:t>BCSE497J - Project - I</a:t>
             </a:r>
-            <a:endParaRPr lang="en-US" sz="1350" dirty="0"/>
+            <a:endParaRPr lang="en-US" sz="1300" dirty="0"/>
           </a:p>
         </p:txBody>
       </p:sp>
@@ -3558,12 +3558,12 @@
         </p:nvSpPr>
         <p:spPr>
           <a:xfrm>
-            <a:off x="8046720" y="1371600"/>
-            <a:ext cx="3566160" cy="1280160"/>
+            <a:off x="8101584" y="1234440"/>
+            <a:ext cx="3474720" cy="1188720"/>
           </a:xfrm>
           <a:prstGeom prst="roundRect">
             <a:avLst>
-              <a:gd name="adj" fmla="val 7143"/>
+              <a:gd name="adj" fmla="val 6154"/>
             </a:avLst>
           </a:prstGeom>
           <a:solidFill>
@@ -3585,24 +3585,24 @@
         </p:nvSpPr>
         <p:spPr>
           <a:xfrm>
-            <a:off x="8275320" y="1554480"/>
-            <a:ext cx="3108960" cy="228600"/>
-          </a:xfrm>
-          <a:prstGeom prst="rect">
-            <a:avLst/>
-          </a:prstGeom>
-          <a:noFill/>
-          <a:ln/>
-        </p:spPr>
-        <p:txBody>
-          <a:bodyPr wrap="square" rtlCol="0" anchor="ctr"/>
-          <a:lstStyle/>
-          <a:p>
-            <a:pPr indent="0" marL="0">
-              <a:buNone/>
-            </a:pPr>
-            <a:r>
-              <a:rPr lang="en-US" sz="950" b="1" spc="100" kern="0" dirty="0">
+            <a:off x="8284464" y="1371600"/>
+            <a:ext cx="3108960" cy="201168"/>
+          </a:xfrm>
+          <a:prstGeom prst="rect">
+            <a:avLst/>
+          </a:prstGeom>
+          <a:noFill/>
+          <a:ln/>
+        </p:spPr>
+        <p:txBody>
+          <a:bodyPr wrap="square" rtlCol="0" anchor="ctr"/>
+          <a:lstStyle/>
+          <a:p>
+            <a:pPr indent="0" marL="0">
+              <a:buNone/>
+            </a:pPr>
+            <a:r>
+              <a:rPr lang="en-US" sz="900" b="1" spc="100" kern="0" dirty="0">
                 <a:solidFill>
                   <a:srgbClr val="64748B"/>
                 </a:solidFill>
@@ -3612,7 +3612,7 @@
               </a:rPr>
               <a:t>ACADEMIC SEMESTER</a:t>
             </a:r>
-            <a:endParaRPr lang="en-US" sz="950" dirty="0"/>
+            <a:endParaRPr lang="en-US" sz="900" dirty="0"/>
           </a:p>
         </p:txBody>
       </p:sp>
@@ -3624,7 +3624,7 @@
         </p:nvSpPr>
         <p:spPr>
           <a:xfrm>
-            <a:off x="8275320" y="1828800"/>
+            <a:off x="8284464" y="1618488"/>
             <a:ext cx="3108960" cy="594360"/>
           </a:xfrm>
           <a:prstGeom prst="rect">
@@ -3641,7 +3641,7 @@
               <a:buNone/>
             </a:pPr>
             <a:r>
-              <a:rPr lang="en-US" sz="1350" b="1" dirty="0">
+              <a:rPr lang="en-US" sz="1300" b="1" dirty="0">
                 <a:solidFill>
                   <a:srgbClr val="0F172A"/>
                 </a:solidFill>
@@ -3651,7 +3651,7 @@
               </a:rPr>
               <a:t>Fall Semester 2026-27</a:t>
             </a:r>
-            <a:endParaRPr lang="en-US" sz="1350" dirty="0"/>
+            <a:endParaRPr lang="en-US" sz="1300" dirty="0"/>
           </a:p>
         </p:txBody>
       </p:sp>
@@ -3663,12 +3663,12 @@
         </p:nvSpPr>
         <p:spPr>
           <a:xfrm>
-            <a:off x="548640" y="2834640"/>
-            <a:ext cx="3566160" cy="1280160"/>
+            <a:off x="603504" y="2606040"/>
+            <a:ext cx="3474720" cy="1188720"/>
           </a:xfrm>
           <a:prstGeom prst="roundRect">
             <a:avLst>
-              <a:gd name="adj" fmla="val 7143"/>
+              <a:gd name="adj" fmla="val 6154"/>
             </a:avLst>
           </a:prstGeom>
           <a:solidFill>
@@ -3690,24 +3690,24 @@
         </p:nvSpPr>
         <p:spPr>
           <a:xfrm>
-            <a:off x="777240" y="3017520"/>
-            <a:ext cx="3108960" cy="228600"/>
-          </a:xfrm>
-          <a:prstGeom prst="rect">
-            <a:avLst/>
-          </a:prstGeom>
-          <a:noFill/>
-          <a:ln/>
-        </p:spPr>
-        <p:txBody>
-          <a:bodyPr wrap="square" rtlCol="0" anchor="ctr"/>
-          <a:lstStyle/>
-          <a:p>
-            <a:pPr indent="0" marL="0">
-              <a:buNone/>
-            </a:pPr>
-            <a:r>
-              <a:rPr lang="en-US" sz="950" b="1" spc="100" kern="0" dirty="0">
+            <a:off x="786384" y="2743200"/>
+            <a:ext cx="3108960" cy="201168"/>
+          </a:xfrm>
+          <a:prstGeom prst="rect">
+            <a:avLst/>
+          </a:prstGeom>
+          <a:noFill/>
+          <a:ln/>
+        </p:spPr>
+        <p:txBody>
+          <a:bodyPr wrap="square" rtlCol="0" anchor="ctr"/>
+          <a:lstStyle/>
+          <a:p>
+            <a:pPr indent="0" marL="0">
+              <a:buNone/>
+            </a:pPr>
+            <a:r>
+              <a:rPr lang="en-US" sz="900" b="1" spc="100" kern="0" dirty="0">
                 <a:solidFill>
                   <a:srgbClr val="64748B"/>
                 </a:solidFill>
@@ -3717,7 +3717,7 @@
               </a:rPr>
               <a:t>COURSE OPTION / DURATION</a:t>
             </a:r>
-            <a:endParaRPr lang="en-US" sz="950" dirty="0"/>
+            <a:endParaRPr lang="en-US" sz="900" dirty="0"/>
           </a:p>
         </p:txBody>
       </p:sp>
@@ -3729,7 +3729,7 @@
         </p:nvSpPr>
         <p:spPr>
           <a:xfrm>
-            <a:off x="777240" y="3291840"/>
+            <a:off x="786384" y="2990088"/>
             <a:ext cx="3108960" cy="594360"/>
           </a:xfrm>
           <a:prstGeom prst="rect">
@@ -3746,7 +3746,7 @@
               <a:buNone/>
             </a:pPr>
             <a:r>
-              <a:rPr lang="en-US" sz="1350" b="1" dirty="0">
+              <a:rPr lang="en-US" sz="1300" b="1" dirty="0">
                 <a:solidFill>
                   <a:srgbClr val="0369A1"/>
                 </a:solidFill>
@@ -3756,7 +3756,7 @@
               </a:rPr>
               <a:t>Regular • 6 ( Months )</a:t>
             </a:r>
-            <a:endParaRPr lang="en-US" sz="1350" dirty="0"/>
+            <a:endParaRPr lang="en-US" sz="1300" dirty="0"/>
           </a:p>
         </p:txBody>
       </p:sp>
@@ -3768,12 +3768,12 @@
         </p:nvSpPr>
         <p:spPr>
           <a:xfrm>
-            <a:off x="4297680" y="2834640"/>
-            <a:ext cx="3566160" cy="1280160"/>
+            <a:off x="4352544" y="2606040"/>
+            <a:ext cx="3474720" cy="1188720"/>
           </a:xfrm>
           <a:prstGeom prst="roundRect">
             <a:avLst>
-              <a:gd name="adj" fmla="val 7143"/>
+              <a:gd name="adj" fmla="val 6154"/>
             </a:avLst>
           </a:prstGeom>
           <a:solidFill>
@@ -3795,24 +3795,24 @@
         </p:nvSpPr>
         <p:spPr>
           <a:xfrm>
-            <a:off x="4526280" y="3017520"/>
-            <a:ext cx="3108960" cy="228600"/>
-          </a:xfrm>
-          <a:prstGeom prst="rect">
-            <a:avLst/>
-          </a:prstGeom>
-          <a:noFill/>
-          <a:ln/>
-        </p:spPr>
-        <p:txBody>
-          <a:bodyPr wrap="square" rtlCol="0" anchor="ctr"/>
-          <a:lstStyle/>
-          <a:p>
-            <a:pPr indent="0" marL="0">
-              <a:buNone/>
-            </a:pPr>
-            <a:r>
-              <a:rPr lang="en-US" sz="950" b="1" spc="100" kern="0" dirty="0">
+            <a:off x="4535424" y="2743200"/>
+            <a:ext cx="3108960" cy="201168"/>
+          </a:xfrm>
+          <a:prstGeom prst="rect">
+            <a:avLst/>
+          </a:prstGeom>
+          <a:noFill/>
+          <a:ln/>
+        </p:spPr>
+        <p:txBody>
+          <a:bodyPr wrap="square" rtlCol="0" anchor="ctr"/>
+          <a:lstStyle/>
+          <a:p>
+            <a:pPr indent="0" marL="0">
+              <a:buNone/>
+            </a:pPr>
+            <a:r>
+              <a:rPr lang="en-US" sz="900" b="1" spc="100" kern="0" dirty="0">
                 <a:solidFill>
                   <a:srgbClr val="64748B"/>
                 </a:solidFill>
@@ -3822,7 +3822,7 @@
               </a:rPr>
               <a:t>PROJECT OPTION</a:t>
             </a:r>
-            <a:endParaRPr lang="en-US" sz="950" dirty="0"/>
+            <a:endParaRPr lang="en-US" sz="900" dirty="0"/>
           </a:p>
         </p:txBody>
       </p:sp>
@@ -3834,7 +3834,7 @@
         </p:nvSpPr>
         <p:spPr>
           <a:xfrm>
-            <a:off x="4526280" y="3291840"/>
+            <a:off x="4535424" y="2990088"/>
             <a:ext cx="3108960" cy="594360"/>
           </a:xfrm>
           <a:prstGeom prst="rect">
@@ -3851,7 +3851,7 @@
               <a:buNone/>
             </a:pPr>
             <a:r>
-              <a:rPr lang="en-US" sz="1350" b="1" dirty="0">
+              <a:rPr lang="en-US" sz="1300" b="1" dirty="0">
                 <a:solidFill>
                   <a:srgbClr val="0F172A"/>
                 </a:solidFill>
@@ -3861,7 +3861,7 @@
               </a:rPr>
               <a:t>General</a:t>
             </a:r>
-            <a:endParaRPr lang="en-US" sz="1350" dirty="0"/>
+            <a:endParaRPr lang="en-US" sz="1300" dirty="0"/>
           </a:p>
         </p:txBody>
       </p:sp>
@@ -3873,12 +3873,12 @@
         </p:nvSpPr>
         <p:spPr>
           <a:xfrm>
-            <a:off x="8046720" y="2834640"/>
-            <a:ext cx="3566160" cy="1280160"/>
+            <a:off x="8101584" y="2606040"/>
+            <a:ext cx="3474720" cy="1188720"/>
           </a:xfrm>
           <a:prstGeom prst="roundRect">
             <a:avLst>
-              <a:gd name="adj" fmla="val 7143"/>
+              <a:gd name="adj" fmla="val 6154"/>
             </a:avLst>
           </a:prstGeom>
           <a:solidFill>
@@ -3900,24 +3900,24 @@
         </p:nvSpPr>
         <p:spPr>
           <a:xfrm>
-            <a:off x="8275320" y="3017520"/>
-            <a:ext cx="3108960" cy="228600"/>
-          </a:xfrm>
-          <a:prstGeom prst="rect">
-            <a:avLst/>
-          </a:prstGeom>
-          <a:noFill/>
-          <a:ln/>
-        </p:spPr>
-        <p:txBody>
-          <a:bodyPr wrap="square" rtlCol="0" anchor="ctr"/>
-          <a:lstStyle/>
-          <a:p>
-            <a:pPr indent="0" marL="0">
-              <a:buNone/>
-            </a:pPr>
-            <a:r>
-              <a:rPr lang="en-US" sz="950" b="1" spc="100" kern="0" dirty="0">
+            <a:off x="8284464" y="2743200"/>
+            <a:ext cx="3108960" cy="201168"/>
+          </a:xfrm>
+          <a:prstGeom prst="rect">
+            <a:avLst/>
+          </a:prstGeom>
+          <a:noFill/>
+          <a:ln/>
+        </p:spPr>
+        <p:txBody>
+          <a:bodyPr wrap="square" rtlCol="0" anchor="ctr"/>
+          <a:lstStyle/>
+          <a:p>
+            <a:pPr indent="0" marL="0">
+              <a:buNone/>
+            </a:pPr>
+            <a:r>
+              <a:rPr lang="en-US" sz="900" b="1" spc="100" kern="0" dirty="0">
                 <a:solidFill>
                   <a:srgbClr val="64748B"/>
                 </a:solidFill>
@@ -3927,7 +3927,7 @@
               </a:rPr>
               <a:t>REGISTRATION STATUS</a:t>
             </a:r>
-            <a:endParaRPr lang="en-US" sz="950" dirty="0"/>
+            <a:endParaRPr lang="en-US" sz="900" dirty="0"/>
           </a:p>
         </p:txBody>
       </p:sp>
@@ -3939,7 +3939,7 @@
         </p:nvSpPr>
         <p:spPr>
           <a:xfrm>
-            <a:off x="8275320" y="3291840"/>
+            <a:off x="8284464" y="2990088"/>
             <a:ext cx="3108960" cy="594360"/>
           </a:xfrm>
           <a:prstGeom prst="rect">
@@ -3956,7 +3956,7 @@
               <a:buNone/>
             </a:pPr>
             <a:r>
-              <a:rPr lang="en-US" sz="1350" b="1" dirty="0">
+              <a:rPr lang="en-US" sz="1300" b="1" dirty="0">
                 <a:solidFill>
                   <a:srgbClr val="059669"/>
                 </a:solidFill>
@@ -3966,7 +3966,7 @@
               </a:rPr>
               <a:t>Approved by Guide</a:t>
             </a:r>
-            <a:endParaRPr lang="en-US" sz="1350" dirty="0"/>
+            <a:endParaRPr lang="en-US" sz="1300" dirty="0"/>
           </a:p>
         </p:txBody>
       </p:sp>
@@ -3978,12 +3978,12 @@
         </p:nvSpPr>
         <p:spPr>
           <a:xfrm>
-            <a:off x="548640" y="4297680"/>
-            <a:ext cx="3566160" cy="1280160"/>
+            <a:off x="603504" y="3977640"/>
+            <a:ext cx="3474720" cy="1188720"/>
           </a:xfrm>
           <a:prstGeom prst="roundRect">
             <a:avLst>
-              <a:gd name="adj" fmla="val 7143"/>
+              <a:gd name="adj" fmla="val 6154"/>
             </a:avLst>
           </a:prstGeom>
           <a:solidFill>
@@ -4005,24 +4005,24 @@
         </p:nvSpPr>
         <p:spPr>
           <a:xfrm>
-            <a:off x="777240" y="4480560"/>
-            <a:ext cx="3108960" cy="228600"/>
-          </a:xfrm>
-          <a:prstGeom prst="rect">
-            <a:avLst/>
-          </a:prstGeom>
-          <a:noFill/>
-          <a:ln/>
-        </p:spPr>
-        <p:txBody>
-          <a:bodyPr wrap="square" rtlCol="0" anchor="ctr"/>
-          <a:lstStyle/>
-          <a:p>
-            <a:pPr indent="0" marL="0">
-              <a:buNone/>
-            </a:pPr>
-            <a:r>
-              <a:rPr lang="en-US" sz="950" b="1" spc="100" kern="0" dirty="0">
+            <a:off x="786384" y="4114800"/>
+            <a:ext cx="3108960" cy="201168"/>
+          </a:xfrm>
+          <a:prstGeom prst="rect">
+            <a:avLst/>
+          </a:prstGeom>
+          <a:noFill/>
+          <a:ln/>
+        </p:spPr>
+        <p:txBody>
+          <a:bodyPr wrap="square" rtlCol="0" anchor="ctr"/>
+          <a:lstStyle/>
+          <a:p>
+            <a:pPr indent="0" marL="0">
+              <a:buNone/>
+            </a:pPr>
+            <a:r>
+              <a:rPr lang="en-US" sz="900" b="1" spc="100" kern="0" dirty="0">
                 <a:solidFill>
                   <a:srgbClr val="64748B"/>
                 </a:solidFill>
@@ -4032,7 +4032,7 @@
               </a:rPr>
               <a:t>STUDENT NAME</a:t>
             </a:r>
-            <a:endParaRPr lang="en-US" sz="950" dirty="0"/>
+            <a:endParaRPr lang="en-US" sz="900" dirty="0"/>
           </a:p>
         </p:txBody>
       </p:sp>
@@ -4044,7 +4044,7 @@
         </p:nvSpPr>
         <p:spPr>
           <a:xfrm>
-            <a:off x="777240" y="4754880"/>
+            <a:off x="786384" y="4361688"/>
             <a:ext cx="3108960" cy="594360"/>
           </a:xfrm>
           <a:prstGeom prst="rect">
@@ -4061,7 +4061,7 @@
               <a:buNone/>
             </a:pPr>
             <a:r>
-              <a:rPr lang="en-US" sz="1350" b="1" dirty="0">
+              <a:rPr lang="en-US" sz="1300" b="1" dirty="0">
                 <a:solidFill>
                   <a:srgbClr val="0F172A"/>
                 </a:solidFill>
@@ -4071,7 +4071,7 @@
               </a:rPr>
               <a:t>Ashish Anil Sikaria</a:t>
             </a:r>
-            <a:endParaRPr lang="en-US" sz="1350" dirty="0"/>
+            <a:endParaRPr lang="en-US" sz="1300" dirty="0"/>
           </a:p>
         </p:txBody>
       </p:sp>
@@ -4083,12 +4083,12 @@
         </p:nvSpPr>
         <p:spPr>
           <a:xfrm>
-            <a:off x="4297680" y="4297680"/>
-            <a:ext cx="3566160" cy="1280160"/>
+            <a:off x="4352544" y="3977640"/>
+            <a:ext cx="3474720" cy="1188720"/>
           </a:xfrm>
           <a:prstGeom prst="roundRect">
             <a:avLst>
-              <a:gd name="adj" fmla="val 7143"/>
+              <a:gd name="adj" fmla="val 6154"/>
             </a:avLst>
           </a:prstGeom>
           <a:solidFill>
@@ -4110,24 +4110,24 @@
         </p:nvSpPr>
         <p:spPr>
           <a:xfrm>
-            <a:off x="4526280" y="4480560"/>
-            <a:ext cx="3108960" cy="228600"/>
-          </a:xfrm>
-          <a:prstGeom prst="rect">
-            <a:avLst/>
-          </a:prstGeom>
-          <a:noFill/>
-          <a:ln/>
-        </p:spPr>
-        <p:txBody>
-          <a:bodyPr wrap="square" rtlCol="0" anchor="ctr"/>
-          <a:lstStyle/>
-          <a:p>
-            <a:pPr indent="0" marL="0">
-              <a:buNone/>
-            </a:pPr>
-            <a:r>
-              <a:rPr lang="en-US" sz="950" b="1" spc="100" kern="0" dirty="0">
+            <a:off x="4535424" y="4114800"/>
+            <a:ext cx="3108960" cy="201168"/>
+          </a:xfrm>
+          <a:prstGeom prst="rect">
+            <a:avLst/>
+          </a:prstGeom>
+          <a:noFill/>
+          <a:ln/>
+        </p:spPr>
+        <p:txBody>
+          <a:bodyPr wrap="square" rtlCol="0" anchor="ctr"/>
+          <a:lstStyle/>
+          <a:p>
+            <a:pPr indent="0" marL="0">
+              <a:buNone/>
+            </a:pPr>
+            <a:r>
+              <a:rPr lang="en-US" sz="900" b="1" spc="100" kern="0" dirty="0">
                 <a:solidFill>
                   <a:srgbClr val="64748B"/>
                 </a:solidFill>
@@ -4137,7 +4137,7 @@
               </a:rPr>
               <a:t>REGISTER NUMBER</a:t>
             </a:r>
-            <a:endParaRPr lang="en-US" sz="950" dirty="0"/>
+            <a:endParaRPr lang="en-US" sz="900" dirty="0"/>
           </a:p>
         </p:txBody>
       </p:sp>
@@ -4149,7 +4149,7 @@
         </p:nvSpPr>
         <p:spPr>
           <a:xfrm>
-            <a:off x="4526280" y="4754880"/>
+            <a:off x="4535424" y="4361688"/>
             <a:ext cx="3108960" cy="594360"/>
           </a:xfrm>
           <a:prstGeom prst="rect">
@@ -4166,7 +4166,7 @@
               <a:buNone/>
             </a:pPr>
             <a:r>
-              <a:rPr lang="en-US" sz="1350" b="1" dirty="0">
+              <a:rPr lang="en-US" sz="1300" b="1" dirty="0">
                 <a:solidFill>
                   <a:srgbClr val="0369A1"/>
                 </a:solidFill>
@@ -4176,7 +4176,7 @@
               </a:rPr>
               <a:t>23BCI0218</a:t>
             </a:r>
-            <a:endParaRPr lang="en-US" sz="1350" dirty="0"/>
+            <a:endParaRPr lang="en-US" sz="1300" dirty="0"/>
           </a:p>
         </p:txBody>
       </p:sp>
@@ -4188,12 +4188,12 @@
         </p:nvSpPr>
         <p:spPr>
           <a:xfrm>
-            <a:off x="8046720" y="4297680"/>
-            <a:ext cx="3566160" cy="1280160"/>
+            <a:off x="8101584" y="3977640"/>
+            <a:ext cx="3474720" cy="1188720"/>
           </a:xfrm>
           <a:prstGeom prst="roundRect">
             <a:avLst>
-              <a:gd name="adj" fmla="val 7143"/>
+              <a:gd name="adj" fmla="val 6154"/>
             </a:avLst>
           </a:prstGeom>
           <a:solidFill>
@@ -4215,24 +4215,24 @@
         </p:nvSpPr>
         <p:spPr>
           <a:xfrm>
-            <a:off x="8275320" y="4480560"/>
-            <a:ext cx="3108960" cy="228600"/>
-          </a:xfrm>
-          <a:prstGeom prst="rect">
-            <a:avLst/>
-          </a:prstGeom>
-          <a:noFill/>
-          <a:ln/>
-        </p:spPr>
-        <p:txBody>
-          <a:bodyPr wrap="square" rtlCol="0" anchor="ctr"/>
-          <a:lstStyle/>
-          <a:p>
-            <a:pPr indent="0" marL="0">
-              <a:buNone/>
-            </a:pPr>
-            <a:r>
-              <a:rPr lang="en-US" sz="950" b="1" spc="100" kern="0" dirty="0">
+            <a:off x="8284464" y="4114800"/>
+            <a:ext cx="3108960" cy="201168"/>
+          </a:xfrm>
+          <a:prstGeom prst="rect">
+            <a:avLst/>
+          </a:prstGeom>
+          <a:noFill/>
+          <a:ln/>
+        </p:spPr>
+        <p:txBody>
+          <a:bodyPr wrap="square" rtlCol="0" anchor="ctr"/>
+          <a:lstStyle/>
+          <a:p>
+            <a:pPr indent="0" marL="0">
+              <a:buNone/>
+            </a:pPr>
+            <a:r>
+              <a:rPr lang="en-US" sz="900" b="1" spc="100" kern="0" dirty="0">
                 <a:solidFill>
                   <a:srgbClr val="64748B"/>
                 </a:solidFill>
@@ -4242,7 +4242,7 @@
               </a:rPr>
               <a:t>FACULTY GUIDE</a:t>
             </a:r>
-            <a:endParaRPr lang="en-US" sz="950" dirty="0"/>
+            <a:endParaRPr lang="en-US" sz="900" dirty="0"/>
           </a:p>
         </p:txBody>
       </p:sp>
@@ -4254,7 +4254,7 @@
         </p:nvSpPr>
         <p:spPr>
           <a:xfrm>
-            <a:off x="8275320" y="4754880"/>
+            <a:off x="8284464" y="4361688"/>
             <a:ext cx="3108960" cy="594360"/>
           </a:xfrm>
           <a:prstGeom prst="rect">
@@ -4271,7 +4271,7 @@
               <a:buNone/>
             </a:pPr>
             <a:r>
-              <a:rPr lang="en-US" sz="1350" b="1" dirty="0">
+              <a:rPr lang="en-US" sz="1300" b="1" dirty="0">
                 <a:solidFill>
                   <a:srgbClr val="6366F1"/>
                 </a:solidFill>
@@ -4281,7 +4281,7 @@
               </a:rPr>
               <a:t>Prof. SELVI M (Emp ID: 16106)</a:t>
             </a:r>
-            <a:endParaRPr lang="en-US" sz="1350" dirty="0"/>
+            <a:endParaRPr lang="en-US" sz="1300" dirty="0"/>
           </a:p>
         </p:txBody>
       </p:sp>
@@ -4293,8 +4293,8 @@
         </p:nvSpPr>
         <p:spPr>
           <a:xfrm>
-            <a:off x="548640" y="5715000"/>
-            <a:ext cx="11091672" cy="502920"/>
+            <a:off x="603504" y="5440680"/>
+            <a:ext cx="10972800" cy="502920"/>
           </a:xfrm>
           <a:prstGeom prst="roundRect">
             <a:avLst>
@@ -4320,7 +4320,7 @@
         </p:nvSpPr>
         <p:spPr>
           <a:xfrm>
-            <a:off x="731520" y="5806440"/>
+            <a:off x="731520" y="5532120"/>
             <a:ext cx="10698480" cy="320040"/>
           </a:xfrm>
           <a:prstGeom prst="rect">
@@ -4391,8 +4391,8 @@
         </p:nvSpPr>
         <p:spPr>
           <a:xfrm>
-            <a:off x="548640" y="320040"/>
-            <a:ext cx="11091672" cy="27432"/>
+            <a:off x="603504" y="320040"/>
+            <a:ext cx="10972800" cy="27432"/>
           </a:xfrm>
           <a:prstGeom prst="rect">
             <a:avLst/>
@@ -4411,24 +4411,24 @@
         </p:nvSpPr>
         <p:spPr>
           <a:xfrm>
-            <a:off x="548640" y="384048"/>
-            <a:ext cx="7315200" cy="274320"/>
-          </a:xfrm>
-          <a:prstGeom prst="rect">
-            <a:avLst/>
-          </a:prstGeom>
-          <a:noFill/>
-          <a:ln/>
-        </p:spPr>
-        <p:txBody>
-          <a:bodyPr wrap="square" rtlCol="0" anchor="ctr"/>
-          <a:lstStyle/>
-          <a:p>
-            <a:pPr indent="0" marL="0">
-              <a:buNone/>
-            </a:pPr>
-            <a:r>
-              <a:rPr lang="en-US" sz="1000" b="1" spc="150" kern="0" dirty="0">
+            <a:off x="603504" y="384048"/>
+            <a:ext cx="7315200" cy="256032"/>
+          </a:xfrm>
+          <a:prstGeom prst="rect">
+            <a:avLst/>
+          </a:prstGeom>
+          <a:noFill/>
+          <a:ln/>
+        </p:spPr>
+        <p:txBody>
+          <a:bodyPr wrap="square" rtlCol="0" anchor="ctr"/>
+          <a:lstStyle/>
+          <a:p>
+            <a:pPr indent="0" marL="0">
+              <a:buNone/>
+            </a:pPr>
+            <a:r>
+              <a:rPr lang="en-US" sz="950" b="1" spc="150" kern="0" dirty="0">
                 <a:solidFill>
                   <a:srgbClr val="0369A1"/>
                 </a:solidFill>
@@ -4438,7 +4438,7 @@
               </a:rPr>
               <a:t>HEALTHCARE INDUSTRY PROBLEM STATEMENT</a:t>
             </a:r>
-            <a:endParaRPr lang="en-US" sz="1000" dirty="0"/>
+            <a:endParaRPr lang="en-US" sz="950" dirty="0"/>
           </a:p>
         </p:txBody>
       </p:sp>
@@ -4450,8 +4450,8 @@
         </p:nvSpPr>
         <p:spPr>
           <a:xfrm>
-            <a:off x="548640" y="685800"/>
-            <a:ext cx="11091672" cy="9144"/>
+            <a:off x="603504" y="658368"/>
+            <a:ext cx="10972800" cy="9144"/>
           </a:xfrm>
           <a:prstGeom prst="rect">
             <a:avLst/>
@@ -4470,8 +4470,8 @@
         </p:nvSpPr>
         <p:spPr>
           <a:xfrm>
-            <a:off x="548640" y="6355080"/>
-            <a:ext cx="11091672" cy="9144"/>
+            <a:off x="603504" y="6263640"/>
+            <a:ext cx="10972800" cy="9144"/>
           </a:xfrm>
           <a:prstGeom prst="rect">
             <a:avLst/>
@@ -4490,24 +4490,24 @@
         </p:nvSpPr>
         <p:spPr>
           <a:xfrm>
-            <a:off x="548640" y="6419088"/>
-            <a:ext cx="7315200" cy="274320"/>
-          </a:xfrm>
-          <a:prstGeom prst="rect">
-            <a:avLst/>
-          </a:prstGeom>
-          <a:noFill/>
-          <a:ln/>
-        </p:spPr>
-        <p:txBody>
-          <a:bodyPr wrap="square" rtlCol="0" anchor="ctr"/>
-          <a:lstStyle/>
-          <a:p>
-            <a:pPr indent="0" marL="0">
-              <a:buNone/>
-            </a:pPr>
-            <a:r>
-              <a:rPr lang="en-US" sz="950" dirty="0">
+            <a:off x="603504" y="6327648"/>
+            <a:ext cx="6858000" cy="274320"/>
+          </a:xfrm>
+          <a:prstGeom prst="rect">
+            <a:avLst/>
+          </a:prstGeom>
+          <a:noFill/>
+          <a:ln/>
+        </p:spPr>
+        <p:txBody>
+          <a:bodyPr wrap="square" rtlCol="0" anchor="ctr"/>
+          <a:lstStyle/>
+          <a:p>
+            <a:pPr indent="0" marL="0">
+              <a:buNone/>
+            </a:pPr>
+            <a:r>
+              <a:rPr lang="en-US" sz="900" dirty="0">
                 <a:solidFill>
                   <a:srgbClr val="64748B"/>
                 </a:solidFill>
@@ -4517,7 +4517,7 @@
               </a:rPr>
               <a:t>Ashish Anil Sikaria (23BCI0218) • Faculty Guide: Prof. SELVI M • SCOPE</a:t>
             </a:r>
-            <a:endParaRPr lang="en-US" sz="950" dirty="0"/>
+            <a:endParaRPr lang="en-US" sz="900" dirty="0"/>
           </a:p>
         </p:txBody>
       </p:sp>
@@ -4529,8 +4529,8 @@
         </p:nvSpPr>
         <p:spPr>
           <a:xfrm>
-            <a:off x="8686800" y="6419088"/>
-            <a:ext cx="2953512" cy="274320"/>
+            <a:off x="7772400" y="6327648"/>
+            <a:ext cx="3803904" cy="274320"/>
           </a:xfrm>
           <a:prstGeom prst="rect">
             <a:avLst/>
@@ -4546,7 +4546,7 @@
               <a:buNone/>
             </a:pPr>
             <a:r>
-              <a:rPr lang="en-US" sz="950" dirty="0">
+              <a:rPr lang="en-US" sz="900" dirty="0">
                 <a:solidFill>
                   <a:srgbClr val="64748B"/>
                 </a:solidFill>
@@ -4556,7 +4556,7 @@
               </a:rPr>
               <a:t>Fall Semester 2026-27</a:t>
             </a:r>
-            <a:endParaRPr lang="en-US" sz="950" dirty="0"/>
+            <a:endParaRPr lang="en-US" sz="900" dirty="0"/>
           </a:p>
         </p:txBody>
       </p:sp>
@@ -4568,24 +4568,24 @@
         </p:nvSpPr>
         <p:spPr>
           <a:xfrm>
-            <a:off x="548640" y="777240"/>
-            <a:ext cx="10972800" cy="457200"/>
-          </a:xfrm>
-          <a:prstGeom prst="rect">
-            <a:avLst/>
-          </a:prstGeom>
-          <a:noFill/>
-          <a:ln/>
-        </p:spPr>
-        <p:txBody>
-          <a:bodyPr wrap="square" rtlCol="0" anchor="ctr"/>
-          <a:lstStyle/>
-          <a:p>
-            <a:pPr indent="0" marL="0">
-              <a:buNone/>
-            </a:pPr>
-            <a:r>
-              <a:rPr lang="en-US" sz="2400" b="1" dirty="0">
+            <a:off x="603504" y="731520"/>
+            <a:ext cx="10972800" cy="411480"/>
+          </a:xfrm>
+          <a:prstGeom prst="rect">
+            <a:avLst/>
+          </a:prstGeom>
+          <a:noFill/>
+          <a:ln/>
+        </p:spPr>
+        <p:txBody>
+          <a:bodyPr wrap="square" rtlCol="0" anchor="ctr"/>
+          <a:lstStyle/>
+          <a:p>
+            <a:pPr indent="0" marL="0">
+              <a:buNone/>
+            </a:pPr>
+            <a:r>
+              <a:rPr lang="en-US" sz="2200" b="1" dirty="0">
                 <a:solidFill>
                   <a:srgbClr val="0F172A"/>
                 </a:solidFill>
@@ -4595,7 +4595,7 @@
               </a:rPr>
               <a:t>The Crisis of Centralized Electronic Health Records</a:t>
             </a:r>
-            <a:endParaRPr lang="en-US" sz="2400" dirty="0"/>
+            <a:endParaRPr lang="en-US" sz="2200" dirty="0"/>
           </a:p>
         </p:txBody>
       </p:sp>
@@ -4607,12 +4607,12 @@
         </p:nvSpPr>
         <p:spPr>
           <a:xfrm>
-            <a:off x="548640" y="1371600"/>
-            <a:ext cx="5440680" cy="2103120"/>
+            <a:off x="603504" y="1234440"/>
+            <a:ext cx="5349240" cy="2148840"/>
           </a:xfrm>
           <a:prstGeom prst="roundRect">
             <a:avLst>
-              <a:gd name="adj" fmla="val 5217"/>
+              <a:gd name="adj" fmla="val 4255"/>
             </a:avLst>
           </a:prstGeom>
           <a:solidFill>
@@ -4634,8 +4634,8 @@
         </p:nvSpPr>
         <p:spPr>
           <a:xfrm>
-            <a:off x="822960" y="1572768"/>
-            <a:ext cx="731520" cy="365760"/>
+            <a:off x="832104" y="1417320"/>
+            <a:ext cx="640080" cy="320040"/>
           </a:xfrm>
           <a:prstGeom prst="rect">
             <a:avLst/>
@@ -4673,8 +4673,8 @@
         </p:nvSpPr>
         <p:spPr>
           <a:xfrm>
-            <a:off x="1463040" y="1572768"/>
-            <a:ext cx="4206240" cy="365760"/>
+            <a:off x="1472184" y="1417320"/>
+            <a:ext cx="4206240" cy="320040"/>
           </a:xfrm>
           <a:prstGeom prst="rect">
             <a:avLst/>
@@ -4712,24 +4712,24 @@
         </p:nvSpPr>
         <p:spPr>
           <a:xfrm>
-            <a:off x="822960" y="2011680"/>
-            <a:ext cx="4892040" cy="1280160"/>
-          </a:xfrm>
-          <a:prstGeom prst="rect">
-            <a:avLst/>
-          </a:prstGeom>
-          <a:noFill/>
-          <a:ln/>
-        </p:spPr>
-        <p:txBody>
-          <a:bodyPr wrap="square" rtlCol="0" anchor="ctr"/>
-          <a:lstStyle/>
-          <a:p>
-            <a:pPr indent="0" marL="0">
-              <a:buNone/>
-            </a:pPr>
-            <a:r>
-              <a:rPr lang="en-US" sz="1150" dirty="0">
+            <a:off x="832104" y="1828800"/>
+            <a:ext cx="4892040" cy="1371600"/>
+          </a:xfrm>
+          <a:prstGeom prst="rect">
+            <a:avLst/>
+          </a:prstGeom>
+          <a:noFill/>
+          <a:ln/>
+        </p:spPr>
+        <p:txBody>
+          <a:bodyPr wrap="square" rtlCol="0" anchor="ctr"/>
+          <a:lstStyle/>
+          <a:p>
+            <a:pPr indent="0" marL="0">
+              <a:buNone/>
+            </a:pPr>
+            <a:r>
+              <a:rPr lang="en-US" sz="1100" dirty="0">
                 <a:solidFill>
                   <a:srgbClr val="334155"/>
                 </a:solidFill>
@@ -4739,7 +4739,7 @@
               </a:rPr>
               <a:t>Over 133M+ medical records breached in 2023–2025 alone. Centralized hospital databases remain high-value targets for ransomware attacks and unauthorized extraction.</a:t>
             </a:r>
-            <a:endParaRPr lang="en-US" sz="1150" dirty="0"/>
+            <a:endParaRPr lang="en-US" sz="1100" dirty="0"/>
           </a:p>
         </p:txBody>
       </p:sp>
@@ -4751,12 +4751,12 @@
         </p:nvSpPr>
         <p:spPr>
           <a:xfrm>
-            <a:off x="6172200" y="1371600"/>
-            <a:ext cx="5440680" cy="2103120"/>
+            <a:off x="6227064" y="1234440"/>
+            <a:ext cx="5349240" cy="2148840"/>
           </a:xfrm>
           <a:prstGeom prst="roundRect">
             <a:avLst>
-              <a:gd name="adj" fmla="val 5217"/>
+              <a:gd name="adj" fmla="val 4255"/>
             </a:avLst>
           </a:prstGeom>
           <a:solidFill>
@@ -4778,8 +4778,8 @@
         </p:nvSpPr>
         <p:spPr>
           <a:xfrm>
-            <a:off x="6446520" y="1572768"/>
-            <a:ext cx="731520" cy="365760"/>
+            <a:off x="6455664" y="1417320"/>
+            <a:ext cx="640080" cy="320040"/>
           </a:xfrm>
           <a:prstGeom prst="rect">
             <a:avLst/>
@@ -4817,8 +4817,8 @@
         </p:nvSpPr>
         <p:spPr>
           <a:xfrm>
-            <a:off x="7086600" y="1572768"/>
-            <a:ext cx="4206240" cy="365760"/>
+            <a:off x="7095744" y="1417320"/>
+            <a:ext cx="4206240" cy="320040"/>
           </a:xfrm>
           <a:prstGeom prst="rect">
             <a:avLst/>
@@ -4856,24 +4856,24 @@
         </p:nvSpPr>
         <p:spPr>
           <a:xfrm>
-            <a:off x="6446520" y="2011680"/>
-            <a:ext cx="4892040" cy="1280160"/>
-          </a:xfrm>
-          <a:prstGeom prst="rect">
-            <a:avLst/>
-          </a:prstGeom>
-          <a:noFill/>
-          <a:ln/>
-        </p:spPr>
-        <p:txBody>
-          <a:bodyPr wrap="square" rtlCol="0" anchor="ctr"/>
-          <a:lstStyle/>
-          <a:p>
-            <a:pPr indent="0" marL="0">
-              <a:buNone/>
-            </a:pPr>
-            <a:r>
-              <a:rPr lang="en-US" sz="1150" dirty="0">
+            <a:off x="6455664" y="1828800"/>
+            <a:ext cx="4892040" cy="1371600"/>
+          </a:xfrm>
+          <a:prstGeom prst="rect">
+            <a:avLst/>
+          </a:prstGeom>
+          <a:noFill/>
+          <a:ln/>
+        </p:spPr>
+        <p:txBody>
+          <a:bodyPr wrap="square" rtlCol="0" anchor="ctr"/>
+          <a:lstStyle/>
+          <a:p>
+            <a:pPr indent="0" marL="0">
+              <a:buNone/>
+            </a:pPr>
+            <a:r>
+              <a:rPr lang="en-US" sz="1100" dirty="0">
                 <a:solidFill>
                   <a:srgbClr val="334155"/>
                 </a:solidFill>
@@ -4883,7 +4883,7 @@
               </a:rPr>
               <a:t>Patients have no direct ownership or visibility into who accesses, shares, or commercializes their sensitive diagnostic records among insurance brokers.</a:t>
             </a:r>
-            <a:endParaRPr lang="en-US" sz="1150" dirty="0"/>
+            <a:endParaRPr lang="en-US" sz="1100" dirty="0"/>
           </a:p>
         </p:txBody>
       </p:sp>
@@ -4895,12 +4895,12 @@
         </p:nvSpPr>
         <p:spPr>
           <a:xfrm>
-            <a:off x="548640" y="3657600"/>
-            <a:ext cx="5440680" cy="2103120"/>
+            <a:off x="603504" y="3566160"/>
+            <a:ext cx="5349240" cy="2148840"/>
           </a:xfrm>
           <a:prstGeom prst="roundRect">
             <a:avLst>
-              <a:gd name="adj" fmla="val 5217"/>
+              <a:gd name="adj" fmla="val 4255"/>
             </a:avLst>
           </a:prstGeom>
           <a:solidFill>
@@ -4922,8 +4922,8 @@
         </p:nvSpPr>
         <p:spPr>
           <a:xfrm>
-            <a:off x="822960" y="3858768"/>
-            <a:ext cx="731520" cy="365760"/>
+            <a:off x="832104" y="3749040"/>
+            <a:ext cx="640080" cy="320040"/>
           </a:xfrm>
           <a:prstGeom prst="rect">
             <a:avLst/>
@@ -4961,8 +4961,8 @@
         </p:nvSpPr>
         <p:spPr>
           <a:xfrm>
-            <a:off x="1463040" y="3858768"/>
-            <a:ext cx="4206240" cy="365760"/>
+            <a:off x="1472184" y="3749040"/>
+            <a:ext cx="4206240" cy="320040"/>
           </a:xfrm>
           <a:prstGeom prst="rect">
             <a:avLst/>
@@ -5000,24 +5000,24 @@
         </p:nvSpPr>
         <p:spPr>
           <a:xfrm>
-            <a:off x="822960" y="4297680"/>
-            <a:ext cx="4892040" cy="1280160"/>
-          </a:xfrm>
-          <a:prstGeom prst="rect">
-            <a:avLst/>
-          </a:prstGeom>
-          <a:noFill/>
-          <a:ln/>
-        </p:spPr>
-        <p:txBody>
-          <a:bodyPr wrap="square" rtlCol="0" anchor="ctr"/>
-          <a:lstStyle/>
-          <a:p>
-            <a:pPr indent="0" marL="0">
-              <a:buNone/>
-            </a:pPr>
-            <a:r>
-              <a:rPr lang="en-US" sz="1150" dirty="0">
+            <a:off x="832104" y="4160520"/>
+            <a:ext cx="4892040" cy="1371600"/>
+          </a:xfrm>
+          <a:prstGeom prst="rect">
+            <a:avLst/>
+          </a:prstGeom>
+          <a:noFill/>
+          <a:ln/>
+        </p:spPr>
+        <p:txBody>
+          <a:bodyPr wrap="square" rtlCol="0" anchor="ctr"/>
+          <a:lstStyle/>
+          <a:p>
+            <a:pPr indent="0" marL="0">
+              <a:buNone/>
+            </a:pPr>
+            <a:r>
+              <a:rPr lang="en-US" sz="1100" dirty="0">
                 <a:solidFill>
                   <a:srgbClr val="334155"/>
                 </a:solidFill>
@@ -5027,7 +5027,7 @@
               </a:rPr>
               <a:t>Incompatible hospital software systems create life-threatening information blind spots during emergency trauma care, resulting in delayed treatments and duplicate testing.</a:t>
             </a:r>
-            <a:endParaRPr lang="en-US" sz="1150" dirty="0"/>
+            <a:endParaRPr lang="en-US" sz="1100" dirty="0"/>
           </a:p>
         </p:txBody>
       </p:sp>
@@ -5039,12 +5039,12 @@
         </p:nvSpPr>
         <p:spPr>
           <a:xfrm>
-            <a:off x="6172200" y="3657600"/>
-            <a:ext cx="5440680" cy="2103120"/>
+            <a:off x="6227064" y="3566160"/>
+            <a:ext cx="5349240" cy="2148840"/>
           </a:xfrm>
           <a:prstGeom prst="roundRect">
             <a:avLst>
-              <a:gd name="adj" fmla="val 5217"/>
+              <a:gd name="adj" fmla="val 4255"/>
             </a:avLst>
           </a:prstGeom>
           <a:solidFill>
@@ -5066,8 +5066,8 @@
         </p:nvSpPr>
         <p:spPr>
           <a:xfrm>
-            <a:off x="6446520" y="3858768"/>
-            <a:ext cx="731520" cy="365760"/>
+            <a:off x="6455664" y="3749040"/>
+            <a:ext cx="640080" cy="320040"/>
           </a:xfrm>
           <a:prstGeom prst="rect">
             <a:avLst/>
@@ -5105,8 +5105,8 @@
         </p:nvSpPr>
         <p:spPr>
           <a:xfrm>
-            <a:off x="7086600" y="3858768"/>
-            <a:ext cx="4206240" cy="365760"/>
+            <a:off x="7095744" y="3749040"/>
+            <a:ext cx="4206240" cy="320040"/>
           </a:xfrm>
           <a:prstGeom prst="rect">
             <a:avLst/>
@@ -5144,24 +5144,24 @@
         </p:nvSpPr>
         <p:spPr>
           <a:xfrm>
-            <a:off x="6446520" y="4297680"/>
-            <a:ext cx="4892040" cy="1280160"/>
-          </a:xfrm>
-          <a:prstGeom prst="rect">
-            <a:avLst/>
-          </a:prstGeom>
-          <a:noFill/>
-          <a:ln/>
-        </p:spPr>
-        <p:txBody>
-          <a:bodyPr wrap="square" rtlCol="0" anchor="ctr"/>
-          <a:lstStyle/>
-          <a:p>
-            <a:pPr indent="0" marL="0">
-              <a:buNone/>
-            </a:pPr>
-            <a:r>
-              <a:rPr lang="en-US" sz="1150" dirty="0">
+            <a:off x="6455664" y="4160520"/>
+            <a:ext cx="4892040" cy="1371600"/>
+          </a:xfrm>
+          <a:prstGeom prst="rect">
+            <a:avLst/>
+          </a:prstGeom>
+          <a:noFill/>
+          <a:ln/>
+        </p:spPr>
+        <p:txBody>
+          <a:bodyPr wrap="square" rtlCol="0" anchor="ctr"/>
+          <a:lstStyle/>
+          <a:p>
+            <a:pPr indent="0" marL="0">
+              <a:buNone/>
+            </a:pPr>
+            <a:r>
+              <a:rPr lang="en-US" sz="1100" dirty="0">
                 <a:solidFill>
                   <a:srgbClr val="334155"/>
                 </a:solidFill>
@@ -5171,7 +5171,7 @@
               </a:rPr>
               <a:t>Legacy systems lack cryptographic non-repudiation, permitting unauthorized retrospective alterations of diagnostic records and untraceable access logs.</a:t>
             </a:r>
-            <a:endParaRPr lang="en-US" sz="1150" dirty="0"/>
+            <a:endParaRPr lang="en-US" sz="1100" dirty="0"/>
           </a:p>
         </p:txBody>
       </p:sp>
@@ -5215,8 +5215,8 @@
         </p:nvSpPr>
         <p:spPr>
           <a:xfrm>
-            <a:off x="548640" y="320040"/>
-            <a:ext cx="11091672" cy="27432"/>
+            <a:off x="603504" y="320040"/>
+            <a:ext cx="10972800" cy="27432"/>
           </a:xfrm>
           <a:prstGeom prst="rect">
             <a:avLst/>
@@ -5235,24 +5235,24 @@
         </p:nvSpPr>
         <p:spPr>
           <a:xfrm>
-            <a:off x="548640" y="384048"/>
-            <a:ext cx="7315200" cy="274320"/>
-          </a:xfrm>
-          <a:prstGeom prst="rect">
-            <a:avLst/>
-          </a:prstGeom>
-          <a:noFill/>
-          <a:ln/>
-        </p:spPr>
-        <p:txBody>
-          <a:bodyPr wrap="square" rtlCol="0" anchor="ctr"/>
-          <a:lstStyle/>
-          <a:p>
-            <a:pPr indent="0" marL="0">
-              <a:buNone/>
-            </a:pPr>
-            <a:r>
-              <a:rPr lang="en-US" sz="1000" b="1" spc="150" kern="0" dirty="0">
+            <a:off x="603504" y="384048"/>
+            <a:ext cx="7315200" cy="256032"/>
+          </a:xfrm>
+          <a:prstGeom prst="rect">
+            <a:avLst/>
+          </a:prstGeom>
+          <a:noFill/>
+          <a:ln/>
+        </p:spPr>
+        <p:txBody>
+          <a:bodyPr wrap="square" rtlCol="0" anchor="ctr"/>
+          <a:lstStyle/>
+          <a:p>
+            <a:pPr indent="0" marL="0">
+              <a:buNone/>
+            </a:pPr>
+            <a:r>
+              <a:rPr lang="en-US" sz="950" b="1" spc="150" kern="0" dirty="0">
                 <a:solidFill>
                   <a:srgbClr val="0369A1"/>
                 </a:solidFill>
@@ -5262,7 +5262,7 @@
               </a:rPr>
               <a:t>ZERO-TRUST ARCHITECTURE &amp; TECHNICAL SOLUTION</a:t>
             </a:r>
-            <a:endParaRPr lang="en-US" sz="1000" dirty="0"/>
+            <a:endParaRPr lang="en-US" sz="950" dirty="0"/>
           </a:p>
         </p:txBody>
       </p:sp>
@@ -5274,8 +5274,8 @@
         </p:nvSpPr>
         <p:spPr>
           <a:xfrm>
-            <a:off x="548640" y="685800"/>
-            <a:ext cx="11091672" cy="9144"/>
+            <a:off x="603504" y="658368"/>
+            <a:ext cx="10972800" cy="9144"/>
           </a:xfrm>
           <a:prstGeom prst="rect">
             <a:avLst/>
@@ -5294,8 +5294,8 @@
         </p:nvSpPr>
         <p:spPr>
           <a:xfrm>
-            <a:off x="548640" y="6355080"/>
-            <a:ext cx="11091672" cy="9144"/>
+            <a:off x="603504" y="6263640"/>
+            <a:ext cx="10972800" cy="9144"/>
           </a:xfrm>
           <a:prstGeom prst="rect">
             <a:avLst/>
@@ -5314,24 +5314,24 @@
         </p:nvSpPr>
         <p:spPr>
           <a:xfrm>
-            <a:off x="548640" y="6419088"/>
-            <a:ext cx="7315200" cy="274320"/>
-          </a:xfrm>
-          <a:prstGeom prst="rect">
-            <a:avLst/>
-          </a:prstGeom>
-          <a:noFill/>
-          <a:ln/>
-        </p:spPr>
-        <p:txBody>
-          <a:bodyPr wrap="square" rtlCol="0" anchor="ctr"/>
-          <a:lstStyle/>
-          <a:p>
-            <a:pPr indent="0" marL="0">
-              <a:buNone/>
-            </a:pPr>
-            <a:r>
-              <a:rPr lang="en-US" sz="950" dirty="0">
+            <a:off x="603504" y="6327648"/>
+            <a:ext cx="6858000" cy="274320"/>
+          </a:xfrm>
+          <a:prstGeom prst="rect">
+            <a:avLst/>
+          </a:prstGeom>
+          <a:noFill/>
+          <a:ln/>
+        </p:spPr>
+        <p:txBody>
+          <a:bodyPr wrap="square" rtlCol="0" anchor="ctr"/>
+          <a:lstStyle/>
+          <a:p>
+            <a:pPr indent="0" marL="0">
+              <a:buNone/>
+            </a:pPr>
+            <a:r>
+              <a:rPr lang="en-US" sz="900" dirty="0">
                 <a:solidFill>
                   <a:srgbClr val="64748B"/>
                 </a:solidFill>
@@ -5341,7 +5341,7 @@
               </a:rPr>
               <a:t>Ashish Anil Sikaria (23BCI0218) • Faculty Guide: Prof. SELVI M • SCOPE</a:t>
             </a:r>
-            <a:endParaRPr lang="en-US" sz="950" dirty="0"/>
+            <a:endParaRPr lang="en-US" sz="900" dirty="0"/>
           </a:p>
         </p:txBody>
       </p:sp>
@@ -5353,8 +5353,8 @@
         </p:nvSpPr>
         <p:spPr>
           <a:xfrm>
-            <a:off x="8686800" y="6419088"/>
-            <a:ext cx="2953512" cy="274320"/>
+            <a:off x="7772400" y="6327648"/>
+            <a:ext cx="3803904" cy="274320"/>
           </a:xfrm>
           <a:prstGeom prst="rect">
             <a:avLst/>
@@ -5370,7 +5370,7 @@
               <a:buNone/>
             </a:pPr>
             <a:r>
-              <a:rPr lang="en-US" sz="950" dirty="0">
+              <a:rPr lang="en-US" sz="900" dirty="0">
                 <a:solidFill>
                   <a:srgbClr val="64748B"/>
                 </a:solidFill>
@@ -5380,7 +5380,7 @@
               </a:rPr>
               <a:t>Fall Semester 2026-27</a:t>
             </a:r>
-            <a:endParaRPr lang="en-US" sz="950" dirty="0"/>
+            <a:endParaRPr lang="en-US" sz="900" dirty="0"/>
           </a:p>
         </p:txBody>
       </p:sp>
@@ -5392,24 +5392,24 @@
         </p:nvSpPr>
         <p:spPr>
           <a:xfrm>
-            <a:off x="548640" y="777240"/>
-            <a:ext cx="10972800" cy="457200"/>
-          </a:xfrm>
-          <a:prstGeom prst="rect">
-            <a:avLst/>
-          </a:prstGeom>
-          <a:noFill/>
-          <a:ln/>
-        </p:spPr>
-        <p:txBody>
-          <a:bodyPr wrap="square" rtlCol="0" anchor="ctr"/>
-          <a:lstStyle/>
-          <a:p>
-            <a:pPr indent="0" marL="0">
-              <a:buNone/>
-            </a:pPr>
-            <a:r>
-              <a:rPr lang="en-US" sz="2400" b="1" dirty="0">
+            <a:off x="603504" y="731520"/>
+            <a:ext cx="10972800" cy="411480"/>
+          </a:xfrm>
+          <a:prstGeom prst="rect">
+            <a:avLst/>
+          </a:prstGeom>
+          <a:noFill/>
+          <a:ln/>
+        </p:spPr>
+        <p:txBody>
+          <a:bodyPr wrap="square" rtlCol="0" anchor="ctr"/>
+          <a:lstStyle/>
+          <a:p>
+            <a:pPr indent="0" marL="0">
+              <a:buNone/>
+            </a:pPr>
+            <a:r>
+              <a:rPr lang="en-US" sz="2200" b="1" dirty="0">
                 <a:solidFill>
                   <a:srgbClr val="0F172A"/>
                 </a:solidFill>
@@ -5419,7 +5419,7 @@
               </a:rPr>
               <a:t>The CareChain Solution: Hybrid Web2/Web3 Protocol</a:t>
             </a:r>
-            <a:endParaRPr lang="en-US" sz="2400" dirty="0"/>
+            <a:endParaRPr lang="en-US" sz="2200" dirty="0"/>
           </a:p>
         </p:txBody>
       </p:sp>
@@ -5431,12 +5431,12 @@
         </p:nvSpPr>
         <p:spPr>
           <a:xfrm>
-            <a:off x="548640" y="1371600"/>
-            <a:ext cx="3566160" cy="4023360"/>
+            <a:off x="603504" y="1234440"/>
+            <a:ext cx="3474720" cy="3931920"/>
           </a:xfrm>
           <a:prstGeom prst="roundRect">
             <a:avLst>
-              <a:gd name="adj" fmla="val 3077"/>
+              <a:gd name="adj" fmla="val 2632"/>
             </a:avLst>
           </a:prstGeom>
           <a:solidFill>
@@ -5458,24 +5458,24 @@
         </p:nvSpPr>
         <p:spPr>
           <a:xfrm>
-            <a:off x="822960" y="1645920"/>
-            <a:ext cx="3017520" cy="228600"/>
-          </a:xfrm>
-          <a:prstGeom prst="rect">
-            <a:avLst/>
-          </a:prstGeom>
-          <a:noFill/>
-          <a:ln/>
-        </p:spPr>
-        <p:txBody>
-          <a:bodyPr wrap="square" rtlCol="0" anchor="ctr"/>
-          <a:lstStyle/>
-          <a:p>
-            <a:pPr indent="0" marL="0">
-              <a:buNone/>
-            </a:pPr>
-            <a:r>
-              <a:rPr lang="en-US" sz="950" b="1" spc="100" kern="0" dirty="0">
+            <a:off x="832104" y="1463040"/>
+            <a:ext cx="3017520" cy="201168"/>
+          </a:xfrm>
+          <a:prstGeom prst="rect">
+            <a:avLst/>
+          </a:prstGeom>
+          <a:noFill/>
+          <a:ln/>
+        </p:spPr>
+        <p:txBody>
+          <a:bodyPr wrap="square" rtlCol="0" anchor="ctr"/>
+          <a:lstStyle/>
+          <a:p>
+            <a:pPr indent="0" marL="0">
+              <a:buNone/>
+            </a:pPr>
+            <a:r>
+              <a:rPr lang="en-US" sz="900" b="1" spc="100" kern="0" dirty="0">
                 <a:solidFill>
                   <a:srgbClr val="0369A1"/>
                 </a:solidFill>
@@ -5485,7 +5485,7 @@
               </a:rPr>
               <a:t>ENCRYPTION LAYER</a:t>
             </a:r>
-            <a:endParaRPr lang="en-US" sz="950" dirty="0"/>
+            <a:endParaRPr lang="en-US" sz="900" dirty="0"/>
           </a:p>
         </p:txBody>
       </p:sp>
@@ -5497,24 +5497,24 @@
         </p:nvSpPr>
         <p:spPr>
           <a:xfrm>
-            <a:off x="822960" y="1965960"/>
-            <a:ext cx="3017520" cy="548640"/>
-          </a:xfrm>
-          <a:prstGeom prst="rect">
-            <a:avLst/>
-          </a:prstGeom>
-          <a:noFill/>
-          <a:ln/>
-        </p:spPr>
-        <p:txBody>
-          <a:bodyPr wrap="square" rtlCol="0" anchor="ctr"/>
-          <a:lstStyle/>
-          <a:p>
-            <a:pPr indent="0" marL="0">
-              <a:buNone/>
-            </a:pPr>
-            <a:r>
-              <a:rPr lang="en-US" sz="1700" b="1" dirty="0">
+            <a:off x="832104" y="1737360"/>
+            <a:ext cx="3017520" cy="502920"/>
+          </a:xfrm>
+          <a:prstGeom prst="rect">
+            <a:avLst/>
+          </a:prstGeom>
+          <a:noFill/>
+          <a:ln/>
+        </p:spPr>
+        <p:txBody>
+          <a:bodyPr wrap="square" rtlCol="0" anchor="ctr"/>
+          <a:lstStyle/>
+          <a:p>
+            <a:pPr indent="0" marL="0">
+              <a:buNone/>
+            </a:pPr>
+            <a:r>
+              <a:rPr lang="en-US" sz="1600" b="1" dirty="0">
                 <a:solidFill>
                   <a:srgbClr val="0F172A"/>
                 </a:solidFill>
@@ -5524,7 +5524,7 @@
               </a:rPr>
               <a:t>Client AES-256-GCM</a:t>
             </a:r>
-            <a:endParaRPr lang="en-US" sz="1700" dirty="0"/>
+            <a:endParaRPr lang="en-US" sz="1600" dirty="0"/>
           </a:p>
         </p:txBody>
       </p:sp>
@@ -5536,24 +5536,24 @@
         </p:nvSpPr>
         <p:spPr>
           <a:xfrm>
-            <a:off x="822960" y="2651760"/>
-            <a:ext cx="3017520" cy="2377440"/>
-          </a:xfrm>
-          <a:prstGeom prst="rect">
-            <a:avLst/>
-          </a:prstGeom>
-          <a:noFill/>
-          <a:ln/>
-        </p:spPr>
-        <p:txBody>
-          <a:bodyPr wrap="square" rtlCol="0" anchor="ctr"/>
-          <a:lstStyle/>
-          <a:p>
-            <a:pPr indent="0" marL="0">
-              <a:buNone/>
-            </a:pPr>
-            <a:r>
-              <a:rPr lang="en-US" sz="1200" dirty="0">
+            <a:off x="832104" y="2331720"/>
+            <a:ext cx="3017520" cy="2560320"/>
+          </a:xfrm>
+          <a:prstGeom prst="rect">
+            <a:avLst/>
+          </a:prstGeom>
+          <a:noFill/>
+          <a:ln/>
+        </p:spPr>
+        <p:txBody>
+          <a:bodyPr wrap="square" rtlCol="0" anchor="ctr"/>
+          <a:lstStyle/>
+          <a:p>
+            <a:pPr indent="0" marL="0">
+              <a:buNone/>
+            </a:pPr>
+            <a:r>
+              <a:rPr lang="en-US" sz="1150" dirty="0">
                 <a:solidFill>
                   <a:srgbClr val="334155"/>
                 </a:solidFill>
@@ -5563,7 +5563,7 @@
               </a:rPr>
               <a:t>All health files and diagnostic reports are encrypted with unique 256-bit symmetric keys, 12-byte IVs, and 16-byte authentication tags before transmission.</a:t>
             </a:r>
-            <a:endParaRPr lang="en-US" sz="1200" dirty="0"/>
+            <a:endParaRPr lang="en-US" sz="1150" dirty="0"/>
           </a:p>
         </p:txBody>
       </p:sp>
@@ -5575,12 +5575,12 @@
         </p:nvSpPr>
         <p:spPr>
           <a:xfrm>
-            <a:off x="4297680" y="1371600"/>
-            <a:ext cx="3566160" cy="4023360"/>
+            <a:off x="4352544" y="1234440"/>
+            <a:ext cx="3474720" cy="3931920"/>
           </a:xfrm>
           <a:prstGeom prst="roundRect">
             <a:avLst>
-              <a:gd name="adj" fmla="val 3077"/>
+              <a:gd name="adj" fmla="val 2632"/>
             </a:avLst>
           </a:prstGeom>
           <a:solidFill>
@@ -5602,24 +5602,24 @@
         </p:nvSpPr>
         <p:spPr>
           <a:xfrm>
-            <a:off x="4572000" y="1645920"/>
-            <a:ext cx="3017520" cy="228600"/>
-          </a:xfrm>
-          <a:prstGeom prst="rect">
-            <a:avLst/>
-          </a:prstGeom>
-          <a:noFill/>
-          <a:ln/>
-        </p:spPr>
-        <p:txBody>
-          <a:bodyPr wrap="square" rtlCol="0" anchor="ctr"/>
-          <a:lstStyle/>
-          <a:p>
-            <a:pPr indent="0" marL="0">
-              <a:buNone/>
-            </a:pPr>
-            <a:r>
-              <a:rPr lang="en-US" sz="950" b="1" spc="100" kern="0" dirty="0">
+            <a:off x="4581144" y="1463040"/>
+            <a:ext cx="3017520" cy="201168"/>
+          </a:xfrm>
+          <a:prstGeom prst="rect">
+            <a:avLst/>
+          </a:prstGeom>
+          <a:noFill/>
+          <a:ln/>
+        </p:spPr>
+        <p:txBody>
+          <a:bodyPr wrap="square" rtlCol="0" anchor="ctr"/>
+          <a:lstStyle/>
+          <a:p>
+            <a:pPr indent="0" marL="0">
+              <a:buNone/>
+            </a:pPr>
+            <a:r>
+              <a:rPr lang="en-US" sz="900" b="1" spc="100" kern="0" dirty="0">
                 <a:solidFill>
                   <a:srgbClr val="6366F1"/>
                 </a:solidFill>
@@ -5629,7 +5629,7 @@
               </a:rPr>
               <a:t>DECENTRALIZED STORAGE</a:t>
             </a:r>
-            <a:endParaRPr lang="en-US" sz="950" dirty="0"/>
+            <a:endParaRPr lang="en-US" sz="900" dirty="0"/>
           </a:p>
         </p:txBody>
       </p:sp>
@@ -5641,24 +5641,24 @@
         </p:nvSpPr>
         <p:spPr>
           <a:xfrm>
-            <a:off x="4572000" y="1965960"/>
-            <a:ext cx="3017520" cy="548640"/>
-          </a:xfrm>
-          <a:prstGeom prst="rect">
-            <a:avLst/>
-          </a:prstGeom>
-          <a:noFill/>
-          <a:ln/>
-        </p:spPr>
-        <p:txBody>
-          <a:bodyPr wrap="square" rtlCol="0" anchor="ctr"/>
-          <a:lstStyle/>
-          <a:p>
-            <a:pPr indent="0" marL="0">
-              <a:buNone/>
-            </a:pPr>
-            <a:r>
-              <a:rPr lang="en-US" sz="1700" b="1" dirty="0">
+            <a:off x="4581144" y="1737360"/>
+            <a:ext cx="3017520" cy="502920"/>
+          </a:xfrm>
+          <a:prstGeom prst="rect">
+            <a:avLst/>
+          </a:prstGeom>
+          <a:noFill/>
+          <a:ln/>
+        </p:spPr>
+        <p:txBody>
+          <a:bodyPr wrap="square" rtlCol="0" anchor="ctr"/>
+          <a:lstStyle/>
+          <a:p>
+            <a:pPr indent="0" marL="0">
+              <a:buNone/>
+            </a:pPr>
+            <a:r>
+              <a:rPr lang="en-US" sz="1600" b="1" dirty="0">
                 <a:solidFill>
                   <a:srgbClr val="0F172A"/>
                 </a:solidFill>
@@ -5668,7 +5668,7 @@
               </a:rPr>
               <a:t>IPFS Distributed Pinning</a:t>
             </a:r>
-            <a:endParaRPr lang="en-US" sz="1700" dirty="0"/>
+            <a:endParaRPr lang="en-US" sz="1600" dirty="0"/>
           </a:p>
         </p:txBody>
       </p:sp>
@@ -5680,24 +5680,24 @@
         </p:nvSpPr>
         <p:spPr>
           <a:xfrm>
-            <a:off x="4572000" y="2651760"/>
-            <a:ext cx="3017520" cy="2377440"/>
-          </a:xfrm>
-          <a:prstGeom prst="rect">
-            <a:avLst/>
-          </a:prstGeom>
-          <a:noFill/>
-          <a:ln/>
-        </p:spPr>
-        <p:txBody>
-          <a:bodyPr wrap="square" rtlCol="0" anchor="ctr"/>
-          <a:lstStyle/>
-          <a:p>
-            <a:pPr indent="0" marL="0">
-              <a:buNone/>
-            </a:pPr>
-            <a:r>
-              <a:rPr lang="en-US" sz="1200" dirty="0">
+            <a:off x="4581144" y="2331720"/>
+            <a:ext cx="3017520" cy="2560320"/>
+          </a:xfrm>
+          <a:prstGeom prst="rect">
+            <a:avLst/>
+          </a:prstGeom>
+          <a:noFill/>
+          <a:ln/>
+        </p:spPr>
+        <p:txBody>
+          <a:bodyPr wrap="square" rtlCol="0" anchor="ctr"/>
+          <a:lstStyle/>
+          <a:p>
+            <a:pPr indent="0" marL="0">
+              <a:buNone/>
+            </a:pPr>
+            <a:r>
+              <a:rPr lang="en-US" sz="1150" dirty="0">
                 <a:solidFill>
                   <a:srgbClr val="334155"/>
                 </a:solidFill>
@@ -5707,7 +5707,7 @@
               </a:rPr>
               <a:t>Encrypted ciphertexts are pinned across decentralized IPFS nodes, generating immutable Content Identifiers (CIDs). Zero Protected Health Information (PHI) is stored on-chain.</a:t>
             </a:r>
-            <a:endParaRPr lang="en-US" sz="1200" dirty="0"/>
+            <a:endParaRPr lang="en-US" sz="1150" dirty="0"/>
           </a:p>
         </p:txBody>
       </p:sp>
@@ -5719,12 +5719,12 @@
         </p:nvSpPr>
         <p:spPr>
           <a:xfrm>
-            <a:off x="8046720" y="1371600"/>
-            <a:ext cx="3566160" cy="4023360"/>
+            <a:off x="8101584" y="1234440"/>
+            <a:ext cx="3474720" cy="3931920"/>
           </a:xfrm>
           <a:prstGeom prst="roundRect">
             <a:avLst>
-              <a:gd name="adj" fmla="val 3077"/>
+              <a:gd name="adj" fmla="val 2632"/>
             </a:avLst>
           </a:prstGeom>
           <a:solidFill>
@@ -5746,24 +5746,24 @@
         </p:nvSpPr>
         <p:spPr>
           <a:xfrm>
-            <a:off x="8321040" y="1645920"/>
-            <a:ext cx="3017520" cy="228600"/>
-          </a:xfrm>
-          <a:prstGeom prst="rect">
-            <a:avLst/>
-          </a:prstGeom>
-          <a:noFill/>
-          <a:ln/>
-        </p:spPr>
-        <p:txBody>
-          <a:bodyPr wrap="square" rtlCol="0" anchor="ctr"/>
-          <a:lstStyle/>
-          <a:p>
-            <a:pPr indent="0" marL="0">
-              <a:buNone/>
-            </a:pPr>
-            <a:r>
-              <a:rPr lang="en-US" sz="950" b="1" spc="100" kern="0" dirty="0">
+            <a:off x="8330184" y="1463040"/>
+            <a:ext cx="3017520" cy="201168"/>
+          </a:xfrm>
+          <a:prstGeom prst="rect">
+            <a:avLst/>
+          </a:prstGeom>
+          <a:noFill/>
+          <a:ln/>
+        </p:spPr>
+        <p:txBody>
+          <a:bodyPr wrap="square" rtlCol="0" anchor="ctr"/>
+          <a:lstStyle/>
+          <a:p>
+            <a:pPr indent="0" marL="0">
+              <a:buNone/>
+            </a:pPr>
+            <a:r>
+              <a:rPr lang="en-US" sz="900" b="1" spc="100" kern="0" dirty="0">
                 <a:solidFill>
                   <a:srgbClr val="059669"/>
                 </a:solidFill>
@@ -5773,7 +5773,7 @@
               </a:rPr>
               <a:t>ACCESS CONTROL</a:t>
             </a:r>
-            <a:endParaRPr lang="en-US" sz="950" dirty="0"/>
+            <a:endParaRPr lang="en-US" sz="900" dirty="0"/>
           </a:p>
         </p:txBody>
       </p:sp>
@@ -5785,24 +5785,24 @@
         </p:nvSpPr>
         <p:spPr>
           <a:xfrm>
-            <a:off x="8321040" y="1965960"/>
-            <a:ext cx="3017520" cy="548640"/>
-          </a:xfrm>
-          <a:prstGeom prst="rect">
-            <a:avLst/>
-          </a:prstGeom>
-          <a:noFill/>
-          <a:ln/>
-        </p:spPr>
-        <p:txBody>
-          <a:bodyPr wrap="square" rtlCol="0" anchor="ctr"/>
-          <a:lstStyle/>
-          <a:p>
-            <a:pPr indent="0" marL="0">
-              <a:buNone/>
-            </a:pPr>
-            <a:r>
-              <a:rPr lang="en-US" sz="1700" b="1" dirty="0">
+            <a:off x="8330184" y="1737360"/>
+            <a:ext cx="3017520" cy="502920"/>
+          </a:xfrm>
+          <a:prstGeom prst="rect">
+            <a:avLst/>
+          </a:prstGeom>
+          <a:noFill/>
+          <a:ln/>
+        </p:spPr>
+        <p:txBody>
+          <a:bodyPr wrap="square" rtlCol="0" anchor="ctr"/>
+          <a:lstStyle/>
+          <a:p>
+            <a:pPr indent="0" marL="0">
+              <a:buNone/>
+            </a:pPr>
+            <a:r>
+              <a:rPr lang="en-US" sz="1600" b="1" dirty="0">
                 <a:solidFill>
                   <a:srgbClr val="0F172A"/>
                 </a:solidFill>
@@ -5812,7 +5812,7 @@
               </a:rPr>
               <a:t>Smart Contract RBAC</a:t>
             </a:r>
-            <a:endParaRPr lang="en-US" sz="1700" dirty="0"/>
+            <a:endParaRPr lang="en-US" sz="1600" dirty="0"/>
           </a:p>
         </p:txBody>
       </p:sp>
@@ -5824,24 +5824,24 @@
         </p:nvSpPr>
         <p:spPr>
           <a:xfrm>
-            <a:off x="8321040" y="2651760"/>
-            <a:ext cx="3017520" cy="2377440"/>
-          </a:xfrm>
-          <a:prstGeom prst="rect">
-            <a:avLst/>
-          </a:prstGeom>
-          <a:noFill/>
-          <a:ln/>
-        </p:spPr>
-        <p:txBody>
-          <a:bodyPr wrap="square" rtlCol="0" anchor="ctr"/>
-          <a:lstStyle/>
-          <a:p>
-            <a:pPr indent="0" marL="0">
-              <a:buNone/>
-            </a:pPr>
-            <a:r>
-              <a:rPr lang="en-US" sz="1200" dirty="0">
+            <a:off x="8330184" y="2331720"/>
+            <a:ext cx="3017520" cy="2560320"/>
+          </a:xfrm>
+          <a:prstGeom prst="rect">
+            <a:avLst/>
+          </a:prstGeom>
+          <a:noFill/>
+          <a:ln/>
+        </p:spPr>
+        <p:txBody>
+          <a:bodyPr wrap="square" rtlCol="0" anchor="ctr"/>
+          <a:lstStyle/>
+          <a:p>
+            <a:pPr indent="0" marL="0">
+              <a:buNone/>
+            </a:pPr>
+            <a:r>
+              <a:rPr lang="en-US" sz="1150" dirty="0">
                 <a:solidFill>
                   <a:srgbClr val="334155"/>
                 </a:solidFill>
@@ -5851,7 +5851,7 @@
               </a:rPr>
               <a:t>Solidity smart contracts enforce isolated patient access matrices (doctorPermissions[p][d]) and emit indexed events for verifiable on-chain audit trails.</a:t>
             </a:r>
-            <a:endParaRPr lang="en-US" sz="1200" dirty="0"/>
+            <a:endParaRPr lang="en-US" sz="1150" dirty="0"/>
           </a:p>
         </p:txBody>
       </p:sp>
@@ -5863,12 +5863,12 @@
         </p:nvSpPr>
         <p:spPr>
           <a:xfrm>
-            <a:off x="548640" y="5577840"/>
-            <a:ext cx="11091672" cy="640080"/>
+            <a:off x="603504" y="5394960"/>
+            <a:ext cx="10972800" cy="548640"/>
           </a:xfrm>
           <a:prstGeom prst="roundRect">
             <a:avLst>
-              <a:gd name="adj" fmla="val 11429"/>
+              <a:gd name="adj" fmla="val 13333"/>
             </a:avLst>
           </a:prstGeom>
           <a:solidFill>
@@ -5890,7 +5890,7 @@
         </p:nvSpPr>
         <p:spPr>
           <a:xfrm>
-            <a:off x="731520" y="5715000"/>
+            <a:off x="731520" y="5504688"/>
             <a:ext cx="10698480" cy="320040"/>
           </a:xfrm>
           <a:prstGeom prst="rect">
@@ -5907,7 +5907,7 @@
               <a:buNone/>
             </a:pPr>
             <a:r>
-              <a:rPr lang="en-US" sz="1100" b="1" dirty="0">
+              <a:rPr lang="en-US" sz="1050" b="1" dirty="0">
                 <a:solidFill>
                   <a:srgbClr val="0369A1"/>
                 </a:solidFill>
@@ -5917,7 +5917,7 @@
               </a:rPr>
               <a:t>REGULATORY COMPLIANCE: HIPAA Security Rule (§164.312) &amp; GDPR Article 17 Crypto-Shredding Compliant.</a:t>
             </a:r>
-            <a:endParaRPr lang="en-US" sz="1100" dirty="0"/>
+            <a:endParaRPr lang="en-US" sz="1050" dirty="0"/>
           </a:p>
         </p:txBody>
       </p:sp>
@@ -5961,8 +5961,8 @@
         </p:nvSpPr>
         <p:spPr>
           <a:xfrm>
-            <a:off x="548640" y="320040"/>
-            <a:ext cx="11091672" cy="27432"/>
+            <a:off x="603504" y="320040"/>
+            <a:ext cx="10972800" cy="27432"/>
           </a:xfrm>
           <a:prstGeom prst="rect">
             <a:avLst/>
@@ -5981,24 +5981,24 @@
         </p:nvSpPr>
         <p:spPr>
           <a:xfrm>
-            <a:off x="548640" y="384048"/>
-            <a:ext cx="7315200" cy="274320"/>
-          </a:xfrm>
-          <a:prstGeom prst="rect">
-            <a:avLst/>
-          </a:prstGeom>
-          <a:noFill/>
-          <a:ln/>
-        </p:spPr>
-        <p:txBody>
-          <a:bodyPr wrap="square" rtlCol="0" anchor="ctr"/>
-          <a:lstStyle/>
-          <a:p>
-            <a:pPr indent="0" marL="0">
-              <a:buNone/>
-            </a:pPr>
-            <a:r>
-              <a:rPr lang="en-US" sz="1000" b="1" spc="150" kern="0" dirty="0">
+            <a:off x="603504" y="384048"/>
+            <a:ext cx="7315200" cy="256032"/>
+          </a:xfrm>
+          <a:prstGeom prst="rect">
+            <a:avLst/>
+          </a:prstGeom>
+          <a:noFill/>
+          <a:ln/>
+        </p:spPr>
+        <p:txBody>
+          <a:bodyPr wrap="square" rtlCol="0" anchor="ctr"/>
+          <a:lstStyle/>
+          <a:p>
+            <a:pPr indent="0" marL="0">
+              <a:buNone/>
+            </a:pPr>
+            <a:r>
+              <a:rPr lang="en-US" sz="950" b="1" spc="150" kern="0" dirty="0">
                 <a:solidFill>
                   <a:srgbClr val="0369A1"/>
                 </a:solidFill>
@@ -6008,7 +6008,7 @@
               </a:rPr>
               <a:t>UNITED NATIONS 2030 AGENDA ALIGNMENT</a:t>
             </a:r>
-            <a:endParaRPr lang="en-US" sz="1000" dirty="0"/>
+            <a:endParaRPr lang="en-US" sz="950" dirty="0"/>
           </a:p>
         </p:txBody>
       </p:sp>
@@ -6020,8 +6020,8 @@
         </p:nvSpPr>
         <p:spPr>
           <a:xfrm>
-            <a:off x="548640" y="685800"/>
-            <a:ext cx="11091672" cy="9144"/>
+            <a:off x="603504" y="658368"/>
+            <a:ext cx="10972800" cy="9144"/>
           </a:xfrm>
           <a:prstGeom prst="rect">
             <a:avLst/>
@@ -6040,8 +6040,8 @@
         </p:nvSpPr>
         <p:spPr>
           <a:xfrm>
-            <a:off x="548640" y="6355080"/>
-            <a:ext cx="11091672" cy="9144"/>
+            <a:off x="603504" y="6263640"/>
+            <a:ext cx="10972800" cy="9144"/>
           </a:xfrm>
           <a:prstGeom prst="rect">
             <a:avLst/>
@@ -6060,24 +6060,24 @@
         </p:nvSpPr>
         <p:spPr>
           <a:xfrm>
-            <a:off x="548640" y="6419088"/>
-            <a:ext cx="7315200" cy="274320"/>
-          </a:xfrm>
-          <a:prstGeom prst="rect">
-            <a:avLst/>
-          </a:prstGeom>
-          <a:noFill/>
-          <a:ln/>
-        </p:spPr>
-        <p:txBody>
-          <a:bodyPr wrap="square" rtlCol="0" anchor="ctr"/>
-          <a:lstStyle/>
-          <a:p>
-            <a:pPr indent="0" marL="0">
-              <a:buNone/>
-            </a:pPr>
-            <a:r>
-              <a:rPr lang="en-US" sz="950" dirty="0">
+            <a:off x="603504" y="6327648"/>
+            <a:ext cx="6858000" cy="274320"/>
+          </a:xfrm>
+          <a:prstGeom prst="rect">
+            <a:avLst/>
+          </a:prstGeom>
+          <a:noFill/>
+          <a:ln/>
+        </p:spPr>
+        <p:txBody>
+          <a:bodyPr wrap="square" rtlCol="0" anchor="ctr"/>
+          <a:lstStyle/>
+          <a:p>
+            <a:pPr indent="0" marL="0">
+              <a:buNone/>
+            </a:pPr>
+            <a:r>
+              <a:rPr lang="en-US" sz="900" dirty="0">
                 <a:solidFill>
                   <a:srgbClr val="64748B"/>
                 </a:solidFill>
@@ -6087,7 +6087,7 @@
               </a:rPr>
               <a:t>Ashish Anil Sikaria (23BCI0218) • Faculty Guide: Prof. SELVI M • SCOPE</a:t>
             </a:r>
-            <a:endParaRPr lang="en-US" sz="950" dirty="0"/>
+            <a:endParaRPr lang="en-US" sz="900" dirty="0"/>
           </a:p>
         </p:txBody>
       </p:sp>
@@ -6099,8 +6099,8 @@
         </p:nvSpPr>
         <p:spPr>
           <a:xfrm>
-            <a:off x="8686800" y="6419088"/>
-            <a:ext cx="2953512" cy="274320"/>
+            <a:off x="7772400" y="6327648"/>
+            <a:ext cx="3803904" cy="274320"/>
           </a:xfrm>
           <a:prstGeom prst="rect">
             <a:avLst/>
@@ -6116,7 +6116,7 @@
               <a:buNone/>
             </a:pPr>
             <a:r>
-              <a:rPr lang="en-US" sz="950" dirty="0">
+              <a:rPr lang="en-US" sz="900" dirty="0">
                 <a:solidFill>
                   <a:srgbClr val="64748B"/>
                 </a:solidFill>
@@ -6126,7 +6126,7 @@
               </a:rPr>
               <a:t>Fall Semester 2026-27</a:t>
             </a:r>
-            <a:endParaRPr lang="en-US" sz="950" dirty="0"/>
+            <a:endParaRPr lang="en-US" sz="900" dirty="0"/>
           </a:p>
         </p:txBody>
       </p:sp>
@@ -6138,24 +6138,24 @@
         </p:nvSpPr>
         <p:spPr>
           <a:xfrm>
-            <a:off x="548640" y="777240"/>
-            <a:ext cx="10972800" cy="457200"/>
-          </a:xfrm>
-          <a:prstGeom prst="rect">
-            <a:avLst/>
-          </a:prstGeom>
-          <a:noFill/>
-          <a:ln/>
-        </p:spPr>
-        <p:txBody>
-          <a:bodyPr wrap="square" rtlCol="0" anchor="ctr"/>
-          <a:lstStyle/>
-          <a:p>
-            <a:pPr indent="0" marL="0">
-              <a:buNone/>
-            </a:pPr>
-            <a:r>
-              <a:rPr lang="en-US" sz="2400" b="1" dirty="0">
+            <a:off x="603504" y="731520"/>
+            <a:ext cx="10972800" cy="411480"/>
+          </a:xfrm>
+          <a:prstGeom prst="rect">
+            <a:avLst/>
+          </a:prstGeom>
+          <a:noFill/>
+          <a:ln/>
+        </p:spPr>
+        <p:txBody>
+          <a:bodyPr wrap="square" rtlCol="0" anchor="ctr"/>
+          <a:lstStyle/>
+          <a:p>
+            <a:pPr indent="0" marL="0">
+              <a:buNone/>
+            </a:pPr>
+            <a:r>
+              <a:rPr lang="en-US" sz="2200" b="1" dirty="0">
                 <a:solidFill>
                   <a:srgbClr val="0F172A"/>
                 </a:solidFill>
@@ -6165,7 +6165,7 @@
               </a:rPr>
               <a:t>Alignment with UN Sustainable Development Goals (SDGs)</a:t>
             </a:r>
-            <a:endParaRPr lang="en-US" sz="2400" dirty="0"/>
+            <a:endParaRPr lang="en-US" sz="2200" dirty="0"/>
           </a:p>
         </p:txBody>
       </p:sp>
@@ -6177,12 +6177,12 @@
         </p:nvSpPr>
         <p:spPr>
           <a:xfrm>
-            <a:off x="548640" y="1371600"/>
-            <a:ext cx="5440680" cy="2103120"/>
+            <a:off x="603504" y="1234440"/>
+            <a:ext cx="5349240" cy="2148840"/>
           </a:xfrm>
           <a:prstGeom prst="roundRect">
             <a:avLst>
-              <a:gd name="adj" fmla="val 5217"/>
+              <a:gd name="adj" fmla="val 4255"/>
             </a:avLst>
           </a:prstGeom>
           <a:solidFill>
@@ -6204,24 +6204,24 @@
         </p:nvSpPr>
         <p:spPr>
           <a:xfrm>
-            <a:off x="822960" y="1554480"/>
-            <a:ext cx="4892040" cy="228600"/>
-          </a:xfrm>
-          <a:prstGeom prst="rect">
-            <a:avLst/>
-          </a:prstGeom>
-          <a:noFill/>
-          <a:ln/>
-        </p:spPr>
-        <p:txBody>
-          <a:bodyPr wrap="square" rtlCol="0" anchor="ctr"/>
-          <a:lstStyle/>
-          <a:p>
-            <a:pPr indent="0" marL="0">
-              <a:buNone/>
-            </a:pPr>
-            <a:r>
-              <a:rPr lang="en-US" sz="1000" b="1" spc="100" kern="0" dirty="0">
+            <a:off x="832104" y="1399032"/>
+            <a:ext cx="4892040" cy="201168"/>
+          </a:xfrm>
+          <a:prstGeom prst="rect">
+            <a:avLst/>
+          </a:prstGeom>
+          <a:noFill/>
+          <a:ln/>
+        </p:spPr>
+        <p:txBody>
+          <a:bodyPr wrap="square" rtlCol="0" anchor="ctr"/>
+          <a:lstStyle/>
+          <a:p>
+            <a:pPr indent="0" marL="0">
+              <a:buNone/>
+            </a:pPr>
+            <a:r>
+              <a:rPr lang="en-US" sz="950" b="1" spc="100" kern="0" dirty="0">
                 <a:solidFill>
                   <a:srgbClr val="059669"/>
                 </a:solidFill>
@@ -6231,7 +6231,7 @@
               </a:rPr>
               <a:t>SDG 3  •  TARGET 3.8</a:t>
             </a:r>
-            <a:endParaRPr lang="en-US" sz="1000" dirty="0"/>
+            <a:endParaRPr lang="en-US" sz="950" dirty="0"/>
           </a:p>
         </p:txBody>
       </p:sp>
@@ -6243,24 +6243,24 @@
         </p:nvSpPr>
         <p:spPr>
           <a:xfrm>
-            <a:off x="822960" y="1810512"/>
-            <a:ext cx="4892040" cy="347472"/>
-          </a:xfrm>
-          <a:prstGeom prst="rect">
-            <a:avLst/>
-          </a:prstGeom>
-          <a:noFill/>
-          <a:ln/>
-        </p:spPr>
-        <p:txBody>
-          <a:bodyPr wrap="square" rtlCol="0" anchor="ctr"/>
-          <a:lstStyle/>
-          <a:p>
-            <a:pPr indent="0" marL="0">
-              <a:buNone/>
-            </a:pPr>
-            <a:r>
-              <a:rPr lang="en-US" sz="1600" b="1" dirty="0">
+            <a:off x="832104" y="1645920"/>
+            <a:ext cx="4892040" cy="320040"/>
+          </a:xfrm>
+          <a:prstGeom prst="rect">
+            <a:avLst/>
+          </a:prstGeom>
+          <a:noFill/>
+          <a:ln/>
+        </p:spPr>
+        <p:txBody>
+          <a:bodyPr wrap="square" rtlCol="0" anchor="ctr"/>
+          <a:lstStyle/>
+          <a:p>
+            <a:pPr indent="0" marL="0">
+              <a:buNone/>
+            </a:pPr>
+            <a:r>
+              <a:rPr lang="en-US" sz="1500" b="1" dirty="0">
                 <a:solidFill>
                   <a:srgbClr val="0F172A"/>
                 </a:solidFill>
@@ -6270,7 +6270,7 @@
               </a:rPr>
               <a:t>Good Health and Well-Being</a:t>
             </a:r>
-            <a:endParaRPr lang="en-US" sz="1600" dirty="0"/>
+            <a:endParaRPr lang="en-US" sz="1500" dirty="0"/>
           </a:p>
         </p:txBody>
       </p:sp>
@@ -6282,24 +6282,24 @@
         </p:nvSpPr>
         <p:spPr>
           <a:xfrm>
-            <a:off x="822960" y="2194560"/>
-            <a:ext cx="4892040" cy="1143000"/>
-          </a:xfrm>
-          <a:prstGeom prst="rect">
-            <a:avLst/>
-          </a:prstGeom>
-          <a:noFill/>
-          <a:ln/>
-        </p:spPr>
-        <p:txBody>
-          <a:bodyPr wrap="square" rtlCol="0" anchor="ctr"/>
-          <a:lstStyle/>
-          <a:p>
-            <a:pPr indent="0" marL="0">
-              <a:buNone/>
-            </a:pPr>
-            <a:r>
-              <a:rPr lang="en-US" sz="1150" dirty="0">
+            <a:off x="832104" y="2011680"/>
+            <a:ext cx="4892040" cy="1234440"/>
+          </a:xfrm>
+          <a:prstGeom prst="rect">
+            <a:avLst/>
+          </a:prstGeom>
+          <a:noFill/>
+          <a:ln/>
+        </p:spPr>
+        <p:txBody>
+          <a:bodyPr wrap="square" rtlCol="0" anchor="ctr"/>
+          <a:lstStyle/>
+          <a:p>
+            <a:pPr indent="0" marL="0">
+              <a:buNone/>
+            </a:pPr>
+            <a:r>
+              <a:rPr lang="en-US" sz="1100" dirty="0">
                 <a:solidFill>
                   <a:srgbClr val="334155"/>
                 </a:solidFill>
@@ -6309,7 +6309,7 @@
               </a:rPr>
               <a:t>Provides portable, tamper-proof medical records across hospital networks and cross-border consultations, reducing diagnostic errors and duplicate procedures.</a:t>
             </a:r>
-            <a:endParaRPr lang="en-US" sz="1150" dirty="0"/>
+            <a:endParaRPr lang="en-US" sz="1100" dirty="0"/>
           </a:p>
         </p:txBody>
       </p:sp>
@@ -6321,12 +6321,12 @@
         </p:nvSpPr>
         <p:spPr>
           <a:xfrm>
-            <a:off x="6172200" y="1371600"/>
-            <a:ext cx="5440680" cy="2103120"/>
+            <a:off x="6227064" y="1234440"/>
+            <a:ext cx="5349240" cy="2148840"/>
           </a:xfrm>
           <a:prstGeom prst="roundRect">
             <a:avLst>
-              <a:gd name="adj" fmla="val 5217"/>
+              <a:gd name="adj" fmla="val 4255"/>
             </a:avLst>
           </a:prstGeom>
           <a:solidFill>
@@ -6348,24 +6348,24 @@
         </p:nvSpPr>
         <p:spPr>
           <a:xfrm>
-            <a:off x="6446520" y="1554480"/>
-            <a:ext cx="4892040" cy="228600"/>
-          </a:xfrm>
-          <a:prstGeom prst="rect">
-            <a:avLst/>
-          </a:prstGeom>
-          <a:noFill/>
-          <a:ln/>
-        </p:spPr>
-        <p:txBody>
-          <a:bodyPr wrap="square" rtlCol="0" anchor="ctr"/>
-          <a:lstStyle/>
-          <a:p>
-            <a:pPr indent="0" marL="0">
-              <a:buNone/>
-            </a:pPr>
-            <a:r>
-              <a:rPr lang="en-US" sz="1000" b="1" spc="100" kern="0" dirty="0">
+            <a:off x="6455664" y="1399032"/>
+            <a:ext cx="4892040" cy="201168"/>
+          </a:xfrm>
+          <a:prstGeom prst="rect">
+            <a:avLst/>
+          </a:prstGeom>
+          <a:noFill/>
+          <a:ln/>
+        </p:spPr>
+        <p:txBody>
+          <a:bodyPr wrap="square" rtlCol="0" anchor="ctr"/>
+          <a:lstStyle/>
+          <a:p>
+            <a:pPr indent="0" marL="0">
+              <a:buNone/>
+            </a:pPr>
+            <a:r>
+              <a:rPr lang="en-US" sz="950" b="1" spc="100" kern="0" dirty="0">
                 <a:solidFill>
                   <a:srgbClr val="D97706"/>
                 </a:solidFill>
@@ -6375,7 +6375,7 @@
               </a:rPr>
               <a:t>SDG 9  •  TARGET 9.5</a:t>
             </a:r>
-            <a:endParaRPr lang="en-US" sz="1000" dirty="0"/>
+            <a:endParaRPr lang="en-US" sz="950" dirty="0"/>
           </a:p>
         </p:txBody>
       </p:sp>
@@ -6387,24 +6387,24 @@
         </p:nvSpPr>
         <p:spPr>
           <a:xfrm>
-            <a:off x="6446520" y="1810512"/>
-            <a:ext cx="4892040" cy="347472"/>
-          </a:xfrm>
-          <a:prstGeom prst="rect">
-            <a:avLst/>
-          </a:prstGeom>
-          <a:noFill/>
-          <a:ln/>
-        </p:spPr>
-        <p:txBody>
-          <a:bodyPr wrap="square" rtlCol="0" anchor="ctr"/>
-          <a:lstStyle/>
-          <a:p>
-            <a:pPr indent="0" marL="0">
-              <a:buNone/>
-            </a:pPr>
-            <a:r>
-              <a:rPr lang="en-US" sz="1600" b="1" dirty="0">
+            <a:off x="6455664" y="1645920"/>
+            <a:ext cx="4892040" cy="320040"/>
+          </a:xfrm>
+          <a:prstGeom prst="rect">
+            <a:avLst/>
+          </a:prstGeom>
+          <a:noFill/>
+          <a:ln/>
+        </p:spPr>
+        <p:txBody>
+          <a:bodyPr wrap="square" rtlCol="0" anchor="ctr"/>
+          <a:lstStyle/>
+          <a:p>
+            <a:pPr indent="0" marL="0">
+              <a:buNone/>
+            </a:pPr>
+            <a:r>
+              <a:rPr lang="en-US" sz="1500" b="1" dirty="0">
                 <a:solidFill>
                   <a:srgbClr val="0F172A"/>
                 </a:solidFill>
@@ -6414,7 +6414,7 @@
               </a:rPr>
               <a:t>Industry, Innovation &amp; Infrastructure</a:t>
             </a:r>
-            <a:endParaRPr lang="en-US" sz="1600" dirty="0"/>
+            <a:endParaRPr lang="en-US" sz="1500" dirty="0"/>
           </a:p>
         </p:txBody>
       </p:sp>
@@ -6426,24 +6426,24 @@
         </p:nvSpPr>
         <p:spPr>
           <a:xfrm>
-            <a:off x="6446520" y="2194560"/>
-            <a:ext cx="4892040" cy="1143000"/>
-          </a:xfrm>
-          <a:prstGeom prst="rect">
-            <a:avLst/>
-          </a:prstGeom>
-          <a:noFill/>
-          <a:ln/>
-        </p:spPr>
-        <p:txBody>
-          <a:bodyPr wrap="square" rtlCol="0" anchor="ctr"/>
-          <a:lstStyle/>
-          <a:p>
-            <a:pPr indent="0" marL="0">
-              <a:buNone/>
-            </a:pPr>
-            <a:r>
-              <a:rPr lang="en-US" sz="1150" dirty="0">
+            <a:off x="6455664" y="2011680"/>
+            <a:ext cx="4892040" cy="1234440"/>
+          </a:xfrm>
+          <a:prstGeom prst="rect">
+            <a:avLst/>
+          </a:prstGeom>
+          <a:noFill/>
+          <a:ln/>
+        </p:spPr>
+        <p:txBody>
+          <a:bodyPr wrap="square" rtlCol="0" anchor="ctr"/>
+          <a:lstStyle/>
+          <a:p>
+            <a:pPr indent="0" marL="0">
+              <a:buNone/>
+            </a:pPr>
+            <a:r>
+              <a:rPr lang="en-US" sz="1100" dirty="0">
                 <a:solidFill>
                   <a:srgbClr val="334155"/>
                 </a:solidFill>
@@ -6453,7 +6453,7 @@
               </a:rPr>
               <a:t>Modernizes vulnerable legacy healthcare databases into resilient decentralized infrastructure combining cryptographic ledger security with IPFS.</a:t>
             </a:r>
-            <a:endParaRPr lang="en-US" sz="1150" dirty="0"/>
+            <a:endParaRPr lang="en-US" sz="1100" dirty="0"/>
           </a:p>
         </p:txBody>
       </p:sp>
@@ -6465,12 +6465,12 @@
         </p:nvSpPr>
         <p:spPr>
           <a:xfrm>
-            <a:off x="548640" y="3657600"/>
-            <a:ext cx="5440680" cy="2103120"/>
+            <a:off x="603504" y="3566160"/>
+            <a:ext cx="5349240" cy="2148840"/>
           </a:xfrm>
           <a:prstGeom prst="roundRect">
             <a:avLst>
-              <a:gd name="adj" fmla="val 5217"/>
+              <a:gd name="adj" fmla="val 4255"/>
             </a:avLst>
           </a:prstGeom>
           <a:solidFill>
@@ -6492,24 +6492,24 @@
         </p:nvSpPr>
         <p:spPr>
           <a:xfrm>
-            <a:off x="822960" y="3840480"/>
-            <a:ext cx="4892040" cy="228600"/>
-          </a:xfrm>
-          <a:prstGeom prst="rect">
-            <a:avLst/>
-          </a:prstGeom>
-          <a:noFill/>
-          <a:ln/>
-        </p:spPr>
-        <p:txBody>
-          <a:bodyPr wrap="square" rtlCol="0" anchor="ctr"/>
-          <a:lstStyle/>
-          <a:p>
-            <a:pPr indent="0" marL="0">
-              <a:buNone/>
-            </a:pPr>
-            <a:r>
-              <a:rPr lang="en-US" sz="1000" b="1" spc="100" kern="0" dirty="0">
+            <a:off x="832104" y="3730752"/>
+            <a:ext cx="4892040" cy="201168"/>
+          </a:xfrm>
+          <a:prstGeom prst="rect">
+            <a:avLst/>
+          </a:prstGeom>
+          <a:noFill/>
+          <a:ln/>
+        </p:spPr>
+        <p:txBody>
+          <a:bodyPr wrap="square" rtlCol="0" anchor="ctr"/>
+          <a:lstStyle/>
+          <a:p>
+            <a:pPr indent="0" marL="0">
+              <a:buNone/>
+            </a:pPr>
+            <a:r>
+              <a:rPr lang="en-US" sz="950" b="1" spc="100" kern="0" dirty="0">
                 <a:solidFill>
                   <a:srgbClr val="E11D48"/>
                 </a:solidFill>
@@ -6519,7 +6519,7 @@
               </a:rPr>
               <a:t>SDG 10  •  TARGET 10.2</a:t>
             </a:r>
-            <a:endParaRPr lang="en-US" sz="1000" dirty="0"/>
+            <a:endParaRPr lang="en-US" sz="950" dirty="0"/>
           </a:p>
         </p:txBody>
       </p:sp>
@@ -6531,24 +6531,24 @@
         </p:nvSpPr>
         <p:spPr>
           <a:xfrm>
-            <a:off x="822960" y="4096512"/>
-            <a:ext cx="4892040" cy="347472"/>
-          </a:xfrm>
-          <a:prstGeom prst="rect">
-            <a:avLst/>
-          </a:prstGeom>
-          <a:noFill/>
-          <a:ln/>
-        </p:spPr>
-        <p:txBody>
-          <a:bodyPr wrap="square" rtlCol="0" anchor="ctr"/>
-          <a:lstStyle/>
-          <a:p>
-            <a:pPr indent="0" marL="0">
-              <a:buNone/>
-            </a:pPr>
-            <a:r>
-              <a:rPr lang="en-US" sz="1600" b="1" dirty="0">
+            <a:off x="832104" y="3977640"/>
+            <a:ext cx="4892040" cy="320040"/>
+          </a:xfrm>
+          <a:prstGeom prst="rect">
+            <a:avLst/>
+          </a:prstGeom>
+          <a:noFill/>
+          <a:ln/>
+        </p:spPr>
+        <p:txBody>
+          <a:bodyPr wrap="square" rtlCol="0" anchor="ctr"/>
+          <a:lstStyle/>
+          <a:p>
+            <a:pPr indent="0" marL="0">
+              <a:buNone/>
+            </a:pPr>
+            <a:r>
+              <a:rPr lang="en-US" sz="1500" b="1" dirty="0">
                 <a:solidFill>
                   <a:srgbClr val="0F172A"/>
                 </a:solidFill>
@@ -6558,7 +6558,7 @@
               </a:rPr>
               <a:t>Reduced Inequalities</a:t>
             </a:r>
-            <a:endParaRPr lang="en-US" sz="1600" dirty="0"/>
+            <a:endParaRPr lang="en-US" sz="1500" dirty="0"/>
           </a:p>
         </p:txBody>
       </p:sp>
@@ -6570,24 +6570,24 @@
         </p:nvSpPr>
         <p:spPr>
           <a:xfrm>
-            <a:off x="822960" y="4480560"/>
-            <a:ext cx="4892040" cy="1143000"/>
-          </a:xfrm>
-          <a:prstGeom prst="rect">
-            <a:avLst/>
-          </a:prstGeom>
-          <a:noFill/>
-          <a:ln/>
-        </p:spPr>
-        <p:txBody>
-          <a:bodyPr wrap="square" rtlCol="0" anchor="ctr"/>
-          <a:lstStyle/>
-          <a:p>
-            <a:pPr indent="0" marL="0">
-              <a:buNone/>
-            </a:pPr>
-            <a:r>
-              <a:rPr lang="en-US" sz="1150" dirty="0">
+            <a:off x="832104" y="4343400"/>
+            <a:ext cx="4892040" cy="1234440"/>
+          </a:xfrm>
+          <a:prstGeom prst="rect">
+            <a:avLst/>
+          </a:prstGeom>
+          <a:noFill/>
+          <a:ln/>
+        </p:spPr>
+        <p:txBody>
+          <a:bodyPr wrap="square" rtlCol="0" anchor="ctr"/>
+          <a:lstStyle/>
+          <a:p>
+            <a:pPr indent="0" marL="0">
+              <a:buNone/>
+            </a:pPr>
+            <a:r>
+              <a:rPr lang="en-US" sz="1100" dirty="0">
                 <a:solidFill>
                   <a:srgbClr val="334155"/>
                 </a:solidFill>
@@ -6597,7 +6597,7 @@
               </a:rPr>
               <a:t>Democratizes patient ownership over health records regardless of socioeconomic status, preventing commercial healthcare monopolies and data lock-in.</a:t>
             </a:r>
-            <a:endParaRPr lang="en-US" sz="1150" dirty="0"/>
+            <a:endParaRPr lang="en-US" sz="1100" dirty="0"/>
           </a:p>
         </p:txBody>
       </p:sp>
@@ -6609,12 +6609,12 @@
         </p:nvSpPr>
         <p:spPr>
           <a:xfrm>
-            <a:off x="6172200" y="3657600"/>
-            <a:ext cx="5440680" cy="2103120"/>
+            <a:off x="6227064" y="3566160"/>
+            <a:ext cx="5349240" cy="2148840"/>
           </a:xfrm>
           <a:prstGeom prst="roundRect">
             <a:avLst>
-              <a:gd name="adj" fmla="val 5217"/>
+              <a:gd name="adj" fmla="val 4255"/>
             </a:avLst>
           </a:prstGeom>
           <a:solidFill>
@@ -6636,24 +6636,24 @@
         </p:nvSpPr>
         <p:spPr>
           <a:xfrm>
-            <a:off x="6446520" y="3840480"/>
-            <a:ext cx="4892040" cy="228600"/>
-          </a:xfrm>
-          <a:prstGeom prst="rect">
-            <a:avLst/>
-          </a:prstGeom>
-          <a:noFill/>
-          <a:ln/>
-        </p:spPr>
-        <p:txBody>
-          <a:bodyPr wrap="square" rtlCol="0" anchor="ctr"/>
-          <a:lstStyle/>
-          <a:p>
-            <a:pPr indent="0" marL="0">
-              <a:buNone/>
-            </a:pPr>
-            <a:r>
-              <a:rPr lang="en-US" sz="1000" b="1" spc="100" kern="0" dirty="0">
+            <a:off x="6455664" y="3730752"/>
+            <a:ext cx="4892040" cy="201168"/>
+          </a:xfrm>
+          <a:prstGeom prst="rect">
+            <a:avLst/>
+          </a:prstGeom>
+          <a:noFill/>
+          <a:ln/>
+        </p:spPr>
+        <p:txBody>
+          <a:bodyPr wrap="square" rtlCol="0" anchor="ctr"/>
+          <a:lstStyle/>
+          <a:p>
+            <a:pPr indent="0" marL="0">
+              <a:buNone/>
+            </a:pPr>
+            <a:r>
+              <a:rPr lang="en-US" sz="950" b="1" spc="100" kern="0" dirty="0">
                 <a:solidFill>
                   <a:srgbClr val="6366F1"/>
                 </a:solidFill>
@@ -6663,7 +6663,7 @@
               </a:rPr>
               <a:t>SDG 16  •  TARGET 16.6</a:t>
             </a:r>
-            <a:endParaRPr lang="en-US" sz="1000" dirty="0"/>
+            <a:endParaRPr lang="en-US" sz="950" dirty="0"/>
           </a:p>
         </p:txBody>
       </p:sp>
@@ -6675,24 +6675,24 @@
         </p:nvSpPr>
         <p:spPr>
           <a:xfrm>
-            <a:off x="6446520" y="4096512"/>
-            <a:ext cx="4892040" cy="347472"/>
-          </a:xfrm>
-          <a:prstGeom prst="rect">
-            <a:avLst/>
-          </a:prstGeom>
-          <a:noFill/>
-          <a:ln/>
-        </p:spPr>
-        <p:txBody>
-          <a:bodyPr wrap="square" rtlCol="0" anchor="ctr"/>
-          <a:lstStyle/>
-          <a:p>
-            <a:pPr indent="0" marL="0">
-              <a:buNone/>
-            </a:pPr>
-            <a:r>
-              <a:rPr lang="en-US" sz="1600" b="1" dirty="0">
+            <a:off x="6455664" y="3977640"/>
+            <a:ext cx="4892040" cy="320040"/>
+          </a:xfrm>
+          <a:prstGeom prst="rect">
+            <a:avLst/>
+          </a:prstGeom>
+          <a:noFill/>
+          <a:ln/>
+        </p:spPr>
+        <p:txBody>
+          <a:bodyPr wrap="square" rtlCol="0" anchor="ctr"/>
+          <a:lstStyle/>
+          <a:p>
+            <a:pPr indent="0" marL="0">
+              <a:buNone/>
+            </a:pPr>
+            <a:r>
+              <a:rPr lang="en-US" sz="1500" b="1" dirty="0">
                 <a:solidFill>
                   <a:srgbClr val="0F172A"/>
                 </a:solidFill>
@@ -6702,7 +6702,7 @@
               </a:rPr>
               <a:t>Peace, Justice &amp; Strong Institutions</a:t>
             </a:r>
-            <a:endParaRPr lang="en-US" sz="1600" dirty="0"/>
+            <a:endParaRPr lang="en-US" sz="1500" dirty="0"/>
           </a:p>
         </p:txBody>
       </p:sp>
@@ -6714,24 +6714,24 @@
         </p:nvSpPr>
         <p:spPr>
           <a:xfrm>
-            <a:off x="6446520" y="4480560"/>
-            <a:ext cx="4892040" cy="1143000"/>
-          </a:xfrm>
-          <a:prstGeom prst="rect">
-            <a:avLst/>
-          </a:prstGeom>
-          <a:noFill/>
-          <a:ln/>
-        </p:spPr>
-        <p:txBody>
-          <a:bodyPr wrap="square" rtlCol="0" anchor="ctr"/>
-          <a:lstStyle/>
-          <a:p>
-            <a:pPr indent="0" marL="0">
-              <a:buNone/>
-            </a:pPr>
-            <a:r>
-              <a:rPr lang="en-US" sz="1150" dirty="0">
+            <a:off x="6455664" y="4343400"/>
+            <a:ext cx="4892040" cy="1234440"/>
+          </a:xfrm>
+          <a:prstGeom prst="rect">
+            <a:avLst/>
+          </a:prstGeom>
+          <a:noFill/>
+          <a:ln/>
+        </p:spPr>
+        <p:txBody>
+          <a:bodyPr wrap="square" rtlCol="0" anchor="ctr"/>
+          <a:lstStyle/>
+          <a:p>
+            <a:pPr indent="0" marL="0">
+              <a:buNone/>
+            </a:pPr>
+            <a:r>
+              <a:rPr lang="en-US" sz="1100" dirty="0">
                 <a:solidFill>
                   <a:srgbClr val="334155"/>
                 </a:solidFill>
@@ -6741,7 +6741,7 @@
               </a:rPr>
               <a:t>Establishes transparent, immutable on-chain audit trails for clinician licensing and diagnostic issuance, preventing healthcare malpractice fraud.</a:t>
             </a:r>
-            <a:endParaRPr lang="en-US" sz="1150" dirty="0"/>
+            <a:endParaRPr lang="en-US" sz="1100" dirty="0"/>
           </a:p>
         </p:txBody>
       </p:sp>
@@ -6785,8 +6785,8 @@
         </p:nvSpPr>
         <p:spPr>
           <a:xfrm>
-            <a:off x="548640" y="320040"/>
-            <a:ext cx="11091672" cy="27432"/>
+            <a:off x="603504" y="320040"/>
+            <a:ext cx="10972800" cy="27432"/>
           </a:xfrm>
           <a:prstGeom prst="rect">
             <a:avLst/>
@@ -6805,24 +6805,24 @@
         </p:nvSpPr>
         <p:spPr>
           <a:xfrm>
-            <a:off x="548640" y="384048"/>
-            <a:ext cx="7315200" cy="274320"/>
-          </a:xfrm>
-          <a:prstGeom prst="rect">
-            <a:avLst/>
-          </a:prstGeom>
-          <a:noFill/>
-          <a:ln/>
-        </p:spPr>
-        <p:txBody>
-          <a:bodyPr wrap="square" rtlCol="0" anchor="ctr"/>
-          <a:lstStyle/>
-          <a:p>
-            <a:pPr indent="0" marL="0">
-              <a:buNone/>
-            </a:pPr>
-            <a:r>
-              <a:rPr lang="en-US" sz="1000" b="1" spc="150" kern="0" dirty="0">
+            <a:off x="603504" y="384048"/>
+            <a:ext cx="7315200" cy="256032"/>
+          </a:xfrm>
+          <a:prstGeom prst="rect">
+            <a:avLst/>
+          </a:prstGeom>
+          <a:noFill/>
+          <a:ln/>
+        </p:spPr>
+        <p:txBody>
+          <a:bodyPr wrap="square" rtlCol="0" anchor="ctr"/>
+          <a:lstStyle/>
+          <a:p>
+            <a:pPr indent="0" marL="0">
+              <a:buNone/>
+            </a:pPr>
+            <a:r>
+              <a:rPr lang="en-US" sz="950" b="1" spc="150" kern="0" dirty="0">
                 <a:solidFill>
                   <a:srgbClr val="0369A1"/>
                 </a:solidFill>
@@ -6832,7 +6832,7 @@
               </a:rPr>
               <a:t>MATURITY SCORECARD • NASA / HORIZON EUROPE FRAMEWORK</a:t>
             </a:r>
-            <a:endParaRPr lang="en-US" sz="1000" dirty="0"/>
+            <a:endParaRPr lang="en-US" sz="950" dirty="0"/>
           </a:p>
         </p:txBody>
       </p:sp>
@@ -6844,8 +6844,8 @@
         </p:nvSpPr>
         <p:spPr>
           <a:xfrm>
-            <a:off x="548640" y="685800"/>
-            <a:ext cx="11091672" cy="9144"/>
+            <a:off x="603504" y="658368"/>
+            <a:ext cx="10972800" cy="9144"/>
           </a:xfrm>
           <a:prstGeom prst="rect">
             <a:avLst/>
@@ -6864,8 +6864,8 @@
         </p:nvSpPr>
         <p:spPr>
           <a:xfrm>
-            <a:off x="548640" y="6355080"/>
-            <a:ext cx="11091672" cy="9144"/>
+            <a:off x="603504" y="6263640"/>
+            <a:ext cx="10972800" cy="9144"/>
           </a:xfrm>
           <a:prstGeom prst="rect">
             <a:avLst/>
@@ -6884,24 +6884,24 @@
         </p:nvSpPr>
         <p:spPr>
           <a:xfrm>
-            <a:off x="548640" y="6419088"/>
-            <a:ext cx="7315200" cy="274320"/>
-          </a:xfrm>
-          <a:prstGeom prst="rect">
-            <a:avLst/>
-          </a:prstGeom>
-          <a:noFill/>
-          <a:ln/>
-        </p:spPr>
-        <p:txBody>
-          <a:bodyPr wrap="square" rtlCol="0" anchor="ctr"/>
-          <a:lstStyle/>
-          <a:p>
-            <a:pPr indent="0" marL="0">
-              <a:buNone/>
-            </a:pPr>
-            <a:r>
-              <a:rPr lang="en-US" sz="950" dirty="0">
+            <a:off x="603504" y="6327648"/>
+            <a:ext cx="6858000" cy="274320"/>
+          </a:xfrm>
+          <a:prstGeom prst="rect">
+            <a:avLst/>
+          </a:prstGeom>
+          <a:noFill/>
+          <a:ln/>
+        </p:spPr>
+        <p:txBody>
+          <a:bodyPr wrap="square" rtlCol="0" anchor="ctr"/>
+          <a:lstStyle/>
+          <a:p>
+            <a:pPr indent="0" marL="0">
+              <a:buNone/>
+            </a:pPr>
+            <a:r>
+              <a:rPr lang="en-US" sz="900" dirty="0">
                 <a:solidFill>
                   <a:srgbClr val="64748B"/>
                 </a:solidFill>
@@ -6911,7 +6911,7 @@
               </a:rPr>
               <a:t>Ashish Anil Sikaria (23BCI0218) • Faculty Guide: Prof. SELVI M • SCOPE</a:t>
             </a:r>
-            <a:endParaRPr lang="en-US" sz="950" dirty="0"/>
+            <a:endParaRPr lang="en-US" sz="900" dirty="0"/>
           </a:p>
         </p:txBody>
       </p:sp>
@@ -6923,8 +6923,8 @@
         </p:nvSpPr>
         <p:spPr>
           <a:xfrm>
-            <a:off x="8686800" y="6419088"/>
-            <a:ext cx="2953512" cy="274320"/>
+            <a:off x="7772400" y="6327648"/>
+            <a:ext cx="3803904" cy="274320"/>
           </a:xfrm>
           <a:prstGeom prst="rect">
             <a:avLst/>
@@ -6940,7 +6940,7 @@
               <a:buNone/>
             </a:pPr>
             <a:r>
-              <a:rPr lang="en-US" sz="950" dirty="0">
+              <a:rPr lang="en-US" sz="900" dirty="0">
                 <a:solidFill>
                   <a:srgbClr val="64748B"/>
                 </a:solidFill>
@@ -6950,7 +6950,7 @@
               </a:rPr>
               <a:t>Fall Semester 2026-27</a:t>
             </a:r>
-            <a:endParaRPr lang="en-US" sz="950" dirty="0"/>
+            <a:endParaRPr lang="en-US" sz="900" dirty="0"/>
           </a:p>
         </p:txBody>
       </p:sp>
@@ -6962,24 +6962,24 @@
         </p:nvSpPr>
         <p:spPr>
           <a:xfrm>
-            <a:off x="548640" y="777240"/>
-            <a:ext cx="10972800" cy="457200"/>
-          </a:xfrm>
-          <a:prstGeom prst="rect">
-            <a:avLst/>
-          </a:prstGeom>
-          <a:noFill/>
-          <a:ln/>
-        </p:spPr>
-        <p:txBody>
-          <a:bodyPr wrap="square" rtlCol="0" anchor="ctr"/>
-          <a:lstStyle/>
-          <a:p>
-            <a:pPr indent="0" marL="0">
-              <a:buNone/>
-            </a:pPr>
-            <a:r>
-              <a:rPr lang="en-US" sz="2400" b="1" dirty="0">
+            <a:off x="603504" y="731520"/>
+            <a:ext cx="10972800" cy="411480"/>
+          </a:xfrm>
+          <a:prstGeom prst="rect">
+            <a:avLst/>
+          </a:prstGeom>
+          <a:noFill/>
+          <a:ln/>
+        </p:spPr>
+        <p:txBody>
+          <a:bodyPr wrap="square" rtlCol="0" anchor="ctr"/>
+          <a:lstStyle/>
+          <a:p>
+            <a:pPr indent="0" marL="0">
+              <a:buNone/>
+            </a:pPr>
+            <a:r>
+              <a:rPr lang="en-US" sz="2200" b="1" dirty="0">
                 <a:solidFill>
                   <a:srgbClr val="0F172A"/>
                 </a:solidFill>
@@ -6989,7 +6989,7 @@
               </a:rPr>
               <a:t>Technology Readiness Level (TRL) Assessment</a:t>
             </a:r>
-            <a:endParaRPr lang="en-US" sz="2400" dirty="0"/>
+            <a:endParaRPr lang="en-US" sz="2200" dirty="0"/>
           </a:p>
         </p:txBody>
       </p:sp>
@@ -7001,12 +7001,12 @@
         </p:nvSpPr>
         <p:spPr>
           <a:xfrm>
-            <a:off x="548640" y="1325880"/>
-            <a:ext cx="2697480" cy="960120"/>
+            <a:off x="603504" y="1234440"/>
+            <a:ext cx="2606040" cy="868680"/>
           </a:xfrm>
           <a:prstGeom prst="roundRect">
             <a:avLst>
-              <a:gd name="adj" fmla="val 9524"/>
+              <a:gd name="adj" fmla="val 8421"/>
             </a:avLst>
           </a:prstGeom>
           <a:solidFill>
@@ -7028,8 +7028,8 @@
         </p:nvSpPr>
         <p:spPr>
           <a:xfrm>
-            <a:off x="685800" y="1463040"/>
-            <a:ext cx="2423160" cy="274320"/>
+            <a:off x="694944" y="1344168"/>
+            <a:ext cx="2423160" cy="256032"/>
           </a:xfrm>
           <a:prstGeom prst="rect">
             <a:avLst/>
@@ -7045,7 +7045,7 @@
               <a:buNone/>
             </a:pPr>
             <a:r>
-              <a:rPr lang="en-US" sz="1200" b="1" dirty="0">
+              <a:rPr lang="en-US" sz="1100" b="1" dirty="0">
                 <a:solidFill>
                   <a:srgbClr val="64748B"/>
                 </a:solidFill>
@@ -7055,7 +7055,7 @@
               </a:rPr>
               <a:t>TRL 1 - 3</a:t>
             </a:r>
-            <a:endParaRPr lang="en-US" sz="1200" dirty="0"/>
+            <a:endParaRPr lang="en-US" sz="1100" dirty="0"/>
           </a:p>
         </p:txBody>
       </p:sp>
@@ -7067,8 +7067,8 @@
         </p:nvSpPr>
         <p:spPr>
           <a:xfrm>
-            <a:off x="685800" y="1737360"/>
-            <a:ext cx="2423160" cy="411480"/>
+            <a:off x="694944" y="1618488"/>
+            <a:ext cx="2423160" cy="384048"/>
           </a:xfrm>
           <a:prstGeom prst="rect">
             <a:avLst/>
@@ -7084,7 +7084,7 @@
               <a:buNone/>
             </a:pPr>
             <a:r>
-              <a:rPr lang="en-US" sz="950" dirty="0">
+              <a:rPr lang="en-US" sz="900" dirty="0">
                 <a:solidFill>
                   <a:srgbClr val="64748B"/>
                 </a:solidFill>
@@ -7094,7 +7094,7 @@
               </a:rPr>
               <a:t>Concept Formulation</a:t>
             </a:r>
-            <a:endParaRPr lang="en-US" sz="950" dirty="0"/>
+            <a:endParaRPr lang="en-US" sz="900" dirty="0"/>
           </a:p>
         </p:txBody>
       </p:sp>
@@ -7106,12 +7106,12 @@
         </p:nvSpPr>
         <p:spPr>
           <a:xfrm>
-            <a:off x="3364992" y="1325880"/>
-            <a:ext cx="2697480" cy="960120"/>
+            <a:off x="3419856" y="1234440"/>
+            <a:ext cx="2606040" cy="868680"/>
           </a:xfrm>
           <a:prstGeom prst="roundRect">
             <a:avLst>
-              <a:gd name="adj" fmla="val 9524"/>
+              <a:gd name="adj" fmla="val 8421"/>
             </a:avLst>
           </a:prstGeom>
           <a:solidFill>
@@ -7133,8 +7133,8 @@
         </p:nvSpPr>
         <p:spPr>
           <a:xfrm>
-            <a:off x="3502152" y="1463040"/>
-            <a:ext cx="2423160" cy="274320"/>
+            <a:off x="3511296" y="1344168"/>
+            <a:ext cx="2423160" cy="256032"/>
           </a:xfrm>
           <a:prstGeom prst="rect">
             <a:avLst/>
@@ -7150,7 +7150,7 @@
               <a:buNone/>
             </a:pPr>
             <a:r>
-              <a:rPr lang="en-US" sz="1200" b="1" dirty="0">
+              <a:rPr lang="en-US" sz="1100" b="1" dirty="0">
                 <a:solidFill>
                   <a:srgbClr val="64748B"/>
                 </a:solidFill>
@@ -7160,7 +7160,7 @@
               </a:rPr>
               <a:t>TRL 4 - 5</a:t>
             </a:r>
-            <a:endParaRPr lang="en-US" sz="1200" dirty="0"/>
+            <a:endParaRPr lang="en-US" sz="1100" dirty="0"/>
           </a:p>
         </p:txBody>
       </p:sp>
@@ -7172,8 +7172,8 @@
         </p:nvSpPr>
         <p:spPr>
           <a:xfrm>
-            <a:off x="3502152" y="1737360"/>
-            <a:ext cx="2423160" cy="411480"/>
+            <a:off x="3511296" y="1618488"/>
+            <a:ext cx="2423160" cy="384048"/>
           </a:xfrm>
           <a:prstGeom prst="rect">
             <a:avLst/>
@@ -7189,7 +7189,7 @@
               <a:buNone/>
             </a:pPr>
             <a:r>
-              <a:rPr lang="en-US" sz="950" dirty="0">
+              <a:rPr lang="en-US" sz="900" dirty="0">
                 <a:solidFill>
                   <a:srgbClr val="64748B"/>
                 </a:solidFill>
@@ -7199,7 +7199,7 @@
               </a:rPr>
               <a:t>Lab Validation</a:t>
             </a:r>
-            <a:endParaRPr lang="en-US" sz="950" dirty="0"/>
+            <a:endParaRPr lang="en-US" sz="900" dirty="0"/>
           </a:p>
         </p:txBody>
       </p:sp>
@@ -7211,12 +7211,12 @@
         </p:nvSpPr>
         <p:spPr>
           <a:xfrm>
-            <a:off x="6181344" y="1325880"/>
-            <a:ext cx="2697480" cy="960120"/>
+            <a:off x="6236208" y="1234440"/>
+            <a:ext cx="2606040" cy="868680"/>
           </a:xfrm>
           <a:prstGeom prst="roundRect">
             <a:avLst>
-              <a:gd name="adj" fmla="val 9524"/>
+              <a:gd name="adj" fmla="val 8421"/>
             </a:avLst>
           </a:prstGeom>
           <a:solidFill>
@@ -7238,8 +7238,8 @@
         </p:nvSpPr>
         <p:spPr>
           <a:xfrm>
-            <a:off x="6318504" y="1463040"/>
-            <a:ext cx="2423160" cy="274320"/>
+            <a:off x="6327648" y="1344168"/>
+            <a:ext cx="2423160" cy="256032"/>
           </a:xfrm>
           <a:prstGeom prst="rect">
             <a:avLst/>
@@ -7255,7 +7255,7 @@
               <a:buNone/>
             </a:pPr>
             <a:r>
-              <a:rPr lang="en-US" sz="1200" b="1" dirty="0">
+              <a:rPr lang="en-US" sz="1100" b="1" dirty="0">
                 <a:solidFill>
                   <a:srgbClr val="0369A1"/>
                 </a:solidFill>
@@ -7265,7 +7265,7 @@
               </a:rPr>
               <a:t>★ TRL 6 VERIFIED ★</a:t>
             </a:r>
-            <a:endParaRPr lang="en-US" sz="1200" dirty="0"/>
+            <a:endParaRPr lang="en-US" sz="1100" dirty="0"/>
           </a:p>
         </p:txBody>
       </p:sp>
@@ -7277,8 +7277,8 @@
         </p:nvSpPr>
         <p:spPr>
           <a:xfrm>
-            <a:off x="6318504" y="1737360"/>
-            <a:ext cx="2423160" cy="411480"/>
+            <a:off x="6327648" y="1618488"/>
+            <a:ext cx="2423160" cy="384048"/>
           </a:xfrm>
           <a:prstGeom prst="rect">
             <a:avLst/>
@@ -7294,7 +7294,7 @@
               <a:buNone/>
             </a:pPr>
             <a:r>
-              <a:rPr lang="en-US" sz="950" dirty="0">
+              <a:rPr lang="en-US" sz="900" dirty="0">
                 <a:solidFill>
                   <a:srgbClr val="0F172A"/>
                 </a:solidFill>
@@ -7304,7 +7304,7 @@
               </a:rPr>
               <a:t>Demonstrated Prototype</a:t>
             </a:r>
-            <a:endParaRPr lang="en-US" sz="950" dirty="0"/>
+            <a:endParaRPr lang="en-US" sz="900" dirty="0"/>
           </a:p>
         </p:txBody>
       </p:sp>
@@ -7316,12 +7316,12 @@
         </p:nvSpPr>
         <p:spPr>
           <a:xfrm>
-            <a:off x="8997696" y="1325880"/>
-            <a:ext cx="2697480" cy="960120"/>
+            <a:off x="9052560" y="1234440"/>
+            <a:ext cx="2606040" cy="868680"/>
           </a:xfrm>
           <a:prstGeom prst="roundRect">
             <a:avLst>
-              <a:gd name="adj" fmla="val 9524"/>
+              <a:gd name="adj" fmla="val 8421"/>
             </a:avLst>
           </a:prstGeom>
           <a:solidFill>
@@ -7343,8 +7343,8 @@
         </p:nvSpPr>
         <p:spPr>
           <a:xfrm>
-            <a:off x="9134856" y="1463040"/>
-            <a:ext cx="2423160" cy="274320"/>
+            <a:off x="9144000" y="1344168"/>
+            <a:ext cx="2423160" cy="256032"/>
           </a:xfrm>
           <a:prstGeom prst="rect">
             <a:avLst/>
@@ -7360,7 +7360,7 @@
               <a:buNone/>
             </a:pPr>
             <a:r>
-              <a:rPr lang="en-US" sz="1200" b="1" dirty="0">
+              <a:rPr lang="en-US" sz="1100" b="1" dirty="0">
                 <a:solidFill>
                   <a:srgbClr val="64748B"/>
                 </a:solidFill>
@@ -7370,7 +7370,7 @@
               </a:rPr>
               <a:t>TRL 7 - 9</a:t>
             </a:r>
-            <a:endParaRPr lang="en-US" sz="1200" dirty="0"/>
+            <a:endParaRPr lang="en-US" sz="1100" dirty="0"/>
           </a:p>
         </p:txBody>
       </p:sp>
@@ -7382,8 +7382,8 @@
         </p:nvSpPr>
         <p:spPr>
           <a:xfrm>
-            <a:off x="9134856" y="1737360"/>
-            <a:ext cx="2423160" cy="411480"/>
+            <a:off x="9144000" y="1618488"/>
+            <a:ext cx="2423160" cy="384048"/>
           </a:xfrm>
           <a:prstGeom prst="rect">
             <a:avLst/>
@@ -7399,7 +7399,7 @@
               <a:buNone/>
             </a:pPr>
             <a:r>
-              <a:rPr lang="en-US" sz="950" dirty="0">
+              <a:rPr lang="en-US" sz="900" dirty="0">
                 <a:solidFill>
                   <a:srgbClr val="64748B"/>
                 </a:solidFill>
@@ -7409,7 +7409,7 @@
               </a:rPr>
               <a:t>Clinical Deployment</a:t>
             </a:r>
-            <a:endParaRPr lang="en-US" sz="950" dirty="0"/>
+            <a:endParaRPr lang="en-US" sz="900" dirty="0"/>
           </a:p>
         </p:txBody>
       </p:sp>
@@ -7421,12 +7421,12 @@
         </p:nvSpPr>
         <p:spPr>
           <a:xfrm>
-            <a:off x="548640" y="2468880"/>
-            <a:ext cx="5440680" cy="3749040"/>
+            <a:off x="603504" y="2240280"/>
+            <a:ext cx="5349240" cy="3794760"/>
           </a:xfrm>
           <a:prstGeom prst="roundRect">
             <a:avLst>
-              <a:gd name="adj" fmla="val 2927"/>
+              <a:gd name="adj" fmla="val 2410"/>
             </a:avLst>
           </a:prstGeom>
           <a:solidFill>
@@ -7448,24 +7448,24 @@
         </p:nvSpPr>
         <p:spPr>
           <a:xfrm>
-            <a:off x="822960" y="2651760"/>
-            <a:ext cx="4892040" cy="274320"/>
-          </a:xfrm>
-          <a:prstGeom prst="rect">
-            <a:avLst/>
-          </a:prstGeom>
-          <a:noFill/>
-          <a:ln/>
-        </p:spPr>
-        <p:txBody>
-          <a:bodyPr wrap="square" rtlCol="0" anchor="ctr"/>
-          <a:lstStyle/>
-          <a:p>
-            <a:pPr indent="0" marL="0">
-              <a:buNone/>
-            </a:pPr>
-            <a:r>
-              <a:rPr lang="en-US" sz="1150" b="1" spc="100" kern="0" dirty="0">
+            <a:off x="822960" y="2423160"/>
+            <a:ext cx="4892040" cy="256032"/>
+          </a:xfrm>
+          <a:prstGeom prst="rect">
+            <a:avLst/>
+          </a:prstGeom>
+          <a:noFill/>
+          <a:ln/>
+        </p:spPr>
+        <p:txBody>
+          <a:bodyPr wrap="square" rtlCol="0" anchor="ctr"/>
+          <a:lstStyle/>
+          <a:p>
+            <a:pPr indent="0" marL="0">
+              <a:buNone/>
+            </a:pPr>
+            <a:r>
+              <a:rPr lang="en-US" sz="1100" b="1" spc="100" kern="0" dirty="0">
                 <a:solidFill>
                   <a:srgbClr val="059669"/>
                 </a:solidFill>
@@ -7475,7 +7475,7 @@
               </a:rPr>
               <a:t>✓ TRL 6 VERIFIED DELIVERABLES</a:t>
             </a:r>
-            <a:endParaRPr lang="en-US" sz="1150" dirty="0"/>
+            <a:endParaRPr lang="en-US" sz="1100" dirty="0"/>
           </a:p>
         </p:txBody>
       </p:sp>
@@ -7487,24 +7487,24 @@
         </p:nvSpPr>
         <p:spPr>
           <a:xfrm>
-            <a:off x="822960" y="3017520"/>
-            <a:ext cx="4892040" cy="3017520"/>
-          </a:xfrm>
-          <a:prstGeom prst="rect">
-            <a:avLst/>
-          </a:prstGeom>
-          <a:noFill/>
-          <a:ln/>
-        </p:spPr>
-        <p:txBody>
-          <a:bodyPr wrap="square" rtlCol="0" anchor="ctr"/>
-          <a:lstStyle/>
-          <a:p>
-            <a:pPr indent="0" marL="0">
-              <a:buNone/>
-            </a:pPr>
-            <a:r>
-              <a:rPr lang="en-US" sz="1100" dirty="0">
+            <a:off x="822960" y="2743200"/>
+            <a:ext cx="4892040" cy="3108960"/>
+          </a:xfrm>
+          <a:prstGeom prst="rect">
+            <a:avLst/>
+          </a:prstGeom>
+          <a:noFill/>
+          <a:ln/>
+        </p:spPr>
+        <p:txBody>
+          <a:bodyPr wrap="square" rtlCol="0" anchor="ctr"/>
+          <a:lstStyle/>
+          <a:p>
+            <a:pPr indent="0" marL="0">
+              <a:buNone/>
+            </a:pPr>
+            <a:r>
+              <a:rPr lang="en-US" sz="1050" dirty="0">
                 <a:solidFill>
                   <a:srgbClr val="334155"/>
                 </a:solidFill>
@@ -7514,20 +7514,20 @@
               </a:rPr>
               <a:t>• Smart Contracts: MedicalRecord.sol deployed with 100% automated test coverage (11/11 Hardhat unit tests passing).</a:t>
             </a:r>
-            <a:endParaRPr lang="en-US" sz="1100" dirty="0"/>
-          </a:p>
-          <a:p>
-            <a:pPr indent="0" marL="0">
-              <a:buNone/>
-            </a:pPr>
-            <a:endParaRPr lang="en-US" sz="1100" dirty="0"/>
-          </a:p>
-          <a:p>
-            <a:pPr indent="0" marL="0">
-              <a:buNone/>
-            </a:pPr>
-            <a:r>
-              <a:rPr lang="en-US" sz="1100" dirty="0">
+            <a:endParaRPr lang="en-US" sz="1050" dirty="0"/>
+          </a:p>
+          <a:p>
+            <a:pPr indent="0" marL="0">
+              <a:buNone/>
+            </a:pPr>
+            <a:endParaRPr lang="en-US" sz="1050" dirty="0"/>
+          </a:p>
+          <a:p>
+            <a:pPr indent="0" marL="0">
+              <a:buNone/>
+            </a:pPr>
+            <a:r>
+              <a:rPr lang="en-US" sz="1050" dirty="0">
                 <a:solidFill>
                   <a:srgbClr val="334155"/>
                 </a:solidFill>
@@ -7537,20 +7537,20 @@
               </a:rPr>
               <a:t>• Cryptographic Gateway: Client-side AES-256-GCM symmetric buffer encryption and IPFS pinning via Pinata live.</a:t>
             </a:r>
-            <a:endParaRPr lang="en-US" sz="1100" dirty="0"/>
-          </a:p>
-          <a:p>
-            <a:pPr indent="0" marL="0">
-              <a:buNone/>
-            </a:pPr>
-            <a:endParaRPr lang="en-US" sz="1100" dirty="0"/>
-          </a:p>
-          <a:p>
-            <a:pPr indent="0" marL="0">
-              <a:buNone/>
-            </a:pPr>
-            <a:r>
-              <a:rPr lang="en-US" sz="1100" dirty="0">
+            <a:endParaRPr lang="en-US" sz="1050" dirty="0"/>
+          </a:p>
+          <a:p>
+            <a:pPr indent="0" marL="0">
+              <a:buNone/>
+            </a:pPr>
+            <a:endParaRPr lang="en-US" sz="1050" dirty="0"/>
+          </a:p>
+          <a:p>
+            <a:pPr indent="0" marL="0">
+              <a:buNone/>
+            </a:pPr>
+            <a:r>
+              <a:rPr lang="en-US" sz="1050" dirty="0">
                 <a:solidFill>
                   <a:srgbClr val="334155"/>
                 </a:solidFill>
@@ -7560,20 +7560,20 @@
               </a:rPr>
               <a:t>• Role-Based Portals: Web3 frontend with dedicated portals for Patients, Licensed Doctors, and Hospital Governance.</a:t>
             </a:r>
-            <a:endParaRPr lang="en-US" sz="1100" dirty="0"/>
-          </a:p>
-          <a:p>
-            <a:pPr indent="0" marL="0">
-              <a:buNone/>
-            </a:pPr>
-            <a:endParaRPr lang="en-US" sz="1100" dirty="0"/>
-          </a:p>
-          <a:p>
-            <a:pPr indent="0" marL="0">
-              <a:buNone/>
-            </a:pPr>
-            <a:r>
-              <a:rPr lang="en-US" sz="1100" dirty="0">
+            <a:endParaRPr lang="en-US" sz="1050" dirty="0"/>
+          </a:p>
+          <a:p>
+            <a:pPr indent="0" marL="0">
+              <a:buNone/>
+            </a:pPr>
+            <a:endParaRPr lang="en-US" sz="1050" dirty="0"/>
+          </a:p>
+          <a:p>
+            <a:pPr indent="0" marL="0">
+              <a:buNone/>
+            </a:pPr>
+            <a:r>
+              <a:rPr lang="en-US" sz="1050" dirty="0">
                 <a:solidFill>
                   <a:srgbClr val="334155"/>
                 </a:solidFill>
@@ -7583,7 +7583,7 @@
               </a:rPr>
               <a:t>• Enterprise Architecture: Monorepo with CI/CD automation, Docker orchestration, and RBAC middleware.</a:t>
             </a:r>
-            <a:endParaRPr lang="en-US" sz="1100" dirty="0"/>
+            <a:endParaRPr lang="en-US" sz="1050" dirty="0"/>
           </a:p>
         </p:txBody>
       </p:sp>
@@ -7595,12 +7595,12 @@
         </p:nvSpPr>
         <p:spPr>
           <a:xfrm>
-            <a:off x="6199632" y="2468880"/>
-            <a:ext cx="5440680" cy="3749040"/>
+            <a:off x="6227064" y="2240280"/>
+            <a:ext cx="5349240" cy="3794760"/>
           </a:xfrm>
           <a:prstGeom prst="roundRect">
             <a:avLst>
-              <a:gd name="adj" fmla="val 2927"/>
+              <a:gd name="adj" fmla="val 2410"/>
             </a:avLst>
           </a:prstGeom>
           <a:solidFill>
@@ -7622,24 +7622,24 @@
         </p:nvSpPr>
         <p:spPr>
           <a:xfrm>
-            <a:off x="6473952" y="2651760"/>
-            <a:ext cx="4892040" cy="274320"/>
-          </a:xfrm>
-          <a:prstGeom prst="rect">
-            <a:avLst/>
-          </a:prstGeom>
-          <a:noFill/>
-          <a:ln/>
-        </p:spPr>
-        <p:txBody>
-          <a:bodyPr wrap="square" rtlCol="0" anchor="ctr"/>
-          <a:lstStyle/>
-          <a:p>
-            <a:pPr indent="0" marL="0">
-              <a:buNone/>
-            </a:pPr>
-            <a:r>
-              <a:rPr lang="en-US" sz="1150" b="1" spc="100" kern="0" dirty="0">
+            <a:off x="6446520" y="2423160"/>
+            <a:ext cx="4892040" cy="256032"/>
+          </a:xfrm>
+          <a:prstGeom prst="rect">
+            <a:avLst/>
+          </a:prstGeom>
+          <a:noFill/>
+          <a:ln/>
+        </p:spPr>
+        <p:txBody>
+          <a:bodyPr wrap="square" rtlCol="0" anchor="ctr"/>
+          <a:lstStyle/>
+          <a:p>
+            <a:pPr indent="0" marL="0">
+              <a:buNone/>
+            </a:pPr>
+            <a:r>
+              <a:rPr lang="en-US" sz="1100" b="1" spc="100" kern="0" dirty="0">
                 <a:solidFill>
                   <a:srgbClr val="0369A1"/>
                 </a:solidFill>
@@ -7649,7 +7649,7 @@
               </a:rPr>
               <a:t>➔ ROADMAP TO TRL 9 (COMMERCIAL DEPLOYMENT)</a:t>
             </a:r>
-            <a:endParaRPr lang="en-US" sz="1150" dirty="0"/>
+            <a:endParaRPr lang="en-US" sz="1100" dirty="0"/>
           </a:p>
         </p:txBody>
       </p:sp>
@@ -7661,24 +7661,24 @@
         </p:nvSpPr>
         <p:spPr>
           <a:xfrm>
-            <a:off x="6473952" y="3017520"/>
-            <a:ext cx="4892040" cy="3017520"/>
-          </a:xfrm>
-          <a:prstGeom prst="rect">
-            <a:avLst/>
-          </a:prstGeom>
-          <a:noFill/>
-          <a:ln/>
-        </p:spPr>
-        <p:txBody>
-          <a:bodyPr wrap="square" rtlCol="0" anchor="ctr"/>
-          <a:lstStyle/>
-          <a:p>
-            <a:pPr indent="0" marL="0">
-              <a:buNone/>
-            </a:pPr>
-            <a:r>
-              <a:rPr lang="en-US" sz="1100" dirty="0">
+            <a:off x="6446520" y="2743200"/>
+            <a:ext cx="4892040" cy="3108960"/>
+          </a:xfrm>
+          <a:prstGeom prst="rect">
+            <a:avLst/>
+          </a:prstGeom>
+          <a:noFill/>
+          <a:ln/>
+        </p:spPr>
+        <p:txBody>
+          <a:bodyPr wrap="square" rtlCol="0" anchor="ctr"/>
+          <a:lstStyle/>
+          <a:p>
+            <a:pPr indent="0" marL="0">
+              <a:buNone/>
+            </a:pPr>
+            <a:r>
+              <a:rPr lang="en-US" sz="1050" dirty="0">
                 <a:solidFill>
                   <a:srgbClr val="334155"/>
                 </a:solidFill>
@@ -7688,20 +7688,20 @@
               </a:rPr>
               <a:t>• TRL 7 (Operational Sandbox): Multi-hospital sandbox testing with HL7 FHIR structured schemas and ERC-4337 Passkey relayers.</a:t>
             </a:r>
-            <a:endParaRPr lang="en-US" sz="1100" dirty="0"/>
-          </a:p>
-          <a:p>
-            <a:pPr indent="0" marL="0">
-              <a:buNone/>
-            </a:pPr>
-            <a:endParaRPr lang="en-US" sz="1100" dirty="0"/>
-          </a:p>
-          <a:p>
-            <a:pPr indent="0" marL="0">
-              <a:buNone/>
-            </a:pPr>
-            <a:r>
-              <a:rPr lang="en-US" sz="1100" dirty="0">
+            <a:endParaRPr lang="en-US" sz="1050" dirty="0"/>
+          </a:p>
+          <a:p>
+            <a:pPr indent="0" marL="0">
+              <a:buNone/>
+            </a:pPr>
+            <a:endParaRPr lang="en-US" sz="1050" dirty="0"/>
+          </a:p>
+          <a:p>
+            <a:pPr indent="0" marL="0">
+              <a:buNone/>
+            </a:pPr>
+            <a:r>
+              <a:rPr lang="en-US" sz="1050" dirty="0">
                 <a:solidFill>
                   <a:srgbClr val="334155"/>
                 </a:solidFill>
@@ -7711,20 +7711,20 @@
               </a:rPr>
               <a:t>• TRL 8 (System Qualification): Formal smart contract verification by CertiK/OpenZeppelin and HIPAA/GDPR certification.</a:t>
             </a:r>
-            <a:endParaRPr lang="en-US" sz="1100" dirty="0"/>
-          </a:p>
-          <a:p>
-            <a:pPr indent="0" marL="0">
-              <a:buNone/>
-            </a:pPr>
-            <a:endParaRPr lang="en-US" sz="1100" dirty="0"/>
-          </a:p>
-          <a:p>
-            <a:pPr indent="0" marL="0">
-              <a:buNone/>
-            </a:pPr>
-            <a:r>
-              <a:rPr lang="en-US" sz="1100" dirty="0">
+            <a:endParaRPr lang="en-US" sz="1050" dirty="0"/>
+          </a:p>
+          <a:p>
+            <a:pPr indent="0" marL="0">
+              <a:buNone/>
+            </a:pPr>
+            <a:endParaRPr lang="en-US" sz="1050" dirty="0"/>
+          </a:p>
+          <a:p>
+            <a:pPr indent="0" marL="0">
+              <a:buNone/>
+            </a:pPr>
+            <a:r>
+              <a:rPr lang="en-US" sz="1050" dirty="0">
                 <a:solidFill>
                   <a:srgbClr val="334155"/>
                 </a:solidFill>
@@ -7734,7 +7734,7 @@
               </a:rPr>
               <a:t>• TRL 9 (Full Clinical Deployment): Production mainnet rollout across participating hospital consortiums and insurance validation nodes.</a:t>
             </a:r>
-            <a:endParaRPr lang="en-US" sz="1100" dirty="0"/>
+            <a:endParaRPr lang="en-US" sz="1050" dirty="0"/>
           </a:p>
         </p:txBody>
       </p:sp>
@@ -7778,8 +7778,8 @@
         </p:nvSpPr>
         <p:spPr>
           <a:xfrm>
-            <a:off x="548640" y="320040"/>
-            <a:ext cx="11091672" cy="27432"/>
+            <a:off x="603504" y="320040"/>
+            <a:ext cx="10972800" cy="27432"/>
           </a:xfrm>
           <a:prstGeom prst="rect">
             <a:avLst/>
@@ -7798,24 +7798,24 @@
         </p:nvSpPr>
         <p:spPr>
           <a:xfrm>
-            <a:off x="548640" y="384048"/>
-            <a:ext cx="7315200" cy="274320"/>
-          </a:xfrm>
-          <a:prstGeom prst="rect">
-            <a:avLst/>
-          </a:prstGeom>
-          <a:noFill/>
-          <a:ln/>
-        </p:spPr>
-        <p:txBody>
-          <a:bodyPr wrap="square" rtlCol="0" anchor="ctr"/>
-          <a:lstStyle/>
-          <a:p>
-            <a:pPr indent="0" marL="0">
-              <a:buNone/>
-            </a:pPr>
-            <a:r>
-              <a:rPr lang="en-US" sz="1000" b="1" spc="150" kern="0" dirty="0">
+            <a:off x="603504" y="384048"/>
+            <a:ext cx="7315200" cy="256032"/>
+          </a:xfrm>
+          <a:prstGeom prst="rect">
+            <a:avLst/>
+          </a:prstGeom>
+          <a:noFill/>
+          <a:ln/>
+        </p:spPr>
+        <p:txBody>
+          <a:bodyPr wrap="square" rtlCol="0" anchor="ctr"/>
+          <a:lstStyle/>
+          <a:p>
+            <a:pPr indent="0" marL="0">
+              <a:buNone/>
+            </a:pPr>
+            <a:r>
+              <a:rPr lang="en-US" sz="950" b="1" spc="150" kern="0" dirty="0">
                 <a:solidFill>
                   <a:srgbClr val="0369A1"/>
                 </a:solidFill>
@@ -7825,7 +7825,7 @@
               </a:rPr>
               <a:t>COMPETITIVE DIFFERENTIATORS &amp; HARD TECH</a:t>
             </a:r>
-            <a:endParaRPr lang="en-US" sz="1000" dirty="0"/>
+            <a:endParaRPr lang="en-US" sz="950" dirty="0"/>
           </a:p>
         </p:txBody>
       </p:sp>
@@ -7837,8 +7837,8 @@
         </p:nvSpPr>
         <p:spPr>
           <a:xfrm>
-            <a:off x="548640" y="685800"/>
-            <a:ext cx="11091672" cy="9144"/>
+            <a:off x="603504" y="658368"/>
+            <a:ext cx="10972800" cy="9144"/>
           </a:xfrm>
           <a:prstGeom prst="rect">
             <a:avLst/>
@@ -7857,8 +7857,8 @@
         </p:nvSpPr>
         <p:spPr>
           <a:xfrm>
-            <a:off x="548640" y="6355080"/>
-            <a:ext cx="11091672" cy="9144"/>
+            <a:off x="603504" y="6263640"/>
+            <a:ext cx="10972800" cy="9144"/>
           </a:xfrm>
           <a:prstGeom prst="rect">
             <a:avLst/>
@@ -7877,24 +7877,24 @@
         </p:nvSpPr>
         <p:spPr>
           <a:xfrm>
-            <a:off x="548640" y="6419088"/>
-            <a:ext cx="7315200" cy="274320"/>
-          </a:xfrm>
-          <a:prstGeom prst="rect">
-            <a:avLst/>
-          </a:prstGeom>
-          <a:noFill/>
-          <a:ln/>
-        </p:spPr>
-        <p:txBody>
-          <a:bodyPr wrap="square" rtlCol="0" anchor="ctr"/>
-          <a:lstStyle/>
-          <a:p>
-            <a:pPr indent="0" marL="0">
-              <a:buNone/>
-            </a:pPr>
-            <a:r>
-              <a:rPr lang="en-US" sz="950" dirty="0">
+            <a:off x="603504" y="6327648"/>
+            <a:ext cx="6858000" cy="274320"/>
+          </a:xfrm>
+          <a:prstGeom prst="rect">
+            <a:avLst/>
+          </a:prstGeom>
+          <a:noFill/>
+          <a:ln/>
+        </p:spPr>
+        <p:txBody>
+          <a:bodyPr wrap="square" rtlCol="0" anchor="ctr"/>
+          <a:lstStyle/>
+          <a:p>
+            <a:pPr indent="0" marL="0">
+              <a:buNone/>
+            </a:pPr>
+            <a:r>
+              <a:rPr lang="en-US" sz="900" dirty="0">
                 <a:solidFill>
                   <a:srgbClr val="64748B"/>
                 </a:solidFill>
@@ -7904,7 +7904,7 @@
               </a:rPr>
               <a:t>Ashish Anil Sikaria (23BCI0218) • Faculty Guide: Prof. SELVI M • SCOPE</a:t>
             </a:r>
-            <a:endParaRPr lang="en-US" sz="950" dirty="0"/>
+            <a:endParaRPr lang="en-US" sz="900" dirty="0"/>
           </a:p>
         </p:txBody>
       </p:sp>
@@ -7916,8 +7916,8 @@
         </p:nvSpPr>
         <p:spPr>
           <a:xfrm>
-            <a:off x="8686800" y="6419088"/>
-            <a:ext cx="2953512" cy="274320"/>
+            <a:off x="7772400" y="6327648"/>
+            <a:ext cx="3803904" cy="274320"/>
           </a:xfrm>
           <a:prstGeom prst="rect">
             <a:avLst/>
@@ -7933,7 +7933,7 @@
               <a:buNone/>
             </a:pPr>
             <a:r>
-              <a:rPr lang="en-US" sz="950" dirty="0">
+              <a:rPr lang="en-US" sz="900" dirty="0">
                 <a:solidFill>
                   <a:srgbClr val="64748B"/>
                 </a:solidFill>
@@ -7943,7 +7943,7 @@
               </a:rPr>
               <a:t>Fall Semester 2026-27</a:t>
             </a:r>
-            <a:endParaRPr lang="en-US" sz="950" dirty="0"/>
+            <a:endParaRPr lang="en-US" sz="900" dirty="0"/>
           </a:p>
         </p:txBody>
       </p:sp>
@@ -7955,24 +7955,24 @@
         </p:nvSpPr>
         <p:spPr>
           <a:xfrm>
-            <a:off x="548640" y="777240"/>
-            <a:ext cx="10972800" cy="457200"/>
-          </a:xfrm>
-          <a:prstGeom prst="rect">
-            <a:avLst/>
-          </a:prstGeom>
-          <a:noFill/>
-          <a:ln/>
-        </p:spPr>
-        <p:txBody>
-          <a:bodyPr wrap="square" rtlCol="0" anchor="ctr"/>
-          <a:lstStyle/>
-          <a:p>
-            <a:pPr indent="0" marL="0">
-              <a:buNone/>
-            </a:pPr>
-            <a:r>
-              <a:rPr lang="en-US" sz="2400" b="1" dirty="0">
+            <a:off x="603504" y="731520"/>
+            <a:ext cx="10972800" cy="411480"/>
+          </a:xfrm>
+          <a:prstGeom prst="rect">
+            <a:avLst/>
+          </a:prstGeom>
+          <a:noFill/>
+          <a:ln/>
+        </p:spPr>
+        <p:txBody>
+          <a:bodyPr wrap="square" rtlCol="0" anchor="ctr"/>
+          <a:lstStyle/>
+          <a:p>
+            <a:pPr indent="0" marL="0">
+              <a:buNone/>
+            </a:pPr>
+            <a:r>
+              <a:rPr lang="en-US" sz="2200" b="1" dirty="0">
                 <a:solidFill>
                   <a:srgbClr val="0F172A"/>
                 </a:solidFill>
@@ -7982,7 +7982,7 @@
               </a:rPr>
               <a:t>Next-Generation Protocol Innovations</a:t>
             </a:r>
-            <a:endParaRPr lang="en-US" sz="2400" dirty="0"/>
+            <a:endParaRPr lang="en-US" sz="2200" dirty="0"/>
           </a:p>
         </p:txBody>
       </p:sp>
@@ -7994,12 +7994,12 @@
         </p:nvSpPr>
         <p:spPr>
           <a:xfrm>
-            <a:off x="548640" y="1371600"/>
-            <a:ext cx="5440680" cy="2103120"/>
+            <a:off x="603504" y="1234440"/>
+            <a:ext cx="5349240" cy="2148840"/>
           </a:xfrm>
           <a:prstGeom prst="roundRect">
             <a:avLst>
-              <a:gd name="adj" fmla="val 5217"/>
+              <a:gd name="adj" fmla="val 4255"/>
             </a:avLst>
           </a:prstGeom>
           <a:solidFill>
@@ -8021,8 +8021,8 @@
         </p:nvSpPr>
         <p:spPr>
           <a:xfrm>
-            <a:off x="822960" y="1572768"/>
-            <a:ext cx="4892040" cy="365760"/>
+            <a:off x="832104" y="1417320"/>
+            <a:ext cx="4892040" cy="320040"/>
           </a:xfrm>
           <a:prstGeom prst="rect">
             <a:avLst/>
@@ -8060,24 +8060,24 @@
         </p:nvSpPr>
         <p:spPr>
           <a:xfrm>
-            <a:off x="822960" y="2011680"/>
-            <a:ext cx="4892040" cy="1280160"/>
-          </a:xfrm>
-          <a:prstGeom prst="rect">
-            <a:avLst/>
-          </a:prstGeom>
-          <a:noFill/>
-          <a:ln/>
-        </p:spPr>
-        <p:txBody>
-          <a:bodyPr wrap="square" rtlCol="0" anchor="ctr"/>
-          <a:lstStyle/>
-          <a:p>
-            <a:pPr indent="0" marL="0">
-              <a:buNone/>
-            </a:pPr>
-            <a:r>
-              <a:rPr lang="en-US" sz="1150" dirty="0">
+            <a:off x="832104" y="1828800"/>
+            <a:ext cx="4892040" cy="1371600"/>
+          </a:xfrm>
+          <a:prstGeom prst="rect">
+            <a:avLst/>
+          </a:prstGeom>
+          <a:noFill/>
+          <a:ln/>
+        </p:spPr>
+        <p:txBody>
+          <a:bodyPr wrap="square" rtlCol="0" anchor="ctr"/>
+          <a:lstStyle/>
+          <a:p>
+            <a:pPr indent="0" marL="0">
+              <a:buNone/>
+            </a:pPr>
+            <a:r>
+              <a:rPr lang="en-US" sz="1100" dirty="0">
                 <a:solidFill>
                   <a:srgbClr val="334155"/>
                 </a:solidFill>
@@ -8087,7 +8087,7 @@
               </a:rPr>
               <a:t>Solves the unconscious ER patient dilemma: Verified physicians trigger time-delayed cryptographic challenges or multi-guardian signatures backed by on-chain audit penalties.</a:t>
             </a:r>
-            <a:endParaRPr lang="en-US" sz="1150" dirty="0"/>
+            <a:endParaRPr lang="en-US" sz="1100" dirty="0"/>
           </a:p>
         </p:txBody>
       </p:sp>
@@ -8099,12 +8099,12 @@
         </p:nvSpPr>
         <p:spPr>
           <a:xfrm>
-            <a:off x="6172200" y="1371600"/>
-            <a:ext cx="5440680" cy="2103120"/>
+            <a:off x="6227064" y="1234440"/>
+            <a:ext cx="5349240" cy="2148840"/>
           </a:xfrm>
           <a:prstGeom prst="roundRect">
             <a:avLst>
-              <a:gd name="adj" fmla="val 5217"/>
+              <a:gd name="adj" fmla="val 4255"/>
             </a:avLst>
           </a:prstGeom>
           <a:solidFill>
@@ -8126,8 +8126,8 @@
         </p:nvSpPr>
         <p:spPr>
           <a:xfrm>
-            <a:off x="6446520" y="1572768"/>
-            <a:ext cx="4892040" cy="365760"/>
+            <a:off x="6455664" y="1417320"/>
+            <a:ext cx="4892040" cy="320040"/>
           </a:xfrm>
           <a:prstGeom prst="rect">
             <a:avLst/>
@@ -8165,24 +8165,24 @@
         </p:nvSpPr>
         <p:spPr>
           <a:xfrm>
-            <a:off x="6446520" y="2011680"/>
-            <a:ext cx="4892040" cy="1280160"/>
-          </a:xfrm>
-          <a:prstGeom prst="rect">
-            <a:avLst/>
-          </a:prstGeom>
-          <a:noFill/>
-          <a:ln/>
-        </p:spPr>
-        <p:txBody>
-          <a:bodyPr wrap="square" rtlCol="0" anchor="ctr"/>
-          <a:lstStyle/>
-          <a:p>
-            <a:pPr indent="0" marL="0">
-              <a:buNone/>
-            </a:pPr>
-            <a:r>
-              <a:rPr lang="en-US" sz="1150" dirty="0">
+            <a:off x="6455664" y="1828800"/>
+            <a:ext cx="4892040" cy="1371600"/>
+          </a:xfrm>
+          <a:prstGeom prst="rect">
+            <a:avLst/>
+          </a:prstGeom>
+          <a:noFill/>
+          <a:ln/>
+        </p:spPr>
+        <p:txBody>
+          <a:bodyPr wrap="square" rtlCol="0" anchor="ctr"/>
+          <a:lstStyle/>
+          <a:p>
+            <a:pPr indent="0" marL="0">
+              <a:buNone/>
+            </a:pPr>
+            <a:r>
+              <a:rPr lang="en-US" sz="1100" dirty="0">
                 <a:solidFill>
                   <a:srgbClr val="334155"/>
                 </a:solidFill>
@@ -8192,7 +8192,7 @@
               </a:rPr>
               <a:t>zk-SNARK circuits allow patients to prove clinical trial or insurance eligibility (e.g. HbA1c &lt; 6.5%, age &gt; 18) without disclosing raw medical files or identity.</a:t>
             </a:r>
-            <a:endParaRPr lang="en-US" sz="1150" dirty="0"/>
+            <a:endParaRPr lang="en-US" sz="1100" dirty="0"/>
           </a:p>
         </p:txBody>
       </p:sp>
@@ -8204,12 +8204,12 @@
         </p:nvSpPr>
         <p:spPr>
           <a:xfrm>
-            <a:off x="548640" y="3657600"/>
-            <a:ext cx="5440680" cy="2103120"/>
+            <a:off x="603504" y="3566160"/>
+            <a:ext cx="5349240" cy="2148840"/>
           </a:xfrm>
           <a:prstGeom prst="roundRect">
             <a:avLst>
-              <a:gd name="adj" fmla="val 5217"/>
+              <a:gd name="adj" fmla="val 4255"/>
             </a:avLst>
           </a:prstGeom>
           <a:solidFill>
@@ -8231,8 +8231,8 @@
         </p:nvSpPr>
         <p:spPr>
           <a:xfrm>
-            <a:off x="822960" y="3858768"/>
-            <a:ext cx="4892040" cy="365760"/>
+            <a:off x="832104" y="3749040"/>
+            <a:ext cx="4892040" cy="320040"/>
           </a:xfrm>
           <a:prstGeom prst="rect">
             <a:avLst/>
@@ -8270,24 +8270,24 @@
         </p:nvSpPr>
         <p:spPr>
           <a:xfrm>
-            <a:off x="822960" y="4297680"/>
-            <a:ext cx="4892040" cy="1280160"/>
-          </a:xfrm>
-          <a:prstGeom prst="rect">
-            <a:avLst/>
-          </a:prstGeom>
-          <a:noFill/>
-          <a:ln/>
-        </p:spPr>
-        <p:txBody>
-          <a:bodyPr wrap="square" rtlCol="0" anchor="ctr"/>
-          <a:lstStyle/>
-          <a:p>
-            <a:pPr indent="0" marL="0">
-              <a:buNone/>
-            </a:pPr>
-            <a:r>
-              <a:rPr lang="en-US" sz="1150" dirty="0">
+            <a:off x="832104" y="4160520"/>
+            <a:ext cx="4892040" cy="1371600"/>
+          </a:xfrm>
+          <a:prstGeom prst="rect">
+            <a:avLst/>
+          </a:prstGeom>
+          <a:noFill/>
+          <a:ln/>
+        </p:spPr>
+        <p:txBody>
+          <a:bodyPr wrap="square" rtlCol="0" anchor="ctr"/>
+          <a:lstStyle/>
+          <a:p>
+            <a:pPr indent="0" marL="0">
+              <a:buNone/>
+            </a:pPr>
+            <a:r>
+              <a:rPr lang="en-US" sz="1100" dirty="0">
                 <a:solidFill>
                   <a:srgbClr val="334155"/>
                 </a:solidFill>
@@ -8297,7 +8297,7 @@
               </a:rPr>
               <a:t>Replaces seed phrases and gas tokens with WebAuthn Passkeys (TouchID / FaceID), sponsored by hospital Paymaster relayers.</a:t>
             </a:r>
-            <a:endParaRPr lang="en-US" sz="1150" dirty="0"/>
+            <a:endParaRPr lang="en-US" sz="1100" dirty="0"/>
           </a:p>
         </p:txBody>
       </p:sp>
@@ -8309,12 +8309,12 @@
         </p:nvSpPr>
         <p:spPr>
           <a:xfrm>
-            <a:off x="6172200" y="3657600"/>
-            <a:ext cx="5440680" cy="2103120"/>
+            <a:off x="6227064" y="3566160"/>
+            <a:ext cx="5349240" cy="2148840"/>
           </a:xfrm>
           <a:prstGeom prst="roundRect">
             <a:avLst>
-              <a:gd name="adj" fmla="val 5217"/>
+              <a:gd name="adj" fmla="val 4255"/>
             </a:avLst>
           </a:prstGeom>
           <a:solidFill>
@@ -8336,8 +8336,8 @@
         </p:nvSpPr>
         <p:spPr>
           <a:xfrm>
-            <a:off x="6446520" y="3858768"/>
-            <a:ext cx="4892040" cy="365760"/>
+            <a:off x="6455664" y="3749040"/>
+            <a:ext cx="4892040" cy="320040"/>
           </a:xfrm>
           <a:prstGeom prst="rect">
             <a:avLst/>
@@ -8375,24 +8375,24 @@
         </p:nvSpPr>
         <p:spPr>
           <a:xfrm>
-            <a:off x="6446520" y="4297680"/>
-            <a:ext cx="4892040" cy="1280160"/>
-          </a:xfrm>
-          <a:prstGeom prst="rect">
-            <a:avLst/>
-          </a:prstGeom>
-          <a:noFill/>
-          <a:ln/>
-        </p:spPr>
-        <p:txBody>
-          <a:bodyPr wrap="square" rtlCol="0" anchor="ctr"/>
-          <a:lstStyle/>
-          <a:p>
-            <a:pPr indent="0" marL="0">
-              <a:buNone/>
-            </a:pPr>
-            <a:r>
-              <a:rPr lang="en-US" sz="1150" dirty="0">
+            <a:off x="6455664" y="4160520"/>
+            <a:ext cx="4892040" cy="1371600"/>
+          </a:xfrm>
+          <a:prstGeom prst="rect">
+            <a:avLst/>
+          </a:prstGeom>
+          <a:noFill/>
+          <a:ln/>
+        </p:spPr>
+        <p:txBody>
+          <a:bodyPr wrap="square" rtlCol="0" anchor="ctr"/>
+          <a:lstStyle/>
+          <a:p>
+            <a:pPr indent="0" marL="0">
+              <a:buNone/>
+            </a:pPr>
+            <a:r>
+              <a:rPr lang="en-US" sz="1100" dirty="0">
                 <a:solidFill>
                   <a:srgbClr val="334155"/>
                 </a:solidFill>
@@ -8402,7 +8402,7 @@
               </a:rPr>
               <a:t>Non-transferable medical credentials minted by state medical boards. If a license is suspended, on-chain decryption permissions are instantly revoked.</a:t>
             </a:r>
-            <a:endParaRPr lang="en-US" sz="1150" dirty="0"/>
+            <a:endParaRPr lang="en-US" sz="1100" dirty="0"/>
           </a:p>
         </p:txBody>
       </p:sp>
@@ -8446,8 +8446,8 @@
         </p:nvSpPr>
         <p:spPr>
           <a:xfrm>
-            <a:off x="548640" y="320040"/>
-            <a:ext cx="11091672" cy="27432"/>
+            <a:off x="603504" y="320040"/>
+            <a:ext cx="10972800" cy="27432"/>
           </a:xfrm>
           <a:prstGeom prst="rect">
             <a:avLst/>
@@ -8466,24 +8466,24 @@
         </p:nvSpPr>
         <p:spPr>
           <a:xfrm>
-            <a:off x="548640" y="384048"/>
-            <a:ext cx="7315200" cy="274320"/>
-          </a:xfrm>
-          <a:prstGeom prst="rect">
-            <a:avLst/>
-          </a:prstGeom>
-          <a:noFill/>
-          <a:ln/>
-        </p:spPr>
-        <p:txBody>
-          <a:bodyPr wrap="square" rtlCol="0" anchor="ctr"/>
-          <a:lstStyle/>
-          <a:p>
-            <a:pPr indent="0" marL="0">
-              <a:buNone/>
-            </a:pPr>
-            <a:r>
-              <a:rPr lang="en-US" sz="1000" b="1" spc="150" kern="0" dirty="0">
+            <a:off x="603504" y="384048"/>
+            <a:ext cx="7315200" cy="256032"/>
+          </a:xfrm>
+          <a:prstGeom prst="rect">
+            <a:avLst/>
+          </a:prstGeom>
+          <a:noFill/>
+          <a:ln/>
+        </p:spPr>
+        <p:txBody>
+          <a:bodyPr wrap="square" rtlCol="0" anchor="ctr"/>
+          <a:lstStyle/>
+          <a:p>
+            <a:pPr indent="0" marL="0">
+              <a:buNone/>
+            </a:pPr>
+            <a:r>
+              <a:rPr lang="en-US" sz="950" b="1" spc="150" kern="0" dirty="0">
                 <a:solidFill>
                   <a:srgbClr val="0369A1"/>
                 </a:solidFill>
@@ -8493,7 +8493,7 @@
               </a:rPr>
               <a:t>STAKEHOLDER VALUE PROPOSITION</a:t>
             </a:r>
-            <a:endParaRPr lang="en-US" sz="1000" dirty="0"/>
+            <a:endParaRPr lang="en-US" sz="950" dirty="0"/>
           </a:p>
         </p:txBody>
       </p:sp>
@@ -8505,8 +8505,8 @@
         </p:nvSpPr>
         <p:spPr>
           <a:xfrm>
-            <a:off x="548640" y="685800"/>
-            <a:ext cx="11091672" cy="9144"/>
+            <a:off x="603504" y="658368"/>
+            <a:ext cx="10972800" cy="9144"/>
           </a:xfrm>
           <a:prstGeom prst="rect">
             <a:avLst/>
@@ -8525,8 +8525,8 @@
         </p:nvSpPr>
         <p:spPr>
           <a:xfrm>
-            <a:off x="548640" y="6355080"/>
-            <a:ext cx="11091672" cy="9144"/>
+            <a:off x="603504" y="6263640"/>
+            <a:ext cx="10972800" cy="9144"/>
           </a:xfrm>
           <a:prstGeom prst="rect">
             <a:avLst/>
@@ -8545,24 +8545,24 @@
         </p:nvSpPr>
         <p:spPr>
           <a:xfrm>
-            <a:off x="548640" y="6419088"/>
-            <a:ext cx="7315200" cy="274320"/>
-          </a:xfrm>
-          <a:prstGeom prst="rect">
-            <a:avLst/>
-          </a:prstGeom>
-          <a:noFill/>
-          <a:ln/>
-        </p:spPr>
-        <p:txBody>
-          <a:bodyPr wrap="square" rtlCol="0" anchor="ctr"/>
-          <a:lstStyle/>
-          <a:p>
-            <a:pPr indent="0" marL="0">
-              <a:buNone/>
-            </a:pPr>
-            <a:r>
-              <a:rPr lang="en-US" sz="950" dirty="0">
+            <a:off x="603504" y="6327648"/>
+            <a:ext cx="6858000" cy="274320"/>
+          </a:xfrm>
+          <a:prstGeom prst="rect">
+            <a:avLst/>
+          </a:prstGeom>
+          <a:noFill/>
+          <a:ln/>
+        </p:spPr>
+        <p:txBody>
+          <a:bodyPr wrap="square" rtlCol="0" anchor="ctr"/>
+          <a:lstStyle/>
+          <a:p>
+            <a:pPr indent="0" marL="0">
+              <a:buNone/>
+            </a:pPr>
+            <a:r>
+              <a:rPr lang="en-US" sz="900" dirty="0">
                 <a:solidFill>
                   <a:srgbClr val="64748B"/>
                 </a:solidFill>
@@ -8572,7 +8572,7 @@
               </a:rPr>
               <a:t>Ashish Anil Sikaria (23BCI0218) • Faculty Guide: Prof. SELVI M • SCOPE</a:t>
             </a:r>
-            <a:endParaRPr lang="en-US" sz="950" dirty="0"/>
+            <a:endParaRPr lang="en-US" sz="900" dirty="0"/>
           </a:p>
         </p:txBody>
       </p:sp>
@@ -8584,8 +8584,8 @@
         </p:nvSpPr>
         <p:spPr>
           <a:xfrm>
-            <a:off x="8686800" y="6419088"/>
-            <a:ext cx="2953512" cy="274320"/>
+            <a:off x="7772400" y="6327648"/>
+            <a:ext cx="3803904" cy="274320"/>
           </a:xfrm>
           <a:prstGeom prst="rect">
             <a:avLst/>
@@ -8601,7 +8601,7 @@
               <a:buNone/>
             </a:pPr>
             <a:r>
-              <a:rPr lang="en-US" sz="950" dirty="0">
+              <a:rPr lang="en-US" sz="900" dirty="0">
                 <a:solidFill>
                   <a:srgbClr val="64748B"/>
                 </a:solidFill>
@@ -8611,7 +8611,7 @@
               </a:rPr>
               <a:t>Fall Semester 2026-27</a:t>
             </a:r>
-            <a:endParaRPr lang="en-US" sz="950" dirty="0"/>
+            <a:endParaRPr lang="en-US" sz="900" dirty="0"/>
           </a:p>
         </p:txBody>
       </p:sp>
@@ -8623,24 +8623,24 @@
         </p:nvSpPr>
         <p:spPr>
           <a:xfrm>
-            <a:off x="548640" y="777240"/>
-            <a:ext cx="10972800" cy="457200"/>
-          </a:xfrm>
-          <a:prstGeom prst="rect">
-            <a:avLst/>
-          </a:prstGeom>
-          <a:noFill/>
-          <a:ln/>
-        </p:spPr>
-        <p:txBody>
-          <a:bodyPr wrap="square" rtlCol="0" anchor="ctr"/>
-          <a:lstStyle/>
-          <a:p>
-            <a:pPr indent="0" marL="0">
-              <a:buNone/>
-            </a:pPr>
-            <a:r>
-              <a:rPr lang="en-US" sz="2400" b="1" dirty="0">
+            <a:off x="603504" y="731520"/>
+            <a:ext cx="10972800" cy="411480"/>
+          </a:xfrm>
+          <a:prstGeom prst="rect">
+            <a:avLst/>
+          </a:prstGeom>
+          <a:noFill/>
+          <a:ln/>
+        </p:spPr>
+        <p:txBody>
+          <a:bodyPr wrap="square" rtlCol="0" anchor="ctr"/>
+          <a:lstStyle/>
+          <a:p>
+            <a:pPr indent="0" marL="0">
+              <a:buNone/>
+            </a:pPr>
+            <a:r>
+              <a:rPr lang="en-US" sz="2200" b="1" dirty="0">
                 <a:solidFill>
                   <a:srgbClr val="0F172A"/>
                 </a:solidFill>
@@ -8650,7 +8650,7 @@
               </a:rPr>
               <a:t>Multi-Sided Healthcare Economic Impact</a:t>
             </a:r>
-            <a:endParaRPr lang="en-US" sz="2400" dirty="0"/>
+            <a:endParaRPr lang="en-US" sz="2200" dirty="0"/>
           </a:p>
         </p:txBody>
       </p:sp>
@@ -8662,12 +8662,12 @@
         </p:nvSpPr>
         <p:spPr>
           <a:xfrm>
-            <a:off x="548640" y="1371600"/>
-            <a:ext cx="2697480" cy="4663440"/>
+            <a:off x="603504" y="1234440"/>
+            <a:ext cx="2606040" cy="4754880"/>
           </a:xfrm>
           <a:prstGeom prst="roundRect">
             <a:avLst>
-              <a:gd name="adj" fmla="val 4068"/>
+              <a:gd name="adj" fmla="val 3509"/>
             </a:avLst>
           </a:prstGeom>
           <a:solidFill>
@@ -8689,8 +8689,8 @@
         </p:nvSpPr>
         <p:spPr>
           <a:xfrm>
-            <a:off x="731520" y="1737360"/>
-            <a:ext cx="2331720" cy="411480"/>
+            <a:off x="740664" y="1554480"/>
+            <a:ext cx="2331720" cy="365760"/>
           </a:xfrm>
           <a:prstGeom prst="rect">
             <a:avLst/>
@@ -8706,7 +8706,7 @@
               <a:buNone/>
             </a:pPr>
             <a:r>
-              <a:rPr lang="en-US" sz="1800" b="1" dirty="0">
+              <a:rPr lang="en-US" sz="1700" b="1" dirty="0">
                 <a:solidFill>
                   <a:srgbClr val="0F172A"/>
                 </a:solidFill>
@@ -8716,7 +8716,7 @@
               </a:rPr>
               <a:t>Patients</a:t>
             </a:r>
-            <a:endParaRPr lang="en-US" sz="1800" dirty="0"/>
+            <a:endParaRPr lang="en-US" sz="1700" dirty="0"/>
           </a:p>
         </p:txBody>
       </p:sp>
@@ -8728,8 +8728,8 @@
         </p:nvSpPr>
         <p:spPr>
           <a:xfrm>
-            <a:off x="731520" y="2377440"/>
-            <a:ext cx="2331720" cy="3291840"/>
+            <a:off x="740664" y="2103120"/>
+            <a:ext cx="2331720" cy="3474720"/>
           </a:xfrm>
           <a:prstGeom prst="rect">
             <a:avLst/>
@@ -8745,7 +8745,7 @@
               <a:buNone/>
             </a:pPr>
             <a:r>
-              <a:rPr lang="en-US" sz="1200" dirty="0">
+              <a:rPr lang="en-US" sz="1150" dirty="0">
                 <a:solidFill>
                   <a:srgbClr val="334155"/>
                 </a:solidFill>
@@ -8755,7 +8755,7 @@
               </a:rPr>
               <a:t>Complete data sovereignty, zero commercial exploitation, and seamless portable access across medical facilities.</a:t>
             </a:r>
-            <a:endParaRPr lang="en-US" sz="1200" dirty="0"/>
+            <a:endParaRPr lang="en-US" sz="1150" dirty="0"/>
           </a:p>
         </p:txBody>
       </p:sp>
@@ -8767,12 +8767,12 @@
         </p:nvSpPr>
         <p:spPr>
           <a:xfrm>
-            <a:off x="3364992" y="1371600"/>
-            <a:ext cx="2697480" cy="4663440"/>
+            <a:off x="3419856" y="1234440"/>
+            <a:ext cx="2606040" cy="4754880"/>
           </a:xfrm>
           <a:prstGeom prst="roundRect">
             <a:avLst>
-              <a:gd name="adj" fmla="val 4068"/>
+              <a:gd name="adj" fmla="val 3509"/>
             </a:avLst>
           </a:prstGeom>
           <a:solidFill>
@@ -8794,8 +8794,8 @@
         </p:nvSpPr>
         <p:spPr>
           <a:xfrm>
-            <a:off x="3547872" y="1737360"/>
-            <a:ext cx="2331720" cy="411480"/>
+            <a:off x="3557016" y="1554480"/>
+            <a:ext cx="2331720" cy="365760"/>
           </a:xfrm>
           <a:prstGeom prst="rect">
             <a:avLst/>
@@ -8811,7 +8811,7 @@
               <a:buNone/>
             </a:pPr>
             <a:r>
-              <a:rPr lang="en-US" sz="1800" b="1" dirty="0">
+              <a:rPr lang="en-US" sz="1700" b="1" dirty="0">
                 <a:solidFill>
                   <a:srgbClr val="0F172A"/>
                 </a:solidFill>
@@ -8821,7 +8821,7 @@
               </a:rPr>
               <a:t>Clinicians</a:t>
             </a:r>
-            <a:endParaRPr lang="en-US" sz="1800" dirty="0"/>
+            <a:endParaRPr lang="en-US" sz="1700" dirty="0"/>
           </a:p>
         </p:txBody>
       </p:sp>
@@ -8833,8 +8833,8 @@
         </p:nvSpPr>
         <p:spPr>
           <a:xfrm>
-            <a:off x="3547872" y="2377440"/>
-            <a:ext cx="2331720" cy="3291840"/>
+            <a:off x="3557016" y="2103120"/>
+            <a:ext cx="2331720" cy="3474720"/>
           </a:xfrm>
           <a:prstGeom prst="rect">
             <a:avLst/>
@@ -8850,7 +8850,7 @@
               <a:buNone/>
             </a:pPr>
             <a:r>
-              <a:rPr lang="en-US" sz="1200" dirty="0">
+              <a:rPr lang="en-US" sz="1150" dirty="0">
                 <a:solidFill>
                   <a:srgbClr val="334155"/>
                 </a:solidFill>
@@ -8860,7 +8860,7 @@
               </a:rPr>
               <a:t>Instant verified medical histories, zero diagnostic redundancy, and reduced malpractice liability.</a:t>
             </a:r>
-            <a:endParaRPr lang="en-US" sz="1200" dirty="0"/>
+            <a:endParaRPr lang="en-US" sz="1150" dirty="0"/>
           </a:p>
         </p:txBody>
       </p:sp>
@@ -8872,12 +8872,12 @@
         </p:nvSpPr>
         <p:spPr>
           <a:xfrm>
-            <a:off x="6181344" y="1371600"/>
-            <a:ext cx="2697480" cy="4663440"/>
+            <a:off x="6236208" y="1234440"/>
+            <a:ext cx="2606040" cy="4754880"/>
           </a:xfrm>
           <a:prstGeom prst="roundRect">
             <a:avLst>
-              <a:gd name="adj" fmla="val 4068"/>
+              <a:gd name="adj" fmla="val 3509"/>
             </a:avLst>
           </a:prstGeom>
           <a:solidFill>
@@ -8899,8 +8899,8 @@
         </p:nvSpPr>
         <p:spPr>
           <a:xfrm>
-            <a:off x="6364224" y="1737360"/>
-            <a:ext cx="2331720" cy="411480"/>
+            <a:off x="6373368" y="1554480"/>
+            <a:ext cx="2331720" cy="365760"/>
           </a:xfrm>
           <a:prstGeom prst="rect">
             <a:avLst/>
@@ -8916,7 +8916,7 @@
               <a:buNone/>
             </a:pPr>
             <a:r>
-              <a:rPr lang="en-US" sz="1800" b="1" dirty="0">
+              <a:rPr lang="en-US" sz="1700" b="1" dirty="0">
                 <a:solidFill>
                   <a:srgbClr val="0F172A"/>
                 </a:solidFill>
@@ -8926,7 +8926,7 @@
               </a:rPr>
               <a:t>Researchers</a:t>
             </a:r>
-            <a:endParaRPr lang="en-US" sz="1800" dirty="0"/>
+            <a:endParaRPr lang="en-US" sz="1700" dirty="0"/>
           </a:p>
         </p:txBody>
       </p:sp>
@@ -8938,8 +8938,8 @@
         </p:nvSpPr>
         <p:spPr>
           <a:xfrm>
-            <a:off x="6364224" y="2377440"/>
-            <a:ext cx="2331720" cy="3291840"/>
+            <a:off x="6373368" y="2103120"/>
+            <a:ext cx="2331720" cy="3474720"/>
           </a:xfrm>
           <a:prstGeom prst="rect">
             <a:avLst/>
@@ -8955,7 +8955,7 @@
               <a:buNone/>
             </a:pPr>
             <a:r>
-              <a:rPr lang="en-US" sz="1200" dirty="0">
+              <a:rPr lang="en-US" sz="1150" dirty="0">
                 <a:solidFill>
                   <a:srgbClr val="334155"/>
                 </a:solidFill>
@@ -8965,7 +8965,7 @@
               </a:rPr>
               <a:t>Opt-in Compute-to-Data research pools with automated cryptographic patient micro-rewards.</a:t>
             </a:r>
-            <a:endParaRPr lang="en-US" sz="1200" dirty="0"/>
+            <a:endParaRPr lang="en-US" sz="1150" dirty="0"/>
           </a:p>
         </p:txBody>
       </p:sp>
@@ -8977,12 +8977,12 @@
         </p:nvSpPr>
         <p:spPr>
           <a:xfrm>
-            <a:off x="8997696" y="1371600"/>
-            <a:ext cx="2697480" cy="4663440"/>
+            <a:off x="9052560" y="1234440"/>
+            <a:ext cx="2606040" cy="4754880"/>
           </a:xfrm>
           <a:prstGeom prst="roundRect">
             <a:avLst>
-              <a:gd name="adj" fmla="val 4068"/>
+              <a:gd name="adj" fmla="val 3509"/>
             </a:avLst>
           </a:prstGeom>
           <a:solidFill>
@@ -9004,8 +9004,8 @@
         </p:nvSpPr>
         <p:spPr>
           <a:xfrm>
-            <a:off x="9180576" y="1737360"/>
-            <a:ext cx="2331720" cy="411480"/>
+            <a:off x="9189720" y="1554480"/>
+            <a:ext cx="2331720" cy="365760"/>
           </a:xfrm>
           <a:prstGeom prst="rect">
             <a:avLst/>
@@ -9021,7 +9021,7 @@
               <a:buNone/>
             </a:pPr>
             <a:r>
-              <a:rPr lang="en-US" sz="1800" b="1" dirty="0">
+              <a:rPr lang="en-US" sz="1700" b="1" dirty="0">
                 <a:solidFill>
                   <a:srgbClr val="0F172A"/>
                 </a:solidFill>
@@ -9031,7 +9031,7 @@
               </a:rPr>
               <a:t>Insurers</a:t>
             </a:r>
-            <a:endParaRPr lang="en-US" sz="1800" dirty="0"/>
+            <a:endParaRPr lang="en-US" sz="1700" dirty="0"/>
           </a:p>
         </p:txBody>
       </p:sp>
@@ -9043,8 +9043,8 @@
         </p:nvSpPr>
         <p:spPr>
           <a:xfrm>
-            <a:off x="9180576" y="2377440"/>
-            <a:ext cx="2331720" cy="3291840"/>
+            <a:off x="9189720" y="2103120"/>
+            <a:ext cx="2331720" cy="3474720"/>
           </a:xfrm>
           <a:prstGeom prst="rect">
             <a:avLst/>
@@ -9060,7 +9060,7 @@
               <a:buNone/>
             </a:pPr>
             <a:r>
-              <a:rPr lang="en-US" sz="1200" dirty="0">
+              <a:rPr lang="en-US" sz="1150" dirty="0">
                 <a:solidFill>
                   <a:srgbClr val="334155"/>
                 </a:solidFill>
@@ -9070,7 +9070,7 @@
               </a:rPr>
               <a:t>Tamper-proof smart contract claims verification, eliminating fraudulent billing and overhead.</a:t>
             </a:r>
-            <a:endParaRPr lang="en-US" sz="1200" dirty="0"/>
+            <a:endParaRPr lang="en-US" sz="1150" dirty="0"/>
           </a:p>
         </p:txBody>
       </p:sp>
@@ -9114,8 +9114,8 @@
         </p:nvSpPr>
         <p:spPr>
           <a:xfrm>
-            <a:off x="548640" y="320040"/>
-            <a:ext cx="11091672" cy="27432"/>
+            <a:off x="603504" y="320040"/>
+            <a:ext cx="10972800" cy="27432"/>
           </a:xfrm>
           <a:prstGeom prst="rect">
             <a:avLst/>
@@ -9134,24 +9134,24 @@
         </p:nvSpPr>
         <p:spPr>
           <a:xfrm>
-            <a:off x="548640" y="384048"/>
-            <a:ext cx="7315200" cy="274320"/>
-          </a:xfrm>
-          <a:prstGeom prst="rect">
-            <a:avLst/>
-          </a:prstGeom>
-          <a:noFill/>
-          <a:ln/>
-        </p:spPr>
-        <p:txBody>
-          <a:bodyPr wrap="square" rtlCol="0" anchor="ctr"/>
-          <a:lstStyle/>
-          <a:p>
-            <a:pPr indent="0" marL="0">
-              <a:buNone/>
-            </a:pPr>
-            <a:r>
-              <a:rPr lang="en-US" sz="1000" b="1" spc="150" kern="0" dirty="0">
+            <a:off x="603504" y="384048"/>
+            <a:ext cx="7315200" cy="256032"/>
+          </a:xfrm>
+          <a:prstGeom prst="rect">
+            <a:avLst/>
+          </a:prstGeom>
+          <a:noFill/>
+          <a:ln/>
+        </p:spPr>
+        <p:txBody>
+          <a:bodyPr wrap="square" rtlCol="0" anchor="ctr"/>
+          <a:lstStyle/>
+          <a:p>
+            <a:pPr indent="0" marL="0">
+              <a:buNone/>
+            </a:pPr>
+            <a:r>
+              <a:rPr lang="en-US" sz="950" b="1" spc="150" kern="0" dirty="0">
                 <a:solidFill>
                   <a:srgbClr val="0369A1"/>
                 </a:solidFill>
@@ -9161,7 +9161,7 @@
               </a:rPr>
               <a:t>DEMONSTRATION &amp; DELIVERABLES</a:t>
             </a:r>
-            <a:endParaRPr lang="en-US" sz="1000" dirty="0"/>
+            <a:endParaRPr lang="en-US" sz="950" dirty="0"/>
           </a:p>
         </p:txBody>
       </p:sp>
@@ -9173,8 +9173,8 @@
         </p:nvSpPr>
         <p:spPr>
           <a:xfrm>
-            <a:off x="548640" y="685800"/>
-            <a:ext cx="11091672" cy="9144"/>
+            <a:off x="603504" y="658368"/>
+            <a:ext cx="10972800" cy="9144"/>
           </a:xfrm>
           <a:prstGeom prst="rect">
             <a:avLst/>
@@ -9193,8 +9193,8 @@
         </p:nvSpPr>
         <p:spPr>
           <a:xfrm>
-            <a:off x="548640" y="6355080"/>
-            <a:ext cx="11091672" cy="9144"/>
+            <a:off x="603504" y="6263640"/>
+            <a:ext cx="10972800" cy="9144"/>
           </a:xfrm>
           <a:prstGeom prst="rect">
             <a:avLst/>
@@ -9213,24 +9213,24 @@
         </p:nvSpPr>
         <p:spPr>
           <a:xfrm>
-            <a:off x="548640" y="6419088"/>
-            <a:ext cx="7315200" cy="274320"/>
-          </a:xfrm>
-          <a:prstGeom prst="rect">
-            <a:avLst/>
-          </a:prstGeom>
-          <a:noFill/>
-          <a:ln/>
-        </p:spPr>
-        <p:txBody>
-          <a:bodyPr wrap="square" rtlCol="0" anchor="ctr"/>
-          <a:lstStyle/>
-          <a:p>
-            <a:pPr indent="0" marL="0">
-              <a:buNone/>
-            </a:pPr>
-            <a:r>
-              <a:rPr lang="en-US" sz="950" dirty="0">
+            <a:off x="603504" y="6327648"/>
+            <a:ext cx="6858000" cy="274320"/>
+          </a:xfrm>
+          <a:prstGeom prst="rect">
+            <a:avLst/>
+          </a:prstGeom>
+          <a:noFill/>
+          <a:ln/>
+        </p:spPr>
+        <p:txBody>
+          <a:bodyPr wrap="square" rtlCol="0" anchor="ctr"/>
+          <a:lstStyle/>
+          <a:p>
+            <a:pPr indent="0" marL="0">
+              <a:buNone/>
+            </a:pPr>
+            <a:r>
+              <a:rPr lang="en-US" sz="900" dirty="0">
                 <a:solidFill>
                   <a:srgbClr val="64748B"/>
                 </a:solidFill>
@@ -9240,7 +9240,7 @@
               </a:rPr>
               <a:t>Ashish Anil Sikaria (23BCI0218) • Faculty Guide: Prof. SELVI M • SCOPE</a:t>
             </a:r>
-            <a:endParaRPr lang="en-US" sz="950" dirty="0"/>
+            <a:endParaRPr lang="en-US" sz="900" dirty="0"/>
           </a:p>
         </p:txBody>
       </p:sp>
@@ -9252,8 +9252,8 @@
         </p:nvSpPr>
         <p:spPr>
           <a:xfrm>
-            <a:off x="8686800" y="6419088"/>
-            <a:ext cx="2953512" cy="274320"/>
+            <a:off x="7772400" y="6327648"/>
+            <a:ext cx="3803904" cy="274320"/>
           </a:xfrm>
           <a:prstGeom prst="rect">
             <a:avLst/>
@@ -9269,7 +9269,7 @@
               <a:buNone/>
             </a:pPr>
             <a:r>
-              <a:rPr lang="en-US" sz="950" dirty="0">
+              <a:rPr lang="en-US" sz="900" dirty="0">
                 <a:solidFill>
                   <a:srgbClr val="64748B"/>
                 </a:solidFill>
@@ -9279,7 +9279,7 @@
               </a:rPr>
               <a:t>Fall Semester 2026-27</a:t>
             </a:r>
-            <a:endParaRPr lang="en-US" sz="950" dirty="0"/>
+            <a:endParaRPr lang="en-US" sz="900" dirty="0"/>
           </a:p>
         </p:txBody>
       </p:sp>
@@ -9291,24 +9291,24 @@
         </p:nvSpPr>
         <p:spPr>
           <a:xfrm>
-            <a:off x="548640" y="777240"/>
-            <a:ext cx="10972800" cy="457200"/>
-          </a:xfrm>
-          <a:prstGeom prst="rect">
-            <a:avLst/>
-          </a:prstGeom>
-          <a:noFill/>
-          <a:ln/>
-        </p:spPr>
-        <p:txBody>
-          <a:bodyPr wrap="square" rtlCol="0" anchor="ctr"/>
-          <a:lstStyle/>
-          <a:p>
-            <a:pPr indent="0" marL="0">
-              <a:buNone/>
-            </a:pPr>
-            <a:r>
-              <a:rPr lang="en-US" sz="2400" b="1" dirty="0">
+            <a:off x="603504" y="731520"/>
+            <a:ext cx="10972800" cy="411480"/>
+          </a:xfrm>
+          <a:prstGeom prst="rect">
+            <a:avLst/>
+          </a:prstGeom>
+          <a:noFill/>
+          <a:ln/>
+        </p:spPr>
+        <p:txBody>
+          <a:bodyPr wrap="square" rtlCol="0" anchor="ctr"/>
+          <a:lstStyle/>
+          <a:p>
+            <a:pPr indent="0" marL="0">
+              <a:buNone/>
+            </a:pPr>
+            <a:r>
+              <a:rPr lang="en-US" sz="2200" b="1" dirty="0">
                 <a:solidFill>
                   <a:srgbClr val="0F172A"/>
                 </a:solidFill>
@@ -9318,7 +9318,7 @@
               </a:rPr>
               <a:t>Prototype Demonstration &amp; System Modules</a:t>
             </a:r>
-            <a:endParaRPr lang="en-US" sz="2400" dirty="0"/>
+            <a:endParaRPr lang="en-US" sz="2200" dirty="0"/>
           </a:p>
         </p:txBody>
       </p:sp>
@@ -9330,12 +9330,12 @@
         </p:nvSpPr>
         <p:spPr>
           <a:xfrm>
-            <a:off x="548640" y="1371600"/>
-            <a:ext cx="5440680" cy="2103120"/>
+            <a:off x="603504" y="1234440"/>
+            <a:ext cx="5349240" cy="2148840"/>
           </a:xfrm>
           <a:prstGeom prst="roundRect">
             <a:avLst>
-              <a:gd name="adj" fmla="val 5217"/>
+              <a:gd name="adj" fmla="val 4255"/>
             </a:avLst>
           </a:prstGeom>
           <a:solidFill>
@@ -9357,24 +9357,24 @@
         </p:nvSpPr>
         <p:spPr>
           <a:xfrm>
-            <a:off x="822960" y="1572768"/>
-            <a:ext cx="4892040" cy="365760"/>
-          </a:xfrm>
-          <a:prstGeom prst="rect">
-            <a:avLst/>
-          </a:prstGeom>
-          <a:noFill/>
-          <a:ln/>
-        </p:spPr>
-        <p:txBody>
-          <a:bodyPr wrap="square" rtlCol="0" anchor="ctr"/>
-          <a:lstStyle/>
-          <a:p>
-            <a:pPr indent="0" marL="0">
-              <a:buNone/>
-            </a:pPr>
-            <a:r>
-              <a:rPr lang="en-US" sz="1600" b="1" dirty="0">
+            <a:off x="832104" y="1417320"/>
+            <a:ext cx="4892040" cy="320040"/>
+          </a:xfrm>
+          <a:prstGeom prst="rect">
+            <a:avLst/>
+          </a:prstGeom>
+          <a:noFill/>
+          <a:ln/>
+        </p:spPr>
+        <p:txBody>
+          <a:bodyPr wrap="square" rtlCol="0" anchor="ctr"/>
+          <a:lstStyle/>
+          <a:p>
+            <a:pPr indent="0" marL="0">
+              <a:buNone/>
+            </a:pPr>
+            <a:r>
+              <a:rPr lang="en-US" sz="1500" b="1" dirty="0">
                 <a:solidFill>
                   <a:srgbClr val="0F172A"/>
                 </a:solidFill>
@@ -9384,7 +9384,7 @@
               </a:rPr>
               <a:t>Patient Health Vault</a:t>
             </a:r>
-            <a:endParaRPr lang="en-US" sz="1600" dirty="0"/>
+            <a:endParaRPr lang="en-US" sz="1500" dirty="0"/>
           </a:p>
         </p:txBody>
       </p:sp>
@@ -9396,24 +9396,24 @@
         </p:nvSpPr>
         <p:spPr>
           <a:xfrm>
-            <a:off x="822960" y="2011680"/>
-            <a:ext cx="4892040" cy="1280160"/>
-          </a:xfrm>
-          <a:prstGeom prst="rect">
-            <a:avLst/>
-          </a:prstGeom>
-          <a:noFill/>
-          <a:ln/>
-        </p:spPr>
-        <p:txBody>
-          <a:bodyPr wrap="square" rtlCol="0" anchor="ctr"/>
-          <a:lstStyle/>
-          <a:p>
-            <a:pPr indent="0" marL="0">
-              <a:buNone/>
-            </a:pPr>
-            <a:r>
-              <a:rPr lang="en-US" sz="1200" dirty="0">
+            <a:off x="832104" y="1828800"/>
+            <a:ext cx="4892040" cy="1371600"/>
+          </a:xfrm>
+          <a:prstGeom prst="rect">
+            <a:avLst/>
+          </a:prstGeom>
+          <a:noFill/>
+          <a:ln/>
+        </p:spPr>
+        <p:txBody>
+          <a:bodyPr wrap="square" rtlCol="0" anchor="ctr"/>
+          <a:lstStyle/>
+          <a:p>
+            <a:pPr indent="0" marL="0">
+              <a:buNone/>
+            </a:pPr>
+            <a:r>
+              <a:rPr lang="en-US" sz="1150" dirty="0">
                 <a:solidFill>
                   <a:srgbClr val="334155"/>
                 </a:solidFill>
@@ -9423,7 +9423,7 @@
               </a:rPr>
               <a:t>Client-side AES-256 file encryption, IPFS pinning via Pinata, and toggleable doctor access control matrix.</a:t>
             </a:r>
-            <a:endParaRPr lang="en-US" sz="1200" dirty="0"/>
+            <a:endParaRPr lang="en-US" sz="1150" dirty="0"/>
           </a:p>
         </p:txBody>
       </p:sp>
@@ -9435,12 +9435,12 @@
         </p:nvSpPr>
         <p:spPr>
           <a:xfrm>
-            <a:off x="6172200" y="1371600"/>
-            <a:ext cx="5440680" cy="2103120"/>
+            <a:off x="6227064" y="1234440"/>
+            <a:ext cx="5349240" cy="2148840"/>
           </a:xfrm>
           <a:prstGeom prst="roundRect">
             <a:avLst>
-              <a:gd name="adj" fmla="val 5217"/>
+              <a:gd name="adj" fmla="val 4255"/>
             </a:avLst>
           </a:prstGeom>
           <a:solidFill>
@@ -9462,24 +9462,24 @@
         </p:nvSpPr>
         <p:spPr>
           <a:xfrm>
-            <a:off x="6446520" y="1572768"/>
-            <a:ext cx="4892040" cy="365760"/>
-          </a:xfrm>
-          <a:prstGeom prst="rect">
-            <a:avLst/>
-          </a:prstGeom>
-          <a:noFill/>
-          <a:ln/>
-        </p:spPr>
-        <p:txBody>
-          <a:bodyPr wrap="square" rtlCol="0" anchor="ctr"/>
-          <a:lstStyle/>
-          <a:p>
-            <a:pPr indent="0" marL="0">
-              <a:buNone/>
-            </a:pPr>
-            <a:r>
-              <a:rPr lang="en-US" sz="1600" b="1" dirty="0">
+            <a:off x="6455664" y="1417320"/>
+            <a:ext cx="4892040" cy="320040"/>
+          </a:xfrm>
+          <a:prstGeom prst="rect">
+            <a:avLst/>
+          </a:prstGeom>
+          <a:noFill/>
+          <a:ln/>
+        </p:spPr>
+        <p:txBody>
+          <a:bodyPr wrap="square" rtlCol="0" anchor="ctr"/>
+          <a:lstStyle/>
+          <a:p>
+            <a:pPr indent="0" marL="0">
+              <a:buNone/>
+            </a:pPr>
+            <a:r>
+              <a:rPr lang="en-US" sz="1500" b="1" dirty="0">
                 <a:solidFill>
                   <a:srgbClr val="0F172A"/>
                 </a:solidFill>
@@ -9489,7 +9489,7 @@
               </a:rPr>
               <a:t>Practitioner Portal</a:t>
             </a:r>
-            <a:endParaRPr lang="en-US" sz="1600" dirty="0"/>
+            <a:endParaRPr lang="en-US" sz="1500" dirty="0"/>
           </a:p>
         </p:txBody>
       </p:sp>
@@ -9501,24 +9501,24 @@
         </p:nvSpPr>
         <p:spPr>
           <a:xfrm>
-            <a:off x="6446520" y="2011680"/>
-            <a:ext cx="4892040" cy="1280160"/>
-          </a:xfrm>
-          <a:prstGeom prst="rect">
-            <a:avLst/>
-          </a:prstGeom>
-          <a:noFill/>
-          <a:ln/>
-        </p:spPr>
-        <p:txBody>
-          <a:bodyPr wrap="square" rtlCol="0" anchor="ctr"/>
-          <a:lstStyle/>
-          <a:p>
-            <a:pPr indent="0" marL="0">
-              <a:buNone/>
-            </a:pPr>
-            <a:r>
-              <a:rPr lang="en-US" sz="1200" dirty="0">
+            <a:off x="6455664" y="1828800"/>
+            <a:ext cx="4892040" cy="1371600"/>
+          </a:xfrm>
+          <a:prstGeom prst="rect">
+            <a:avLst/>
+          </a:prstGeom>
+          <a:noFill/>
+          <a:ln/>
+        </p:spPr>
+        <p:txBody>
+          <a:bodyPr wrap="square" rtlCol="0" anchor="ctr"/>
+          <a:lstStyle/>
+          <a:p>
+            <a:pPr indent="0" marL="0">
+              <a:buNone/>
+            </a:pPr>
+            <a:r>
+              <a:rPr lang="en-US" sz="1150" dirty="0">
                 <a:solidFill>
                   <a:srgbClr val="334155"/>
                 </a:solidFill>
@@ -9528,7 +9528,7 @@
               </a:rPr>
               <a:t>Authorized patient EHR lookup, verified clinical diagnostic report uploads, and digital prescription issuance.</a:t>
             </a:r>
-            <a:endParaRPr lang="en-US" sz="1200" dirty="0"/>
+            <a:endParaRPr lang="en-US" sz="1150" dirty="0"/>
           </a:p>
         </p:txBody>
       </p:sp>
@@ -9540,12 +9540,12 @@
         </p:nvSpPr>
         <p:spPr>
           <a:xfrm>
-            <a:off x="548640" y="3657600"/>
-            <a:ext cx="5440680" cy="2103120"/>
+            <a:off x="603504" y="3566160"/>
+            <a:ext cx="5349240" cy="2148840"/>
           </a:xfrm>
           <a:prstGeom prst="roundRect">
             <a:avLst>
-              <a:gd name="adj" fmla="val 5217"/>
+              <a:gd name="adj" fmla="val 4255"/>
             </a:avLst>
           </a:prstGeom>
           <a:solidFill>
@@ -9567,24 +9567,24 @@
         </p:nvSpPr>
         <p:spPr>
           <a:xfrm>
-            <a:off x="822960" y="3858768"/>
-            <a:ext cx="4892040" cy="365760"/>
-          </a:xfrm>
-          <a:prstGeom prst="rect">
-            <a:avLst/>
-          </a:prstGeom>
-          <a:noFill/>
-          <a:ln/>
-        </p:spPr>
-        <p:txBody>
-          <a:bodyPr wrap="square" rtlCol="0" anchor="ctr"/>
-          <a:lstStyle/>
-          <a:p>
-            <a:pPr indent="0" marL="0">
-              <a:buNone/>
-            </a:pPr>
-            <a:r>
-              <a:rPr lang="en-US" sz="1600" b="1" dirty="0">
+            <a:off x="832104" y="3749040"/>
+            <a:ext cx="4892040" cy="320040"/>
+          </a:xfrm>
+          <a:prstGeom prst="rect">
+            <a:avLst/>
+          </a:prstGeom>
+          <a:noFill/>
+          <a:ln/>
+        </p:spPr>
+        <p:txBody>
+          <a:bodyPr wrap="square" rtlCol="0" anchor="ctr"/>
+          <a:lstStyle/>
+          <a:p>
+            <a:pPr indent="0" marL="0">
+              <a:buNone/>
+            </a:pPr>
+            <a:r>
+              <a:rPr lang="en-US" sz="1500" b="1" dirty="0">
                 <a:solidFill>
                   <a:srgbClr val="0F172A"/>
                 </a:solidFill>
@@ -9594,7 +9594,7 @@
               </a:rPr>
               <a:t>Hospital Governance</a:t>
             </a:r>
-            <a:endParaRPr lang="en-US" sz="1600" dirty="0"/>
+            <a:endParaRPr lang="en-US" sz="1500" dirty="0"/>
           </a:p>
         </p:txBody>
       </p:sp>
@@ -9606,24 +9606,24 @@
         </p:nvSpPr>
         <p:spPr>
           <a:xfrm>
-            <a:off x="822960" y="4297680"/>
-            <a:ext cx="4892040" cy="1280160"/>
-          </a:xfrm>
-          <a:prstGeom prst="rect">
-            <a:avLst/>
-          </a:prstGeom>
-          <a:noFill/>
-          <a:ln/>
-        </p:spPr>
-        <p:txBody>
-          <a:bodyPr wrap="square" rtlCol="0" anchor="ctr"/>
-          <a:lstStyle/>
-          <a:p>
-            <a:pPr indent="0" marL="0">
-              <a:buNone/>
-            </a:pPr>
-            <a:r>
-              <a:rPr lang="en-US" sz="1200" dirty="0">
+            <a:off x="832104" y="4160520"/>
+            <a:ext cx="4892040" cy="1371600"/>
+          </a:xfrm>
+          <a:prstGeom prst="rect">
+            <a:avLst/>
+          </a:prstGeom>
+          <a:noFill/>
+          <a:ln/>
+        </p:spPr>
+        <p:txBody>
+          <a:bodyPr wrap="square" rtlCol="0" anchor="ctr"/>
+          <a:lstStyle/>
+          <a:p>
+            <a:pPr indent="0" marL="0">
+              <a:buNone/>
+            </a:pPr>
+            <a:r>
+              <a:rPr lang="en-US" sz="1150" dirty="0">
                 <a:solidFill>
                   <a:srgbClr val="334155"/>
                 </a:solidFill>
@@ -9633,7 +9633,7 @@
               </a:rPr>
               <a:t>Practitioner license verification, smart contract telemetry, and HIPAA audit trail log exports.</a:t>
             </a:r>
-            <a:endParaRPr lang="en-US" sz="1200" dirty="0"/>
+            <a:endParaRPr lang="en-US" sz="1150" dirty="0"/>
           </a:p>
         </p:txBody>
       </p:sp>
@@ -9645,12 +9645,12 @@
         </p:nvSpPr>
         <p:spPr>
           <a:xfrm>
-            <a:off x="6172200" y="3657600"/>
-            <a:ext cx="5440680" cy="2103120"/>
+            <a:off x="6227064" y="3566160"/>
+            <a:ext cx="5349240" cy="2148840"/>
           </a:xfrm>
           <a:prstGeom prst="roundRect">
             <a:avLst>
-              <a:gd name="adj" fmla="val 5217"/>
+              <a:gd name="adj" fmla="val 4255"/>
             </a:avLst>
           </a:prstGeom>
           <a:solidFill>
@@ -9672,24 +9672,24 @@
         </p:nvSpPr>
         <p:spPr>
           <a:xfrm>
-            <a:off x="6446520" y="3858768"/>
-            <a:ext cx="4892040" cy="365760"/>
-          </a:xfrm>
-          <a:prstGeom prst="rect">
-            <a:avLst/>
-          </a:prstGeom>
-          <a:noFill/>
-          <a:ln/>
-        </p:spPr>
-        <p:txBody>
-          <a:bodyPr wrap="square" rtlCol="0" anchor="ctr"/>
-          <a:lstStyle/>
-          <a:p>
-            <a:pPr indent="0" marL="0">
-              <a:buNone/>
-            </a:pPr>
-            <a:r>
-              <a:rPr lang="en-US" sz="1600" b="1" dirty="0">
+            <a:off x="6455664" y="3749040"/>
+            <a:ext cx="4892040" cy="320040"/>
+          </a:xfrm>
+          <a:prstGeom prst="rect">
+            <a:avLst/>
+          </a:prstGeom>
+          <a:noFill/>
+          <a:ln/>
+        </p:spPr>
+        <p:txBody>
+          <a:bodyPr wrap="square" rtlCol="0" anchor="ctr"/>
+          <a:lstStyle/>
+          <a:p>
+            <a:pPr indent="0" marL="0">
+              <a:buNone/>
+            </a:pPr>
+            <a:r>
+              <a:rPr lang="en-US" sz="1500" b="1" dirty="0">
                 <a:solidFill>
                   <a:srgbClr val="0F172A"/>
                 </a:solidFill>
@@ -9699,7 +9699,7 @@
               </a:rPr>
               <a:t>Web3 Wallet Layer</a:t>
             </a:r>
-            <a:endParaRPr lang="en-US" sz="1600" dirty="0"/>
+            <a:endParaRPr lang="en-US" sz="1500" dirty="0"/>
           </a:p>
         </p:txBody>
       </p:sp>
@@ -9711,24 +9711,24 @@
         </p:nvSpPr>
         <p:spPr>
           <a:xfrm>
-            <a:off x="6446520" y="4297680"/>
-            <a:ext cx="4892040" cy="1280160"/>
-          </a:xfrm>
-          <a:prstGeom prst="rect">
-            <a:avLst/>
-          </a:prstGeom>
-          <a:noFill/>
-          <a:ln/>
-        </p:spPr>
-        <p:txBody>
-          <a:bodyPr wrap="square" rtlCol="0" anchor="ctr"/>
-          <a:lstStyle/>
-          <a:p>
-            <a:pPr indent="0" marL="0">
-              <a:buNone/>
-            </a:pPr>
-            <a:r>
-              <a:rPr lang="en-US" sz="1200" dirty="0">
+            <a:off x="6455664" y="4160520"/>
+            <a:ext cx="4892040" cy="1371600"/>
+          </a:xfrm>
+          <a:prstGeom prst="rect">
+            <a:avLst/>
+          </a:prstGeom>
+          <a:noFill/>
+          <a:ln/>
+        </p:spPr>
+        <p:txBody>
+          <a:bodyPr wrap="square" rtlCol="0" anchor="ctr"/>
+          <a:lstStyle/>
+          <a:p>
+            <a:pPr indent="0" marL="0">
+              <a:buNone/>
+            </a:pPr>
+            <a:r>
+              <a:rPr lang="en-US" sz="1150" dirty="0">
                 <a:solidFill>
                   <a:srgbClr val="334155"/>
                 </a:solidFill>
@@ -9738,7 +9738,7 @@
               </a:rPr>
               <a:t>Direct MetaMask provider integration alongside off-chain fallback simulation modes.</a:t>
             </a:r>
-            <a:endParaRPr lang="en-US" sz="1200" dirty="0"/>
+            <a:endParaRPr lang="en-US" sz="1150" dirty="0"/>
           </a:p>
         </p:txBody>
       </p:sp>

--- a/docs/presentation/CareChain_Presentation.pptx
+++ b/docs/presentation/CareChain_Presentation.pptx
@@ -3112,7 +3112,7 @@
             <a:avLst/>
           </a:prstGeom>
           <a:solidFill>
-            <a:srgbClr val="F8FAFC"/>
+            <a:srgbClr val="FFFFFF"/>
           </a:solidFill>
           <a:ln>
             <a:noFill/>
@@ -3142,20 +3142,180 @@
       </p:sp>
       <p:sp>
         <p:nvSpPr>
-          <p:cNvPr id="3" name="Rounded Rectangle 2"/>
+          <p:cNvPr id="3" name="Rectangle 2"/>
           <p:cNvSpPr/>
           <p:nvPr/>
         </p:nvSpPr>
         <p:spPr>
           <a:xfrm>
-            <a:off x="603504" y="457200"/>
-            <a:ext cx="10972800" cy="5852160"/>
+            <a:off x="0" y="0"/>
+            <a:ext cx="365760" cy="6858000"/>
+          </a:xfrm>
+          <a:prstGeom prst="rect">
+            <a:avLst/>
+          </a:prstGeom>
+          <a:solidFill>
+            <a:srgbClr val="0284C7"/>
+          </a:solidFill>
+          <a:ln>
+            <a:noFill/>
+          </a:ln>
+        </p:spPr>
+        <p:style>
+          <a:lnRef idx="1">
+            <a:schemeClr val="accent1"/>
+          </a:lnRef>
+          <a:fillRef idx="3">
+            <a:schemeClr val="accent1"/>
+          </a:fillRef>
+          <a:effectRef idx="2">
+            <a:schemeClr val="accent1"/>
+          </a:effectRef>
+          <a:fontRef idx="minor">
+            <a:schemeClr val="lt1"/>
+          </a:fontRef>
+        </p:style>
+        <p:txBody>
+          <a:bodyPr rtlCol="0" anchor="ctr"/>
+          <a:lstStyle/>
+          <a:p>
+            <a:pPr algn="ctr"/>
+          </a:p>
+        </p:txBody>
+      </p:sp>
+      <p:sp>
+        <p:nvSpPr>
+          <p:cNvPr id="4" name="Rounded Rectangle 3"/>
+          <p:cNvSpPr/>
+          <p:nvPr/>
+        </p:nvSpPr>
+        <p:spPr>
+          <a:xfrm>
+            <a:off x="1097280" y="731520"/>
+            <a:ext cx="5303520" cy="347472"/>
           </a:xfrm>
           <a:prstGeom prst="roundRect">
             <a:avLst/>
           </a:prstGeom>
           <a:solidFill>
-            <a:srgbClr val="FFFFFF"/>
+            <a:srgbClr val="F0F9FF"/>
+          </a:solidFill>
+          <a:ln w="12700">
+            <a:solidFill>
+              <a:srgbClr val="BAE6FD"/>
+            </a:solidFill>
+          </a:ln>
+        </p:spPr>
+        <p:style>
+          <a:lnRef idx="1">
+            <a:schemeClr val="accent1"/>
+          </a:lnRef>
+          <a:fillRef idx="3">
+            <a:schemeClr val="accent1"/>
+          </a:fillRef>
+          <a:effectRef idx="2">
+            <a:schemeClr val="accent1"/>
+          </a:effectRef>
+          <a:fontRef idx="minor">
+            <a:schemeClr val="lt1"/>
+          </a:fontRef>
+        </p:style>
+        <p:txBody>
+          <a:bodyPr rtlCol="0" anchor="ctr"/>
+          <a:lstStyle/>
+          <a:p>
+            <a:pPr algn="ctr">
+              <a:defRPr sz="1000" b="1">
+                <a:solidFill>
+                  <a:srgbClr val="0369A1"/>
+                </a:solidFill>
+                <a:latin typeface="Calibri"/>
+              </a:defRPr>
+            </a:pPr>
+            <a:r>
+              <a:t>FALL SEMESTER 2026-27  •  BCSE497J - PROJECT - I</a:t>
+            </a:r>
+          </a:p>
+        </p:txBody>
+      </p:sp>
+      <p:sp>
+        <p:nvSpPr>
+          <p:cNvPr id="5" name="TextBox 4"/>
+          <p:cNvSpPr txBox="1"/>
+          <p:nvPr/>
+        </p:nvSpPr>
+        <p:spPr>
+          <a:xfrm>
+            <a:off x="1097280" y="1234440"/>
+            <a:ext cx="10058400" cy="1645920"/>
+          </a:xfrm>
+          <a:prstGeom prst="rect">
+            <a:avLst/>
+          </a:prstGeom>
+          <a:noFill/>
+        </p:spPr>
+        <p:txBody>
+          <a:bodyPr wrap="square">
+            <a:spAutoFit/>
+          </a:bodyPr>
+          <a:lstStyle/>
+          <a:p>
+            <a:pPr>
+              <a:defRPr sz="4600" b="1">
+                <a:solidFill>
+                  <a:srgbClr val="0F172A"/>
+                </a:solidFill>
+                <a:latin typeface="Calibri"/>
+              </a:defRPr>
+            </a:pPr>
+            <a:r>
+              <a:t>CareChain</a:t>
+            </a:r>
+          </a:p>
+          <a:p>
+            <a:pPr>
+              <a:defRPr sz="1800" b="1">
+                <a:solidFill>
+                  <a:srgbClr val="0284C7"/>
+                </a:solidFill>
+                <a:latin typeface="Calibri"/>
+              </a:defRPr>
+            </a:pPr>
+            <a:r>
+              <a:t>Decentralized, Patient-Centric Electronic Health Record Protocol</a:t>
+            </a:r>
+          </a:p>
+          <a:p>
+            <a:pPr>
+              <a:defRPr sz="1200">
+                <a:solidFill>
+                  <a:srgbClr val="64748B"/>
+                </a:solidFill>
+                <a:latin typeface="Calibri"/>
+              </a:defRPr>
+            </a:pPr>
+            <a:r>
+              <a:t>Empowering patient data sovereignty through Ethereum Smart Contracts, AES-256 Client-Side Encryption, and Decentralized IPFS Storage.</a:t>
+            </a:r>
+          </a:p>
+        </p:txBody>
+      </p:sp>
+      <p:sp>
+        <p:nvSpPr>
+          <p:cNvPr id="6" name="Rounded Rectangle 5"/>
+          <p:cNvSpPr/>
+          <p:nvPr/>
+        </p:nvSpPr>
+        <p:spPr>
+          <a:xfrm>
+            <a:off x="1097280" y="3337560"/>
+            <a:ext cx="4754880" cy="2468880"/>
+          </a:xfrm>
+          <a:prstGeom prst="roundRect">
+            <a:avLst/>
+          </a:prstGeom>
+          <a:solidFill>
+            <a:srgbClr val="F8FAFC"/>
           </a:solidFill>
           <a:ln w="19050">
             <a:solidFill>
@@ -3178,23 +3338,67 @@
           </a:fontRef>
         </p:style>
         <p:txBody>
-          <a:bodyPr rtlCol="0" anchor="ctr"/>
-          <a:lstStyle/>
-          <a:p>
-            <a:pPr algn="ctr"/>
-          </a:p>
-        </p:txBody>
-      </p:sp>
-      <p:sp>
-        <p:nvSpPr>
-          <p:cNvPr id="4" name="Rounded Rectangle 3"/>
+          <a:bodyPr rtlCol="0" anchor="ctr" wrap="square"/>
+          <a:lstStyle/>
+          <a:p>
+            <a:pPr algn="ctr">
+              <a:defRPr sz="950" b="1">
+                <a:solidFill>
+                  <a:srgbClr val="0369A1"/>
+                </a:solidFill>
+                <a:latin typeface="Calibri"/>
+              </a:defRPr>
+            </a:pPr>
+            <a:r>
+              <a:t>SUBMITTED BY</a:t>
+            </a:r>
+          </a:p>
+          <a:p>
+            <a:pPr>
+              <a:defRPr sz="1900" b="1">
+                <a:solidFill>
+                  <a:srgbClr val="0F172A"/>
+                </a:solidFill>
+                <a:latin typeface="Calibri"/>
+              </a:defRPr>
+            </a:pPr>
+            <a:r>
+              <a:t>Ashish Anil Sikaria</a:t>
+            </a:r>
+          </a:p>
+          <a:p>
+            <a:pPr>
+              <a:defRPr sz="1100">
+                <a:solidFill>
+                  <a:srgbClr val="334155"/>
+                </a:solidFill>
+                <a:latin typeface="Calibri"/>
+              </a:defRPr>
+            </a:pPr>
+            <a:r>
+              <a:t>Register Number: 23BCI0218</a:t>
+            </a:r>
+            <a:br/>
+            <a:r>
+              <a:t>Programme: B.Tech Computer Science &amp; Engineering</a:t>
+            </a:r>
+            <a:br/>
+            <a:r>
+              <a:t>School: SCOPE (School of Computer Science &amp; Engineering)</a:t>
+            </a:r>
+          </a:p>
+        </p:txBody>
+      </p:sp>
+      <p:sp>
+        <p:nvSpPr>
+          <p:cNvPr id="7" name="Rounded Rectangle 6"/>
           <p:cNvSpPr/>
           <p:nvPr/>
         </p:nvSpPr>
         <p:spPr>
           <a:xfrm>
-            <a:off x="3346704" y="685800"/>
-            <a:ext cx="5486400" cy="320040"/>
+            <a:off x="6217920" y="3337560"/>
+            <a:ext cx="4754880" cy="2468880"/>
           </a:xfrm>
           <a:prstGeom prst="roundRect">
             <a:avLst/>
@@ -3202,9 +3406,9 @@
           <a:solidFill>
             <a:srgbClr val="F0F9FF"/>
           </a:solidFill>
-          <a:ln w="12700">
+          <a:ln w="19050">
             <a:solidFill>
-              <a:srgbClr val="0284C7"/>
+              <a:srgbClr val="BAE6FD"/>
             </a:solidFill>
           </a:ln>
         </p:spPr>
@@ -3223,11 +3427,11 @@
           </a:fontRef>
         </p:style>
         <p:txBody>
-          <a:bodyPr rtlCol="0" anchor="ctr"/>
+          <a:bodyPr rtlCol="0" anchor="ctr" wrap="square"/>
           <a:lstStyle/>
           <a:p>
             <a:pPr algn="ctr">
-              <a:defRPr sz="1000" b="1">
+              <a:defRPr sz="950" b="1">
                 <a:solidFill>
                   <a:srgbClr val="0369A1"/>
                 </a:solidFill>
@@ -3235,35 +3439,12 @@
               </a:defRPr>
             </a:pPr>
             <a:r>
-              <a:t>FALL SEMESTER 2026-27  •  BCSE497J - PROJECT - I</a:t>
-            </a:r>
-          </a:p>
-        </p:txBody>
-      </p:sp>
-      <p:sp>
-        <p:nvSpPr>
-          <p:cNvPr id="5" name="TextBox 4"/>
-          <p:cNvSpPr txBox="1"/>
-          <p:nvPr/>
-        </p:nvSpPr>
-        <p:spPr>
-          <a:xfrm>
-            <a:off x="914400" y="1097280"/>
-            <a:ext cx="10360152" cy="777240"/>
-          </a:xfrm>
-          <a:prstGeom prst="rect">
-            <a:avLst/>
-          </a:prstGeom>
-          <a:noFill/>
-        </p:spPr>
-        <p:txBody>
-          <a:bodyPr wrap="none">
-            <a:spAutoFit/>
-          </a:bodyPr>
-          <a:lstStyle/>
-          <a:p>
-            <a:pPr algn="ctr">
-              <a:defRPr sz="4000" b="1">
+              <a:t>FACULTY GUIDE</a:t>
+            </a:r>
+          </a:p>
+          <a:p>
+            <a:pPr>
+              <a:defRPr sz="1900" b="1">
                 <a:solidFill>
                   <a:srgbClr val="0F172A"/>
                 </a:solidFill>
@@ -3271,147 +3452,7 @@
               </a:defRPr>
             </a:pPr>
             <a:r>
-              <a:t>CareChain</a:t>
-            </a:r>
-          </a:p>
-        </p:txBody>
-      </p:sp>
-      <p:sp>
-        <p:nvSpPr>
-          <p:cNvPr id="6" name="TextBox 5"/>
-          <p:cNvSpPr txBox="1"/>
-          <p:nvPr/>
-        </p:nvSpPr>
-        <p:spPr>
-          <a:xfrm>
-            <a:off x="914400" y="1874519"/>
-            <a:ext cx="10360152" cy="347472"/>
-          </a:xfrm>
-          <a:prstGeom prst="rect">
-            <a:avLst/>
-          </a:prstGeom>
-          <a:noFill/>
-        </p:spPr>
-        <p:txBody>
-          <a:bodyPr wrap="none">
-            <a:spAutoFit/>
-          </a:bodyPr>
-          <a:lstStyle/>
-          <a:p>
-            <a:pPr algn="ctr">
-              <a:defRPr sz="1600" b="1">
-                <a:solidFill>
-                  <a:srgbClr val="0369A1"/>
-                </a:solidFill>
-                <a:latin typeface="Calibri"/>
-              </a:defRPr>
-            </a:pPr>
-            <a:r>
-              <a:t>Decentralized, Patient-Centric Electronic Health Record (EHR) Protocol</a:t>
-            </a:r>
-          </a:p>
-        </p:txBody>
-      </p:sp>
-      <p:sp>
-        <p:nvSpPr>
-          <p:cNvPr id="7" name="TextBox 6"/>
-          <p:cNvSpPr txBox="1"/>
-          <p:nvPr/>
-        </p:nvSpPr>
-        <p:spPr>
-          <a:xfrm>
-            <a:off x="1371600" y="2240280"/>
-            <a:ext cx="9445752" cy="411480"/>
-          </a:xfrm>
-          <a:prstGeom prst="rect">
-            <a:avLst/>
-          </a:prstGeom>
-          <a:noFill/>
-        </p:spPr>
-        <p:txBody>
-          <a:bodyPr wrap="none">
-            <a:spAutoFit/>
-          </a:bodyPr>
-          <a:lstStyle/>
-          <a:p>
-            <a:pPr algn="ctr">
-              <a:defRPr sz="1150">
-                <a:solidFill>
-                  <a:srgbClr val="64748B"/>
-                </a:solidFill>
-                <a:latin typeface="Calibri"/>
-              </a:defRPr>
-            </a:pPr>
-            <a:r>
-              <a:t>Empowering patient data ownership through Ethereum Smart Contracts, AES-256 Client-Side Encryption, and Decentralized IPFS Storage.</a:t>
-            </a:r>
-          </a:p>
-        </p:txBody>
-      </p:sp>
-      <p:sp>
-        <p:nvSpPr>
-          <p:cNvPr id="8" name="Rounded Rectangle 7"/>
-          <p:cNvSpPr/>
-          <p:nvPr/>
-        </p:nvSpPr>
-        <p:spPr>
-          <a:xfrm>
-            <a:off x="1280160" y="2834640"/>
-            <a:ext cx="4572000" cy="2651760"/>
-          </a:xfrm>
-          <a:prstGeom prst="roundRect">
-            <a:avLst/>
-          </a:prstGeom>
-          <a:solidFill>
-            <a:srgbClr val="F0F9FF"/>
-          </a:solidFill>
-          <a:ln w="15240">
-            <a:solidFill>
-              <a:srgbClr val="BAE6FD"/>
-            </a:solidFill>
-          </a:ln>
-        </p:spPr>
-        <p:style>
-          <a:lnRef idx="1">
-            <a:schemeClr val="accent1"/>
-          </a:lnRef>
-          <a:fillRef idx="3">
-            <a:schemeClr val="accent1"/>
-          </a:fillRef>
-          <a:effectRef idx="2">
-            <a:schemeClr val="accent1"/>
-          </a:effectRef>
-          <a:fontRef idx="minor">
-            <a:schemeClr val="lt1"/>
-          </a:fontRef>
-        </p:style>
-        <p:txBody>
-          <a:bodyPr rtlCol="0" anchor="ctr" wrap="square"/>
-          <a:lstStyle/>
-          <a:p>
-            <a:pPr algn="ctr">
-              <a:defRPr sz="900" b="1">
-                <a:solidFill>
-                  <a:srgbClr val="0369A1"/>
-                </a:solidFill>
-                <a:latin typeface="Calibri"/>
-              </a:defRPr>
-            </a:pPr>
-            <a:r>
-              <a:t>SUBMITTED BY</a:t>
-            </a:r>
-          </a:p>
-          <a:p>
-            <a:pPr>
-              <a:defRPr sz="1800" b="1">
-                <a:solidFill>
-                  <a:srgbClr val="0F172A"/>
-                </a:solidFill>
-                <a:latin typeface="Calibri"/>
-              </a:defRPr>
-            </a:pPr>
-            <a:r>
-              <a:t>Ashish Anil Sikaria</a:t>
+              <a:t>Prof. SELVI M</a:t>
             </a:r>
           </a:p>
           <a:p>
@@ -3424,108 +3465,15 @@
               </a:defRPr>
             </a:pPr>
             <a:r>
-              <a:t>Register No: 23BCI0218</a:t>
+              <a:t>Designation: Associate Professor Grade 2</a:t>
             </a:r>
             <a:br/>
             <a:r>
-              <a:t>Programme: B.Tech Computer Science &amp; Engineering</a:t>
+              <a:t>Employee ID: 16106</a:t>
             </a:r>
             <a:br/>
             <a:r>
-              <a:t>School: SCOPE (School of Computer Science &amp; Engineering)</a:t>
-            </a:r>
-          </a:p>
-        </p:txBody>
-      </p:sp>
-      <p:sp>
-        <p:nvSpPr>
-          <p:cNvPr id="9" name="Rounded Rectangle 8"/>
-          <p:cNvSpPr/>
-          <p:nvPr/>
-        </p:nvSpPr>
-        <p:spPr>
-          <a:xfrm>
-            <a:off x="6336792" y="2834640"/>
-            <a:ext cx="4572000" cy="2651760"/>
-          </a:xfrm>
-          <a:prstGeom prst="roundRect">
-            <a:avLst/>
-          </a:prstGeom>
-          <a:solidFill>
-            <a:srgbClr val="EEF2FF"/>
-          </a:solidFill>
-          <a:ln w="15240">
-            <a:solidFill>
-              <a:srgbClr val="C7D2FE"/>
-            </a:solidFill>
-          </a:ln>
-        </p:spPr>
-        <p:style>
-          <a:lnRef idx="1">
-            <a:schemeClr val="accent1"/>
-          </a:lnRef>
-          <a:fillRef idx="3">
-            <a:schemeClr val="accent1"/>
-          </a:fillRef>
-          <a:effectRef idx="2">
-            <a:schemeClr val="accent1"/>
-          </a:effectRef>
-          <a:fontRef idx="minor">
-            <a:schemeClr val="lt1"/>
-          </a:fontRef>
-        </p:style>
-        <p:txBody>
-          <a:bodyPr rtlCol="0" anchor="ctr" wrap="square"/>
-          <a:lstStyle/>
-          <a:p>
-            <a:pPr algn="ctr">
-              <a:defRPr sz="900" b="1">
-                <a:solidFill>
-                  <a:srgbClr val="6366F1"/>
-                </a:solidFill>
-                <a:latin typeface="Calibri"/>
-              </a:defRPr>
-            </a:pPr>
-            <a:r>
-              <a:t>UNDER THE GUIDANCE OF</a:t>
-            </a:r>
-          </a:p>
-          <a:p>
-            <a:pPr>
-              <a:defRPr sz="1800" b="1">
-                <a:solidFill>
-                  <a:srgbClr val="0F172A"/>
-                </a:solidFill>
-                <a:latin typeface="Calibri"/>
-              </a:defRPr>
-            </a:pPr>
-            <a:r>
-              <a:t>Prof. SELVI M</a:t>
-            </a:r>
-          </a:p>
-          <a:p>
-            <a:pPr>
-              <a:defRPr sz="1100">
-                <a:solidFill>
-                  <a:srgbClr val="334155"/>
-                </a:solidFill>
-                <a:latin typeface="Calibri"/>
-              </a:defRPr>
-            </a:pPr>
-            <a:r>
-              <a:t>Designation: Associate Professor Grade 2</a:t>
-            </a:r>
-            <a:br/>
-            <a:r>
-              <a:t>Employee ID: 16106</a:t>
-            </a:r>
-            <a:br/>
-            <a:r>
-              <a:t>School: SCOPE (School of Computer Science &amp; Engineering)</a:t>
-            </a:r>
-            <a:br/>
-            <a:r>
-              <a:t>Status: Registered &amp; Approved by Guide</a:t>
+              <a:t>School: SCOPE • Registration Status: Approved by Guide</a:t>
             </a:r>
           </a:p>
         </p:txBody>
@@ -3563,7 +3511,7 @@
             <a:avLst/>
           </a:prstGeom>
           <a:solidFill>
-            <a:srgbClr val="F8FAFC"/>
+            <a:srgbClr val="FFFFFF"/>
           </a:solidFill>
           <a:ln>
             <a:noFill/>
@@ -3593,20 +3541,125 @@
       </p:sp>
       <p:sp>
         <p:nvSpPr>
-          <p:cNvPr id="3" name="Rounded Rectangle 2"/>
+          <p:cNvPr id="3" name="Rectangle 2"/>
           <p:cNvSpPr/>
           <p:nvPr/>
         </p:nvSpPr>
         <p:spPr>
           <a:xfrm>
-            <a:off x="603504" y="457200"/>
-            <a:ext cx="10972800" cy="5852160"/>
+            <a:off x="0" y="0"/>
+            <a:ext cx="365760" cy="6858000"/>
+          </a:xfrm>
+          <a:prstGeom prst="rect">
+            <a:avLst/>
+          </a:prstGeom>
+          <a:solidFill>
+            <a:srgbClr val="0284C7"/>
+          </a:solidFill>
+          <a:ln>
+            <a:noFill/>
+          </a:ln>
+        </p:spPr>
+        <p:style>
+          <a:lnRef idx="1">
+            <a:schemeClr val="accent1"/>
+          </a:lnRef>
+          <a:fillRef idx="3">
+            <a:schemeClr val="accent1"/>
+          </a:fillRef>
+          <a:effectRef idx="2">
+            <a:schemeClr val="accent1"/>
+          </a:effectRef>
+          <a:fontRef idx="minor">
+            <a:schemeClr val="lt1"/>
+          </a:fontRef>
+        </p:style>
+        <p:txBody>
+          <a:bodyPr rtlCol="0" anchor="ctr"/>
+          <a:lstStyle/>
+          <a:p>
+            <a:pPr algn="ctr"/>
+          </a:p>
+        </p:txBody>
+      </p:sp>
+      <p:sp>
+        <p:nvSpPr>
+          <p:cNvPr id="4" name="TextBox 3"/>
+          <p:cNvSpPr txBox="1"/>
+          <p:nvPr/>
+        </p:nvSpPr>
+        <p:spPr>
+          <a:xfrm>
+            <a:off x="1097280" y="640080"/>
+            <a:ext cx="10058400" cy="1645920"/>
+          </a:xfrm>
+          <a:prstGeom prst="rect">
+            <a:avLst/>
+          </a:prstGeom>
+          <a:noFill/>
+        </p:spPr>
+        <p:txBody>
+          <a:bodyPr wrap="square">
+            <a:spAutoFit/>
+          </a:bodyPr>
+          <a:lstStyle/>
+          <a:p>
+            <a:pPr>
+              <a:defRPr sz="1000" b="1">
+                <a:solidFill>
+                  <a:srgbClr val="0369A1"/>
+                </a:solidFill>
+                <a:latin typeface="Calibri"/>
+              </a:defRPr>
+            </a:pPr>
+            <a:r>
+              <a:t>CONCLUSION &amp; PROJECT DEFENSE</a:t>
+            </a:r>
+          </a:p>
+          <a:p>
+            <a:pPr>
+              <a:defRPr sz="3200" b="1">
+                <a:solidFill>
+                  <a:srgbClr val="0F172A"/>
+                </a:solidFill>
+                <a:latin typeface="Calibri"/>
+              </a:defRPr>
+            </a:pPr>
+            <a:r>
+              <a:t>CareChain: Redefining Sovereign Healthcare</a:t>
+            </a:r>
+          </a:p>
+          <a:p>
+            <a:pPr>
+              <a:defRPr sz="1150">
+                <a:solidFill>
+                  <a:srgbClr val="64748B"/>
+                </a:solidFill>
+                <a:latin typeface="Calibri"/>
+              </a:defRPr>
+            </a:pPr>
+            <a:r>
+              <a:t>CareChain delivers a verified, production-grade protocol for patient-governed electronic health records. Validated with 100% automated test coverage, zero-trust cryptographic security, and mapped against UN SDGs and TRL progression.</a:t>
+            </a:r>
+          </a:p>
+        </p:txBody>
+      </p:sp>
+      <p:sp>
+        <p:nvSpPr>
+          <p:cNvPr id="5" name="Rounded Rectangle 4"/>
+          <p:cNvSpPr/>
+          <p:nvPr/>
+        </p:nvSpPr>
+        <p:spPr>
+          <a:xfrm>
+            <a:off x="1097280" y="2468880"/>
+            <a:ext cx="10058400" cy="3657600"/>
           </a:xfrm>
           <a:prstGeom prst="roundRect">
             <a:avLst/>
           </a:prstGeom>
           <a:solidFill>
-            <a:srgbClr val="FFFFFF"/>
+            <a:srgbClr val="F8FAFC"/>
           </a:solidFill>
           <a:ln w="19050">
             <a:solidFill>
@@ -3638,132 +3691,24 @@
       </p:sp>
       <p:sp>
         <p:nvSpPr>
-          <p:cNvPr id="4" name="TextBox 3"/>
-          <p:cNvSpPr txBox="1"/>
-          <p:nvPr/>
-        </p:nvSpPr>
-        <p:spPr>
-          <a:xfrm>
-            <a:off x="914400" y="731520"/>
-            <a:ext cx="10360152" cy="274320"/>
-          </a:xfrm>
-          <a:prstGeom prst="rect">
-            <a:avLst/>
-          </a:prstGeom>
-          <a:noFill/>
-        </p:spPr>
-        <p:txBody>
-          <a:bodyPr wrap="none">
-            <a:spAutoFit/>
-          </a:bodyPr>
-          <a:lstStyle/>
-          <a:p>
-            <a:pPr algn="ctr">
-              <a:defRPr sz="1000" b="1">
-                <a:solidFill>
-                  <a:srgbClr val="0369A1"/>
-                </a:solidFill>
-                <a:latin typeface="Calibri"/>
-              </a:defRPr>
-            </a:pPr>
-            <a:r>
-              <a:t>CONCLUSION &amp; ACADEMIC DEFENSE</a:t>
-            </a:r>
-          </a:p>
-        </p:txBody>
-      </p:sp>
-      <p:sp>
-        <p:nvSpPr>
-          <p:cNvPr id="5" name="TextBox 4"/>
-          <p:cNvSpPr txBox="1"/>
-          <p:nvPr/>
-        </p:nvSpPr>
-        <p:spPr>
-          <a:xfrm>
-            <a:off x="914400" y="1051560"/>
-            <a:ext cx="10360152" cy="640080"/>
-          </a:xfrm>
-          <a:prstGeom prst="rect">
-            <a:avLst/>
-          </a:prstGeom>
-          <a:noFill/>
-        </p:spPr>
-        <p:txBody>
-          <a:bodyPr wrap="none">
-            <a:spAutoFit/>
-          </a:bodyPr>
-          <a:lstStyle/>
-          <a:p>
-            <a:pPr algn="ctr">
-              <a:defRPr sz="3000" b="1">
-                <a:solidFill>
-                  <a:srgbClr val="0F172A"/>
-                </a:solidFill>
-                <a:latin typeface="Calibri"/>
-              </a:defRPr>
-            </a:pPr>
-            <a:r>
-              <a:t>CareChain: Redefining Sovereign Healthcare</a:t>
-            </a:r>
-          </a:p>
-        </p:txBody>
-      </p:sp>
-      <p:sp>
-        <p:nvSpPr>
-          <p:cNvPr id="6" name="TextBox 5"/>
-          <p:cNvSpPr txBox="1"/>
-          <p:nvPr/>
-        </p:nvSpPr>
-        <p:spPr>
-          <a:xfrm>
-            <a:off x="1371600" y="1691640"/>
-            <a:ext cx="9445752" cy="594360"/>
-          </a:xfrm>
-          <a:prstGeom prst="rect">
-            <a:avLst/>
-          </a:prstGeom>
-          <a:noFill/>
-        </p:spPr>
-        <p:txBody>
-          <a:bodyPr wrap="none">
-            <a:spAutoFit/>
-          </a:bodyPr>
-          <a:lstStyle/>
-          <a:p>
-            <a:pPr algn="ctr">
-              <a:defRPr sz="1150">
-                <a:solidFill>
-                  <a:srgbClr val="334155"/>
-                </a:solidFill>
-                <a:latin typeface="Calibri"/>
-              </a:defRPr>
-            </a:pPr>
-            <a:r>
-              <a:t>CareChain delivers a verified, production-grade protocol for patient-governed electronic health records. Validated with 100% automated test coverage, zero-trust cryptographic security, and mapped against UN SDGs and TRL progression.</a:t>
-            </a:r>
-          </a:p>
-        </p:txBody>
-      </p:sp>
-      <p:sp>
-        <p:nvSpPr>
-          <p:cNvPr id="7" name="Rounded Rectangle 6"/>
+          <p:cNvPr id="6" name="Rounded Rectangle 5"/>
           <p:cNvSpPr/>
           <p:nvPr/>
         </p:nvSpPr>
         <p:spPr>
           <a:xfrm>
-            <a:off x="1097280" y="2468880"/>
-            <a:ext cx="9994392" cy="3474720"/>
+            <a:off x="1371600" y="2743200"/>
+            <a:ext cx="4572000" cy="868680"/>
           </a:xfrm>
           <a:prstGeom prst="roundRect">
             <a:avLst/>
           </a:prstGeom>
           <a:solidFill>
-            <a:srgbClr val="F0F9FF"/>
-          </a:solidFill>
-          <a:ln w="15240">
+            <a:srgbClr val="FFFFFF"/>
+          </a:solidFill>
+          <a:ln w="12700">
             <a:solidFill>
-              <a:srgbClr val="BAE6FD"/>
+              <a:srgbClr val="E2E8F0"/>
             </a:solidFill>
           </a:ln>
         </p:spPr>
@@ -3782,23 +3727,46 @@
           </a:fontRef>
         </p:style>
         <p:txBody>
-          <a:bodyPr rtlCol="0" anchor="ctr"/>
-          <a:lstStyle/>
-          <a:p>
-            <a:pPr algn="ctr"/>
-          </a:p>
-        </p:txBody>
-      </p:sp>
-      <p:sp>
-        <p:nvSpPr>
-          <p:cNvPr id="8" name="Rounded Rectangle 7"/>
+          <a:bodyPr rtlCol="0" anchor="ctr" wrap="square"/>
+          <a:lstStyle/>
+          <a:p>
+            <a:pPr algn="ctr">
+              <a:defRPr sz="850" b="1">
+                <a:solidFill>
+                  <a:srgbClr val="64748B"/>
+                </a:solidFill>
+                <a:latin typeface="Calibri"/>
+              </a:defRPr>
+            </a:pPr>
+            <a:r>
+              <a:t>CANDIDATE NAME</a:t>
+            </a:r>
+          </a:p>
+          <a:p>
+            <a:pPr>
+              <a:defRPr sz="1250" b="1">
+                <a:solidFill>
+                  <a:srgbClr val="0F172A"/>
+                </a:solidFill>
+                <a:latin typeface="Calibri"/>
+              </a:defRPr>
+            </a:pPr>
+            <a:r>
+              <a:t>Ashish Anil Sikaria</a:t>
+            </a:r>
+          </a:p>
+        </p:txBody>
+      </p:sp>
+      <p:sp>
+        <p:nvSpPr>
+          <p:cNvPr id="7" name="Rounded Rectangle 6"/>
           <p:cNvSpPr/>
           <p:nvPr/>
         </p:nvSpPr>
         <p:spPr>
           <a:xfrm>
-            <a:off x="1371600" y="2743200"/>
-            <a:ext cx="4572000" cy="822960"/>
+            <a:off x="6217920" y="2743200"/>
+            <a:ext cx="4572000" cy="868680"/>
           </a:xfrm>
           <a:prstGeom prst="roundRect">
             <a:avLst/>
@@ -3839,34 +3807,34 @@
               </a:defRPr>
             </a:pPr>
             <a:r>
-              <a:t>CANDIDATE</a:t>
+              <a:t>REGISTER NUMBER</a:t>
             </a:r>
           </a:p>
           <a:p>
             <a:pPr>
-              <a:defRPr sz="1200" b="1">
-                <a:solidFill>
-                  <a:srgbClr val="0F172A"/>
-                </a:solidFill>
-                <a:latin typeface="Calibri"/>
-              </a:defRPr>
-            </a:pPr>
-            <a:r>
-              <a:t>Ashish Anil Sikaria (23BCI0218)</a:t>
-            </a:r>
-          </a:p>
-        </p:txBody>
-      </p:sp>
-      <p:sp>
-        <p:nvSpPr>
-          <p:cNvPr id="9" name="Rounded Rectangle 8"/>
+              <a:defRPr sz="1250" b="1">
+                <a:solidFill>
+                  <a:srgbClr val="0369A1"/>
+                </a:solidFill>
+                <a:latin typeface="Calibri"/>
+              </a:defRPr>
+            </a:pPr>
+            <a:r>
+              <a:t>23BCI0218</a:t>
+            </a:r>
+          </a:p>
+        </p:txBody>
+      </p:sp>
+      <p:sp>
+        <p:nvSpPr>
+          <p:cNvPr id="8" name="Rounded Rectangle 7"/>
           <p:cNvSpPr/>
           <p:nvPr/>
         </p:nvSpPr>
         <p:spPr>
           <a:xfrm>
-            <a:off x="6217920" y="2743200"/>
-            <a:ext cx="4572000" cy="822960"/>
+            <a:off x="1371600" y="3794760"/>
+            <a:ext cx="4572000" cy="868680"/>
           </a:xfrm>
           <a:prstGeom prst="roundRect">
             <a:avLst/>
@@ -3912,7 +3880,7 @@
           </a:p>
           <a:p>
             <a:pPr>
-              <a:defRPr sz="1200" b="1">
+              <a:defRPr sz="1250" b="1">
                 <a:solidFill>
                   <a:srgbClr val="0F172A"/>
                 </a:solidFill>
@@ -3927,14 +3895,14 @@
       </p:sp>
       <p:sp>
         <p:nvSpPr>
-          <p:cNvPr id="10" name="Rounded Rectangle 9"/>
+          <p:cNvPr id="9" name="Rounded Rectangle 8"/>
           <p:cNvSpPr/>
           <p:nvPr/>
         </p:nvSpPr>
         <p:spPr>
           <a:xfrm>
-            <a:off x="1371600" y="3749039"/>
-            <a:ext cx="4572000" cy="822960"/>
+            <a:off x="6217920" y="3794760"/>
+            <a:ext cx="4572000" cy="868680"/>
           </a:xfrm>
           <a:prstGeom prst="roundRect">
             <a:avLst/>
@@ -3980,9 +3948,9 @@
           </a:p>
           <a:p>
             <a:pPr>
-              <a:defRPr sz="1200" b="1">
-                <a:solidFill>
-                  <a:srgbClr val="6366F1"/>
+              <a:defRPr sz="1250" b="1">
+                <a:solidFill>
+                  <a:srgbClr val="0369A1"/>
                 </a:solidFill>
                 <a:latin typeface="Calibri"/>
               </a:defRPr>
@@ -3995,14 +3963,14 @@
       </p:sp>
       <p:sp>
         <p:nvSpPr>
-          <p:cNvPr id="11" name="Rounded Rectangle 10"/>
+          <p:cNvPr id="10" name="Rounded Rectangle 9"/>
           <p:cNvSpPr/>
           <p:nvPr/>
         </p:nvSpPr>
         <p:spPr>
           <a:xfrm>
-            <a:off x="6217920" y="3749039"/>
-            <a:ext cx="4572000" cy="822960"/>
+            <a:off x="1371600" y="4846320"/>
+            <a:ext cx="4572000" cy="868680"/>
           </a:xfrm>
           <a:prstGeom prst="roundRect">
             <a:avLst/>
@@ -4043,12 +4011,12 @@
               </a:defRPr>
             </a:pPr>
             <a:r>
-              <a:t>SCHOOL</a:t>
+              <a:t>ACADEMIC SCHOOL</a:t>
             </a:r>
           </a:p>
           <a:p>
             <a:pPr>
-              <a:defRPr sz="1200" b="1">
+              <a:defRPr sz="1250" b="1">
                 <a:solidFill>
                   <a:srgbClr val="0F172A"/>
                 </a:solidFill>
@@ -4056,21 +4024,21 @@
               </a:defRPr>
             </a:pPr>
             <a:r>
-              <a:t>SCOPE (Computer Science &amp; Engineering)</a:t>
-            </a:r>
-          </a:p>
-        </p:txBody>
-      </p:sp>
-      <p:sp>
-        <p:nvSpPr>
-          <p:cNvPr id="12" name="Rounded Rectangle 11"/>
+              <a:t>SCOPE (School of Computer Science &amp; Eng.)</a:t>
+            </a:r>
+          </a:p>
+        </p:txBody>
+      </p:sp>
+      <p:sp>
+        <p:nvSpPr>
+          <p:cNvPr id="11" name="Rounded Rectangle 10"/>
           <p:cNvSpPr/>
           <p:nvPr/>
         </p:nvSpPr>
         <p:spPr>
           <a:xfrm>
-            <a:off x="1371600" y="4754880"/>
-            <a:ext cx="4572000" cy="822960"/>
+            <a:off x="6217920" y="4846320"/>
+            <a:ext cx="4572000" cy="868680"/>
           </a:xfrm>
           <a:prstGeom prst="roundRect">
             <a:avLst/>
@@ -4111,88 +4079,20 @@
               </a:defRPr>
             </a:pPr>
             <a:r>
-              <a:t>READINESS LEVEL</a:t>
+              <a:t>PROJECT STATUS</a:t>
             </a:r>
           </a:p>
           <a:p>
             <a:pPr>
-              <a:defRPr sz="1200" b="1">
-                <a:solidFill>
-                  <a:srgbClr val="059669"/>
-                </a:solidFill>
-                <a:latin typeface="Calibri"/>
-              </a:defRPr>
-            </a:pPr>
-            <a:r>
-              <a:t>TRL 6 (Demonstrated Prototype)</a:t>
-            </a:r>
-          </a:p>
-        </p:txBody>
-      </p:sp>
-      <p:sp>
-        <p:nvSpPr>
-          <p:cNvPr id="13" name="Rounded Rectangle 12"/>
-          <p:cNvSpPr/>
-          <p:nvPr/>
-        </p:nvSpPr>
-        <p:spPr>
-          <a:xfrm>
-            <a:off x="6217920" y="4754880"/>
-            <a:ext cx="4572000" cy="822960"/>
-          </a:xfrm>
-          <a:prstGeom prst="roundRect">
-            <a:avLst/>
-          </a:prstGeom>
-          <a:solidFill>
-            <a:srgbClr val="FFFFFF"/>
-          </a:solidFill>
-          <a:ln w="12700">
-            <a:solidFill>
-              <a:srgbClr val="E2E8F0"/>
-            </a:solidFill>
-          </a:ln>
-        </p:spPr>
-        <p:style>
-          <a:lnRef idx="1">
-            <a:schemeClr val="accent1"/>
-          </a:lnRef>
-          <a:fillRef idx="3">
-            <a:schemeClr val="accent1"/>
-          </a:fillRef>
-          <a:effectRef idx="2">
-            <a:schemeClr val="accent1"/>
-          </a:effectRef>
-          <a:fontRef idx="minor">
-            <a:schemeClr val="lt1"/>
-          </a:fontRef>
-        </p:style>
-        <p:txBody>
-          <a:bodyPr rtlCol="0" anchor="ctr" wrap="square"/>
-          <a:lstStyle/>
-          <a:p>
-            <a:pPr algn="ctr">
-              <a:defRPr sz="850" b="1">
-                <a:solidFill>
-                  <a:srgbClr val="64748B"/>
-                </a:solidFill>
-                <a:latin typeface="Calibri"/>
-              </a:defRPr>
-            </a:pPr>
-            <a:r>
-              <a:t>UN SDG ALIGNMENT</a:t>
-            </a:r>
-          </a:p>
-          <a:p>
-            <a:pPr>
-              <a:defRPr sz="1200" b="1">
-                <a:solidFill>
-                  <a:srgbClr val="0369A1"/>
-                </a:solidFill>
-                <a:latin typeface="Calibri"/>
-              </a:defRPr>
-            </a:pPr>
-            <a:r>
-              <a:t>SDGs 3.8, 9.5, 10.2, 16.6</a:t>
+              <a:defRPr sz="1250" b="1">
+                <a:solidFill>
+                  <a:srgbClr val="4C9F38"/>
+                </a:solidFill>
+                <a:latin typeface="Calibri"/>
+              </a:defRPr>
+            </a:pPr>
+            <a:r>
+              <a:t>Registered &amp; Approved by Guide (TRL 6)</a:t>
             </a:r>
           </a:p>
         </p:txBody>
@@ -4260,20 +4160,105 @@
       </p:sp>
       <p:sp>
         <p:nvSpPr>
-          <p:cNvPr id="3" name="Rectangle 2"/>
+          <p:cNvPr id="3" name="TextBox 2"/>
+          <p:cNvSpPr txBox="1"/>
+          <p:nvPr/>
+        </p:nvSpPr>
+        <p:spPr>
+          <a:xfrm>
+            <a:off x="731520" y="365760"/>
+            <a:ext cx="10725912" cy="274320"/>
+          </a:xfrm>
+          <a:prstGeom prst="rect">
+            <a:avLst/>
+          </a:prstGeom>
+          <a:noFill/>
+        </p:spPr>
+        <p:txBody>
+          <a:bodyPr wrap="square">
+            <a:spAutoFit/>
+          </a:bodyPr>
+          <a:lstStyle/>
+          <a:p>
+            <a:pPr>
+              <a:defRPr sz="950" b="1">
+                <a:solidFill>
+                  <a:srgbClr val="0284C7"/>
+                </a:solidFill>
+                <a:latin typeface="Calibri"/>
+              </a:defRPr>
+            </a:pPr>
+            <a:r>
+              <a:t>ACADEMIC FRAMEWORK</a:t>
+            </a:r>
+          </a:p>
+        </p:txBody>
+      </p:sp>
+      <p:sp>
+        <p:nvSpPr>
+          <p:cNvPr id="4" name="TextBox 3"/>
+          <p:cNvSpPr txBox="1"/>
+          <p:nvPr/>
+        </p:nvSpPr>
+        <p:spPr>
+          <a:xfrm>
+            <a:off x="731520" y="621792"/>
+            <a:ext cx="10725912" cy="457200"/>
+          </a:xfrm>
+          <a:prstGeom prst="rect">
+            <a:avLst/>
+          </a:prstGeom>
+          <a:noFill/>
+        </p:spPr>
+        <p:txBody>
+          <a:bodyPr wrap="square">
+            <a:spAutoFit/>
+          </a:bodyPr>
+          <a:lstStyle/>
+          <a:p>
+            <a:pPr>
+              <a:defRPr sz="2200" b="1">
+                <a:solidFill>
+                  <a:srgbClr val="0F172A"/>
+                </a:solidFill>
+                <a:latin typeface="Calibri"/>
+              </a:defRPr>
+            </a:pPr>
+            <a:r>
+              <a:t>Institutional Registration &amp; Governance Profile</a:t>
+            </a:r>
+          </a:p>
+          <a:p>
+            <a:pPr>
+              <a:defRPr sz="1100">
+                <a:solidFill>
+                  <a:srgbClr val="64748B"/>
+                </a:solidFill>
+                <a:latin typeface="Calibri"/>
+              </a:defRPr>
+            </a:pPr>
+            <a:r>
+              <a:t>Formal curriculum registration specifications approved by faculty guide.</a:t>
+            </a:r>
+          </a:p>
+        </p:txBody>
+      </p:sp>
+      <p:sp>
+        <p:nvSpPr>
+          <p:cNvPr id="5" name="Rectangle 4"/>
           <p:cNvSpPr/>
           <p:nvPr/>
         </p:nvSpPr>
         <p:spPr>
           <a:xfrm>
-            <a:off x="603504" y="320040"/>
-            <a:ext cx="10972800" cy="27432"/>
+            <a:off x="731520" y="1234440"/>
+            <a:ext cx="10725912" cy="9144"/>
           </a:xfrm>
           <a:prstGeom prst="rect">
             <a:avLst/>
           </a:prstGeom>
           <a:solidFill>
-            <a:srgbClr val="0284C7"/>
+            <a:srgbClr val="E2E8F0"/>
           </a:solidFill>
           <a:ln>
             <a:noFill/>
@@ -4303,50 +4288,14 @@
       </p:sp>
       <p:sp>
         <p:nvSpPr>
-          <p:cNvPr id="4" name="TextBox 3"/>
-          <p:cNvSpPr txBox="1"/>
-          <p:nvPr/>
-        </p:nvSpPr>
-        <p:spPr>
-          <a:xfrm>
-            <a:off x="603504" y="384048"/>
-            <a:ext cx="7315200" cy="256032"/>
-          </a:xfrm>
-          <a:prstGeom prst="rect">
-            <a:avLst/>
-          </a:prstGeom>
-          <a:noFill/>
-        </p:spPr>
-        <p:txBody>
-          <a:bodyPr wrap="square">
-            <a:spAutoFit/>
-          </a:bodyPr>
-          <a:lstStyle/>
-          <a:p>
-            <a:pPr>
-              <a:defRPr sz="950" b="1">
-                <a:solidFill>
-                  <a:srgbClr val="0369A1"/>
-                </a:solidFill>
-                <a:latin typeface="Calibri"/>
-              </a:defRPr>
-            </a:pPr>
-            <a:r>
-              <a:t>ACADEMIC FRAMEWORK • BCSE497J PROJECT PROFILE</a:t>
-            </a:r>
-          </a:p>
-        </p:txBody>
-      </p:sp>
-      <p:sp>
-        <p:nvSpPr>
-          <p:cNvPr id="5" name="Rectangle 4"/>
+          <p:cNvPr id="6" name="Rectangle 5"/>
           <p:cNvSpPr/>
           <p:nvPr/>
         </p:nvSpPr>
         <p:spPr>
           <a:xfrm>
-            <a:off x="603504" y="658368"/>
-            <a:ext cx="10972800" cy="9144"/>
+            <a:off x="731520" y="6263640"/>
+            <a:ext cx="10725912" cy="9144"/>
           </a:xfrm>
           <a:prstGeom prst="rect">
             <a:avLst/>
@@ -4382,23 +4331,97 @@
       </p:sp>
       <p:sp>
         <p:nvSpPr>
-          <p:cNvPr id="6" name="Rectangle 5"/>
+          <p:cNvPr id="7" name="TextBox 6"/>
+          <p:cNvSpPr txBox="1"/>
+          <p:nvPr/>
+        </p:nvSpPr>
+        <p:spPr>
+          <a:xfrm>
+            <a:off x="731520" y="6327648"/>
+            <a:ext cx="6400800" cy="274320"/>
+          </a:xfrm>
+          <a:prstGeom prst="rect">
+            <a:avLst/>
+          </a:prstGeom>
+          <a:noFill/>
+        </p:spPr>
+        <p:txBody>
+          <a:bodyPr wrap="none">
+            <a:spAutoFit/>
+          </a:bodyPr>
+          <a:lstStyle/>
+          <a:p>
+            <a:pPr>
+              <a:defRPr sz="900">
+                <a:solidFill>
+                  <a:srgbClr val="64748B"/>
+                </a:solidFill>
+                <a:latin typeface="Calibri"/>
+              </a:defRPr>
+            </a:pPr>
+            <a:r>
+              <a:t>CareChain • Ashish Anil Sikaria (23BCI0218) • Guide: Prof. SELVI M • SCOPE</a:t>
+            </a:r>
+          </a:p>
+        </p:txBody>
+      </p:sp>
+      <p:sp>
+        <p:nvSpPr>
+          <p:cNvPr id="8" name="TextBox 7"/>
+          <p:cNvSpPr txBox="1"/>
+          <p:nvPr/>
+        </p:nvSpPr>
+        <p:spPr>
+          <a:xfrm>
+            <a:off x="7772400" y="6327648"/>
+            <a:ext cx="3685032" cy="274320"/>
+          </a:xfrm>
+          <a:prstGeom prst="rect">
+            <a:avLst/>
+          </a:prstGeom>
+          <a:noFill/>
+        </p:spPr>
+        <p:txBody>
+          <a:bodyPr wrap="none">
+            <a:spAutoFit/>
+          </a:bodyPr>
+          <a:lstStyle/>
+          <a:p>
+            <a:pPr algn="r">
+              <a:defRPr sz="900">
+                <a:solidFill>
+                  <a:srgbClr val="64748B"/>
+                </a:solidFill>
+                <a:latin typeface="Calibri"/>
+              </a:defRPr>
+            </a:pPr>
+            <a:r>
+              <a:t>BCSE497J Project - I • Fall 2026-27</a:t>
+            </a:r>
+          </a:p>
+        </p:txBody>
+      </p:sp>
+      <p:sp>
+        <p:nvSpPr>
+          <p:cNvPr id="9" name="Rounded Rectangle 8"/>
           <p:cNvSpPr/>
           <p:nvPr/>
         </p:nvSpPr>
         <p:spPr>
           <a:xfrm>
-            <a:off x="603504" y="6263640"/>
-            <a:ext cx="10972800" cy="9144"/>
-          </a:xfrm>
-          <a:prstGeom prst="rect">
-            <a:avLst/>
-          </a:prstGeom>
-          <a:solidFill>
-            <a:srgbClr val="E2E8F0"/>
-          </a:solidFill>
-          <a:ln>
-            <a:noFill/>
+            <a:off x="731520" y="1463040"/>
+            <a:ext cx="3429000" cy="1234440"/>
+          </a:xfrm>
+          <a:prstGeom prst="roundRect">
+            <a:avLst/>
+          </a:prstGeom>
+          <a:solidFill>
+            <a:srgbClr val="F0F9FF"/>
+          </a:solidFill>
+          <a:ln w="15240">
+            <a:solidFill>
+              <a:srgbClr val="BAE6FD"/>
+            </a:solidFill>
           </a:ln>
         </p:spPr>
         <p:style>
@@ -4416,117 +4439,32 @@
           </a:fontRef>
         </p:style>
         <p:txBody>
-          <a:bodyPr rtlCol="0" anchor="ctr"/>
-          <a:lstStyle/>
-          <a:p>
-            <a:pPr algn="ctr"/>
-          </a:p>
-        </p:txBody>
-      </p:sp>
-      <p:sp>
-        <p:nvSpPr>
-          <p:cNvPr id="7" name="TextBox 6"/>
-          <p:cNvSpPr txBox="1"/>
-          <p:nvPr/>
-        </p:nvSpPr>
-        <p:spPr>
-          <a:xfrm>
-            <a:off x="603504" y="6327648"/>
-            <a:ext cx="6858000" cy="274320"/>
-          </a:xfrm>
-          <a:prstGeom prst="rect">
-            <a:avLst/>
-          </a:prstGeom>
-          <a:noFill/>
-        </p:spPr>
-        <p:txBody>
-          <a:bodyPr wrap="none">
-            <a:spAutoFit/>
-          </a:bodyPr>
-          <a:lstStyle/>
+          <a:bodyPr rtlCol="0" anchor="ctr" wrap="square"/>
+          <a:lstStyle/>
+          <a:p>
+            <a:pPr algn="ctr">
+              <a:defRPr sz="900" b="1">
+                <a:solidFill>
+                  <a:srgbClr val="64748B"/>
+                </a:solidFill>
+                <a:latin typeface="Calibri"/>
+              </a:defRPr>
+            </a:pPr>
+            <a:r>
+              <a:t>PROJECT TITLE</a:t>
+            </a:r>
+          </a:p>
           <a:p>
             <a:pPr>
-              <a:defRPr sz="900">
-                <a:solidFill>
-                  <a:srgbClr val="64748B"/>
-                </a:solidFill>
-                <a:latin typeface="Calibri"/>
-              </a:defRPr>
-            </a:pPr>
-            <a:r>
-              <a:t>Ashish Anil Sikaria (23BCI0218) • Faculty Guide: Prof. SELVI M • SCOPE</a:t>
-            </a:r>
-          </a:p>
-        </p:txBody>
-      </p:sp>
-      <p:sp>
-        <p:nvSpPr>
-          <p:cNvPr id="8" name="TextBox 7"/>
-          <p:cNvSpPr txBox="1"/>
-          <p:nvPr/>
-        </p:nvSpPr>
-        <p:spPr>
-          <a:xfrm>
-            <a:off x="7772400" y="6327648"/>
-            <a:ext cx="3803904" cy="274320"/>
-          </a:xfrm>
-          <a:prstGeom prst="rect">
-            <a:avLst/>
-          </a:prstGeom>
-          <a:noFill/>
-        </p:spPr>
-        <p:txBody>
-          <a:bodyPr wrap="none">
-            <a:spAutoFit/>
-          </a:bodyPr>
-          <a:lstStyle/>
-          <a:p>
-            <a:pPr algn="r">
-              <a:defRPr sz="900">
-                <a:solidFill>
-                  <a:srgbClr val="64748B"/>
-                </a:solidFill>
-                <a:latin typeface="Calibri"/>
-              </a:defRPr>
-            </a:pPr>
-            <a:r>
-              <a:t>Fall Semester 2026-27</a:t>
-            </a:r>
-          </a:p>
-        </p:txBody>
-      </p:sp>
-      <p:sp>
-        <p:nvSpPr>
-          <p:cNvPr id="9" name="TextBox 8"/>
-          <p:cNvSpPr txBox="1"/>
-          <p:nvPr/>
-        </p:nvSpPr>
-        <p:spPr>
-          <a:xfrm>
-            <a:off x="603504" y="731520"/>
-            <a:ext cx="10972800" cy="411480"/>
-          </a:xfrm>
-          <a:prstGeom prst="rect">
-            <a:avLst/>
-          </a:prstGeom>
-          <a:noFill/>
-        </p:spPr>
-        <p:txBody>
-          <a:bodyPr wrap="none">
-            <a:spAutoFit/>
-          </a:bodyPr>
-          <a:lstStyle/>
-          <a:p>
-            <a:pPr>
-              <a:defRPr sz="2200" b="1">
-                <a:solidFill>
-                  <a:srgbClr val="0F172A"/>
-                </a:solidFill>
-                <a:latin typeface="Calibri"/>
-              </a:defRPr>
-            </a:pPr>
-            <a:r>
-              <a:t>Academic Registration &amp; Governance</a:t>
+              <a:defRPr sz="1300" b="1">
+                <a:solidFill>
+                  <a:srgbClr val="0369A1"/>
+                </a:solidFill>
+                <a:latin typeface="Calibri"/>
+              </a:defRPr>
+            </a:pPr>
+            <a:r>
+              <a:t>CareChain</a:t>
             </a:r>
           </a:p>
         </p:txBody>
@@ -4539,14 +4477,14 @@
         </p:nvSpPr>
         <p:spPr>
           <a:xfrm>
-            <a:off x="603504" y="1234440"/>
-            <a:ext cx="3474720" cy="1188720"/>
+            <a:off x="4434840" y="1463040"/>
+            <a:ext cx="3429000" cy="1234440"/>
           </a:xfrm>
           <a:prstGeom prst="roundRect">
             <a:avLst/>
           </a:prstGeom>
           <a:solidFill>
-            <a:srgbClr val="F0F9FF"/>
+            <a:srgbClr val="FFFFFF"/>
           </a:solidFill>
           <a:ln w="15240">
             <a:solidFill>
@@ -4581,20 +4519,20 @@
               </a:defRPr>
             </a:pPr>
             <a:r>
-              <a:t>PROJECT TITLE</a:t>
+              <a:t>COURSE DETAILS</a:t>
             </a:r>
           </a:p>
           <a:p>
             <a:pPr>
               <a:defRPr sz="1300" b="1">
                 <a:solidFill>
-                  <a:srgbClr val="0369A1"/>
-                </a:solidFill>
-                <a:latin typeface="Calibri"/>
-              </a:defRPr>
-            </a:pPr>
-            <a:r>
-              <a:t>CareChain</a:t>
+                  <a:srgbClr val="0F172A"/>
+                </a:solidFill>
+                <a:latin typeface="Calibri"/>
+              </a:defRPr>
+            </a:pPr>
+            <a:r>
+              <a:t>BCSE497J - Project - I</a:t>
             </a:r>
           </a:p>
         </p:txBody>
@@ -4607,8 +4545,8 @@
         </p:nvSpPr>
         <p:spPr>
           <a:xfrm>
-            <a:off x="4352544" y="1234440"/>
-            <a:ext cx="3474720" cy="1188720"/>
+            <a:off x="8138160" y="1463040"/>
+            <a:ext cx="3429000" cy="1234440"/>
           </a:xfrm>
           <a:prstGeom prst="roundRect">
             <a:avLst/>
@@ -4649,7 +4587,7 @@
               </a:defRPr>
             </a:pPr>
             <a:r>
-              <a:t>COURSE CODE &amp; NAME</a:t>
+              <a:t>ACADEMIC SESSION</a:t>
             </a:r>
           </a:p>
           <a:p>
@@ -4662,7 +4600,7 @@
               </a:defRPr>
             </a:pPr>
             <a:r>
-              <a:t>BCSE497J - Project - I</a:t>
+              <a:t>Fall Semester 2026-27</a:t>
             </a:r>
           </a:p>
         </p:txBody>
@@ -4675,8 +4613,76 @@
         </p:nvSpPr>
         <p:spPr>
           <a:xfrm>
-            <a:off x="8101583" y="1234440"/>
-            <a:ext cx="3474720" cy="1188720"/>
+            <a:off x="731520" y="2880360"/>
+            <a:ext cx="3429000" cy="1234440"/>
+          </a:xfrm>
+          <a:prstGeom prst="roundRect">
+            <a:avLst/>
+          </a:prstGeom>
+          <a:solidFill>
+            <a:srgbClr val="F0F9FF"/>
+          </a:solidFill>
+          <a:ln w="15240">
+            <a:solidFill>
+              <a:srgbClr val="BAE6FD"/>
+            </a:solidFill>
+          </a:ln>
+        </p:spPr>
+        <p:style>
+          <a:lnRef idx="1">
+            <a:schemeClr val="accent1"/>
+          </a:lnRef>
+          <a:fillRef idx="3">
+            <a:schemeClr val="accent1"/>
+          </a:fillRef>
+          <a:effectRef idx="2">
+            <a:schemeClr val="accent1"/>
+          </a:effectRef>
+          <a:fontRef idx="minor">
+            <a:schemeClr val="lt1"/>
+          </a:fontRef>
+        </p:style>
+        <p:txBody>
+          <a:bodyPr rtlCol="0" anchor="ctr" wrap="square"/>
+          <a:lstStyle/>
+          <a:p>
+            <a:pPr algn="ctr">
+              <a:defRPr sz="900" b="1">
+                <a:solidFill>
+                  <a:srgbClr val="64748B"/>
+                </a:solidFill>
+                <a:latin typeface="Calibri"/>
+              </a:defRPr>
+            </a:pPr>
+            <a:r>
+              <a:t>PROJECT OPTION / DURATION</a:t>
+            </a:r>
+          </a:p>
+          <a:p>
+            <a:pPr>
+              <a:defRPr sz="1300" b="1">
+                <a:solidFill>
+                  <a:srgbClr val="0369A1"/>
+                </a:solidFill>
+                <a:latin typeface="Calibri"/>
+              </a:defRPr>
+            </a:pPr>
+            <a:r>
+              <a:t>General • 6 ( Months ) Regular</a:t>
+            </a:r>
+          </a:p>
+        </p:txBody>
+      </p:sp>
+      <p:sp>
+        <p:nvSpPr>
+          <p:cNvPr id="13" name="Rounded Rectangle 12"/>
+          <p:cNvSpPr/>
+          <p:nvPr/>
+        </p:nvSpPr>
+        <p:spPr>
+          <a:xfrm>
+            <a:off x="4434840" y="2880360"/>
+            <a:ext cx="3429000" cy="1234440"/>
           </a:xfrm>
           <a:prstGeom prst="roundRect">
             <a:avLst/>
@@ -4717,7 +4723,7 @@
               </a:defRPr>
             </a:pPr>
             <a:r>
-              <a:t>ACADEMIC SEMESTER</a:t>
+              <a:t>STUDENT NAME</a:t>
             </a:r>
           </a:p>
           <a:p>
@@ -4730,27 +4736,95 @@
               </a:defRPr>
             </a:pPr>
             <a:r>
-              <a:t>Fall Semester 2026-27</a:t>
-            </a:r>
-          </a:p>
-        </p:txBody>
-      </p:sp>
-      <p:sp>
-        <p:nvSpPr>
-          <p:cNvPr id="13" name="Rounded Rectangle 12"/>
+              <a:t>Ashish Anil Sikaria</a:t>
+            </a:r>
+          </a:p>
+        </p:txBody>
+      </p:sp>
+      <p:sp>
+        <p:nvSpPr>
+          <p:cNvPr id="14" name="Rounded Rectangle 13"/>
           <p:cNvSpPr/>
           <p:nvPr/>
         </p:nvSpPr>
         <p:spPr>
           <a:xfrm>
-            <a:off x="603504" y="2606040"/>
-            <a:ext cx="3474720" cy="1188720"/>
+            <a:off x="8138160" y="2880360"/>
+            <a:ext cx="3429000" cy="1234440"/>
           </a:xfrm>
           <a:prstGeom prst="roundRect">
             <a:avLst/>
           </a:prstGeom>
           <a:solidFill>
             <a:srgbClr val="F0F9FF"/>
+          </a:solidFill>
+          <a:ln w="15240">
+            <a:solidFill>
+              <a:srgbClr val="BAE6FD"/>
+            </a:solidFill>
+          </a:ln>
+        </p:spPr>
+        <p:style>
+          <a:lnRef idx="1">
+            <a:schemeClr val="accent1"/>
+          </a:lnRef>
+          <a:fillRef idx="3">
+            <a:schemeClr val="accent1"/>
+          </a:fillRef>
+          <a:effectRef idx="2">
+            <a:schemeClr val="accent1"/>
+          </a:effectRef>
+          <a:fontRef idx="minor">
+            <a:schemeClr val="lt1"/>
+          </a:fontRef>
+        </p:style>
+        <p:txBody>
+          <a:bodyPr rtlCol="0" anchor="ctr" wrap="square"/>
+          <a:lstStyle/>
+          <a:p>
+            <a:pPr algn="ctr">
+              <a:defRPr sz="900" b="1">
+                <a:solidFill>
+                  <a:srgbClr val="64748B"/>
+                </a:solidFill>
+                <a:latin typeface="Calibri"/>
+              </a:defRPr>
+            </a:pPr>
+            <a:r>
+              <a:t>REGISTER NUMBER</a:t>
+            </a:r>
+          </a:p>
+          <a:p>
+            <a:pPr>
+              <a:defRPr sz="1300" b="1">
+                <a:solidFill>
+                  <a:srgbClr val="0369A1"/>
+                </a:solidFill>
+                <a:latin typeface="Calibri"/>
+              </a:defRPr>
+            </a:pPr>
+            <a:r>
+              <a:t>23BCI0218</a:t>
+            </a:r>
+          </a:p>
+        </p:txBody>
+      </p:sp>
+      <p:sp>
+        <p:nvSpPr>
+          <p:cNvPr id="15" name="Rounded Rectangle 14"/>
+          <p:cNvSpPr/>
+          <p:nvPr/>
+        </p:nvSpPr>
+        <p:spPr>
+          <a:xfrm>
+            <a:off x="731520" y="4297680"/>
+            <a:ext cx="3429000" cy="1234440"/>
+          </a:xfrm>
+          <a:prstGeom prst="roundRect">
+            <a:avLst/>
+          </a:prstGeom>
+          <a:solidFill>
+            <a:srgbClr val="FFFFFF"/>
           </a:solidFill>
           <a:ln w="15240">
             <a:solidFill>
@@ -4785,34 +4859,34 @@
               </a:defRPr>
             </a:pPr>
             <a:r>
-              <a:t>COURSE OPTION / DURATION</a:t>
+              <a:t>FACULTY GUIDE</a:t>
             </a:r>
           </a:p>
           <a:p>
             <a:pPr>
               <a:defRPr sz="1300" b="1">
                 <a:solidFill>
-                  <a:srgbClr val="0369A1"/>
-                </a:solidFill>
-                <a:latin typeface="Calibri"/>
-              </a:defRPr>
-            </a:pPr>
-            <a:r>
-              <a:t>Regular • 6 ( Months )</a:t>
-            </a:r>
-          </a:p>
-        </p:txBody>
-      </p:sp>
-      <p:sp>
-        <p:nvSpPr>
-          <p:cNvPr id="14" name="Rounded Rectangle 13"/>
+                  <a:srgbClr val="0F172A"/>
+                </a:solidFill>
+                <a:latin typeface="Calibri"/>
+              </a:defRPr>
+            </a:pPr>
+            <a:r>
+              <a:t>Prof. SELVI M (Emp ID: 16106)</a:t>
+            </a:r>
+          </a:p>
+        </p:txBody>
+      </p:sp>
+      <p:sp>
+        <p:nvSpPr>
+          <p:cNvPr id="16" name="Rounded Rectangle 15"/>
           <p:cNvSpPr/>
           <p:nvPr/>
         </p:nvSpPr>
         <p:spPr>
           <a:xfrm>
-            <a:off x="4352544" y="2606040"/>
-            <a:ext cx="3474720" cy="1188720"/>
+            <a:off x="4434840" y="4297680"/>
+            <a:ext cx="3429000" cy="1234440"/>
           </a:xfrm>
           <a:prstGeom prst="roundRect">
             <a:avLst/>
@@ -4853,7 +4927,7 @@
               </a:defRPr>
             </a:pPr>
             <a:r>
-              <a:t>PROJECT OPTION</a:t>
+              <a:t>ACADEMIC SCHOOL</a:t>
             </a:r>
           </a:p>
           <a:p>
@@ -4866,31 +4940,31 @@
               </a:defRPr>
             </a:pPr>
             <a:r>
-              <a:t>General</a:t>
-            </a:r>
-          </a:p>
-        </p:txBody>
-      </p:sp>
-      <p:sp>
-        <p:nvSpPr>
-          <p:cNvPr id="15" name="Rounded Rectangle 14"/>
+              <a:t>SCOPE (Computer Science &amp; Eng.)</a:t>
+            </a:r>
+          </a:p>
+        </p:txBody>
+      </p:sp>
+      <p:sp>
+        <p:nvSpPr>
+          <p:cNvPr id="17" name="Rounded Rectangle 16"/>
           <p:cNvSpPr/>
           <p:nvPr/>
         </p:nvSpPr>
         <p:spPr>
           <a:xfrm>
-            <a:off x="8101583" y="2606040"/>
-            <a:ext cx="3474720" cy="1188720"/>
+            <a:off x="8138160" y="4297680"/>
+            <a:ext cx="3429000" cy="1234440"/>
           </a:xfrm>
           <a:prstGeom prst="roundRect">
             <a:avLst/>
           </a:prstGeom>
           <a:solidFill>
-            <a:srgbClr val="ECFDF5"/>
+            <a:srgbClr val="F0FDFA"/>
           </a:solidFill>
           <a:ln w="15240">
             <a:solidFill>
-              <a:srgbClr val="E2E8F0"/>
+              <a:srgbClr val="A7F3D0"/>
             </a:solidFill>
           </a:ln>
         </p:spPr>
@@ -4928,37 +5002,37 @@
             <a:pPr>
               <a:defRPr sz="1300" b="1">
                 <a:solidFill>
-                  <a:srgbClr val="059669"/>
-                </a:solidFill>
-                <a:latin typeface="Calibri"/>
-              </a:defRPr>
-            </a:pPr>
-            <a:r>
-              <a:t>Approved by Guide</a:t>
-            </a:r>
-          </a:p>
-        </p:txBody>
-      </p:sp>
-      <p:sp>
-        <p:nvSpPr>
-          <p:cNvPr id="16" name="Rounded Rectangle 15"/>
+                  <a:srgbClr val="4C9F38"/>
+                </a:solidFill>
+                <a:latin typeface="Calibri"/>
+              </a:defRPr>
+            </a:pPr>
+            <a:r>
+              <a:t>Registered &amp; Approved by Guide</a:t>
+            </a:r>
+          </a:p>
+        </p:txBody>
+      </p:sp>
+      <p:sp>
+        <p:nvSpPr>
+          <p:cNvPr id="18" name="Rounded Rectangle 17"/>
           <p:cNvSpPr/>
           <p:nvPr/>
         </p:nvSpPr>
         <p:spPr>
           <a:xfrm>
-            <a:off x="603504" y="3977639"/>
-            <a:ext cx="3474720" cy="1188720"/>
+            <a:off x="731520" y="5532120"/>
+            <a:ext cx="10725912" cy="502920"/>
           </a:xfrm>
           <a:prstGeom prst="roundRect">
             <a:avLst/>
           </a:prstGeom>
           <a:solidFill>
-            <a:srgbClr val="FFFFFF"/>
-          </a:solidFill>
-          <a:ln w="15240">
+            <a:srgbClr val="F0FDFA"/>
+          </a:solidFill>
+          <a:ln w="12700">
             <a:solidFill>
-              <a:srgbClr val="E2E8F0"/>
+              <a:srgbClr val="A7F3D0"/>
             </a:solidFill>
           </a:ln>
         </p:spPr>
@@ -4977,223 +5051,19 @@
           </a:fontRef>
         </p:style>
         <p:txBody>
-          <a:bodyPr rtlCol="0" anchor="ctr" wrap="square"/>
+          <a:bodyPr rtlCol="0" anchor="ctr"/>
           <a:lstStyle/>
           <a:p>
             <a:pPr algn="ctr">
-              <a:defRPr sz="900" b="1">
-                <a:solidFill>
-                  <a:srgbClr val="64748B"/>
-                </a:solidFill>
-                <a:latin typeface="Calibri"/>
-              </a:defRPr>
-            </a:pPr>
-            <a:r>
-              <a:t>STUDENT NAME</a:t>
-            </a:r>
-          </a:p>
-          <a:p>
-            <a:pPr>
-              <a:defRPr sz="1300" b="1">
-                <a:solidFill>
-                  <a:srgbClr val="0F172A"/>
-                </a:solidFill>
-                <a:latin typeface="Calibri"/>
-              </a:defRPr>
-            </a:pPr>
-            <a:r>
-              <a:t>Ashish Anil Sikaria</a:t>
-            </a:r>
-          </a:p>
-        </p:txBody>
-      </p:sp>
-      <p:sp>
-        <p:nvSpPr>
-          <p:cNvPr id="17" name="Rounded Rectangle 16"/>
-          <p:cNvSpPr/>
-          <p:nvPr/>
-        </p:nvSpPr>
-        <p:spPr>
-          <a:xfrm>
-            <a:off x="4352544" y="3977639"/>
-            <a:ext cx="3474720" cy="1188720"/>
-          </a:xfrm>
-          <a:prstGeom prst="roundRect">
-            <a:avLst/>
-          </a:prstGeom>
-          <a:solidFill>
-            <a:srgbClr val="F0F9FF"/>
-          </a:solidFill>
-          <a:ln w="15240">
-            <a:solidFill>
-              <a:srgbClr val="E2E8F0"/>
-            </a:solidFill>
-          </a:ln>
-        </p:spPr>
-        <p:style>
-          <a:lnRef idx="1">
-            <a:schemeClr val="accent1"/>
-          </a:lnRef>
-          <a:fillRef idx="3">
-            <a:schemeClr val="accent1"/>
-          </a:fillRef>
-          <a:effectRef idx="2">
-            <a:schemeClr val="accent1"/>
-          </a:effectRef>
-          <a:fontRef idx="minor">
-            <a:schemeClr val="lt1"/>
-          </a:fontRef>
-        </p:style>
-        <p:txBody>
-          <a:bodyPr rtlCol="0" anchor="ctr" wrap="square"/>
-          <a:lstStyle/>
-          <a:p>
-            <a:pPr algn="ctr">
-              <a:defRPr sz="900" b="1">
-                <a:solidFill>
-                  <a:srgbClr val="64748B"/>
-                </a:solidFill>
-                <a:latin typeface="Calibri"/>
-              </a:defRPr>
-            </a:pPr>
-            <a:r>
-              <a:t>REGISTER NUMBER</a:t>
-            </a:r>
-          </a:p>
-          <a:p>
-            <a:pPr>
-              <a:defRPr sz="1300" b="1">
-                <a:solidFill>
-                  <a:srgbClr val="0369A1"/>
-                </a:solidFill>
-                <a:latin typeface="Calibri"/>
-              </a:defRPr>
-            </a:pPr>
-            <a:r>
-              <a:t>23BCI0218</a:t>
-            </a:r>
-          </a:p>
-        </p:txBody>
-      </p:sp>
-      <p:sp>
-        <p:nvSpPr>
-          <p:cNvPr id="18" name="Rounded Rectangle 17"/>
-          <p:cNvSpPr/>
-          <p:nvPr/>
-        </p:nvSpPr>
-        <p:spPr>
-          <a:xfrm>
-            <a:off x="8101583" y="3977639"/>
-            <a:ext cx="3474720" cy="1188720"/>
-          </a:xfrm>
-          <a:prstGeom prst="roundRect">
-            <a:avLst/>
-          </a:prstGeom>
-          <a:solidFill>
-            <a:srgbClr val="EEF2FF"/>
-          </a:solidFill>
-          <a:ln w="15240">
-            <a:solidFill>
-              <a:srgbClr val="E2E8F0"/>
-            </a:solidFill>
-          </a:ln>
-        </p:spPr>
-        <p:style>
-          <a:lnRef idx="1">
-            <a:schemeClr val="accent1"/>
-          </a:lnRef>
-          <a:fillRef idx="3">
-            <a:schemeClr val="accent1"/>
-          </a:fillRef>
-          <a:effectRef idx="2">
-            <a:schemeClr val="accent1"/>
-          </a:effectRef>
-          <a:fontRef idx="minor">
-            <a:schemeClr val="lt1"/>
-          </a:fontRef>
-        </p:style>
-        <p:txBody>
-          <a:bodyPr rtlCol="0" anchor="ctr" wrap="square"/>
-          <a:lstStyle/>
-          <a:p>
-            <a:pPr algn="ctr">
-              <a:defRPr sz="900" b="1">
-                <a:solidFill>
-                  <a:srgbClr val="64748B"/>
-                </a:solidFill>
-                <a:latin typeface="Calibri"/>
-              </a:defRPr>
-            </a:pPr>
-            <a:r>
-              <a:t>FACULTY GUIDE</a:t>
-            </a:r>
-          </a:p>
-          <a:p>
-            <a:pPr>
-              <a:defRPr sz="1300" b="1">
-                <a:solidFill>
-                  <a:srgbClr val="6366F1"/>
-                </a:solidFill>
-                <a:latin typeface="Calibri"/>
-              </a:defRPr>
-            </a:pPr>
-            <a:r>
-              <a:t>Prof. SELVI M (Emp ID: 16106)</a:t>
-            </a:r>
-          </a:p>
-        </p:txBody>
-      </p:sp>
-      <p:sp>
-        <p:nvSpPr>
-          <p:cNvPr id="19" name="Rounded Rectangle 18"/>
-          <p:cNvSpPr/>
-          <p:nvPr/>
-        </p:nvSpPr>
-        <p:spPr>
-          <a:xfrm>
-            <a:off x="603504" y="5440680"/>
-            <a:ext cx="10972800" cy="502920"/>
-          </a:xfrm>
-          <a:prstGeom prst="roundRect">
-            <a:avLst/>
-          </a:prstGeom>
-          <a:solidFill>
-            <a:srgbClr val="ECFDF5"/>
-          </a:solidFill>
-          <a:ln w="12700">
-            <a:solidFill>
-              <a:srgbClr val="6EE7B7"/>
-            </a:solidFill>
-          </a:ln>
-        </p:spPr>
-        <p:style>
-          <a:lnRef idx="1">
-            <a:schemeClr val="accent1"/>
-          </a:lnRef>
-          <a:fillRef idx="3">
-            <a:schemeClr val="accent1"/>
-          </a:fillRef>
-          <a:effectRef idx="2">
-            <a:schemeClr val="accent1"/>
-          </a:effectRef>
-          <a:fontRef idx="minor">
-            <a:schemeClr val="lt1"/>
-          </a:fontRef>
-        </p:style>
-        <p:txBody>
-          <a:bodyPr rtlCol="0" anchor="ctr"/>
-          <a:lstStyle/>
-          <a:p>
-            <a:pPr algn="ctr">
-              <a:defRPr sz="1100" b="1">
-                <a:solidFill>
-                  <a:srgbClr val="059669"/>
-                </a:solidFill>
-                <a:latin typeface="Calibri"/>
-              </a:defRPr>
-            </a:pPr>
-            <a:r>
-              <a:t>STATUS: Project registered and approved by faculty guide in SCOPE.</a:t>
+              <a:defRPr sz="1050" b="1">
+                <a:solidFill>
+                  <a:srgbClr val="4C9F38"/>
+                </a:solidFill>
+                <a:latin typeface="Calibri"/>
+              </a:defRPr>
+            </a:pPr>
+            <a:r>
+              <a:t>OFFICIAL REGISTRATION VERIFIED: Approved under faculty supervision in SCOPE for Fall 2026-27.</a:t>
             </a:r>
           </a:p>
         </p:txBody>
@@ -5261,20 +5131,105 @@
       </p:sp>
       <p:sp>
         <p:nvSpPr>
-          <p:cNvPr id="3" name="Rectangle 2"/>
+          <p:cNvPr id="3" name="TextBox 2"/>
+          <p:cNvSpPr txBox="1"/>
+          <p:nvPr/>
+        </p:nvSpPr>
+        <p:spPr>
+          <a:xfrm>
+            <a:off x="731520" y="365760"/>
+            <a:ext cx="10725912" cy="274320"/>
+          </a:xfrm>
+          <a:prstGeom prst="rect">
+            <a:avLst/>
+          </a:prstGeom>
+          <a:noFill/>
+        </p:spPr>
+        <p:txBody>
+          <a:bodyPr wrap="square">
+            <a:spAutoFit/>
+          </a:bodyPr>
+          <a:lstStyle/>
+          <a:p>
+            <a:pPr>
+              <a:defRPr sz="950" b="1">
+                <a:solidFill>
+                  <a:srgbClr val="0284C7"/>
+                </a:solidFill>
+                <a:latin typeface="Calibri"/>
+              </a:defRPr>
+            </a:pPr>
+            <a:r>
+              <a:t>MARKET &amp; INDUSTRY CRISIS</a:t>
+            </a:r>
+          </a:p>
+        </p:txBody>
+      </p:sp>
+      <p:sp>
+        <p:nvSpPr>
+          <p:cNvPr id="4" name="TextBox 3"/>
+          <p:cNvSpPr txBox="1"/>
+          <p:nvPr/>
+        </p:nvSpPr>
+        <p:spPr>
+          <a:xfrm>
+            <a:off x="731520" y="621792"/>
+            <a:ext cx="10725912" cy="457200"/>
+          </a:xfrm>
+          <a:prstGeom prst="rect">
+            <a:avLst/>
+          </a:prstGeom>
+          <a:noFill/>
+        </p:spPr>
+        <p:txBody>
+          <a:bodyPr wrap="square">
+            <a:spAutoFit/>
+          </a:bodyPr>
+          <a:lstStyle/>
+          <a:p>
+            <a:pPr>
+              <a:defRPr sz="2200" b="1">
+                <a:solidFill>
+                  <a:srgbClr val="0F172A"/>
+                </a:solidFill>
+                <a:latin typeface="Calibri"/>
+              </a:defRPr>
+            </a:pPr>
+            <a:r>
+              <a:t>The Fundamental Failure of Centralized Healthcare Data</a:t>
+            </a:r>
+          </a:p>
+          <a:p>
+            <a:pPr>
+              <a:defRPr sz="1100">
+                <a:solidFill>
+                  <a:srgbClr val="64748B"/>
+                </a:solidFill>
+                <a:latin typeface="Calibri"/>
+              </a:defRPr>
+            </a:pPr>
+            <a:r>
+              <a:t>Ransomware targets, non-interoperable hospital silos, and zero patient sovereignty.</a:t>
+            </a:r>
+          </a:p>
+        </p:txBody>
+      </p:sp>
+      <p:sp>
+        <p:nvSpPr>
+          <p:cNvPr id="5" name="Rectangle 4"/>
           <p:cNvSpPr/>
           <p:nvPr/>
         </p:nvSpPr>
         <p:spPr>
           <a:xfrm>
-            <a:off x="603504" y="320040"/>
-            <a:ext cx="10972800" cy="27432"/>
+            <a:off x="731520" y="1234440"/>
+            <a:ext cx="10725912" cy="9144"/>
           </a:xfrm>
           <a:prstGeom prst="rect">
             <a:avLst/>
           </a:prstGeom>
           <a:solidFill>
-            <a:srgbClr val="0284C7"/>
+            <a:srgbClr val="E2E8F0"/>
           </a:solidFill>
           <a:ln>
             <a:noFill/>
@@ -5304,50 +5259,14 @@
       </p:sp>
       <p:sp>
         <p:nvSpPr>
-          <p:cNvPr id="4" name="TextBox 3"/>
-          <p:cNvSpPr txBox="1"/>
-          <p:nvPr/>
-        </p:nvSpPr>
-        <p:spPr>
-          <a:xfrm>
-            <a:off x="603504" y="384048"/>
-            <a:ext cx="7315200" cy="256032"/>
-          </a:xfrm>
-          <a:prstGeom prst="rect">
-            <a:avLst/>
-          </a:prstGeom>
-          <a:noFill/>
-        </p:spPr>
-        <p:txBody>
-          <a:bodyPr wrap="square">
-            <a:spAutoFit/>
-          </a:bodyPr>
-          <a:lstStyle/>
-          <a:p>
-            <a:pPr>
-              <a:defRPr sz="950" b="1">
-                <a:solidFill>
-                  <a:srgbClr val="0369A1"/>
-                </a:solidFill>
-                <a:latin typeface="Calibri"/>
-              </a:defRPr>
-            </a:pPr>
-            <a:r>
-              <a:t>HEALTHCARE INDUSTRY PROBLEM STATEMENT</a:t>
-            </a:r>
-          </a:p>
-        </p:txBody>
-      </p:sp>
-      <p:sp>
-        <p:nvSpPr>
-          <p:cNvPr id="5" name="Rectangle 4"/>
+          <p:cNvPr id="6" name="Rectangle 5"/>
           <p:cNvSpPr/>
           <p:nvPr/>
         </p:nvSpPr>
         <p:spPr>
           <a:xfrm>
-            <a:off x="603504" y="658368"/>
-            <a:ext cx="10972800" cy="9144"/>
+            <a:off x="731520" y="6263640"/>
+            <a:ext cx="10725912" cy="9144"/>
           </a:xfrm>
           <a:prstGeom prst="rect">
             <a:avLst/>
@@ -5383,23 +5302,97 @@
       </p:sp>
       <p:sp>
         <p:nvSpPr>
-          <p:cNvPr id="6" name="Rectangle 5"/>
+          <p:cNvPr id="7" name="TextBox 6"/>
+          <p:cNvSpPr txBox="1"/>
+          <p:nvPr/>
+        </p:nvSpPr>
+        <p:spPr>
+          <a:xfrm>
+            <a:off x="731520" y="6327648"/>
+            <a:ext cx="6400800" cy="274320"/>
+          </a:xfrm>
+          <a:prstGeom prst="rect">
+            <a:avLst/>
+          </a:prstGeom>
+          <a:noFill/>
+        </p:spPr>
+        <p:txBody>
+          <a:bodyPr wrap="none">
+            <a:spAutoFit/>
+          </a:bodyPr>
+          <a:lstStyle/>
+          <a:p>
+            <a:pPr>
+              <a:defRPr sz="900">
+                <a:solidFill>
+                  <a:srgbClr val="64748B"/>
+                </a:solidFill>
+                <a:latin typeface="Calibri"/>
+              </a:defRPr>
+            </a:pPr>
+            <a:r>
+              <a:t>CareChain • Ashish Anil Sikaria (23BCI0218) • Guide: Prof. SELVI M • SCOPE</a:t>
+            </a:r>
+          </a:p>
+        </p:txBody>
+      </p:sp>
+      <p:sp>
+        <p:nvSpPr>
+          <p:cNvPr id="8" name="TextBox 7"/>
+          <p:cNvSpPr txBox="1"/>
+          <p:nvPr/>
+        </p:nvSpPr>
+        <p:spPr>
+          <a:xfrm>
+            <a:off x="7772400" y="6327648"/>
+            <a:ext cx="3685032" cy="274320"/>
+          </a:xfrm>
+          <a:prstGeom prst="rect">
+            <a:avLst/>
+          </a:prstGeom>
+          <a:noFill/>
+        </p:spPr>
+        <p:txBody>
+          <a:bodyPr wrap="none">
+            <a:spAutoFit/>
+          </a:bodyPr>
+          <a:lstStyle/>
+          <a:p>
+            <a:pPr algn="r">
+              <a:defRPr sz="900">
+                <a:solidFill>
+                  <a:srgbClr val="64748B"/>
+                </a:solidFill>
+                <a:latin typeface="Calibri"/>
+              </a:defRPr>
+            </a:pPr>
+            <a:r>
+              <a:t>BCSE497J Project - I • Fall 2026-27</a:t>
+            </a:r>
+          </a:p>
+        </p:txBody>
+      </p:sp>
+      <p:sp>
+        <p:nvSpPr>
+          <p:cNvPr id="9" name="Rounded Rectangle 8"/>
           <p:cNvSpPr/>
           <p:nvPr/>
         </p:nvSpPr>
         <p:spPr>
           <a:xfrm>
-            <a:off x="603504" y="6263640"/>
-            <a:ext cx="10972800" cy="9144"/>
-          </a:xfrm>
-          <a:prstGeom prst="rect">
-            <a:avLst/>
-          </a:prstGeom>
-          <a:solidFill>
-            <a:srgbClr val="E2E8F0"/>
-          </a:solidFill>
-          <a:ln>
-            <a:noFill/>
+            <a:off x="731520" y="1463040"/>
+            <a:ext cx="3840480" cy="4480560"/>
+          </a:xfrm>
+          <a:prstGeom prst="roundRect">
+            <a:avLst/>
+          </a:prstGeom>
+          <a:solidFill>
+            <a:srgbClr val="FFF1F2"/>
+          </a:solidFill>
+          <a:ln w="19050">
+            <a:solidFill>
+              <a:srgbClr val="FECDD3"/>
+            </a:solidFill>
           </a:ln>
         </p:spPr>
         <p:style>
@@ -5417,117 +5410,59 @@
           </a:fontRef>
         </p:style>
         <p:txBody>
-          <a:bodyPr rtlCol="0" anchor="ctr"/>
-          <a:lstStyle/>
-          <a:p>
-            <a:pPr algn="ctr"/>
-          </a:p>
-        </p:txBody>
-      </p:sp>
-      <p:sp>
-        <p:nvSpPr>
-          <p:cNvPr id="7" name="TextBox 6"/>
-          <p:cNvSpPr txBox="1"/>
-          <p:nvPr/>
-        </p:nvSpPr>
-        <p:spPr>
-          <a:xfrm>
-            <a:off x="603504" y="6327648"/>
-            <a:ext cx="6858000" cy="274320"/>
-          </a:xfrm>
-          <a:prstGeom prst="rect">
-            <a:avLst/>
-          </a:prstGeom>
-          <a:noFill/>
-        </p:spPr>
-        <p:txBody>
-          <a:bodyPr wrap="none">
-            <a:spAutoFit/>
-          </a:bodyPr>
-          <a:lstStyle/>
+          <a:bodyPr rtlCol="0" anchor="ctr" wrap="square"/>
+          <a:lstStyle/>
+          <a:p>
+            <a:pPr algn="ctr">
+              <a:defRPr sz="950" b="1">
+                <a:solidFill>
+                  <a:srgbClr val="E11D48"/>
+                </a:solidFill>
+                <a:latin typeface="Calibri"/>
+              </a:defRPr>
+            </a:pPr>
+            <a:r>
+              <a:t>HEALTHCARE DATA CRISIS</a:t>
+            </a:r>
+          </a:p>
           <a:p>
             <a:pPr>
-              <a:defRPr sz="900">
-                <a:solidFill>
-                  <a:srgbClr val="64748B"/>
-                </a:solidFill>
-                <a:latin typeface="Calibri"/>
-              </a:defRPr>
-            </a:pPr>
-            <a:r>
-              <a:t>Ashish Anil Sikaria (23BCI0218) • Faculty Guide: Prof. SELVI M • SCOPE</a:t>
-            </a:r>
-          </a:p>
-        </p:txBody>
-      </p:sp>
-      <p:sp>
-        <p:nvSpPr>
-          <p:cNvPr id="8" name="TextBox 7"/>
-          <p:cNvSpPr txBox="1"/>
-          <p:nvPr/>
-        </p:nvSpPr>
-        <p:spPr>
-          <a:xfrm>
-            <a:off x="7772400" y="6327648"/>
-            <a:ext cx="3803904" cy="274320"/>
-          </a:xfrm>
-          <a:prstGeom prst="rect">
-            <a:avLst/>
-          </a:prstGeom>
-          <a:noFill/>
-        </p:spPr>
-        <p:txBody>
-          <a:bodyPr wrap="none">
-            <a:spAutoFit/>
-          </a:bodyPr>
-          <a:lstStyle/>
-          <a:p>
-            <a:pPr algn="r">
-              <a:defRPr sz="900">
-                <a:solidFill>
-                  <a:srgbClr val="64748B"/>
-                </a:solidFill>
-                <a:latin typeface="Calibri"/>
-              </a:defRPr>
-            </a:pPr>
-            <a:r>
-              <a:t>Fall Semester 2026-27</a:t>
-            </a:r>
-          </a:p>
-        </p:txBody>
-      </p:sp>
-      <p:sp>
-        <p:nvSpPr>
-          <p:cNvPr id="9" name="TextBox 8"/>
-          <p:cNvSpPr txBox="1"/>
-          <p:nvPr/>
-        </p:nvSpPr>
-        <p:spPr>
-          <a:xfrm>
-            <a:off x="603504" y="731520"/>
-            <a:ext cx="10972800" cy="411480"/>
-          </a:xfrm>
-          <a:prstGeom prst="rect">
-            <a:avLst/>
-          </a:prstGeom>
-          <a:noFill/>
-        </p:spPr>
-        <p:txBody>
-          <a:bodyPr wrap="none">
-            <a:spAutoFit/>
-          </a:bodyPr>
-          <a:lstStyle/>
+              <a:defRPr sz="4400" b="1">
+                <a:solidFill>
+                  <a:srgbClr val="0F172A"/>
+                </a:solidFill>
+                <a:latin typeface="Calibri"/>
+              </a:defRPr>
+            </a:pPr>
+            <a:r>
+              <a:t>133M+</a:t>
+            </a:r>
+          </a:p>
           <a:p>
             <a:pPr>
-              <a:defRPr sz="2200" b="1">
-                <a:solidFill>
-                  <a:srgbClr val="0F172A"/>
-                </a:solidFill>
-                <a:latin typeface="Calibri"/>
-              </a:defRPr>
-            </a:pPr>
-            <a:r>
-              <a:t>The Crisis of Centralized Electronic Health Records</a:t>
+              <a:defRPr sz="1300" b="1">
+                <a:solidFill>
+                  <a:srgbClr val="E11D48"/>
+                </a:solidFill>
+                <a:latin typeface="Calibri"/>
+              </a:defRPr>
+            </a:pPr>
+            <a:r>
+              <a:t>Patient Records Breached in 2023–2025</a:t>
+            </a:r>
+          </a:p>
+          <a:p>
+            <a:br/>
+            <a:pPr>
+              <a:defRPr sz="1100">
+                <a:solidFill>
+                  <a:srgbClr val="334155"/>
+                </a:solidFill>
+                <a:latin typeface="Calibri"/>
+              </a:defRPr>
+            </a:pPr>
+            <a:r>
+              <a:t>Centralized hospital database servers remain the #1 prime target for global ransomware cartels, causing catastrophic identity leakage and medical fraud.</a:t>
             </a:r>
           </a:p>
         </p:txBody>
@@ -5540,18 +5475,18 @@
         </p:nvSpPr>
         <p:spPr>
           <a:xfrm>
-            <a:off x="603504" y="1234440"/>
-            <a:ext cx="5349240" cy="2148840"/>
+            <a:off x="4754880" y="1463040"/>
+            <a:ext cx="6702552" cy="1371600"/>
           </a:xfrm>
           <a:prstGeom prst="roundRect">
             <a:avLst/>
           </a:prstGeom>
           <a:solidFill>
-            <a:srgbClr val="FFF1F2"/>
+            <a:srgbClr val="FFFBEB"/>
           </a:solidFill>
           <a:ln w="15240">
             <a:solidFill>
-              <a:srgbClr val="FECDD3"/>
+              <a:srgbClr val="FDE68A"/>
             </a:solidFill>
           </a:ln>
         </p:spPr>
@@ -5574,7 +5509,7 @@
           <a:lstStyle/>
           <a:p>
             <a:pPr algn="ctr">
-              <a:defRPr sz="1500" b="1">
+              <a:defRPr sz="1400" b="1">
                 <a:solidFill>
                   <a:srgbClr val="0F172A"/>
                 </a:solidFill>
@@ -5582,7 +5517,7 @@
               </a:defRPr>
             </a:pPr>
             <a:r>
-              <a:t>01  Centralized Honeypots &amp; Breaches</a:t>
+              <a:t>01   Zero Patient Sovereignty</a:t>
             </a:r>
           </a:p>
           <a:p>
@@ -5595,7 +5530,7 @@
               </a:defRPr>
             </a:pPr>
             <a:r>
-              <a:t>Over 133M+ medical records breached in 2023–2025 alone. Centralized hospital databases remain high-value targets for ransomware attacks and unauthorized extraction.</a:t>
+              <a:t>Patients have zero visibility into who accesses, shares, or commercializes their diagnostic records among third-party commercial brokers.</a:t>
             </a:r>
           </a:p>
         </p:txBody>
@@ -5608,18 +5543,18 @@
         </p:nvSpPr>
         <p:spPr>
           <a:xfrm>
-            <a:off x="6227064" y="1234440"/>
-            <a:ext cx="5349240" cy="2148840"/>
+            <a:off x="4754880" y="2999232"/>
+            <a:ext cx="6702552" cy="1371600"/>
           </a:xfrm>
           <a:prstGeom prst="roundRect">
             <a:avLst/>
           </a:prstGeom>
           <a:solidFill>
-            <a:srgbClr val="FFFBEB"/>
+            <a:srgbClr val="F0F9FF"/>
           </a:solidFill>
           <a:ln w="15240">
             <a:solidFill>
-              <a:srgbClr val="FDE68A"/>
+              <a:srgbClr val="BAE6FD"/>
             </a:solidFill>
           </a:ln>
         </p:spPr>
@@ -5642,7 +5577,7 @@
           <a:lstStyle/>
           <a:p>
             <a:pPr algn="ctr">
-              <a:defRPr sz="1500" b="1">
+              <a:defRPr sz="1400" b="1">
                 <a:solidFill>
                   <a:srgbClr val="0F172A"/>
                 </a:solidFill>
@@ -5650,7 +5585,7 @@
               </a:defRPr>
             </a:pPr>
             <a:r>
-              <a:t>02  Zero Patient Sovereignty</a:t>
+              <a:t>02   Fragmented Interoperability Silos</a:t>
             </a:r>
           </a:p>
           <a:p>
@@ -5663,7 +5598,7 @@
               </a:defRPr>
             </a:pPr>
             <a:r>
-              <a:t>Patients have no direct ownership or visibility into who accesses, shares, or commercializes their sensitive diagnostic records among insurance brokers.</a:t>
+              <a:t>Incompatible hospital software systems create life-threatening information blind spots in emergency trauma care, forcing duplicate diagnostics.</a:t>
             </a:r>
           </a:p>
         </p:txBody>
@@ -5676,18 +5611,18 @@
         </p:nvSpPr>
         <p:spPr>
           <a:xfrm>
-            <a:off x="603504" y="3566160"/>
-            <a:ext cx="5349240" cy="2148840"/>
+            <a:off x="4754880" y="4535424"/>
+            <a:ext cx="6702552" cy="1371600"/>
           </a:xfrm>
           <a:prstGeom prst="roundRect">
             <a:avLst/>
           </a:prstGeom>
           <a:solidFill>
-            <a:srgbClr val="F0F9FF"/>
+            <a:srgbClr val="EEF2FF"/>
           </a:solidFill>
           <a:ln w="15240">
             <a:solidFill>
-              <a:srgbClr val="BAE6FD"/>
+              <a:srgbClr val="C7D2FE"/>
             </a:solidFill>
           </a:ln>
         </p:spPr>
@@ -5710,7 +5645,7 @@
           <a:lstStyle/>
           <a:p>
             <a:pPr algn="ctr">
-              <a:defRPr sz="1500" b="1">
+              <a:defRPr sz="1400" b="1">
                 <a:solidFill>
                   <a:srgbClr val="0F172A"/>
                 </a:solidFill>
@@ -5718,7 +5653,7 @@
               </a:defRPr>
             </a:pPr>
             <a:r>
-              <a:t>03  Fragmented Data Silos</a:t>
+              <a:t>03   Lack of Tamper-Evident Audits</a:t>
             </a:r>
           </a:p>
           <a:p>
@@ -5731,75 +5666,7 @@
               </a:defRPr>
             </a:pPr>
             <a:r>
-              <a:t>Incompatible hospital software systems create life-threatening information blind spots during emergency trauma care, resulting in delayed treatments and duplicate testing.</a:t>
-            </a:r>
-          </a:p>
-        </p:txBody>
-      </p:sp>
-      <p:sp>
-        <p:nvSpPr>
-          <p:cNvPr id="13" name="Rounded Rectangle 12"/>
-          <p:cNvSpPr/>
-          <p:nvPr/>
-        </p:nvSpPr>
-        <p:spPr>
-          <a:xfrm>
-            <a:off x="6227064" y="3566160"/>
-            <a:ext cx="5349240" cy="2148840"/>
-          </a:xfrm>
-          <a:prstGeom prst="roundRect">
-            <a:avLst/>
-          </a:prstGeom>
-          <a:solidFill>
-            <a:srgbClr val="EEF2FF"/>
-          </a:solidFill>
-          <a:ln w="15240">
-            <a:solidFill>
-              <a:srgbClr val="DDD6FE"/>
-            </a:solidFill>
-          </a:ln>
-        </p:spPr>
-        <p:style>
-          <a:lnRef idx="1">
-            <a:schemeClr val="accent1"/>
-          </a:lnRef>
-          <a:fillRef idx="3">
-            <a:schemeClr val="accent1"/>
-          </a:fillRef>
-          <a:effectRef idx="2">
-            <a:schemeClr val="accent1"/>
-          </a:effectRef>
-          <a:fontRef idx="minor">
-            <a:schemeClr val="lt1"/>
-          </a:fontRef>
-        </p:style>
-        <p:txBody>
-          <a:bodyPr rtlCol="0" anchor="ctr" wrap="square"/>
-          <a:lstStyle/>
-          <a:p>
-            <a:pPr algn="ctr">
-              <a:defRPr sz="1500" b="1">
-                <a:solidFill>
-                  <a:srgbClr val="0F172A"/>
-                </a:solidFill>
-                <a:latin typeface="Calibri"/>
-              </a:defRPr>
-            </a:pPr>
-            <a:r>
-              <a:t>04  Lack of Tamper-Evident Audits</a:t>
-            </a:r>
-          </a:p>
-          <a:p>
-            <a:pPr>
-              <a:defRPr sz="1100">
-                <a:solidFill>
-                  <a:srgbClr val="334155"/>
-                </a:solidFill>
-                <a:latin typeface="Calibri"/>
-              </a:defRPr>
-            </a:pPr>
-            <a:r>
-              <a:t>Legacy systems lack cryptographic non-repudiation, permitting unauthorized retrospective alterations of diagnostic records and untraceable access logs.</a:t>
+              <a:t>Legacy relational databases lack cryptographic non-repudiation, allowing retrospective record alterations and untraceable access logs.</a:t>
             </a:r>
           </a:p>
         </p:txBody>
@@ -5867,20 +5734,105 @@
       </p:sp>
       <p:sp>
         <p:nvSpPr>
-          <p:cNvPr id="3" name="Rectangle 2"/>
+          <p:cNvPr id="3" name="TextBox 2"/>
+          <p:cNvSpPr txBox="1"/>
+          <p:nvPr/>
+        </p:nvSpPr>
+        <p:spPr>
+          <a:xfrm>
+            <a:off x="731520" y="365760"/>
+            <a:ext cx="10725912" cy="274320"/>
+          </a:xfrm>
+          <a:prstGeom prst="rect">
+            <a:avLst/>
+          </a:prstGeom>
+          <a:noFill/>
+        </p:spPr>
+        <p:txBody>
+          <a:bodyPr wrap="square">
+            <a:spAutoFit/>
+          </a:bodyPr>
+          <a:lstStyle/>
+          <a:p>
+            <a:pPr>
+              <a:defRPr sz="950" b="1">
+                <a:solidFill>
+                  <a:srgbClr val="0284C7"/>
+                </a:solidFill>
+                <a:latin typeface="Calibri"/>
+              </a:defRPr>
+            </a:pPr>
+            <a:r>
+              <a:t>TECHNICAL ARCHITECTURE</a:t>
+            </a:r>
+          </a:p>
+        </p:txBody>
+      </p:sp>
+      <p:sp>
+        <p:nvSpPr>
+          <p:cNvPr id="4" name="TextBox 3"/>
+          <p:cNvSpPr txBox="1"/>
+          <p:nvPr/>
+        </p:nvSpPr>
+        <p:spPr>
+          <a:xfrm>
+            <a:off x="731520" y="621792"/>
+            <a:ext cx="10725912" cy="457200"/>
+          </a:xfrm>
+          <a:prstGeom prst="rect">
+            <a:avLst/>
+          </a:prstGeom>
+          <a:noFill/>
+        </p:spPr>
+        <p:txBody>
+          <a:bodyPr wrap="square">
+            <a:spAutoFit/>
+          </a:bodyPr>
+          <a:lstStyle/>
+          <a:p>
+            <a:pPr>
+              <a:defRPr sz="2200" b="1">
+                <a:solidFill>
+                  <a:srgbClr val="0F172A"/>
+                </a:solidFill>
+                <a:latin typeface="Calibri"/>
+              </a:defRPr>
+            </a:pPr>
+            <a:r>
+              <a:t>The CareChain Zero-Trust Healthcare Protocol</a:t>
+            </a:r>
+          </a:p>
+          <a:p>
+            <a:pPr>
+              <a:defRPr sz="1100">
+                <a:solidFill>
+                  <a:srgbClr val="64748B"/>
+                </a:solidFill>
+                <a:latin typeface="Calibri"/>
+              </a:defRPr>
+            </a:pPr>
+            <a:r>
+              <a:t>A layered Web2/Web3 architecture separating cryptography, decentralized storage, and access control.</a:t>
+            </a:r>
+          </a:p>
+        </p:txBody>
+      </p:sp>
+      <p:sp>
+        <p:nvSpPr>
+          <p:cNvPr id="5" name="Rectangle 4"/>
           <p:cNvSpPr/>
           <p:nvPr/>
         </p:nvSpPr>
         <p:spPr>
           <a:xfrm>
-            <a:off x="603504" y="320040"/>
-            <a:ext cx="10972800" cy="27432"/>
+            <a:off x="731520" y="1234440"/>
+            <a:ext cx="10725912" cy="9144"/>
           </a:xfrm>
           <a:prstGeom prst="rect">
             <a:avLst/>
           </a:prstGeom>
           <a:solidFill>
-            <a:srgbClr val="0284C7"/>
+            <a:srgbClr val="E2E8F0"/>
           </a:solidFill>
           <a:ln>
             <a:noFill/>
@@ -5910,50 +5862,14 @@
       </p:sp>
       <p:sp>
         <p:nvSpPr>
-          <p:cNvPr id="4" name="TextBox 3"/>
-          <p:cNvSpPr txBox="1"/>
-          <p:nvPr/>
-        </p:nvSpPr>
-        <p:spPr>
-          <a:xfrm>
-            <a:off x="603504" y="384048"/>
-            <a:ext cx="7315200" cy="256032"/>
-          </a:xfrm>
-          <a:prstGeom prst="rect">
-            <a:avLst/>
-          </a:prstGeom>
-          <a:noFill/>
-        </p:spPr>
-        <p:txBody>
-          <a:bodyPr wrap="square">
-            <a:spAutoFit/>
-          </a:bodyPr>
-          <a:lstStyle/>
-          <a:p>
-            <a:pPr>
-              <a:defRPr sz="950" b="1">
-                <a:solidFill>
-                  <a:srgbClr val="0369A1"/>
-                </a:solidFill>
-                <a:latin typeface="Calibri"/>
-              </a:defRPr>
-            </a:pPr>
-            <a:r>
-              <a:t>ZERO-TRUST ARCHITECTURE &amp; TECHNICAL SOLUTION</a:t>
-            </a:r>
-          </a:p>
-        </p:txBody>
-      </p:sp>
-      <p:sp>
-        <p:nvSpPr>
-          <p:cNvPr id="5" name="Rectangle 4"/>
+          <p:cNvPr id="6" name="Rectangle 5"/>
           <p:cNvSpPr/>
           <p:nvPr/>
         </p:nvSpPr>
         <p:spPr>
           <a:xfrm>
-            <a:off x="603504" y="658368"/>
-            <a:ext cx="10972800" cy="9144"/>
+            <a:off x="731520" y="6263640"/>
+            <a:ext cx="10725912" cy="9144"/>
           </a:xfrm>
           <a:prstGeom prst="rect">
             <a:avLst/>
@@ -5989,23 +5905,97 @@
       </p:sp>
       <p:sp>
         <p:nvSpPr>
-          <p:cNvPr id="6" name="Rectangle 5"/>
+          <p:cNvPr id="7" name="TextBox 6"/>
+          <p:cNvSpPr txBox="1"/>
+          <p:nvPr/>
+        </p:nvSpPr>
+        <p:spPr>
+          <a:xfrm>
+            <a:off x="731520" y="6327648"/>
+            <a:ext cx="6400800" cy="274320"/>
+          </a:xfrm>
+          <a:prstGeom prst="rect">
+            <a:avLst/>
+          </a:prstGeom>
+          <a:noFill/>
+        </p:spPr>
+        <p:txBody>
+          <a:bodyPr wrap="none">
+            <a:spAutoFit/>
+          </a:bodyPr>
+          <a:lstStyle/>
+          <a:p>
+            <a:pPr>
+              <a:defRPr sz="900">
+                <a:solidFill>
+                  <a:srgbClr val="64748B"/>
+                </a:solidFill>
+                <a:latin typeface="Calibri"/>
+              </a:defRPr>
+            </a:pPr>
+            <a:r>
+              <a:t>CareChain • Ashish Anil Sikaria (23BCI0218) • Guide: Prof. SELVI M • SCOPE</a:t>
+            </a:r>
+          </a:p>
+        </p:txBody>
+      </p:sp>
+      <p:sp>
+        <p:nvSpPr>
+          <p:cNvPr id="8" name="TextBox 7"/>
+          <p:cNvSpPr txBox="1"/>
+          <p:nvPr/>
+        </p:nvSpPr>
+        <p:spPr>
+          <a:xfrm>
+            <a:off x="7772400" y="6327648"/>
+            <a:ext cx="3685032" cy="274320"/>
+          </a:xfrm>
+          <a:prstGeom prst="rect">
+            <a:avLst/>
+          </a:prstGeom>
+          <a:noFill/>
+        </p:spPr>
+        <p:txBody>
+          <a:bodyPr wrap="none">
+            <a:spAutoFit/>
+          </a:bodyPr>
+          <a:lstStyle/>
+          <a:p>
+            <a:pPr algn="r">
+              <a:defRPr sz="900">
+                <a:solidFill>
+                  <a:srgbClr val="64748B"/>
+                </a:solidFill>
+                <a:latin typeface="Calibri"/>
+              </a:defRPr>
+            </a:pPr>
+            <a:r>
+              <a:t>BCSE497J Project - I • Fall 2026-27</a:t>
+            </a:r>
+          </a:p>
+        </p:txBody>
+      </p:sp>
+      <p:sp>
+        <p:nvSpPr>
+          <p:cNvPr id="9" name="Rounded Rectangle 8"/>
           <p:cNvSpPr/>
           <p:nvPr/>
         </p:nvSpPr>
         <p:spPr>
           <a:xfrm>
-            <a:off x="603504" y="6263640"/>
-            <a:ext cx="10972800" cy="9144"/>
-          </a:xfrm>
-          <a:prstGeom prst="rect">
-            <a:avLst/>
-          </a:prstGeom>
-          <a:solidFill>
-            <a:srgbClr val="E2E8F0"/>
-          </a:solidFill>
-          <a:ln>
-            <a:noFill/>
+            <a:off x="731520" y="1463040"/>
+            <a:ext cx="3429000" cy="3931920"/>
+          </a:xfrm>
+          <a:prstGeom prst="roundRect">
+            <a:avLst/>
+          </a:prstGeom>
+          <a:solidFill>
+            <a:srgbClr val="F0F9FF"/>
+          </a:solidFill>
+          <a:ln w="15240">
+            <a:solidFill>
+              <a:srgbClr val="BAE6FD"/>
+            </a:solidFill>
           </a:ln>
         </p:spPr>
         <p:style>
@@ -6023,117 +6013,46 @@
           </a:fontRef>
         </p:style>
         <p:txBody>
-          <a:bodyPr rtlCol="0" anchor="ctr"/>
-          <a:lstStyle/>
-          <a:p>
-            <a:pPr algn="ctr"/>
-          </a:p>
-        </p:txBody>
-      </p:sp>
-      <p:sp>
-        <p:nvSpPr>
-          <p:cNvPr id="7" name="TextBox 6"/>
-          <p:cNvSpPr txBox="1"/>
-          <p:nvPr/>
-        </p:nvSpPr>
-        <p:spPr>
-          <a:xfrm>
-            <a:off x="603504" y="6327648"/>
-            <a:ext cx="6858000" cy="274320"/>
-          </a:xfrm>
-          <a:prstGeom prst="rect">
-            <a:avLst/>
-          </a:prstGeom>
-          <a:noFill/>
-        </p:spPr>
-        <p:txBody>
-          <a:bodyPr wrap="none">
-            <a:spAutoFit/>
-          </a:bodyPr>
-          <a:lstStyle/>
+          <a:bodyPr rtlCol="0" anchor="ctr" wrap="square"/>
+          <a:lstStyle/>
+          <a:p>
+            <a:pPr algn="ctr">
+              <a:defRPr sz="850" b="1">
+                <a:solidFill>
+                  <a:srgbClr val="0369A1"/>
+                </a:solidFill>
+                <a:latin typeface="Calibri"/>
+              </a:defRPr>
+            </a:pPr>
+            <a:r>
+              <a:t>LAYER 01 : CLIENT PRIVACY</a:t>
+            </a:r>
+          </a:p>
           <a:p>
             <a:pPr>
-              <a:defRPr sz="900">
-                <a:solidFill>
-                  <a:srgbClr val="64748B"/>
-                </a:solidFill>
-                <a:latin typeface="Calibri"/>
-              </a:defRPr>
-            </a:pPr>
-            <a:r>
-              <a:t>Ashish Anil Sikaria (23BCI0218) • Faculty Guide: Prof. SELVI M • SCOPE</a:t>
-            </a:r>
-          </a:p>
-        </p:txBody>
-      </p:sp>
-      <p:sp>
-        <p:nvSpPr>
-          <p:cNvPr id="8" name="TextBox 7"/>
-          <p:cNvSpPr txBox="1"/>
-          <p:nvPr/>
-        </p:nvSpPr>
-        <p:spPr>
-          <a:xfrm>
-            <a:off x="7772400" y="6327648"/>
-            <a:ext cx="3803904" cy="274320"/>
-          </a:xfrm>
-          <a:prstGeom prst="rect">
-            <a:avLst/>
-          </a:prstGeom>
-          <a:noFill/>
-        </p:spPr>
-        <p:txBody>
-          <a:bodyPr wrap="none">
-            <a:spAutoFit/>
-          </a:bodyPr>
-          <a:lstStyle/>
-          <a:p>
-            <a:pPr algn="r">
-              <a:defRPr sz="900">
-                <a:solidFill>
-                  <a:srgbClr val="64748B"/>
-                </a:solidFill>
-                <a:latin typeface="Calibri"/>
-              </a:defRPr>
-            </a:pPr>
-            <a:r>
-              <a:t>Fall Semester 2026-27</a:t>
-            </a:r>
-          </a:p>
-        </p:txBody>
-      </p:sp>
-      <p:sp>
-        <p:nvSpPr>
-          <p:cNvPr id="9" name="TextBox 8"/>
-          <p:cNvSpPr txBox="1"/>
-          <p:nvPr/>
-        </p:nvSpPr>
-        <p:spPr>
-          <a:xfrm>
-            <a:off x="603504" y="731520"/>
-            <a:ext cx="10972800" cy="411480"/>
-          </a:xfrm>
-          <a:prstGeom prst="rect">
-            <a:avLst/>
-          </a:prstGeom>
-          <a:noFill/>
-        </p:spPr>
-        <p:txBody>
-          <a:bodyPr wrap="none">
-            <a:spAutoFit/>
-          </a:bodyPr>
-          <a:lstStyle/>
-          <a:p>
+              <a:defRPr sz="1600" b="1">
+                <a:solidFill>
+                  <a:srgbClr val="0F172A"/>
+                </a:solidFill>
+                <a:latin typeface="Calibri"/>
+              </a:defRPr>
+            </a:pPr>
+            <a:r>
+              <a:t>AES-256-GCM Encryption</a:t>
+            </a:r>
+          </a:p>
+          <a:p>
+            <a:br/>
             <a:pPr>
-              <a:defRPr sz="2200" b="1">
-                <a:solidFill>
-                  <a:srgbClr val="0F172A"/>
-                </a:solidFill>
-                <a:latin typeface="Calibri"/>
-              </a:defRPr>
-            </a:pPr>
-            <a:r>
-              <a:t>The CareChain Solution: Hybrid Web2/Web3 Protocol</a:t>
+              <a:defRPr sz="1150">
+                <a:solidFill>
+                  <a:srgbClr val="334155"/>
+                </a:solidFill>
+                <a:latin typeface="Calibri"/>
+              </a:defRPr>
+            </a:pPr>
+            <a:r>
+              <a:t>All medical files and diagnostic scans are encrypted locally in the browser with unique 256-bit symmetric keys, 12-byte IVs, and 16-byte auth tags before leaving the device.</a:t>
             </a:r>
           </a:p>
         </p:txBody>
@@ -6146,18 +6065,18 @@
         </p:nvSpPr>
         <p:spPr>
           <a:xfrm>
-            <a:off x="603504" y="1234440"/>
-            <a:ext cx="3474720" cy="3931920"/>
+            <a:off x="4434840" y="1463040"/>
+            <a:ext cx="3429000" cy="3931920"/>
           </a:xfrm>
           <a:prstGeom prst="roundRect">
             <a:avLst/>
           </a:prstGeom>
           <a:solidFill>
-            <a:srgbClr val="F0F9FF"/>
+            <a:srgbClr val="EEF2FF"/>
           </a:solidFill>
           <a:ln w="15240">
             <a:solidFill>
-              <a:srgbClr val="BAE6FD"/>
+              <a:srgbClr val="C7D2FE"/>
             </a:solidFill>
           </a:ln>
         </p:spPr>
@@ -6180,15 +6099,15 @@
           <a:lstStyle/>
           <a:p>
             <a:pPr algn="ctr">
-              <a:defRPr sz="900" b="1">
-                <a:solidFill>
-                  <a:srgbClr val="0369A1"/>
-                </a:solidFill>
-                <a:latin typeface="Calibri"/>
-              </a:defRPr>
-            </a:pPr>
-            <a:r>
-              <a:t>ENCRYPTION LAYER</a:t>
+              <a:defRPr sz="850" b="1">
+                <a:solidFill>
+                  <a:srgbClr val="00689D"/>
+                </a:solidFill>
+                <a:latin typeface="Calibri"/>
+              </a:defRPr>
+            </a:pPr>
+            <a:r>
+              <a:t>LAYER 02 : DECENTRALIZED PINNING</a:t>
             </a:r>
           </a:p>
           <a:p>
@@ -6201,10 +6120,11 @@
               </a:defRPr>
             </a:pPr>
             <a:r>
-              <a:t>Client AES-256-GCM</a:t>
-            </a:r>
-          </a:p>
-          <a:p>
+              <a:t>IPFS Storage Protocol</a:t>
+            </a:r>
+          </a:p>
+          <a:p>
+            <a:br/>
             <a:pPr>
               <a:defRPr sz="1150">
                 <a:solidFill>
@@ -6214,7 +6134,7 @@
               </a:defRPr>
             </a:pPr>
             <a:r>
-              <a:t>All health files and diagnostic reports are encrypted with unique 256-bit symmetric keys, 12-byte IVs, and 16-byte authentication tags before transmission.</a:t>
+              <a:t>Encrypted ciphertexts are pinned across decentralized IPFS nodes, generating immutable Content Identifiers (CIDs). Zero Protected Health Information (PHI) is ever exposed on-chain.</a:t>
             </a:r>
           </a:p>
         </p:txBody>
@@ -6227,18 +6147,18 @@
         </p:nvSpPr>
         <p:spPr>
           <a:xfrm>
-            <a:off x="4352544" y="1234440"/>
-            <a:ext cx="3474720" cy="3931920"/>
+            <a:off x="8138160" y="1463040"/>
+            <a:ext cx="3429000" cy="3931920"/>
           </a:xfrm>
           <a:prstGeom prst="roundRect">
             <a:avLst/>
           </a:prstGeom>
           <a:solidFill>
-            <a:srgbClr val="EEF2FF"/>
+            <a:srgbClr val="F0FDFA"/>
           </a:solidFill>
           <a:ln w="15240">
             <a:solidFill>
-              <a:srgbClr val="DDD6FE"/>
+              <a:srgbClr val="A7F3D0"/>
             </a:solidFill>
           </a:ln>
         </p:spPr>
@@ -6261,15 +6181,15 @@
           <a:lstStyle/>
           <a:p>
             <a:pPr algn="ctr">
-              <a:defRPr sz="900" b="1">
-                <a:solidFill>
-                  <a:srgbClr val="6366F1"/>
-                </a:solidFill>
-                <a:latin typeface="Calibri"/>
-              </a:defRPr>
-            </a:pPr>
-            <a:r>
-              <a:t>DECENTRALIZED STORAGE</a:t>
+              <a:defRPr sz="850" b="1">
+                <a:solidFill>
+                  <a:srgbClr val="4C9F38"/>
+                </a:solidFill>
+                <a:latin typeface="Calibri"/>
+              </a:defRPr>
+            </a:pPr>
+            <a:r>
+              <a:t>LAYER 03 : ACCESS GOVERNANCE</a:t>
             </a:r>
           </a:p>
           <a:p>
@@ -6282,10 +6202,11 @@
               </a:defRPr>
             </a:pPr>
             <a:r>
-              <a:t>IPFS Distributed Pinning</a:t>
-            </a:r>
-          </a:p>
-          <a:p>
+              <a:t>Smart Contract RBAC</a:t>
+            </a:r>
+          </a:p>
+          <a:p>
+            <a:br/>
             <a:pPr>
               <a:defRPr sz="1150">
                 <a:solidFill>
@@ -6295,7 +6216,7 @@
               </a:defRPr>
             </a:pPr>
             <a:r>
-              <a:t>Encrypted ciphertexts are pinned across decentralized IPFS nodes, generating immutable Content Identifiers (CIDs). Zero Protected Health Information (PHI) is stored on-chain.</a:t>
+              <a:t>Solidity contracts enforce isolated patient access matrices (doctorPermissions[p][d]) and emit indexed blockchain events for an immutable regulatory audit trail.</a:t>
             </a:r>
           </a:p>
         </p:txBody>
@@ -6308,89 +6229,8 @@
         </p:nvSpPr>
         <p:spPr>
           <a:xfrm>
-            <a:off x="8101583" y="1234440"/>
-            <a:ext cx="3474720" cy="3931920"/>
-          </a:xfrm>
-          <a:prstGeom prst="roundRect">
-            <a:avLst/>
-          </a:prstGeom>
-          <a:solidFill>
-            <a:srgbClr val="ECFDF5"/>
-          </a:solidFill>
-          <a:ln w="15240">
-            <a:solidFill>
-              <a:srgbClr val="A7F3D0"/>
-            </a:solidFill>
-          </a:ln>
-        </p:spPr>
-        <p:style>
-          <a:lnRef idx="1">
-            <a:schemeClr val="accent1"/>
-          </a:lnRef>
-          <a:fillRef idx="3">
-            <a:schemeClr val="accent1"/>
-          </a:fillRef>
-          <a:effectRef idx="2">
-            <a:schemeClr val="accent1"/>
-          </a:effectRef>
-          <a:fontRef idx="minor">
-            <a:schemeClr val="lt1"/>
-          </a:fontRef>
-        </p:style>
-        <p:txBody>
-          <a:bodyPr rtlCol="0" anchor="ctr" wrap="square"/>
-          <a:lstStyle/>
-          <a:p>
-            <a:pPr algn="ctr">
-              <a:defRPr sz="900" b="1">
-                <a:solidFill>
-                  <a:srgbClr val="059669"/>
-                </a:solidFill>
-                <a:latin typeface="Calibri"/>
-              </a:defRPr>
-            </a:pPr>
-            <a:r>
-              <a:t>ACCESS CONTROL</a:t>
-            </a:r>
-          </a:p>
-          <a:p>
-            <a:pPr>
-              <a:defRPr sz="1600" b="1">
-                <a:solidFill>
-                  <a:srgbClr val="0F172A"/>
-                </a:solidFill>
-                <a:latin typeface="Calibri"/>
-              </a:defRPr>
-            </a:pPr>
-            <a:r>
-              <a:t>Smart Contract RBAC</a:t>
-            </a:r>
-          </a:p>
-          <a:p>
-            <a:pPr>
-              <a:defRPr sz="1150">
-                <a:solidFill>
-                  <a:srgbClr val="334155"/>
-                </a:solidFill>
-                <a:latin typeface="Calibri"/>
-              </a:defRPr>
-            </a:pPr>
-            <a:r>
-              <a:t>Solidity smart contracts enforce isolated patient access matrices (doctorPermissions[p][d]) and emit indexed events for verifiable on-chain audit trails.</a:t>
-            </a:r>
-          </a:p>
-        </p:txBody>
-      </p:sp>
-      <p:sp>
-        <p:nvSpPr>
-          <p:cNvPr id="13" name="Rounded Rectangle 12"/>
-          <p:cNvSpPr/>
-          <p:nvPr/>
-        </p:nvSpPr>
-        <p:spPr>
-          <a:xfrm>
-            <a:off x="603504" y="5394960"/>
-            <a:ext cx="10972800" cy="548640"/>
+            <a:off x="731520" y="5532120"/>
+            <a:ext cx="10725912" cy="502920"/>
           </a:xfrm>
           <a:prstGeom prst="roundRect">
             <a:avLst/>
@@ -6499,20 +6339,105 @@
       </p:sp>
       <p:sp>
         <p:nvSpPr>
-          <p:cNvPr id="3" name="Rectangle 2"/>
+          <p:cNvPr id="3" name="TextBox 2"/>
+          <p:cNvSpPr txBox="1"/>
+          <p:nvPr/>
+        </p:nvSpPr>
+        <p:spPr>
+          <a:xfrm>
+            <a:off x="731520" y="365760"/>
+            <a:ext cx="10725912" cy="274320"/>
+          </a:xfrm>
+          <a:prstGeom prst="rect">
+            <a:avLst/>
+          </a:prstGeom>
+          <a:noFill/>
+        </p:spPr>
+        <p:txBody>
+          <a:bodyPr wrap="square">
+            <a:spAutoFit/>
+          </a:bodyPr>
+          <a:lstStyle/>
+          <a:p>
+            <a:pPr>
+              <a:defRPr sz="950" b="1">
+                <a:solidFill>
+                  <a:srgbClr val="0284C7"/>
+                </a:solidFill>
+                <a:latin typeface="Calibri"/>
+              </a:defRPr>
+            </a:pPr>
+            <a:r>
+              <a:t>GLOBAL SUSTAINABILITY IMPACT</a:t>
+            </a:r>
+          </a:p>
+        </p:txBody>
+      </p:sp>
+      <p:sp>
+        <p:nvSpPr>
+          <p:cNvPr id="4" name="TextBox 3"/>
+          <p:cNvSpPr txBox="1"/>
+          <p:nvPr/>
+        </p:nvSpPr>
+        <p:spPr>
+          <a:xfrm>
+            <a:off x="731520" y="621792"/>
+            <a:ext cx="10725912" cy="457200"/>
+          </a:xfrm>
+          <a:prstGeom prst="rect">
+            <a:avLst/>
+          </a:prstGeom>
+          <a:noFill/>
+        </p:spPr>
+        <p:txBody>
+          <a:bodyPr wrap="square">
+            <a:spAutoFit/>
+          </a:bodyPr>
+          <a:lstStyle/>
+          <a:p>
+            <a:pPr>
+              <a:defRPr sz="2200" b="1">
+                <a:solidFill>
+                  <a:srgbClr val="0F172A"/>
+                </a:solidFill>
+                <a:latin typeface="Calibri"/>
+              </a:defRPr>
+            </a:pPr>
+            <a:r>
+              <a:t>Alignment with UN Sustainable Development Goals (SDGs)</a:t>
+            </a:r>
+          </a:p>
+          <a:p>
+            <a:pPr>
+              <a:defRPr sz="1100">
+                <a:solidFill>
+                  <a:srgbClr val="64748B"/>
+                </a:solidFill>
+                <a:latin typeface="Calibri"/>
+              </a:defRPr>
+            </a:pPr>
+            <a:r>
+              <a:t>CareChain directly contributes to 4 major United Nations 2030 Agenda targets.</a:t>
+            </a:r>
+          </a:p>
+        </p:txBody>
+      </p:sp>
+      <p:sp>
+        <p:nvSpPr>
+          <p:cNvPr id="5" name="Rectangle 4"/>
           <p:cNvSpPr/>
           <p:nvPr/>
         </p:nvSpPr>
         <p:spPr>
           <a:xfrm>
-            <a:off x="603504" y="320040"/>
-            <a:ext cx="10972800" cy="27432"/>
+            <a:off x="731520" y="1234440"/>
+            <a:ext cx="10725912" cy="9144"/>
           </a:xfrm>
           <a:prstGeom prst="rect">
             <a:avLst/>
           </a:prstGeom>
           <a:solidFill>
-            <a:srgbClr val="0284C7"/>
+            <a:srgbClr val="E2E8F0"/>
           </a:solidFill>
           <a:ln>
             <a:noFill/>
@@ -6542,50 +6467,14 @@
       </p:sp>
       <p:sp>
         <p:nvSpPr>
-          <p:cNvPr id="4" name="TextBox 3"/>
-          <p:cNvSpPr txBox="1"/>
-          <p:nvPr/>
-        </p:nvSpPr>
-        <p:spPr>
-          <a:xfrm>
-            <a:off x="603504" y="384048"/>
-            <a:ext cx="7315200" cy="256032"/>
-          </a:xfrm>
-          <a:prstGeom prst="rect">
-            <a:avLst/>
-          </a:prstGeom>
-          <a:noFill/>
-        </p:spPr>
-        <p:txBody>
-          <a:bodyPr wrap="square">
-            <a:spAutoFit/>
-          </a:bodyPr>
-          <a:lstStyle/>
-          <a:p>
-            <a:pPr>
-              <a:defRPr sz="950" b="1">
-                <a:solidFill>
-                  <a:srgbClr val="0369A1"/>
-                </a:solidFill>
-                <a:latin typeface="Calibri"/>
-              </a:defRPr>
-            </a:pPr>
-            <a:r>
-              <a:t>UNITED NATIONS 2030 AGENDA ALIGNMENT</a:t>
-            </a:r>
-          </a:p>
-        </p:txBody>
-      </p:sp>
-      <p:sp>
-        <p:nvSpPr>
-          <p:cNvPr id="5" name="Rectangle 4"/>
+          <p:cNvPr id="6" name="Rectangle 5"/>
           <p:cNvSpPr/>
           <p:nvPr/>
         </p:nvSpPr>
         <p:spPr>
           <a:xfrm>
-            <a:off x="603504" y="658368"/>
-            <a:ext cx="10972800" cy="9144"/>
+            <a:off x="731520" y="6263640"/>
+            <a:ext cx="10725912" cy="9144"/>
           </a:xfrm>
           <a:prstGeom prst="rect">
             <a:avLst/>
@@ -6621,23 +6510,97 @@
       </p:sp>
       <p:sp>
         <p:nvSpPr>
-          <p:cNvPr id="6" name="Rectangle 5"/>
+          <p:cNvPr id="7" name="TextBox 6"/>
+          <p:cNvSpPr txBox="1"/>
+          <p:nvPr/>
+        </p:nvSpPr>
+        <p:spPr>
+          <a:xfrm>
+            <a:off x="731520" y="6327648"/>
+            <a:ext cx="6400800" cy="274320"/>
+          </a:xfrm>
+          <a:prstGeom prst="rect">
+            <a:avLst/>
+          </a:prstGeom>
+          <a:noFill/>
+        </p:spPr>
+        <p:txBody>
+          <a:bodyPr wrap="none">
+            <a:spAutoFit/>
+          </a:bodyPr>
+          <a:lstStyle/>
+          <a:p>
+            <a:pPr>
+              <a:defRPr sz="900">
+                <a:solidFill>
+                  <a:srgbClr val="64748B"/>
+                </a:solidFill>
+                <a:latin typeface="Calibri"/>
+              </a:defRPr>
+            </a:pPr>
+            <a:r>
+              <a:t>CareChain • Ashish Anil Sikaria (23BCI0218) • Guide: Prof. SELVI M • SCOPE</a:t>
+            </a:r>
+          </a:p>
+        </p:txBody>
+      </p:sp>
+      <p:sp>
+        <p:nvSpPr>
+          <p:cNvPr id="8" name="TextBox 7"/>
+          <p:cNvSpPr txBox="1"/>
+          <p:nvPr/>
+        </p:nvSpPr>
+        <p:spPr>
+          <a:xfrm>
+            <a:off x="7772400" y="6327648"/>
+            <a:ext cx="3685032" cy="274320"/>
+          </a:xfrm>
+          <a:prstGeom prst="rect">
+            <a:avLst/>
+          </a:prstGeom>
+          <a:noFill/>
+        </p:spPr>
+        <p:txBody>
+          <a:bodyPr wrap="none">
+            <a:spAutoFit/>
+          </a:bodyPr>
+          <a:lstStyle/>
+          <a:p>
+            <a:pPr algn="r">
+              <a:defRPr sz="900">
+                <a:solidFill>
+                  <a:srgbClr val="64748B"/>
+                </a:solidFill>
+                <a:latin typeface="Calibri"/>
+              </a:defRPr>
+            </a:pPr>
+            <a:r>
+              <a:t>BCSE497J Project - I • Fall 2026-27</a:t>
+            </a:r>
+          </a:p>
+        </p:txBody>
+      </p:sp>
+      <p:sp>
+        <p:nvSpPr>
+          <p:cNvPr id="9" name="Rounded Rectangle 8"/>
           <p:cNvSpPr/>
           <p:nvPr/>
         </p:nvSpPr>
         <p:spPr>
           <a:xfrm>
-            <a:off x="603504" y="6263640"/>
-            <a:ext cx="10972800" cy="9144"/>
-          </a:xfrm>
-          <a:prstGeom prst="rect">
-            <a:avLst/>
-          </a:prstGeom>
-          <a:solidFill>
-            <a:srgbClr val="E2E8F0"/>
-          </a:solidFill>
-          <a:ln>
-            <a:noFill/>
+            <a:off x="731520" y="1463040"/>
+            <a:ext cx="5239512" cy="2057400"/>
+          </a:xfrm>
+          <a:prstGeom prst="roundRect">
+            <a:avLst/>
+          </a:prstGeom>
+          <a:solidFill>
+            <a:srgbClr val="F0FDF4"/>
+          </a:solidFill>
+          <a:ln w="19050">
+            <a:solidFill>
+              <a:srgbClr val="BBF7D0"/>
+            </a:solidFill>
           </a:ln>
         </p:spPr>
         <p:style>
@@ -6655,117 +6618,45 @@
           </a:fontRef>
         </p:style>
         <p:txBody>
-          <a:bodyPr rtlCol="0" anchor="ctr"/>
-          <a:lstStyle/>
-          <a:p>
-            <a:pPr algn="ctr"/>
-          </a:p>
-        </p:txBody>
-      </p:sp>
-      <p:sp>
-        <p:nvSpPr>
-          <p:cNvPr id="7" name="TextBox 6"/>
-          <p:cNvSpPr txBox="1"/>
-          <p:nvPr/>
-        </p:nvSpPr>
-        <p:spPr>
-          <a:xfrm>
-            <a:off x="603504" y="6327648"/>
-            <a:ext cx="6858000" cy="274320"/>
-          </a:xfrm>
-          <a:prstGeom prst="rect">
-            <a:avLst/>
-          </a:prstGeom>
-          <a:noFill/>
-        </p:spPr>
-        <p:txBody>
-          <a:bodyPr wrap="none">
-            <a:spAutoFit/>
-          </a:bodyPr>
-          <a:lstStyle/>
+          <a:bodyPr rtlCol="0" anchor="ctr" wrap="square"/>
+          <a:lstStyle/>
+          <a:p>
+            <a:pPr algn="ctr">
+              <a:defRPr sz="1000" b="1">
+                <a:solidFill>
+                  <a:srgbClr val="4C9F38"/>
+                </a:solidFill>
+                <a:latin typeface="Calibri"/>
+              </a:defRPr>
+            </a:pPr>
+            <a:r>
+              <a:t>SDG 3   •   TARGET 3.8</a:t>
+            </a:r>
+          </a:p>
           <a:p>
             <a:pPr>
-              <a:defRPr sz="900">
-                <a:solidFill>
-                  <a:srgbClr val="64748B"/>
-                </a:solidFill>
-                <a:latin typeface="Calibri"/>
-              </a:defRPr>
-            </a:pPr>
-            <a:r>
-              <a:t>Ashish Anil Sikaria (23BCI0218) • Faculty Guide: Prof. SELVI M • SCOPE</a:t>
-            </a:r>
-          </a:p>
-        </p:txBody>
-      </p:sp>
-      <p:sp>
-        <p:nvSpPr>
-          <p:cNvPr id="8" name="TextBox 7"/>
-          <p:cNvSpPr txBox="1"/>
-          <p:nvPr/>
-        </p:nvSpPr>
-        <p:spPr>
-          <a:xfrm>
-            <a:off x="7772400" y="6327648"/>
-            <a:ext cx="3803904" cy="274320"/>
-          </a:xfrm>
-          <a:prstGeom prst="rect">
-            <a:avLst/>
-          </a:prstGeom>
-          <a:noFill/>
-        </p:spPr>
-        <p:txBody>
-          <a:bodyPr wrap="none">
-            <a:spAutoFit/>
-          </a:bodyPr>
-          <a:lstStyle/>
-          <a:p>
-            <a:pPr algn="r">
-              <a:defRPr sz="900">
-                <a:solidFill>
-                  <a:srgbClr val="64748B"/>
-                </a:solidFill>
-                <a:latin typeface="Calibri"/>
-              </a:defRPr>
-            </a:pPr>
-            <a:r>
-              <a:t>Fall Semester 2026-27</a:t>
-            </a:r>
-          </a:p>
-        </p:txBody>
-      </p:sp>
-      <p:sp>
-        <p:nvSpPr>
-          <p:cNvPr id="9" name="TextBox 8"/>
-          <p:cNvSpPr txBox="1"/>
-          <p:nvPr/>
-        </p:nvSpPr>
-        <p:spPr>
-          <a:xfrm>
-            <a:off x="603504" y="731520"/>
-            <a:ext cx="10972800" cy="411480"/>
-          </a:xfrm>
-          <a:prstGeom prst="rect">
-            <a:avLst/>
-          </a:prstGeom>
-          <a:noFill/>
-        </p:spPr>
-        <p:txBody>
-          <a:bodyPr wrap="none">
-            <a:spAutoFit/>
-          </a:bodyPr>
-          <a:lstStyle/>
+              <a:defRPr sz="1500" b="1">
+                <a:solidFill>
+                  <a:srgbClr val="0F172A"/>
+                </a:solidFill>
+                <a:latin typeface="Calibri"/>
+              </a:defRPr>
+            </a:pPr>
+            <a:r>
+              <a:t>Good Health and Well-Being</a:t>
+            </a:r>
+          </a:p>
           <a:p>
             <a:pPr>
-              <a:defRPr sz="2200" b="1">
-                <a:solidFill>
-                  <a:srgbClr val="0F172A"/>
-                </a:solidFill>
-                <a:latin typeface="Calibri"/>
-              </a:defRPr>
-            </a:pPr>
-            <a:r>
-              <a:t>Alignment with UN Sustainable Development Goals (SDGs)</a:t>
+              <a:defRPr sz="1100">
+                <a:solidFill>
+                  <a:srgbClr val="334155"/>
+                </a:solidFill>
+                <a:latin typeface="Calibri"/>
+              </a:defRPr>
+            </a:pPr>
+            <a:r>
+              <a:t>Provides portable, tamper-proof medical records across hospital networks and cross-border consultations, reducing diagnostic errors and duplicate testing.</a:t>
             </a:r>
           </a:p>
         </p:txBody>
@@ -6778,18 +6669,18 @@
         </p:nvSpPr>
         <p:spPr>
           <a:xfrm>
-            <a:off x="603504" y="1234440"/>
-            <a:ext cx="5349240" cy="2148840"/>
+            <a:off x="6217920" y="1463040"/>
+            <a:ext cx="5239512" cy="2057400"/>
           </a:xfrm>
           <a:prstGeom prst="roundRect">
             <a:avLst/>
           </a:prstGeom>
           <a:solidFill>
-            <a:srgbClr val="ECFDF5"/>
-          </a:solidFill>
-          <a:ln w="15240">
+            <a:srgbClr val="FFF7ED"/>
+          </a:solidFill>
+          <a:ln w="19050">
             <a:solidFill>
-              <a:srgbClr val="A7F3D0"/>
+              <a:srgbClr val="FED7AA"/>
             </a:solidFill>
           </a:ln>
         </p:spPr>
@@ -6812,15 +6703,15 @@
           <a:lstStyle/>
           <a:p>
             <a:pPr algn="ctr">
-              <a:defRPr sz="950" b="1">
-                <a:solidFill>
-                  <a:srgbClr val="059669"/>
-                </a:solidFill>
-                <a:latin typeface="Calibri"/>
-              </a:defRPr>
-            </a:pPr>
-            <a:r>
-              <a:t>SDG 3  •  TARGET 3.8</a:t>
+              <a:defRPr sz="1000" b="1">
+                <a:solidFill>
+                  <a:srgbClr val="FD6925"/>
+                </a:solidFill>
+                <a:latin typeface="Calibri"/>
+              </a:defRPr>
+            </a:pPr>
+            <a:r>
+              <a:t>SDG 9   •   TARGET 9.5</a:t>
             </a:r>
           </a:p>
           <a:p>
@@ -6833,7 +6724,7 @@
               </a:defRPr>
             </a:pPr>
             <a:r>
-              <a:t>Good Health and Well-Being</a:t>
+              <a:t>Industry, Innovation &amp; Infrastructure</a:t>
             </a:r>
           </a:p>
           <a:p>
@@ -6846,7 +6737,7 @@
               </a:defRPr>
             </a:pPr>
             <a:r>
-              <a:t>Provides portable, tamper-proof medical records across hospital networks and cross-border consultations, reducing diagnostic errors and duplicate procedures.</a:t>
+              <a:t>Modernizes vulnerable legacy healthcare databases into resilient decentralized infrastructure combining cryptographic ledger security with IPFS.</a:t>
             </a:r>
           </a:p>
         </p:txBody>
@@ -6859,18 +6750,18 @@
         </p:nvSpPr>
         <p:spPr>
           <a:xfrm>
-            <a:off x="6227064" y="1234440"/>
-            <a:ext cx="5349240" cy="2148840"/>
+            <a:off x="731520" y="3703320"/>
+            <a:ext cx="5239512" cy="2057400"/>
           </a:xfrm>
           <a:prstGeom prst="roundRect">
             <a:avLst/>
           </a:prstGeom>
           <a:solidFill>
-            <a:srgbClr val="FFFBEB"/>
-          </a:solidFill>
-          <a:ln w="15240">
+            <a:srgbClr val="FDF2F8"/>
+          </a:solidFill>
+          <a:ln w="19050">
             <a:solidFill>
-              <a:srgbClr val="FDE68A"/>
+              <a:srgbClr val="FBCFE8"/>
             </a:solidFill>
           </a:ln>
         </p:spPr>
@@ -6893,15 +6784,15 @@
           <a:lstStyle/>
           <a:p>
             <a:pPr algn="ctr">
-              <a:defRPr sz="950" b="1">
-                <a:solidFill>
-                  <a:srgbClr val="D97706"/>
-                </a:solidFill>
-                <a:latin typeface="Calibri"/>
-              </a:defRPr>
-            </a:pPr>
-            <a:r>
-              <a:t>SDG 9  •  TARGET 9.5</a:t>
+              <a:defRPr sz="1000" b="1">
+                <a:solidFill>
+                  <a:srgbClr val="DD1367"/>
+                </a:solidFill>
+                <a:latin typeface="Calibri"/>
+              </a:defRPr>
+            </a:pPr>
+            <a:r>
+              <a:t>SDG 10   •   TARGET 10.2</a:t>
             </a:r>
           </a:p>
           <a:p>
@@ -6914,7 +6805,7 @@
               </a:defRPr>
             </a:pPr>
             <a:r>
-              <a:t>Industry, Innovation &amp; Infrastructure</a:t>
+              <a:t>Reduced Inequalities</a:t>
             </a:r>
           </a:p>
           <a:p>
@@ -6927,7 +6818,7 @@
               </a:defRPr>
             </a:pPr>
             <a:r>
-              <a:t>Modernizes vulnerable legacy healthcare databases into resilient decentralized infrastructure combining cryptographic ledger security with IPFS.</a:t>
+              <a:t>Democratizes patient ownership over health records regardless of socioeconomic status, preventing commercial healthcare monopolies and data lock-in.</a:t>
             </a:r>
           </a:p>
         </p:txBody>
@@ -6940,18 +6831,18 @@
         </p:nvSpPr>
         <p:spPr>
           <a:xfrm>
-            <a:off x="603504" y="3566160"/>
-            <a:ext cx="5349240" cy="2148840"/>
+            <a:off x="6217920" y="3703320"/>
+            <a:ext cx="5239512" cy="2057400"/>
           </a:xfrm>
           <a:prstGeom prst="roundRect">
             <a:avLst/>
           </a:prstGeom>
           <a:solidFill>
-            <a:srgbClr val="FFF1F2"/>
-          </a:solidFill>
-          <a:ln w="15240">
+            <a:srgbClr val="F0F9FF"/>
+          </a:solidFill>
+          <a:ln w="19050">
             <a:solidFill>
-              <a:srgbClr val="FECDD3"/>
+              <a:srgbClr val="BAE6FD"/>
             </a:solidFill>
           </a:ln>
         </p:spPr>
@@ -6974,96 +6865,15 @@
           <a:lstStyle/>
           <a:p>
             <a:pPr algn="ctr">
-              <a:defRPr sz="950" b="1">
-                <a:solidFill>
-                  <a:srgbClr val="E11D48"/>
-                </a:solidFill>
-                <a:latin typeface="Calibri"/>
-              </a:defRPr>
-            </a:pPr>
-            <a:r>
-              <a:t>SDG 10  •  TARGET 10.2</a:t>
-            </a:r>
-          </a:p>
-          <a:p>
-            <a:pPr>
-              <a:defRPr sz="1500" b="1">
-                <a:solidFill>
-                  <a:srgbClr val="0F172A"/>
-                </a:solidFill>
-                <a:latin typeface="Calibri"/>
-              </a:defRPr>
-            </a:pPr>
-            <a:r>
-              <a:t>Reduced Inequalities</a:t>
-            </a:r>
-          </a:p>
-          <a:p>
-            <a:pPr>
-              <a:defRPr sz="1100">
-                <a:solidFill>
-                  <a:srgbClr val="334155"/>
-                </a:solidFill>
-                <a:latin typeface="Calibri"/>
-              </a:defRPr>
-            </a:pPr>
-            <a:r>
-              <a:t>Democratizes patient ownership over health records regardless of socioeconomic status, preventing commercial healthcare monopolies and data lock-in.</a:t>
-            </a:r>
-          </a:p>
-        </p:txBody>
-      </p:sp>
-      <p:sp>
-        <p:nvSpPr>
-          <p:cNvPr id="13" name="Rounded Rectangle 12"/>
-          <p:cNvSpPr/>
-          <p:nvPr/>
-        </p:nvSpPr>
-        <p:spPr>
-          <a:xfrm>
-            <a:off x="6227064" y="3566160"/>
-            <a:ext cx="5349240" cy="2148840"/>
-          </a:xfrm>
-          <a:prstGeom prst="roundRect">
-            <a:avLst/>
-          </a:prstGeom>
-          <a:solidFill>
-            <a:srgbClr val="EEF2FF"/>
-          </a:solidFill>
-          <a:ln w="15240">
-            <a:solidFill>
-              <a:srgbClr val="DDD6FE"/>
-            </a:solidFill>
-          </a:ln>
-        </p:spPr>
-        <p:style>
-          <a:lnRef idx="1">
-            <a:schemeClr val="accent1"/>
-          </a:lnRef>
-          <a:fillRef idx="3">
-            <a:schemeClr val="accent1"/>
-          </a:fillRef>
-          <a:effectRef idx="2">
-            <a:schemeClr val="accent1"/>
-          </a:effectRef>
-          <a:fontRef idx="minor">
-            <a:schemeClr val="lt1"/>
-          </a:fontRef>
-        </p:style>
-        <p:txBody>
-          <a:bodyPr rtlCol="0" anchor="ctr" wrap="square"/>
-          <a:lstStyle/>
-          <a:p>
-            <a:pPr algn="ctr">
-              <a:defRPr sz="950" b="1">
-                <a:solidFill>
-                  <a:srgbClr val="6366F1"/>
-                </a:solidFill>
-                <a:latin typeface="Calibri"/>
-              </a:defRPr>
-            </a:pPr>
-            <a:r>
-              <a:t>SDG 16  •  TARGET 16.6</a:t>
+              <a:defRPr sz="1000" b="1">
+                <a:solidFill>
+                  <a:srgbClr val="00689D"/>
+                </a:solidFill>
+                <a:latin typeface="Calibri"/>
+              </a:defRPr>
+            </a:pPr>
+            <a:r>
+              <a:t>SDG 16   •   TARGET 16.6</a:t>
             </a:r>
           </a:p>
           <a:p>
@@ -7157,20 +6967,105 @@
       </p:sp>
       <p:sp>
         <p:nvSpPr>
-          <p:cNvPr id="3" name="Rectangle 2"/>
+          <p:cNvPr id="3" name="TextBox 2"/>
+          <p:cNvSpPr txBox="1"/>
+          <p:nvPr/>
+        </p:nvSpPr>
+        <p:spPr>
+          <a:xfrm>
+            <a:off x="731520" y="365760"/>
+            <a:ext cx="10725912" cy="274320"/>
+          </a:xfrm>
+          <a:prstGeom prst="rect">
+            <a:avLst/>
+          </a:prstGeom>
+          <a:noFill/>
+        </p:spPr>
+        <p:txBody>
+          <a:bodyPr wrap="square">
+            <a:spAutoFit/>
+          </a:bodyPr>
+          <a:lstStyle/>
+          <a:p>
+            <a:pPr>
+              <a:defRPr sz="950" b="1">
+                <a:solidFill>
+                  <a:srgbClr val="0284C7"/>
+                </a:solidFill>
+                <a:latin typeface="Calibri"/>
+              </a:defRPr>
+            </a:pPr>
+            <a:r>
+              <a:t>TECHNICAL MATURITY SCORECARD</a:t>
+            </a:r>
+          </a:p>
+        </p:txBody>
+      </p:sp>
+      <p:sp>
+        <p:nvSpPr>
+          <p:cNvPr id="4" name="TextBox 3"/>
+          <p:cNvSpPr txBox="1"/>
+          <p:nvPr/>
+        </p:nvSpPr>
+        <p:spPr>
+          <a:xfrm>
+            <a:off x="731520" y="621792"/>
+            <a:ext cx="10725912" cy="457200"/>
+          </a:xfrm>
+          <a:prstGeom prst="rect">
+            <a:avLst/>
+          </a:prstGeom>
+          <a:noFill/>
+        </p:spPr>
+        <p:txBody>
+          <a:bodyPr wrap="square">
+            <a:spAutoFit/>
+          </a:bodyPr>
+          <a:lstStyle/>
+          <a:p>
+            <a:pPr>
+              <a:defRPr sz="2200" b="1">
+                <a:solidFill>
+                  <a:srgbClr val="0F172A"/>
+                </a:solidFill>
+                <a:latin typeface="Calibri"/>
+              </a:defRPr>
+            </a:pPr>
+            <a:r>
+              <a:t>Technology Readiness Level (TRL 6 Verified Prototype)</a:t>
+            </a:r>
+          </a:p>
+          <a:p>
+            <a:pPr>
+              <a:defRPr sz="1100">
+                <a:solidFill>
+                  <a:srgbClr val="64748B"/>
+                </a:solidFill>
+                <a:latin typeface="Calibri"/>
+              </a:defRPr>
+            </a:pPr>
+            <a:r>
+              <a:t>Maturity benchmarking mapped against NASA and Horizon Europe readiness standards.</a:t>
+            </a:r>
+          </a:p>
+        </p:txBody>
+      </p:sp>
+      <p:sp>
+        <p:nvSpPr>
+          <p:cNvPr id="5" name="Rectangle 4"/>
           <p:cNvSpPr/>
           <p:nvPr/>
         </p:nvSpPr>
         <p:spPr>
           <a:xfrm>
-            <a:off x="603504" y="320040"/>
-            <a:ext cx="10972800" cy="27432"/>
+            <a:off x="731520" y="1234440"/>
+            <a:ext cx="10725912" cy="9144"/>
           </a:xfrm>
           <a:prstGeom prst="rect">
             <a:avLst/>
           </a:prstGeom>
           <a:solidFill>
-            <a:srgbClr val="0284C7"/>
+            <a:srgbClr val="E2E8F0"/>
           </a:solidFill>
           <a:ln>
             <a:noFill/>
@@ -7200,50 +7095,14 @@
       </p:sp>
       <p:sp>
         <p:nvSpPr>
-          <p:cNvPr id="4" name="TextBox 3"/>
-          <p:cNvSpPr txBox="1"/>
-          <p:nvPr/>
-        </p:nvSpPr>
-        <p:spPr>
-          <a:xfrm>
-            <a:off x="603504" y="384048"/>
-            <a:ext cx="7315200" cy="256032"/>
-          </a:xfrm>
-          <a:prstGeom prst="rect">
-            <a:avLst/>
-          </a:prstGeom>
-          <a:noFill/>
-        </p:spPr>
-        <p:txBody>
-          <a:bodyPr wrap="square">
-            <a:spAutoFit/>
-          </a:bodyPr>
-          <a:lstStyle/>
-          <a:p>
-            <a:pPr>
-              <a:defRPr sz="950" b="1">
-                <a:solidFill>
-                  <a:srgbClr val="0369A1"/>
-                </a:solidFill>
-                <a:latin typeface="Calibri"/>
-              </a:defRPr>
-            </a:pPr>
-            <a:r>
-              <a:t>MATURITY SCORECARD • NASA / HORIZON EUROPE FRAMEWORK</a:t>
-            </a:r>
-          </a:p>
-        </p:txBody>
-      </p:sp>
-      <p:sp>
-        <p:nvSpPr>
-          <p:cNvPr id="5" name="Rectangle 4"/>
+          <p:cNvPr id="6" name="Rectangle 5"/>
           <p:cNvSpPr/>
           <p:nvPr/>
         </p:nvSpPr>
         <p:spPr>
           <a:xfrm>
-            <a:off x="603504" y="658368"/>
-            <a:ext cx="10972800" cy="9144"/>
+            <a:off x="731520" y="6263640"/>
+            <a:ext cx="10725912" cy="9144"/>
           </a:xfrm>
           <a:prstGeom prst="rect">
             <a:avLst/>
@@ -7279,23 +7138,97 @@
       </p:sp>
       <p:sp>
         <p:nvSpPr>
-          <p:cNvPr id="6" name="Rectangle 5"/>
+          <p:cNvPr id="7" name="TextBox 6"/>
+          <p:cNvSpPr txBox="1"/>
+          <p:nvPr/>
+        </p:nvSpPr>
+        <p:spPr>
+          <a:xfrm>
+            <a:off x="731520" y="6327648"/>
+            <a:ext cx="6400800" cy="274320"/>
+          </a:xfrm>
+          <a:prstGeom prst="rect">
+            <a:avLst/>
+          </a:prstGeom>
+          <a:noFill/>
+        </p:spPr>
+        <p:txBody>
+          <a:bodyPr wrap="none">
+            <a:spAutoFit/>
+          </a:bodyPr>
+          <a:lstStyle/>
+          <a:p>
+            <a:pPr>
+              <a:defRPr sz="900">
+                <a:solidFill>
+                  <a:srgbClr val="64748B"/>
+                </a:solidFill>
+                <a:latin typeface="Calibri"/>
+              </a:defRPr>
+            </a:pPr>
+            <a:r>
+              <a:t>CareChain • Ashish Anil Sikaria (23BCI0218) • Guide: Prof. SELVI M • SCOPE</a:t>
+            </a:r>
+          </a:p>
+        </p:txBody>
+      </p:sp>
+      <p:sp>
+        <p:nvSpPr>
+          <p:cNvPr id="8" name="TextBox 7"/>
+          <p:cNvSpPr txBox="1"/>
+          <p:nvPr/>
+        </p:nvSpPr>
+        <p:spPr>
+          <a:xfrm>
+            <a:off x="7772400" y="6327648"/>
+            <a:ext cx="3685032" cy="274320"/>
+          </a:xfrm>
+          <a:prstGeom prst="rect">
+            <a:avLst/>
+          </a:prstGeom>
+          <a:noFill/>
+        </p:spPr>
+        <p:txBody>
+          <a:bodyPr wrap="none">
+            <a:spAutoFit/>
+          </a:bodyPr>
+          <a:lstStyle/>
+          <a:p>
+            <a:pPr algn="r">
+              <a:defRPr sz="900">
+                <a:solidFill>
+                  <a:srgbClr val="64748B"/>
+                </a:solidFill>
+                <a:latin typeface="Calibri"/>
+              </a:defRPr>
+            </a:pPr>
+            <a:r>
+              <a:t>BCSE497J Project - I • Fall 2026-27</a:t>
+            </a:r>
+          </a:p>
+        </p:txBody>
+      </p:sp>
+      <p:sp>
+        <p:nvSpPr>
+          <p:cNvPr id="9" name="Rounded Rectangle 8"/>
           <p:cNvSpPr/>
           <p:nvPr/>
         </p:nvSpPr>
         <p:spPr>
           <a:xfrm>
-            <a:off x="603504" y="6263640"/>
-            <a:ext cx="10972800" cy="9144"/>
-          </a:xfrm>
-          <a:prstGeom prst="rect">
-            <a:avLst/>
-          </a:prstGeom>
-          <a:solidFill>
-            <a:srgbClr val="E2E8F0"/>
-          </a:solidFill>
-          <a:ln>
-            <a:noFill/>
+            <a:off x="731520" y="1417320"/>
+            <a:ext cx="2496312" cy="914400"/>
+          </a:xfrm>
+          <a:prstGeom prst="roundRect">
+            <a:avLst/>
+          </a:prstGeom>
+          <a:solidFill>
+            <a:srgbClr val="FFFFFF"/>
+          </a:solidFill>
+          <a:ln w="12700">
+            <a:solidFill>
+              <a:srgbClr val="E2E8F0"/>
+            </a:solidFill>
           </a:ln>
         </p:spPr>
         <p:style>
@@ -7313,37 +7246,11 @@
           </a:fontRef>
         </p:style>
         <p:txBody>
-          <a:bodyPr rtlCol="0" anchor="ctr"/>
-          <a:lstStyle/>
-          <a:p>
-            <a:pPr algn="ctr"/>
-          </a:p>
-        </p:txBody>
-      </p:sp>
-      <p:sp>
-        <p:nvSpPr>
-          <p:cNvPr id="7" name="TextBox 6"/>
-          <p:cNvSpPr txBox="1"/>
-          <p:nvPr/>
-        </p:nvSpPr>
-        <p:spPr>
-          <a:xfrm>
-            <a:off x="603504" y="6327648"/>
-            <a:ext cx="6858000" cy="274320"/>
-          </a:xfrm>
-          <a:prstGeom prst="rect">
-            <a:avLst/>
-          </a:prstGeom>
-          <a:noFill/>
-        </p:spPr>
-        <p:txBody>
-          <a:bodyPr wrap="none">
-            <a:spAutoFit/>
-          </a:bodyPr>
-          <a:lstStyle/>
-          <a:p>
-            <a:pPr>
-              <a:defRPr sz="900">
+          <a:bodyPr rtlCol="0" anchor="ctr" wrap="square"/>
+          <a:lstStyle/>
+          <a:p>
+            <a:pPr algn="ctr">
+              <a:defRPr sz="1100" b="1">
                 <a:solidFill>
                   <a:srgbClr val="64748B"/>
                 </a:solidFill>
@@ -7351,35 +7258,12 @@
               </a:defRPr>
             </a:pPr>
             <a:r>
-              <a:t>Ashish Anil Sikaria (23BCI0218) • Faculty Guide: Prof. SELVI M • SCOPE</a:t>
-            </a:r>
-          </a:p>
-        </p:txBody>
-      </p:sp>
-      <p:sp>
-        <p:nvSpPr>
-          <p:cNvPr id="8" name="TextBox 7"/>
-          <p:cNvSpPr txBox="1"/>
-          <p:nvPr/>
-        </p:nvSpPr>
-        <p:spPr>
-          <a:xfrm>
-            <a:off x="7772400" y="6327648"/>
-            <a:ext cx="3803904" cy="274320"/>
-          </a:xfrm>
-          <a:prstGeom prst="rect">
-            <a:avLst/>
-          </a:prstGeom>
-          <a:noFill/>
-        </p:spPr>
-        <p:txBody>
-          <a:bodyPr wrap="none">
-            <a:spAutoFit/>
-          </a:bodyPr>
-          <a:lstStyle/>
-          <a:p>
-            <a:pPr algn="r">
-              <a:defRPr sz="900">
+              <a:t>TRL 1 - 3</a:t>
+            </a:r>
+          </a:p>
+          <a:p>
+            <a:pPr algn="ctr">
+              <a:defRPr sz="850">
                 <a:solidFill>
                   <a:srgbClr val="64748B"/>
                 </a:solidFill>
@@ -7387,43 +7271,7 @@
               </a:defRPr>
             </a:pPr>
             <a:r>
-              <a:t>Fall Semester 2026-27</a:t>
-            </a:r>
-          </a:p>
-        </p:txBody>
-      </p:sp>
-      <p:sp>
-        <p:nvSpPr>
-          <p:cNvPr id="9" name="TextBox 8"/>
-          <p:cNvSpPr txBox="1"/>
-          <p:nvPr/>
-        </p:nvSpPr>
-        <p:spPr>
-          <a:xfrm>
-            <a:off x="603504" y="731520"/>
-            <a:ext cx="10972800" cy="411480"/>
-          </a:xfrm>
-          <a:prstGeom prst="rect">
-            <a:avLst/>
-          </a:prstGeom>
-          <a:noFill/>
-        </p:spPr>
-        <p:txBody>
-          <a:bodyPr wrap="none">
-            <a:spAutoFit/>
-          </a:bodyPr>
-          <a:lstStyle/>
-          <a:p>
-            <a:pPr>
-              <a:defRPr sz="2200" b="1">
-                <a:solidFill>
-                  <a:srgbClr val="0F172A"/>
-                </a:solidFill>
-                <a:latin typeface="Calibri"/>
-              </a:defRPr>
-            </a:pPr>
-            <a:r>
-              <a:t>Technology Readiness Level (TRL) Assessment</a:t>
+              <a:t>Basic Research &amp; Concept Formulation</a:t>
             </a:r>
           </a:p>
         </p:txBody>
@@ -7436,8 +7284,8 @@
         </p:nvSpPr>
         <p:spPr>
           <a:xfrm>
-            <a:off x="603504" y="1234440"/>
-            <a:ext cx="2606040" cy="868680"/>
+            <a:off x="3474720" y="1417320"/>
+            <a:ext cx="2496312" cy="914400"/>
           </a:xfrm>
           <a:prstGeom prst="roundRect">
             <a:avLst/>
@@ -7478,12 +7326,12 @@
               </a:defRPr>
             </a:pPr>
             <a:r>
-              <a:t>TRL 1 - 3</a:t>
+              <a:t>TRL 4 - 5</a:t>
             </a:r>
           </a:p>
           <a:p>
             <a:pPr algn="ctr">
-              <a:defRPr sz="900">
+              <a:defRPr sz="850">
                 <a:solidFill>
                   <a:srgbClr val="64748B"/>
                 </a:solidFill>
@@ -7491,7 +7339,7 @@
               </a:defRPr>
             </a:pPr>
             <a:r>
-              <a:t>Concept Formulation</a:t>
+              <a:t>Lab Component Validation</a:t>
             </a:r>
           </a:p>
         </p:txBody>
@@ -7504,8 +7352,76 @@
         </p:nvSpPr>
         <p:spPr>
           <a:xfrm>
-            <a:off x="3419856" y="1234440"/>
-            <a:ext cx="2606040" cy="868680"/>
+            <a:off x="6217920" y="1417320"/>
+            <a:ext cx="2496312" cy="914400"/>
+          </a:xfrm>
+          <a:prstGeom prst="roundRect">
+            <a:avLst/>
+          </a:prstGeom>
+          <a:solidFill>
+            <a:srgbClr val="F0F9FF"/>
+          </a:solidFill>
+          <a:ln w="25400">
+            <a:solidFill>
+              <a:srgbClr val="0284C7"/>
+            </a:solidFill>
+          </a:ln>
+        </p:spPr>
+        <p:style>
+          <a:lnRef idx="1">
+            <a:schemeClr val="accent1"/>
+          </a:lnRef>
+          <a:fillRef idx="3">
+            <a:schemeClr val="accent1"/>
+          </a:fillRef>
+          <a:effectRef idx="2">
+            <a:schemeClr val="accent1"/>
+          </a:effectRef>
+          <a:fontRef idx="minor">
+            <a:schemeClr val="lt1"/>
+          </a:fontRef>
+        </p:style>
+        <p:txBody>
+          <a:bodyPr rtlCol="0" anchor="ctr" wrap="square"/>
+          <a:lstStyle/>
+          <a:p>
+            <a:pPr algn="ctr">
+              <a:defRPr sz="1100" b="1">
+                <a:solidFill>
+                  <a:srgbClr val="0369A1"/>
+                </a:solidFill>
+                <a:latin typeface="Calibri"/>
+              </a:defRPr>
+            </a:pPr>
+            <a:r>
+              <a:t>★ TRL 6 VERIFIED ★</a:t>
+            </a:r>
+          </a:p>
+          <a:p>
+            <a:pPr algn="ctr">
+              <a:defRPr sz="850">
+                <a:solidFill>
+                  <a:srgbClr val="0F172A"/>
+                </a:solidFill>
+                <a:latin typeface="Calibri"/>
+              </a:defRPr>
+            </a:pPr>
+            <a:r>
+              <a:t>Demonstrated Working Prototype</a:t>
+            </a:r>
+          </a:p>
+        </p:txBody>
+      </p:sp>
+      <p:sp>
+        <p:nvSpPr>
+          <p:cNvPr id="12" name="Rounded Rectangle 11"/>
+          <p:cNvSpPr/>
+          <p:nvPr/>
+        </p:nvSpPr>
+        <p:spPr>
+          <a:xfrm>
+            <a:off x="8961120" y="1417320"/>
+            <a:ext cx="2496312" cy="914400"/>
           </a:xfrm>
           <a:prstGeom prst="roundRect">
             <a:avLst/>
@@ -7546,12 +7462,12 @@
               </a:defRPr>
             </a:pPr>
             <a:r>
-              <a:t>TRL 4 - 5</a:t>
+              <a:t>TRL 7 - 9</a:t>
             </a:r>
           </a:p>
           <a:p>
             <a:pPr algn="ctr">
-              <a:defRPr sz="900">
+              <a:defRPr sz="850">
                 <a:solidFill>
                   <a:srgbClr val="64748B"/>
                 </a:solidFill>
@@ -7559,31 +7475,31 @@
               </a:defRPr>
             </a:pPr>
             <a:r>
-              <a:t>Lab Validation</a:t>
-            </a:r>
-          </a:p>
-        </p:txBody>
-      </p:sp>
-      <p:sp>
-        <p:nvSpPr>
-          <p:cNvPr id="12" name="Rounded Rectangle 11"/>
+              <a:t>Clinical Trials &amp; Mainnet Deployment</a:t>
+            </a:r>
+          </a:p>
+        </p:txBody>
+      </p:sp>
+      <p:sp>
+        <p:nvSpPr>
+          <p:cNvPr id="13" name="Rounded Rectangle 12"/>
           <p:cNvSpPr/>
           <p:nvPr/>
         </p:nvSpPr>
         <p:spPr>
           <a:xfrm>
-            <a:off x="6236208" y="1234440"/>
-            <a:ext cx="2606040" cy="868680"/>
+            <a:off x="731520" y="2468880"/>
+            <a:ext cx="5239512" cy="3566160"/>
           </a:xfrm>
           <a:prstGeom prst="roundRect">
             <a:avLst/>
           </a:prstGeom>
           <a:solidFill>
-            <a:srgbClr val="F0F9FF"/>
-          </a:solidFill>
-          <a:ln w="25400">
+            <a:srgbClr val="F0FDFA"/>
+          </a:solidFill>
+          <a:ln w="19050">
             <a:solidFill>
-              <a:srgbClr val="0284C7"/>
+              <a:srgbClr val="A7F3D0"/>
             </a:solidFill>
           </a:ln>
         </p:spPr>
@@ -7606,52 +7522,67 @@
           <a:lstStyle/>
           <a:p>
             <a:pPr algn="ctr">
-              <a:defRPr sz="1100" b="1">
-                <a:solidFill>
-                  <a:srgbClr val="0369A1"/>
-                </a:solidFill>
-                <a:latin typeface="Calibri"/>
-              </a:defRPr>
-            </a:pPr>
-            <a:r>
-              <a:t>★ TRL 6 VERIFIED ★</a:t>
-            </a:r>
-          </a:p>
-          <a:p>
-            <a:pPr algn="ctr">
-              <a:defRPr sz="900">
-                <a:solidFill>
-                  <a:srgbClr val="0F172A"/>
-                </a:solidFill>
-                <a:latin typeface="Calibri"/>
-              </a:defRPr>
-            </a:pPr>
-            <a:r>
-              <a:t>Demonstrated Prototype</a:t>
-            </a:r>
-          </a:p>
-        </p:txBody>
-      </p:sp>
-      <p:sp>
-        <p:nvSpPr>
-          <p:cNvPr id="13" name="Rounded Rectangle 12"/>
+              <a:defRPr sz="1150" b="1">
+                <a:solidFill>
+                  <a:srgbClr val="4C9F38"/>
+                </a:solidFill>
+                <a:latin typeface="Calibri"/>
+              </a:defRPr>
+            </a:pPr>
+            <a:r>
+              <a:t>✓ TRL 6 VERIFIED DELIVERABLES</a:t>
+            </a:r>
+          </a:p>
+          <a:p>
+            <a:pPr>
+              <a:defRPr sz="1050">
+                <a:solidFill>
+                  <a:srgbClr val="334155"/>
+                </a:solidFill>
+                <a:latin typeface="Calibri"/>
+              </a:defRPr>
+            </a:pPr>
+            <a:r>
+              <a:t>• Smart Contracts: MedicalRecord.sol deployed with 100% automated test coverage (11/11 Hardhat unit tests passing).</a:t>
+            </a:r>
+            <a:br/>
+            <a:br/>
+            <a:r>
+              <a:t>• Cryptographic Pipeline: Client-side AES-256-GCM buffer encryption and IPFS pinning via Pinata live.</a:t>
+            </a:r>
+            <a:br/>
+            <a:br/>
+            <a:r>
+              <a:t>• Role Portals: Production Web3 UI for Patients, Doctors, and Hospital Governance with MetaMask wallet syncing.</a:t>
+            </a:r>
+            <a:br/>
+            <a:br/>
+            <a:r>
+              <a:t>• Enterprise Scaffolding: Monorepo with CI/CD automation, Docker orchestration, and RBAC middleware.</a:t>
+            </a:r>
+          </a:p>
+        </p:txBody>
+      </p:sp>
+      <p:sp>
+        <p:nvSpPr>
+          <p:cNvPr id="14" name="Rounded Rectangle 13"/>
           <p:cNvSpPr/>
           <p:nvPr/>
         </p:nvSpPr>
         <p:spPr>
           <a:xfrm>
-            <a:off x="9052560" y="1234440"/>
-            <a:ext cx="2606040" cy="868680"/>
+            <a:off x="6217920" y="2468880"/>
+            <a:ext cx="5239512" cy="3566160"/>
           </a:xfrm>
           <a:prstGeom prst="roundRect">
             <a:avLst/>
           </a:prstGeom>
           <a:solidFill>
-            <a:srgbClr val="FFFFFF"/>
-          </a:solidFill>
-          <a:ln w="12700">
+            <a:srgbClr val="F0F9FF"/>
+          </a:solidFill>
+          <a:ln w="19050">
             <a:solidFill>
-              <a:srgbClr val="E2E8F0"/>
+              <a:srgbClr val="BAE6FD"/>
             </a:solidFill>
           </a:ln>
         </p:spPr>
@@ -7674,83 +7605,15 @@
           <a:lstStyle/>
           <a:p>
             <a:pPr algn="ctr">
-              <a:defRPr sz="1100" b="1">
-                <a:solidFill>
-                  <a:srgbClr val="64748B"/>
-                </a:solidFill>
-                <a:latin typeface="Calibri"/>
-              </a:defRPr>
-            </a:pPr>
-            <a:r>
-              <a:t>TRL 7 - 9</a:t>
-            </a:r>
-          </a:p>
-          <a:p>
-            <a:pPr algn="ctr">
-              <a:defRPr sz="900">
-                <a:solidFill>
-                  <a:srgbClr val="64748B"/>
-                </a:solidFill>
-                <a:latin typeface="Calibri"/>
-              </a:defRPr>
-            </a:pPr>
-            <a:r>
-              <a:t>Clinical Deployment</a:t>
-            </a:r>
-          </a:p>
-        </p:txBody>
-      </p:sp>
-      <p:sp>
-        <p:nvSpPr>
-          <p:cNvPr id="14" name="Rounded Rectangle 13"/>
-          <p:cNvSpPr/>
-          <p:nvPr/>
-        </p:nvSpPr>
-        <p:spPr>
-          <a:xfrm>
-            <a:off x="603504" y="2240280"/>
-            <a:ext cx="5349240" cy="3794760"/>
-          </a:xfrm>
-          <a:prstGeom prst="roundRect">
-            <a:avLst/>
-          </a:prstGeom>
-          <a:solidFill>
-            <a:srgbClr val="ECFDF5"/>
-          </a:solidFill>
-          <a:ln w="15240">
-            <a:solidFill>
-              <a:srgbClr val="A7F3D0"/>
-            </a:solidFill>
-          </a:ln>
-        </p:spPr>
-        <p:style>
-          <a:lnRef idx="1">
-            <a:schemeClr val="accent1"/>
-          </a:lnRef>
-          <a:fillRef idx="3">
-            <a:schemeClr val="accent1"/>
-          </a:fillRef>
-          <a:effectRef idx="2">
-            <a:schemeClr val="accent1"/>
-          </a:effectRef>
-          <a:fontRef idx="minor">
-            <a:schemeClr val="lt1"/>
-          </a:fontRef>
-        </p:style>
-        <p:txBody>
-          <a:bodyPr rtlCol="0" anchor="ctr" wrap="square"/>
-          <a:lstStyle/>
-          <a:p>
-            <a:pPr algn="ctr">
-              <a:defRPr sz="1100" b="1">
-                <a:solidFill>
-                  <a:srgbClr val="059669"/>
-                </a:solidFill>
-                <a:latin typeface="Calibri"/>
-              </a:defRPr>
-            </a:pPr>
-            <a:r>
-              <a:t>✓ TRL 6 VERIFIED DELIVERABLES</a:t>
+              <a:defRPr sz="1150" b="1">
+                <a:solidFill>
+                  <a:srgbClr val="0369A1"/>
+                </a:solidFill>
+                <a:latin typeface="Calibri"/>
+              </a:defRPr>
+            </a:pPr>
+            <a:r>
+              <a:t>➔ ROADMAP TO TRL 9 (COMMERCIAL CLINICAL)</a:t>
             </a:r>
           </a:p>
           <a:p>
@@ -7763,100 +7626,17 @@
               </a:defRPr>
             </a:pPr>
             <a:r>
-              <a:t>• Smart Contracts: MedicalRecord.sol deployed with 100% automated test coverage (11/11 Hardhat unit tests passing).</a:t>
+              <a:t>• TRL 7 (Operational Sandbox): Multi-hospital sandbox testing with HL7 FHIR structured data and ERC-4337 Passkey relayers.</a:t>
             </a:r>
             <a:br/>
             <a:br/>
             <a:r>
-              <a:t>• Cryptographic Gateway: Client-side AES-256-GCM symmetric buffer encryption and IPFS pinning via Pinata live.</a:t>
+              <a:t>• TRL 8 (System Qualification): Formal smart contract verification by CertiK/OpenZeppelin and HIPAA/GDPR certification.</a:t>
             </a:r>
             <a:br/>
             <a:br/>
             <a:r>
-              <a:t>• Role-Based Portals: Web3 frontend with dedicated portals for Patients, Licensed Doctors, and Hospital Governance.</a:t>
-            </a:r>
-            <a:br/>
-            <a:br/>
-            <a:r>
-              <a:t>• Enterprise Architecture: Monorepo with CI/CD automation, Docker orchestration, and RBAC middleware.</a:t>
-            </a:r>
-          </a:p>
-        </p:txBody>
-      </p:sp>
-      <p:sp>
-        <p:nvSpPr>
-          <p:cNvPr id="15" name="Rounded Rectangle 14"/>
-          <p:cNvSpPr/>
-          <p:nvPr/>
-        </p:nvSpPr>
-        <p:spPr>
-          <a:xfrm>
-            <a:off x="6227064" y="2240280"/>
-            <a:ext cx="5349240" cy="3794760"/>
-          </a:xfrm>
-          <a:prstGeom prst="roundRect">
-            <a:avLst/>
-          </a:prstGeom>
-          <a:solidFill>
-            <a:srgbClr val="F0F9FF"/>
-          </a:solidFill>
-          <a:ln w="15240">
-            <a:solidFill>
-              <a:srgbClr val="BAE6FD"/>
-            </a:solidFill>
-          </a:ln>
-        </p:spPr>
-        <p:style>
-          <a:lnRef idx="1">
-            <a:schemeClr val="accent1"/>
-          </a:lnRef>
-          <a:fillRef idx="3">
-            <a:schemeClr val="accent1"/>
-          </a:fillRef>
-          <a:effectRef idx="2">
-            <a:schemeClr val="accent1"/>
-          </a:effectRef>
-          <a:fontRef idx="minor">
-            <a:schemeClr val="lt1"/>
-          </a:fontRef>
-        </p:style>
-        <p:txBody>
-          <a:bodyPr rtlCol="0" anchor="ctr" wrap="square"/>
-          <a:lstStyle/>
-          <a:p>
-            <a:pPr algn="ctr">
-              <a:defRPr sz="1100" b="1">
-                <a:solidFill>
-                  <a:srgbClr val="0369A1"/>
-                </a:solidFill>
-                <a:latin typeface="Calibri"/>
-              </a:defRPr>
-            </a:pPr>
-            <a:r>
-              <a:t>➔ ROADMAP TO TRL 9 (COMMERCIAL DEPLOYMENT)</a:t>
-            </a:r>
-          </a:p>
-          <a:p>
-            <a:pPr>
-              <a:defRPr sz="1050">
-                <a:solidFill>
-                  <a:srgbClr val="334155"/>
-                </a:solidFill>
-                <a:latin typeface="Calibri"/>
-              </a:defRPr>
-            </a:pPr>
-            <a:r>
-              <a:t>• TRL 7 (Operational Sandbox): Multi-hospital sandbox testing with HL7 FHIR structured schemas and ERC-4337 Passkey relayers.</a:t>
-            </a:r>
-            <a:br/>
-            <a:br/>
-            <a:r>
-              <a:t>• TRL 8 (System Qualification): Formal smart contract verification by CertiK/OpenZeppelin and HIPAA/GDPR certification.</a:t>
-            </a:r>
-            <a:br/>
-            <a:br/>
-            <a:r>
-              <a:t>• TRL 9 (Full Clinical Deployment): Production mainnet rollout across participating hospital consortiums and insurance validation nodes.</a:t>
+              <a:t>• TRL 9 (Full Clinical Deployment): Live production mainnet rollout across participating hospital networks and insurance nodes.</a:t>
             </a:r>
           </a:p>
         </p:txBody>
@@ -7924,20 +7704,105 @@
       </p:sp>
       <p:sp>
         <p:nvSpPr>
-          <p:cNvPr id="3" name="Rectangle 2"/>
+          <p:cNvPr id="3" name="TextBox 2"/>
+          <p:cNvSpPr txBox="1"/>
+          <p:nvPr/>
+        </p:nvSpPr>
+        <p:spPr>
+          <a:xfrm>
+            <a:off x="731520" y="365760"/>
+            <a:ext cx="10725912" cy="274320"/>
+          </a:xfrm>
+          <a:prstGeom prst="rect">
+            <a:avLst/>
+          </a:prstGeom>
+          <a:noFill/>
+        </p:spPr>
+        <p:txBody>
+          <a:bodyPr wrap="square">
+            <a:spAutoFit/>
+          </a:bodyPr>
+          <a:lstStyle/>
+          <a:p>
+            <a:pPr>
+              <a:defRPr sz="950" b="1">
+                <a:solidFill>
+                  <a:srgbClr val="0284C7"/>
+                </a:solidFill>
+                <a:latin typeface="Calibri"/>
+              </a:defRPr>
+            </a:pPr>
+            <a:r>
+              <a:t>COMPETITIVE DIFFERENTIATORS</a:t>
+            </a:r>
+          </a:p>
+        </p:txBody>
+      </p:sp>
+      <p:sp>
+        <p:nvSpPr>
+          <p:cNvPr id="4" name="TextBox 3"/>
+          <p:cNvSpPr txBox="1"/>
+          <p:nvPr/>
+        </p:nvSpPr>
+        <p:spPr>
+          <a:xfrm>
+            <a:off x="731520" y="621792"/>
+            <a:ext cx="10725912" cy="457200"/>
+          </a:xfrm>
+          <a:prstGeom prst="rect">
+            <a:avLst/>
+          </a:prstGeom>
+          <a:noFill/>
+        </p:spPr>
+        <p:txBody>
+          <a:bodyPr wrap="square">
+            <a:spAutoFit/>
+          </a:bodyPr>
+          <a:lstStyle/>
+          <a:p>
+            <a:pPr>
+              <a:defRPr sz="2200" b="1">
+                <a:solidFill>
+                  <a:srgbClr val="0F172A"/>
+                </a:solidFill>
+                <a:latin typeface="Calibri"/>
+              </a:defRPr>
+            </a:pPr>
+            <a:r>
+              <a:t>Novel Innovations Beyond Generic Student Demos</a:t>
+            </a:r>
+          </a:p>
+          <a:p>
+            <a:pPr>
+              <a:defRPr sz="1100">
+                <a:solidFill>
+                  <a:srgbClr val="64748B"/>
+                </a:solidFill>
+                <a:latin typeface="Calibri"/>
+              </a:defRPr>
+            </a:pPr>
+            <a:r>
+              <a:t>Key cryptographic and architectural features solving real-world healthcare challenges.</a:t>
+            </a:r>
+          </a:p>
+        </p:txBody>
+      </p:sp>
+      <p:sp>
+        <p:nvSpPr>
+          <p:cNvPr id="5" name="Rectangle 4"/>
           <p:cNvSpPr/>
           <p:nvPr/>
         </p:nvSpPr>
         <p:spPr>
           <a:xfrm>
-            <a:off x="603504" y="320040"/>
-            <a:ext cx="10972800" cy="27432"/>
+            <a:off x="731520" y="1234440"/>
+            <a:ext cx="10725912" cy="9144"/>
           </a:xfrm>
           <a:prstGeom prst="rect">
             <a:avLst/>
           </a:prstGeom>
           <a:solidFill>
-            <a:srgbClr val="0284C7"/>
+            <a:srgbClr val="E2E8F0"/>
           </a:solidFill>
           <a:ln>
             <a:noFill/>
@@ -7967,50 +7832,14 @@
       </p:sp>
       <p:sp>
         <p:nvSpPr>
-          <p:cNvPr id="4" name="TextBox 3"/>
-          <p:cNvSpPr txBox="1"/>
-          <p:nvPr/>
-        </p:nvSpPr>
-        <p:spPr>
-          <a:xfrm>
-            <a:off x="603504" y="384048"/>
-            <a:ext cx="7315200" cy="256032"/>
-          </a:xfrm>
-          <a:prstGeom prst="rect">
-            <a:avLst/>
-          </a:prstGeom>
-          <a:noFill/>
-        </p:spPr>
-        <p:txBody>
-          <a:bodyPr wrap="square">
-            <a:spAutoFit/>
-          </a:bodyPr>
-          <a:lstStyle/>
-          <a:p>
-            <a:pPr>
-              <a:defRPr sz="950" b="1">
-                <a:solidFill>
-                  <a:srgbClr val="0369A1"/>
-                </a:solidFill>
-                <a:latin typeface="Calibri"/>
-              </a:defRPr>
-            </a:pPr>
-            <a:r>
-              <a:t>COMPETITIVE DIFFERENTIATORS &amp; HARD TECH</a:t>
-            </a:r>
-          </a:p>
-        </p:txBody>
-      </p:sp>
-      <p:sp>
-        <p:nvSpPr>
-          <p:cNvPr id="5" name="Rectangle 4"/>
+          <p:cNvPr id="6" name="Rectangle 5"/>
           <p:cNvSpPr/>
           <p:nvPr/>
         </p:nvSpPr>
         <p:spPr>
           <a:xfrm>
-            <a:off x="603504" y="658368"/>
-            <a:ext cx="10972800" cy="9144"/>
+            <a:off x="731520" y="6263640"/>
+            <a:ext cx="10725912" cy="9144"/>
           </a:xfrm>
           <a:prstGeom prst="rect">
             <a:avLst/>
@@ -8046,23 +7875,97 @@
       </p:sp>
       <p:sp>
         <p:nvSpPr>
-          <p:cNvPr id="6" name="Rectangle 5"/>
+          <p:cNvPr id="7" name="TextBox 6"/>
+          <p:cNvSpPr txBox="1"/>
+          <p:nvPr/>
+        </p:nvSpPr>
+        <p:spPr>
+          <a:xfrm>
+            <a:off x="731520" y="6327648"/>
+            <a:ext cx="6400800" cy="274320"/>
+          </a:xfrm>
+          <a:prstGeom prst="rect">
+            <a:avLst/>
+          </a:prstGeom>
+          <a:noFill/>
+        </p:spPr>
+        <p:txBody>
+          <a:bodyPr wrap="none">
+            <a:spAutoFit/>
+          </a:bodyPr>
+          <a:lstStyle/>
+          <a:p>
+            <a:pPr>
+              <a:defRPr sz="900">
+                <a:solidFill>
+                  <a:srgbClr val="64748B"/>
+                </a:solidFill>
+                <a:latin typeface="Calibri"/>
+              </a:defRPr>
+            </a:pPr>
+            <a:r>
+              <a:t>CareChain • Ashish Anil Sikaria (23BCI0218) • Guide: Prof. SELVI M • SCOPE</a:t>
+            </a:r>
+          </a:p>
+        </p:txBody>
+      </p:sp>
+      <p:sp>
+        <p:nvSpPr>
+          <p:cNvPr id="8" name="TextBox 7"/>
+          <p:cNvSpPr txBox="1"/>
+          <p:nvPr/>
+        </p:nvSpPr>
+        <p:spPr>
+          <a:xfrm>
+            <a:off x="7772400" y="6327648"/>
+            <a:ext cx="3685032" cy="274320"/>
+          </a:xfrm>
+          <a:prstGeom prst="rect">
+            <a:avLst/>
+          </a:prstGeom>
+          <a:noFill/>
+        </p:spPr>
+        <p:txBody>
+          <a:bodyPr wrap="none">
+            <a:spAutoFit/>
+          </a:bodyPr>
+          <a:lstStyle/>
+          <a:p>
+            <a:pPr algn="r">
+              <a:defRPr sz="900">
+                <a:solidFill>
+                  <a:srgbClr val="64748B"/>
+                </a:solidFill>
+                <a:latin typeface="Calibri"/>
+              </a:defRPr>
+            </a:pPr>
+            <a:r>
+              <a:t>BCSE497J Project - I • Fall 2026-27</a:t>
+            </a:r>
+          </a:p>
+        </p:txBody>
+      </p:sp>
+      <p:sp>
+        <p:nvSpPr>
+          <p:cNvPr id="9" name="Rounded Rectangle 8"/>
           <p:cNvSpPr/>
           <p:nvPr/>
         </p:nvSpPr>
         <p:spPr>
           <a:xfrm>
-            <a:off x="603504" y="6263640"/>
-            <a:ext cx="10972800" cy="9144"/>
-          </a:xfrm>
-          <a:prstGeom prst="rect">
-            <a:avLst/>
-          </a:prstGeom>
-          <a:solidFill>
-            <a:srgbClr val="E2E8F0"/>
-          </a:solidFill>
-          <a:ln>
-            <a:noFill/>
+            <a:off x="731520" y="1463040"/>
+            <a:ext cx="5239512" cy="2057400"/>
+          </a:xfrm>
+          <a:prstGeom prst="roundRect">
+            <a:avLst/>
+          </a:prstGeom>
+          <a:solidFill>
+            <a:srgbClr val="FFF1F2"/>
+          </a:solidFill>
+          <a:ln w="19050">
+            <a:solidFill>
+              <a:srgbClr val="FECDD3"/>
+            </a:solidFill>
           </a:ln>
         </p:spPr>
         <p:style>
@@ -8080,117 +7983,32 @@
           </a:fontRef>
         </p:style>
         <p:txBody>
-          <a:bodyPr rtlCol="0" anchor="ctr"/>
-          <a:lstStyle/>
-          <a:p>
-            <a:pPr algn="ctr"/>
-          </a:p>
-        </p:txBody>
-      </p:sp>
-      <p:sp>
-        <p:nvSpPr>
-          <p:cNvPr id="7" name="TextBox 6"/>
-          <p:cNvSpPr txBox="1"/>
-          <p:nvPr/>
-        </p:nvSpPr>
-        <p:spPr>
-          <a:xfrm>
-            <a:off x="603504" y="6327648"/>
-            <a:ext cx="6858000" cy="274320"/>
-          </a:xfrm>
-          <a:prstGeom prst="rect">
-            <a:avLst/>
-          </a:prstGeom>
-          <a:noFill/>
-        </p:spPr>
-        <p:txBody>
-          <a:bodyPr wrap="none">
-            <a:spAutoFit/>
-          </a:bodyPr>
-          <a:lstStyle/>
+          <a:bodyPr rtlCol="0" anchor="ctr" wrap="square"/>
+          <a:lstStyle/>
+          <a:p>
+            <a:pPr algn="ctr">
+              <a:defRPr sz="1450" b="1">
+                <a:solidFill>
+                  <a:srgbClr val="0F172A"/>
+                </a:solidFill>
+                <a:latin typeface="Calibri"/>
+              </a:defRPr>
+            </a:pPr>
+            <a:r>
+              <a:t>Break-Glass Emergency Protocol</a:t>
+            </a:r>
+          </a:p>
           <a:p>
             <a:pPr>
-              <a:defRPr sz="900">
-                <a:solidFill>
-                  <a:srgbClr val="64748B"/>
-                </a:solidFill>
-                <a:latin typeface="Calibri"/>
-              </a:defRPr>
-            </a:pPr>
-            <a:r>
-              <a:t>Ashish Anil Sikaria (23BCI0218) • Faculty Guide: Prof. SELVI M • SCOPE</a:t>
-            </a:r>
-          </a:p>
-        </p:txBody>
-      </p:sp>
-      <p:sp>
-        <p:nvSpPr>
-          <p:cNvPr id="8" name="TextBox 7"/>
-          <p:cNvSpPr txBox="1"/>
-          <p:nvPr/>
-        </p:nvSpPr>
-        <p:spPr>
-          <a:xfrm>
-            <a:off x="7772400" y="6327648"/>
-            <a:ext cx="3803904" cy="274320"/>
-          </a:xfrm>
-          <a:prstGeom prst="rect">
-            <a:avLst/>
-          </a:prstGeom>
-          <a:noFill/>
-        </p:spPr>
-        <p:txBody>
-          <a:bodyPr wrap="none">
-            <a:spAutoFit/>
-          </a:bodyPr>
-          <a:lstStyle/>
-          <a:p>
-            <a:pPr algn="r">
-              <a:defRPr sz="900">
-                <a:solidFill>
-                  <a:srgbClr val="64748B"/>
-                </a:solidFill>
-                <a:latin typeface="Calibri"/>
-              </a:defRPr>
-            </a:pPr>
-            <a:r>
-              <a:t>Fall Semester 2026-27</a:t>
-            </a:r>
-          </a:p>
-        </p:txBody>
-      </p:sp>
-      <p:sp>
-        <p:nvSpPr>
-          <p:cNvPr id="9" name="TextBox 8"/>
-          <p:cNvSpPr txBox="1"/>
-          <p:nvPr/>
-        </p:nvSpPr>
-        <p:spPr>
-          <a:xfrm>
-            <a:off x="603504" y="731520"/>
-            <a:ext cx="10972800" cy="411480"/>
-          </a:xfrm>
-          <a:prstGeom prst="rect">
-            <a:avLst/>
-          </a:prstGeom>
-          <a:noFill/>
-        </p:spPr>
-        <p:txBody>
-          <a:bodyPr wrap="none">
-            <a:spAutoFit/>
-          </a:bodyPr>
-          <a:lstStyle/>
-          <a:p>
-            <a:pPr>
-              <a:defRPr sz="2200" b="1">
-                <a:solidFill>
-                  <a:srgbClr val="0F172A"/>
-                </a:solidFill>
-                <a:latin typeface="Calibri"/>
-              </a:defRPr>
-            </a:pPr>
-            <a:r>
-              <a:t>Next-Generation Protocol Innovations</a:t>
+              <a:defRPr sz="1100">
+                <a:solidFill>
+                  <a:srgbClr val="334155"/>
+                </a:solidFill>
+                <a:latin typeface="Calibri"/>
+              </a:defRPr>
+            </a:pPr>
+            <a:r>
+              <a:t>Solves the unconscious ER patient dilemma: Verified physicians trigger time-delayed cryptographic challenges or multi-guardian signatures backed by on-chain audit penalties.</a:t>
             </a:r>
           </a:p>
         </p:txBody>
@@ -8203,18 +8021,18 @@
         </p:nvSpPr>
         <p:spPr>
           <a:xfrm>
-            <a:off x="603504" y="1234440"/>
-            <a:ext cx="5349240" cy="2148840"/>
+            <a:off x="6217920" y="1463040"/>
+            <a:ext cx="5239512" cy="2057400"/>
           </a:xfrm>
           <a:prstGeom prst="roundRect">
             <a:avLst/>
           </a:prstGeom>
           <a:solidFill>
-            <a:srgbClr val="FFF1F2"/>
-          </a:solidFill>
-          <a:ln w="15240">
+            <a:srgbClr val="EEF2FF"/>
+          </a:solidFill>
+          <a:ln w="19050">
             <a:solidFill>
-              <a:srgbClr val="FECDD3"/>
+              <a:srgbClr val="C7D2FE"/>
             </a:solidFill>
           </a:ln>
         </p:spPr>
@@ -8237,7 +8055,7 @@
           <a:lstStyle/>
           <a:p>
             <a:pPr algn="ctr">
-              <a:defRPr sz="1500" b="1">
+              <a:defRPr sz="1450" b="1">
                 <a:solidFill>
                   <a:srgbClr val="0F172A"/>
                 </a:solidFill>
@@ -8245,7 +8063,7 @@
               </a:defRPr>
             </a:pPr>
             <a:r>
-              <a:t>Break-Glass Emergency Protocol</a:t>
+              <a:t>Zero-Knowledge (ZK) Health Claims</a:t>
             </a:r>
           </a:p>
           <a:p>
@@ -8258,7 +8076,7 @@
               </a:defRPr>
             </a:pPr>
             <a:r>
-              <a:t>Solves the unconscious ER patient dilemma: Verified physicians trigger time-delayed cryptographic challenges or multi-guardian signatures backed by on-chain audit penalties.</a:t>
+              <a:t>zk-SNARK circuits allow patients to prove clinical trial or insurance eligibility (e.g. HbA1c &lt; 6.5%, age &gt; 18) without disclosing raw medical files or identity.</a:t>
             </a:r>
           </a:p>
         </p:txBody>
@@ -8271,18 +8089,18 @@
         </p:nvSpPr>
         <p:spPr>
           <a:xfrm>
-            <a:off x="6227064" y="1234440"/>
-            <a:ext cx="5349240" cy="2148840"/>
+            <a:off x="731520" y="3703320"/>
+            <a:ext cx="5239512" cy="2057400"/>
           </a:xfrm>
           <a:prstGeom prst="roundRect">
             <a:avLst/>
           </a:prstGeom>
           <a:solidFill>
-            <a:srgbClr val="EEF2FF"/>
-          </a:solidFill>
-          <a:ln w="15240">
+            <a:srgbClr val="F0F9FF"/>
+          </a:solidFill>
+          <a:ln w="19050">
             <a:solidFill>
-              <a:srgbClr val="DDD6FE"/>
+              <a:srgbClr val="BAE6FD"/>
             </a:solidFill>
           </a:ln>
         </p:spPr>
@@ -8305,7 +8123,7 @@
           <a:lstStyle/>
           <a:p>
             <a:pPr algn="ctr">
-              <a:defRPr sz="1500" b="1">
+              <a:defRPr sz="1450" b="1">
                 <a:solidFill>
                   <a:srgbClr val="0F172A"/>
                 </a:solidFill>
@@ -8313,7 +8131,7 @@
               </a:defRPr>
             </a:pPr>
             <a:r>
-              <a:t>Zero-Knowledge (ZK) Health Claims</a:t>
+              <a:t>Gasless Account Abstraction (ERC-4337)</a:t>
             </a:r>
           </a:p>
           <a:p>
@@ -8326,7 +8144,7 @@
               </a:defRPr>
             </a:pPr>
             <a:r>
-              <a:t>zk-SNARK circuits allow patients to prove clinical trial or insurance eligibility (e.g. HbA1c &lt; 6.5%, age &gt; 18) without disclosing raw medical files or identity.</a:t>
+              <a:t>Replaces seed phrases and gas tokens with WebAuthn Passkeys (TouchID / FaceID), sponsored by hospital Paymaster relayers.</a:t>
             </a:r>
           </a:p>
         </p:txBody>
@@ -8339,18 +8157,18 @@
         </p:nvSpPr>
         <p:spPr>
           <a:xfrm>
-            <a:off x="603504" y="3566160"/>
-            <a:ext cx="5349240" cy="2148840"/>
+            <a:off x="6217920" y="3703320"/>
+            <a:ext cx="5239512" cy="2057400"/>
           </a:xfrm>
           <a:prstGeom prst="roundRect">
             <a:avLst/>
           </a:prstGeom>
           <a:solidFill>
-            <a:srgbClr val="F0F9FF"/>
-          </a:solidFill>
-          <a:ln w="15240">
+            <a:srgbClr val="F0FDFA"/>
+          </a:solidFill>
+          <a:ln w="19050">
             <a:solidFill>
-              <a:srgbClr val="BAE6FD"/>
+              <a:srgbClr val="A7F3D0"/>
             </a:solidFill>
           </a:ln>
         </p:spPr>
@@ -8373,75 +8191,7 @@
           <a:lstStyle/>
           <a:p>
             <a:pPr algn="ctr">
-              <a:defRPr sz="1500" b="1">
-                <a:solidFill>
-                  <a:srgbClr val="0F172A"/>
-                </a:solidFill>
-                <a:latin typeface="Calibri"/>
-              </a:defRPr>
-            </a:pPr>
-            <a:r>
-              <a:t>Gasless Account Abstraction (ERC-4337)</a:t>
-            </a:r>
-          </a:p>
-          <a:p>
-            <a:pPr>
-              <a:defRPr sz="1100">
-                <a:solidFill>
-                  <a:srgbClr val="334155"/>
-                </a:solidFill>
-                <a:latin typeface="Calibri"/>
-              </a:defRPr>
-            </a:pPr>
-            <a:r>
-              <a:t>Replaces seed phrases and gas tokens with WebAuthn Passkeys (TouchID / FaceID), sponsored by hospital Paymaster relayers.</a:t>
-            </a:r>
-          </a:p>
-        </p:txBody>
-      </p:sp>
-      <p:sp>
-        <p:nvSpPr>
-          <p:cNvPr id="13" name="Rounded Rectangle 12"/>
-          <p:cNvSpPr/>
-          <p:nvPr/>
-        </p:nvSpPr>
-        <p:spPr>
-          <a:xfrm>
-            <a:off x="6227064" y="3566160"/>
-            <a:ext cx="5349240" cy="2148840"/>
-          </a:xfrm>
-          <a:prstGeom prst="roundRect">
-            <a:avLst/>
-          </a:prstGeom>
-          <a:solidFill>
-            <a:srgbClr val="ECFDF5"/>
-          </a:solidFill>
-          <a:ln w="15240">
-            <a:solidFill>
-              <a:srgbClr val="A7F3D0"/>
-            </a:solidFill>
-          </a:ln>
-        </p:spPr>
-        <p:style>
-          <a:lnRef idx="1">
-            <a:schemeClr val="accent1"/>
-          </a:lnRef>
-          <a:fillRef idx="3">
-            <a:schemeClr val="accent1"/>
-          </a:fillRef>
-          <a:effectRef idx="2">
-            <a:schemeClr val="accent1"/>
-          </a:effectRef>
-          <a:fontRef idx="minor">
-            <a:schemeClr val="lt1"/>
-          </a:fontRef>
-        </p:style>
-        <p:txBody>
-          <a:bodyPr rtlCol="0" anchor="ctr" wrap="square"/>
-          <a:lstStyle/>
-          <a:p>
-            <a:pPr algn="ctr">
-              <a:defRPr sz="1500" b="1">
+              <a:defRPr sz="1450" b="1">
                 <a:solidFill>
                   <a:srgbClr val="0F172A"/>
                 </a:solidFill>
@@ -8530,20 +8280,105 @@
       </p:sp>
       <p:sp>
         <p:nvSpPr>
-          <p:cNvPr id="3" name="Rectangle 2"/>
+          <p:cNvPr id="3" name="TextBox 2"/>
+          <p:cNvSpPr txBox="1"/>
+          <p:nvPr/>
+        </p:nvSpPr>
+        <p:spPr>
+          <a:xfrm>
+            <a:off x="731520" y="365760"/>
+            <a:ext cx="10725912" cy="274320"/>
+          </a:xfrm>
+          <a:prstGeom prst="rect">
+            <a:avLst/>
+          </a:prstGeom>
+          <a:noFill/>
+        </p:spPr>
+        <p:txBody>
+          <a:bodyPr wrap="square">
+            <a:spAutoFit/>
+          </a:bodyPr>
+          <a:lstStyle/>
+          <a:p>
+            <a:pPr>
+              <a:defRPr sz="950" b="1">
+                <a:solidFill>
+                  <a:srgbClr val="0284C7"/>
+                </a:solidFill>
+                <a:latin typeface="Calibri"/>
+              </a:defRPr>
+            </a:pPr>
+            <a:r>
+              <a:t>VALUE PROPOSITION</a:t>
+            </a:r>
+          </a:p>
+        </p:txBody>
+      </p:sp>
+      <p:sp>
+        <p:nvSpPr>
+          <p:cNvPr id="4" name="TextBox 3"/>
+          <p:cNvSpPr txBox="1"/>
+          <p:nvPr/>
+        </p:nvSpPr>
+        <p:spPr>
+          <a:xfrm>
+            <a:off x="731520" y="621792"/>
+            <a:ext cx="10725912" cy="457200"/>
+          </a:xfrm>
+          <a:prstGeom prst="rect">
+            <a:avLst/>
+          </a:prstGeom>
+          <a:noFill/>
+        </p:spPr>
+        <p:txBody>
+          <a:bodyPr wrap="square">
+            <a:spAutoFit/>
+          </a:bodyPr>
+          <a:lstStyle/>
+          <a:p>
+            <a:pPr>
+              <a:defRPr sz="2200" b="1">
+                <a:solidFill>
+                  <a:srgbClr val="0F172A"/>
+                </a:solidFill>
+                <a:latin typeface="Calibri"/>
+              </a:defRPr>
+            </a:pPr>
+            <a:r>
+              <a:t>Multi-Sided Healthcare Economic Proposition</a:t>
+            </a:r>
+          </a:p>
+          <a:p>
+            <a:pPr>
+              <a:defRPr sz="1100">
+                <a:solidFill>
+                  <a:srgbClr val="64748B"/>
+                </a:solidFill>
+                <a:latin typeface="Calibri"/>
+              </a:defRPr>
+            </a:pPr>
+            <a:r>
+              <a:t>Creating tangible value for patients, clinicians, medical researchers, and insurance providers.</a:t>
+            </a:r>
+          </a:p>
+        </p:txBody>
+      </p:sp>
+      <p:sp>
+        <p:nvSpPr>
+          <p:cNvPr id="5" name="Rectangle 4"/>
           <p:cNvSpPr/>
           <p:nvPr/>
         </p:nvSpPr>
         <p:spPr>
           <a:xfrm>
-            <a:off x="603504" y="320040"/>
-            <a:ext cx="10972800" cy="27432"/>
+            <a:off x="731520" y="1234440"/>
+            <a:ext cx="10725912" cy="9144"/>
           </a:xfrm>
           <a:prstGeom prst="rect">
             <a:avLst/>
           </a:prstGeom>
           <a:solidFill>
-            <a:srgbClr val="0284C7"/>
+            <a:srgbClr val="E2E8F0"/>
           </a:solidFill>
           <a:ln>
             <a:noFill/>
@@ -8573,50 +8408,14 @@
       </p:sp>
       <p:sp>
         <p:nvSpPr>
-          <p:cNvPr id="4" name="TextBox 3"/>
-          <p:cNvSpPr txBox="1"/>
-          <p:nvPr/>
-        </p:nvSpPr>
-        <p:spPr>
-          <a:xfrm>
-            <a:off x="603504" y="384048"/>
-            <a:ext cx="7315200" cy="256032"/>
-          </a:xfrm>
-          <a:prstGeom prst="rect">
-            <a:avLst/>
-          </a:prstGeom>
-          <a:noFill/>
-        </p:spPr>
-        <p:txBody>
-          <a:bodyPr wrap="square">
-            <a:spAutoFit/>
-          </a:bodyPr>
-          <a:lstStyle/>
-          <a:p>
-            <a:pPr>
-              <a:defRPr sz="950" b="1">
-                <a:solidFill>
-                  <a:srgbClr val="0369A1"/>
-                </a:solidFill>
-                <a:latin typeface="Calibri"/>
-              </a:defRPr>
-            </a:pPr>
-            <a:r>
-              <a:t>STAKEHOLDER VALUE PROPOSITION</a:t>
-            </a:r>
-          </a:p>
-        </p:txBody>
-      </p:sp>
-      <p:sp>
-        <p:nvSpPr>
-          <p:cNvPr id="5" name="Rectangle 4"/>
+          <p:cNvPr id="6" name="Rectangle 5"/>
           <p:cNvSpPr/>
           <p:nvPr/>
         </p:nvSpPr>
         <p:spPr>
           <a:xfrm>
-            <a:off x="603504" y="658368"/>
-            <a:ext cx="10972800" cy="9144"/>
+            <a:off x="731520" y="6263640"/>
+            <a:ext cx="10725912" cy="9144"/>
           </a:xfrm>
           <a:prstGeom prst="rect">
             <a:avLst/>
@@ -8652,23 +8451,97 @@
       </p:sp>
       <p:sp>
         <p:nvSpPr>
-          <p:cNvPr id="6" name="Rectangle 5"/>
+          <p:cNvPr id="7" name="TextBox 6"/>
+          <p:cNvSpPr txBox="1"/>
+          <p:nvPr/>
+        </p:nvSpPr>
+        <p:spPr>
+          <a:xfrm>
+            <a:off x="731520" y="6327648"/>
+            <a:ext cx="6400800" cy="274320"/>
+          </a:xfrm>
+          <a:prstGeom prst="rect">
+            <a:avLst/>
+          </a:prstGeom>
+          <a:noFill/>
+        </p:spPr>
+        <p:txBody>
+          <a:bodyPr wrap="none">
+            <a:spAutoFit/>
+          </a:bodyPr>
+          <a:lstStyle/>
+          <a:p>
+            <a:pPr>
+              <a:defRPr sz="900">
+                <a:solidFill>
+                  <a:srgbClr val="64748B"/>
+                </a:solidFill>
+                <a:latin typeface="Calibri"/>
+              </a:defRPr>
+            </a:pPr>
+            <a:r>
+              <a:t>CareChain • Ashish Anil Sikaria (23BCI0218) • Guide: Prof. SELVI M • SCOPE</a:t>
+            </a:r>
+          </a:p>
+        </p:txBody>
+      </p:sp>
+      <p:sp>
+        <p:nvSpPr>
+          <p:cNvPr id="8" name="TextBox 7"/>
+          <p:cNvSpPr txBox="1"/>
+          <p:nvPr/>
+        </p:nvSpPr>
+        <p:spPr>
+          <a:xfrm>
+            <a:off x="7772400" y="6327648"/>
+            <a:ext cx="3685032" cy="274320"/>
+          </a:xfrm>
+          <a:prstGeom prst="rect">
+            <a:avLst/>
+          </a:prstGeom>
+          <a:noFill/>
+        </p:spPr>
+        <p:txBody>
+          <a:bodyPr wrap="none">
+            <a:spAutoFit/>
+          </a:bodyPr>
+          <a:lstStyle/>
+          <a:p>
+            <a:pPr algn="r">
+              <a:defRPr sz="900">
+                <a:solidFill>
+                  <a:srgbClr val="64748B"/>
+                </a:solidFill>
+                <a:latin typeface="Calibri"/>
+              </a:defRPr>
+            </a:pPr>
+            <a:r>
+              <a:t>BCSE497J Project - I • Fall 2026-27</a:t>
+            </a:r>
+          </a:p>
+        </p:txBody>
+      </p:sp>
+      <p:sp>
+        <p:nvSpPr>
+          <p:cNvPr id="9" name="Rounded Rectangle 8"/>
           <p:cNvSpPr/>
           <p:nvPr/>
         </p:nvSpPr>
         <p:spPr>
           <a:xfrm>
-            <a:off x="603504" y="6263640"/>
-            <a:ext cx="10972800" cy="9144"/>
-          </a:xfrm>
-          <a:prstGeom prst="rect">
-            <a:avLst/>
-          </a:prstGeom>
-          <a:solidFill>
-            <a:srgbClr val="E2E8F0"/>
-          </a:solidFill>
-          <a:ln>
-            <a:noFill/>
+            <a:off x="731520" y="1463040"/>
+            <a:ext cx="2496312" cy="4480560"/>
+          </a:xfrm>
+          <a:prstGeom prst="roundRect">
+            <a:avLst/>
+          </a:prstGeom>
+          <a:solidFill>
+            <a:srgbClr val="F0F9FF"/>
+          </a:solidFill>
+          <a:ln w="19050">
+            <a:solidFill>
+              <a:srgbClr val="BAE6FD"/>
+            </a:solidFill>
           </a:ln>
         </p:spPr>
         <p:style>
@@ -8686,109 +8559,11 @@
           </a:fontRef>
         </p:style>
         <p:txBody>
-          <a:bodyPr rtlCol="0" anchor="ctr"/>
-          <a:lstStyle/>
-          <a:p>
-            <a:pPr algn="ctr"/>
-          </a:p>
-        </p:txBody>
-      </p:sp>
-      <p:sp>
-        <p:nvSpPr>
-          <p:cNvPr id="7" name="TextBox 6"/>
-          <p:cNvSpPr txBox="1"/>
-          <p:nvPr/>
-        </p:nvSpPr>
-        <p:spPr>
-          <a:xfrm>
-            <a:off x="603504" y="6327648"/>
-            <a:ext cx="6858000" cy="274320"/>
-          </a:xfrm>
-          <a:prstGeom prst="rect">
-            <a:avLst/>
-          </a:prstGeom>
-          <a:noFill/>
-        </p:spPr>
-        <p:txBody>
-          <a:bodyPr wrap="none">
-            <a:spAutoFit/>
-          </a:bodyPr>
-          <a:lstStyle/>
-          <a:p>
-            <a:pPr>
-              <a:defRPr sz="900">
-                <a:solidFill>
-                  <a:srgbClr val="64748B"/>
-                </a:solidFill>
-                <a:latin typeface="Calibri"/>
-              </a:defRPr>
-            </a:pPr>
-            <a:r>
-              <a:t>Ashish Anil Sikaria (23BCI0218) • Faculty Guide: Prof. SELVI M • SCOPE</a:t>
-            </a:r>
-          </a:p>
-        </p:txBody>
-      </p:sp>
-      <p:sp>
-        <p:nvSpPr>
-          <p:cNvPr id="8" name="TextBox 7"/>
-          <p:cNvSpPr txBox="1"/>
-          <p:nvPr/>
-        </p:nvSpPr>
-        <p:spPr>
-          <a:xfrm>
-            <a:off x="7772400" y="6327648"/>
-            <a:ext cx="3803904" cy="274320"/>
-          </a:xfrm>
-          <a:prstGeom prst="rect">
-            <a:avLst/>
-          </a:prstGeom>
-          <a:noFill/>
-        </p:spPr>
-        <p:txBody>
-          <a:bodyPr wrap="none">
-            <a:spAutoFit/>
-          </a:bodyPr>
-          <a:lstStyle/>
-          <a:p>
-            <a:pPr algn="r">
-              <a:defRPr sz="900">
-                <a:solidFill>
-                  <a:srgbClr val="64748B"/>
-                </a:solidFill>
-                <a:latin typeface="Calibri"/>
-              </a:defRPr>
-            </a:pPr>
-            <a:r>
-              <a:t>Fall Semester 2026-27</a:t>
-            </a:r>
-          </a:p>
-        </p:txBody>
-      </p:sp>
-      <p:sp>
-        <p:nvSpPr>
-          <p:cNvPr id="9" name="TextBox 8"/>
-          <p:cNvSpPr txBox="1"/>
-          <p:nvPr/>
-        </p:nvSpPr>
-        <p:spPr>
-          <a:xfrm>
-            <a:off x="603504" y="731520"/>
-            <a:ext cx="10972800" cy="411480"/>
-          </a:xfrm>
-          <a:prstGeom prst="rect">
-            <a:avLst/>
-          </a:prstGeom>
-          <a:noFill/>
-        </p:spPr>
-        <p:txBody>
-          <a:bodyPr wrap="none">
-            <a:spAutoFit/>
-          </a:bodyPr>
-          <a:lstStyle/>
-          <a:p>
-            <a:pPr>
-              <a:defRPr sz="2200" b="1">
+          <a:bodyPr rtlCol="0" anchor="ctr" wrap="square"/>
+          <a:lstStyle/>
+          <a:p>
+            <a:pPr algn="ctr">
+              <a:defRPr sz="1700" b="1">
                 <a:solidFill>
                   <a:srgbClr val="0F172A"/>
                 </a:solidFill>
@@ -8796,7 +8571,21 @@
               </a:defRPr>
             </a:pPr>
             <a:r>
-              <a:t>Multi-Sided Healthcare Economic Impact</a:t>
+              <a:t>Patients</a:t>
+            </a:r>
+          </a:p>
+          <a:p>
+            <a:pPr algn="ctr">
+              <a:defRPr sz="1150">
+                <a:solidFill>
+                  <a:srgbClr val="334155"/>
+                </a:solidFill>
+                <a:latin typeface="Calibri"/>
+              </a:defRPr>
+            </a:pPr>
+            <a:br/>
+            <a:r>
+              <a:t>Complete data sovereignty, zero corporate exploitation, and seamless portable access across medical facilities.</a:t>
             </a:r>
           </a:p>
         </p:txBody>
@@ -8809,18 +8598,18 @@
         </p:nvSpPr>
         <p:spPr>
           <a:xfrm>
-            <a:off x="603504" y="1234440"/>
-            <a:ext cx="2606040" cy="4754880"/>
+            <a:off x="3474720" y="1463040"/>
+            <a:ext cx="2496312" cy="4480560"/>
           </a:xfrm>
           <a:prstGeom prst="roundRect">
             <a:avLst/>
           </a:prstGeom>
           <a:solidFill>
-            <a:srgbClr val="F0F9FF"/>
-          </a:solidFill>
-          <a:ln w="15240">
+            <a:srgbClr val="F0FDFA"/>
+          </a:solidFill>
+          <a:ln w="19050">
             <a:solidFill>
-              <a:srgbClr val="BAE6FD"/>
+              <a:srgbClr val="A7F3D0"/>
             </a:solidFill>
           </a:ln>
         </p:spPr>
@@ -8851,7 +8640,7 @@
               </a:defRPr>
             </a:pPr>
             <a:r>
-              <a:t>Patients</a:t>
+              <a:t>Clinicians</a:t>
             </a:r>
           </a:p>
           <a:p>
@@ -8863,8 +8652,9 @@
                 <a:latin typeface="Calibri"/>
               </a:defRPr>
             </a:pPr>
-            <a:r>
-              <a:t>Complete data sovereignty, zero commercial exploitation, and seamless portable access across medical facilities.</a:t>
+            <a:br/>
+            <a:r>
+              <a:t>Instant verified medical histories, zero diagnostic redundancy, and reduced malpractice liability.</a:t>
             </a:r>
           </a:p>
         </p:txBody>
@@ -8877,18 +8667,18 @@
         </p:nvSpPr>
         <p:spPr>
           <a:xfrm>
-            <a:off x="3419856" y="1234440"/>
-            <a:ext cx="2606040" cy="4754880"/>
+            <a:off x="6217920" y="1463040"/>
+            <a:ext cx="2496312" cy="4480560"/>
           </a:xfrm>
           <a:prstGeom prst="roundRect">
             <a:avLst/>
           </a:prstGeom>
           <a:solidFill>
-            <a:srgbClr val="ECFDF5"/>
-          </a:solidFill>
-          <a:ln w="15240">
+            <a:srgbClr val="EEF2FF"/>
+          </a:solidFill>
+          <a:ln w="19050">
             <a:solidFill>
-              <a:srgbClr val="A7F3D0"/>
+              <a:srgbClr val="C7D2FE"/>
             </a:solidFill>
           </a:ln>
         </p:spPr>
@@ -8919,7 +8709,7 @@
               </a:defRPr>
             </a:pPr>
             <a:r>
-              <a:t>Clinicians</a:t>
+              <a:t>Researchers</a:t>
             </a:r>
           </a:p>
           <a:p>
@@ -8931,8 +8721,9 @@
                 <a:latin typeface="Calibri"/>
               </a:defRPr>
             </a:pPr>
-            <a:r>
-              <a:t>Instant verified medical histories, zero diagnostic redundancy, and reduced malpractice liability.</a:t>
+            <a:br/>
+            <a:r>
+              <a:t>Opt-in Compute-to-Data research pools with automated cryptographic patient micro-rewards.</a:t>
             </a:r>
           </a:p>
         </p:txBody>
@@ -8945,18 +8736,18 @@
         </p:nvSpPr>
         <p:spPr>
           <a:xfrm>
-            <a:off x="6236208" y="1234440"/>
-            <a:ext cx="2606040" cy="4754880"/>
+            <a:off x="8961120" y="1463040"/>
+            <a:ext cx="2496312" cy="4480560"/>
           </a:xfrm>
           <a:prstGeom prst="roundRect">
             <a:avLst/>
           </a:prstGeom>
           <a:solidFill>
-            <a:srgbClr val="EEF2FF"/>
-          </a:solidFill>
-          <a:ln w="15240">
+            <a:srgbClr val="FFFBEB"/>
+          </a:solidFill>
+          <a:ln w="19050">
             <a:solidFill>
-              <a:srgbClr val="DDD6FE"/>
+              <a:srgbClr val="FDE68A"/>
             </a:solidFill>
           </a:ln>
         </p:spPr>
@@ -8987,7 +8778,7 @@
               </a:defRPr>
             </a:pPr>
             <a:r>
-              <a:t>Researchers</a:t>
+              <a:t>Insurers</a:t>
             </a:r>
           </a:p>
           <a:p>
@@ -8999,76 +8790,9 @@
                 <a:latin typeface="Calibri"/>
               </a:defRPr>
             </a:pPr>
-            <a:r>
-              <a:t>Opt-in Compute-to-Data research pools with automated cryptographic patient micro-rewards.</a:t>
-            </a:r>
-          </a:p>
-        </p:txBody>
-      </p:sp>
-      <p:sp>
-        <p:nvSpPr>
-          <p:cNvPr id="13" name="Rounded Rectangle 12"/>
-          <p:cNvSpPr/>
-          <p:nvPr/>
-        </p:nvSpPr>
-        <p:spPr>
-          <a:xfrm>
-            <a:off x="9052560" y="1234440"/>
-            <a:ext cx="2606040" cy="4754880"/>
-          </a:xfrm>
-          <a:prstGeom prst="roundRect">
-            <a:avLst/>
-          </a:prstGeom>
-          <a:solidFill>
-            <a:srgbClr val="FFFBEB"/>
-          </a:solidFill>
-          <a:ln w="15240">
-            <a:solidFill>
-              <a:srgbClr val="FDE68A"/>
-            </a:solidFill>
-          </a:ln>
-        </p:spPr>
-        <p:style>
-          <a:lnRef idx="1">
-            <a:schemeClr val="accent1"/>
-          </a:lnRef>
-          <a:fillRef idx="3">
-            <a:schemeClr val="accent1"/>
-          </a:fillRef>
-          <a:effectRef idx="2">
-            <a:schemeClr val="accent1"/>
-          </a:effectRef>
-          <a:fontRef idx="minor">
-            <a:schemeClr val="lt1"/>
-          </a:fontRef>
-        </p:style>
-        <p:txBody>
-          <a:bodyPr rtlCol="0" anchor="ctr" wrap="square"/>
-          <a:lstStyle/>
-          <a:p>
-            <a:pPr algn="ctr">
-              <a:defRPr sz="1700" b="1">
-                <a:solidFill>
-                  <a:srgbClr val="0F172A"/>
-                </a:solidFill>
-                <a:latin typeface="Calibri"/>
-              </a:defRPr>
-            </a:pPr>
-            <a:r>
-              <a:t>Insurers</a:t>
-            </a:r>
-          </a:p>
-          <a:p>
-            <a:pPr algn="ctr">
-              <a:defRPr sz="1150">
-                <a:solidFill>
-                  <a:srgbClr val="334155"/>
-                </a:solidFill>
-                <a:latin typeface="Calibri"/>
-              </a:defRPr>
-            </a:pPr>
-            <a:r>
-              <a:t>Tamper-proof smart contract claims verification, eliminating fraudulent billing and overhead.</a:t>
+            <a:br/>
+            <a:r>
+              <a:t>Tamper-proof smart contract claims verification, eliminating fraudulent billing and administrative overhead.</a:t>
             </a:r>
           </a:p>
         </p:txBody>
@@ -9136,20 +8860,105 @@
       </p:sp>
       <p:sp>
         <p:nvSpPr>
-          <p:cNvPr id="3" name="Rectangle 2"/>
+          <p:cNvPr id="3" name="TextBox 2"/>
+          <p:cNvSpPr txBox="1"/>
+          <p:nvPr/>
+        </p:nvSpPr>
+        <p:spPr>
+          <a:xfrm>
+            <a:off x="731520" y="365760"/>
+            <a:ext cx="10725912" cy="274320"/>
+          </a:xfrm>
+          <a:prstGeom prst="rect">
+            <a:avLst/>
+          </a:prstGeom>
+          <a:noFill/>
+        </p:spPr>
+        <p:txBody>
+          <a:bodyPr wrap="square">
+            <a:spAutoFit/>
+          </a:bodyPr>
+          <a:lstStyle/>
+          <a:p>
+            <a:pPr>
+              <a:defRPr sz="950" b="1">
+                <a:solidFill>
+                  <a:srgbClr val="0284C7"/>
+                </a:solidFill>
+                <a:latin typeface="Calibri"/>
+              </a:defRPr>
+            </a:pPr>
+            <a:r>
+              <a:t>SYSTEM SHOWCASE</a:t>
+            </a:r>
+          </a:p>
+        </p:txBody>
+      </p:sp>
+      <p:sp>
+        <p:nvSpPr>
+          <p:cNvPr id="4" name="TextBox 3"/>
+          <p:cNvSpPr txBox="1"/>
+          <p:nvPr/>
+        </p:nvSpPr>
+        <p:spPr>
+          <a:xfrm>
+            <a:off x="731520" y="621792"/>
+            <a:ext cx="10725912" cy="457200"/>
+          </a:xfrm>
+          <a:prstGeom prst="rect">
+            <a:avLst/>
+          </a:prstGeom>
+          <a:noFill/>
+        </p:spPr>
+        <p:txBody>
+          <a:bodyPr wrap="square">
+            <a:spAutoFit/>
+          </a:bodyPr>
+          <a:lstStyle/>
+          <a:p>
+            <a:pPr>
+              <a:defRPr sz="2200" b="1">
+                <a:solidFill>
+                  <a:srgbClr val="0F172A"/>
+                </a:solidFill>
+                <a:latin typeface="Calibri"/>
+              </a:defRPr>
+            </a:pPr>
+            <a:r>
+              <a:t>Functional Prototype Demonstration &amp; Core Modules</a:t>
+            </a:r>
+          </a:p>
+          <a:p>
+            <a:pPr>
+              <a:defRPr sz="1100">
+                <a:solidFill>
+                  <a:srgbClr val="64748B"/>
+                </a:solidFill>
+                <a:latin typeface="Calibri"/>
+              </a:defRPr>
+            </a:pPr>
+            <a:r>
+              <a:t>Full-stack role-based architecture operating live on localhost with MetaMask.</a:t>
+            </a:r>
+          </a:p>
+        </p:txBody>
+      </p:sp>
+      <p:sp>
+        <p:nvSpPr>
+          <p:cNvPr id="5" name="Rectangle 4"/>
           <p:cNvSpPr/>
           <p:nvPr/>
         </p:nvSpPr>
         <p:spPr>
           <a:xfrm>
-            <a:off x="603504" y="320040"/>
-            <a:ext cx="10972800" cy="27432"/>
+            <a:off x="731520" y="1234440"/>
+            <a:ext cx="10725912" cy="9144"/>
           </a:xfrm>
           <a:prstGeom prst="rect">
             <a:avLst/>
           </a:prstGeom>
           <a:solidFill>
-            <a:srgbClr val="0284C7"/>
+            <a:srgbClr val="E2E8F0"/>
           </a:solidFill>
           <a:ln>
             <a:noFill/>
@@ -9179,50 +8988,14 @@
       </p:sp>
       <p:sp>
         <p:nvSpPr>
-          <p:cNvPr id="4" name="TextBox 3"/>
-          <p:cNvSpPr txBox="1"/>
-          <p:nvPr/>
-        </p:nvSpPr>
-        <p:spPr>
-          <a:xfrm>
-            <a:off x="603504" y="384048"/>
-            <a:ext cx="7315200" cy="256032"/>
-          </a:xfrm>
-          <a:prstGeom prst="rect">
-            <a:avLst/>
-          </a:prstGeom>
-          <a:noFill/>
-        </p:spPr>
-        <p:txBody>
-          <a:bodyPr wrap="square">
-            <a:spAutoFit/>
-          </a:bodyPr>
-          <a:lstStyle/>
-          <a:p>
-            <a:pPr>
-              <a:defRPr sz="950" b="1">
-                <a:solidFill>
-                  <a:srgbClr val="0369A1"/>
-                </a:solidFill>
-                <a:latin typeface="Calibri"/>
-              </a:defRPr>
-            </a:pPr>
-            <a:r>
-              <a:t>DEMONSTRATION &amp; DELIVERABLES</a:t>
-            </a:r>
-          </a:p>
-        </p:txBody>
-      </p:sp>
-      <p:sp>
-        <p:nvSpPr>
-          <p:cNvPr id="5" name="Rectangle 4"/>
+          <p:cNvPr id="6" name="Rectangle 5"/>
           <p:cNvSpPr/>
           <p:nvPr/>
         </p:nvSpPr>
         <p:spPr>
           <a:xfrm>
-            <a:off x="603504" y="658368"/>
-            <a:ext cx="10972800" cy="9144"/>
+            <a:off x="731520" y="6263640"/>
+            <a:ext cx="10725912" cy="9144"/>
           </a:xfrm>
           <a:prstGeom prst="rect">
             <a:avLst/>
@@ -9258,23 +9031,97 @@
       </p:sp>
       <p:sp>
         <p:nvSpPr>
-          <p:cNvPr id="6" name="Rectangle 5"/>
+          <p:cNvPr id="7" name="TextBox 6"/>
+          <p:cNvSpPr txBox="1"/>
+          <p:nvPr/>
+        </p:nvSpPr>
+        <p:spPr>
+          <a:xfrm>
+            <a:off x="731520" y="6327648"/>
+            <a:ext cx="6400800" cy="274320"/>
+          </a:xfrm>
+          <a:prstGeom prst="rect">
+            <a:avLst/>
+          </a:prstGeom>
+          <a:noFill/>
+        </p:spPr>
+        <p:txBody>
+          <a:bodyPr wrap="none">
+            <a:spAutoFit/>
+          </a:bodyPr>
+          <a:lstStyle/>
+          <a:p>
+            <a:pPr>
+              <a:defRPr sz="900">
+                <a:solidFill>
+                  <a:srgbClr val="64748B"/>
+                </a:solidFill>
+                <a:latin typeface="Calibri"/>
+              </a:defRPr>
+            </a:pPr>
+            <a:r>
+              <a:t>CareChain • Ashish Anil Sikaria (23BCI0218) • Guide: Prof. SELVI M • SCOPE</a:t>
+            </a:r>
+          </a:p>
+        </p:txBody>
+      </p:sp>
+      <p:sp>
+        <p:nvSpPr>
+          <p:cNvPr id="8" name="TextBox 7"/>
+          <p:cNvSpPr txBox="1"/>
+          <p:nvPr/>
+        </p:nvSpPr>
+        <p:spPr>
+          <a:xfrm>
+            <a:off x="7772400" y="6327648"/>
+            <a:ext cx="3685032" cy="274320"/>
+          </a:xfrm>
+          <a:prstGeom prst="rect">
+            <a:avLst/>
+          </a:prstGeom>
+          <a:noFill/>
+        </p:spPr>
+        <p:txBody>
+          <a:bodyPr wrap="none">
+            <a:spAutoFit/>
+          </a:bodyPr>
+          <a:lstStyle/>
+          <a:p>
+            <a:pPr algn="r">
+              <a:defRPr sz="900">
+                <a:solidFill>
+                  <a:srgbClr val="64748B"/>
+                </a:solidFill>
+                <a:latin typeface="Calibri"/>
+              </a:defRPr>
+            </a:pPr>
+            <a:r>
+              <a:t>BCSE497J Project - I • Fall 2026-27</a:t>
+            </a:r>
+          </a:p>
+        </p:txBody>
+      </p:sp>
+      <p:sp>
+        <p:nvSpPr>
+          <p:cNvPr id="9" name="Rounded Rectangle 8"/>
           <p:cNvSpPr/>
           <p:nvPr/>
         </p:nvSpPr>
         <p:spPr>
           <a:xfrm>
-            <a:off x="603504" y="6263640"/>
-            <a:ext cx="10972800" cy="9144"/>
-          </a:xfrm>
-          <a:prstGeom prst="rect">
-            <a:avLst/>
-          </a:prstGeom>
-          <a:solidFill>
-            <a:srgbClr val="E2E8F0"/>
-          </a:solidFill>
-          <a:ln>
-            <a:noFill/>
+            <a:off x="731520" y="1463040"/>
+            <a:ext cx="5239512" cy="2057400"/>
+          </a:xfrm>
+          <a:prstGeom prst="roundRect">
+            <a:avLst/>
+          </a:prstGeom>
+          <a:solidFill>
+            <a:srgbClr val="F0F9FF"/>
+          </a:solidFill>
+          <a:ln w="19050">
+            <a:solidFill>
+              <a:srgbClr val="BAE6FD"/>
+            </a:solidFill>
           </a:ln>
         </p:spPr>
         <p:style>
@@ -9292,117 +9139,32 @@
           </a:fontRef>
         </p:style>
         <p:txBody>
-          <a:bodyPr rtlCol="0" anchor="ctr"/>
-          <a:lstStyle/>
-          <a:p>
-            <a:pPr algn="ctr"/>
-          </a:p>
-        </p:txBody>
-      </p:sp>
-      <p:sp>
-        <p:nvSpPr>
-          <p:cNvPr id="7" name="TextBox 6"/>
-          <p:cNvSpPr txBox="1"/>
-          <p:nvPr/>
-        </p:nvSpPr>
-        <p:spPr>
-          <a:xfrm>
-            <a:off x="603504" y="6327648"/>
-            <a:ext cx="6858000" cy="274320"/>
-          </a:xfrm>
-          <a:prstGeom prst="rect">
-            <a:avLst/>
-          </a:prstGeom>
-          <a:noFill/>
-        </p:spPr>
-        <p:txBody>
-          <a:bodyPr wrap="none">
-            <a:spAutoFit/>
-          </a:bodyPr>
-          <a:lstStyle/>
+          <a:bodyPr rtlCol="0" anchor="ctr" wrap="square"/>
+          <a:lstStyle/>
+          <a:p>
+            <a:pPr algn="ctr">
+              <a:defRPr sz="1500" b="1">
+                <a:solidFill>
+                  <a:srgbClr val="0F172A"/>
+                </a:solidFill>
+                <a:latin typeface="Calibri"/>
+              </a:defRPr>
+            </a:pPr>
+            <a:r>
+              <a:t>Patient Health Vault</a:t>
+            </a:r>
+          </a:p>
           <a:p>
             <a:pPr>
-              <a:defRPr sz="900">
-                <a:solidFill>
-                  <a:srgbClr val="64748B"/>
-                </a:solidFill>
-                <a:latin typeface="Calibri"/>
-              </a:defRPr>
-            </a:pPr>
-            <a:r>
-              <a:t>Ashish Anil Sikaria (23BCI0218) • Faculty Guide: Prof. SELVI M • SCOPE</a:t>
-            </a:r>
-          </a:p>
-        </p:txBody>
-      </p:sp>
-      <p:sp>
-        <p:nvSpPr>
-          <p:cNvPr id="8" name="TextBox 7"/>
-          <p:cNvSpPr txBox="1"/>
-          <p:nvPr/>
-        </p:nvSpPr>
-        <p:spPr>
-          <a:xfrm>
-            <a:off x="7772400" y="6327648"/>
-            <a:ext cx="3803904" cy="274320"/>
-          </a:xfrm>
-          <a:prstGeom prst="rect">
-            <a:avLst/>
-          </a:prstGeom>
-          <a:noFill/>
-        </p:spPr>
-        <p:txBody>
-          <a:bodyPr wrap="none">
-            <a:spAutoFit/>
-          </a:bodyPr>
-          <a:lstStyle/>
-          <a:p>
-            <a:pPr algn="r">
-              <a:defRPr sz="900">
-                <a:solidFill>
-                  <a:srgbClr val="64748B"/>
-                </a:solidFill>
-                <a:latin typeface="Calibri"/>
-              </a:defRPr>
-            </a:pPr>
-            <a:r>
-              <a:t>Fall Semester 2026-27</a:t>
-            </a:r>
-          </a:p>
-        </p:txBody>
-      </p:sp>
-      <p:sp>
-        <p:nvSpPr>
-          <p:cNvPr id="9" name="TextBox 8"/>
-          <p:cNvSpPr txBox="1"/>
-          <p:nvPr/>
-        </p:nvSpPr>
-        <p:spPr>
-          <a:xfrm>
-            <a:off x="603504" y="731520"/>
-            <a:ext cx="10972800" cy="411480"/>
-          </a:xfrm>
-          <a:prstGeom prst="rect">
-            <a:avLst/>
-          </a:prstGeom>
-          <a:noFill/>
-        </p:spPr>
-        <p:txBody>
-          <a:bodyPr wrap="none">
-            <a:spAutoFit/>
-          </a:bodyPr>
-          <a:lstStyle/>
-          <a:p>
-            <a:pPr>
-              <a:defRPr sz="2200" b="1">
-                <a:solidFill>
-                  <a:srgbClr val="0F172A"/>
-                </a:solidFill>
-                <a:latin typeface="Calibri"/>
-              </a:defRPr>
-            </a:pPr>
-            <a:r>
-              <a:t>Prototype Demonstration &amp; System Modules</a:t>
+              <a:defRPr sz="1100">
+                <a:solidFill>
+                  <a:srgbClr val="334155"/>
+                </a:solidFill>
+                <a:latin typeface="Calibri"/>
+              </a:defRPr>
+            </a:pPr>
+            <a:r>
+              <a:t>Client-side AES-256 file encryption, IPFS pinning via Pinata, and toggleable doctor access control matrix.</a:t>
             </a:r>
           </a:p>
         </p:txBody>
@@ -9415,18 +9177,18 @@
         </p:nvSpPr>
         <p:spPr>
           <a:xfrm>
-            <a:off x="603504" y="1234440"/>
-            <a:ext cx="5349240" cy="2148840"/>
+            <a:off x="6217920" y="1463040"/>
+            <a:ext cx="5239512" cy="2057400"/>
           </a:xfrm>
           <a:prstGeom prst="roundRect">
             <a:avLst/>
           </a:prstGeom>
           <a:solidFill>
-            <a:srgbClr val="F0F9FF"/>
-          </a:solidFill>
-          <a:ln w="15240">
+            <a:srgbClr val="F0FDFA"/>
+          </a:solidFill>
+          <a:ln w="19050">
             <a:solidFill>
-              <a:srgbClr val="BAE6FD"/>
+              <a:srgbClr val="A7F3D0"/>
             </a:solidFill>
           </a:ln>
         </p:spPr>
@@ -9457,12 +9219,12 @@
               </a:defRPr>
             </a:pPr>
             <a:r>
-              <a:t>Patient Health Vault</a:t>
+              <a:t>Practitioner Portal</a:t>
             </a:r>
           </a:p>
           <a:p>
             <a:pPr>
-              <a:defRPr sz="1150">
+              <a:defRPr sz="1100">
                 <a:solidFill>
                   <a:srgbClr val="334155"/>
                 </a:solidFill>
@@ -9470,7 +9232,7 @@
               </a:defRPr>
             </a:pPr>
             <a:r>
-              <a:t>Client-side AES-256 file encryption, IPFS pinning via Pinata, and toggleable doctor access control matrix.</a:t>
+              <a:t>Authorized patient EHR lookup, verified clinical diagnostic report uploads, and digital prescription issuance.</a:t>
             </a:r>
           </a:p>
         </p:txBody>
@@ -9483,18 +9245,18 @@
         </p:nvSpPr>
         <p:spPr>
           <a:xfrm>
-            <a:off x="6227064" y="1234440"/>
-            <a:ext cx="5349240" cy="2148840"/>
+            <a:off x="731520" y="3703320"/>
+            <a:ext cx="5239512" cy="2057400"/>
           </a:xfrm>
           <a:prstGeom prst="roundRect">
             <a:avLst/>
           </a:prstGeom>
           <a:solidFill>
-            <a:srgbClr val="ECFDF5"/>
-          </a:solidFill>
-          <a:ln w="15240">
+            <a:srgbClr val="EEF2FF"/>
+          </a:solidFill>
+          <a:ln w="19050">
             <a:solidFill>
-              <a:srgbClr val="A7F3D0"/>
+              <a:srgbClr val="C7D2FE"/>
             </a:solidFill>
           </a:ln>
         </p:spPr>
@@ -9525,12 +9287,12 @@
               </a:defRPr>
             </a:pPr>
             <a:r>
-              <a:t>Practitioner Portal</a:t>
+              <a:t>Hospital Governance</a:t>
             </a:r>
           </a:p>
           <a:p>
             <a:pPr>
-              <a:defRPr sz="1150">
+              <a:defRPr sz="1100">
                 <a:solidFill>
                   <a:srgbClr val="334155"/>
                 </a:solidFill>
@@ -9538,7 +9300,7 @@
               </a:defRPr>
             </a:pPr>
             <a:r>
-              <a:t>Authorized patient EHR lookup, verified clinical diagnostic report uploads, and digital prescription issuance.</a:t>
+              <a:t>Practitioner license verification, smart contract telemetry, and HIPAA audit trail log exports.</a:t>
             </a:r>
           </a:p>
         </p:txBody>
@@ -9551,18 +9313,18 @@
         </p:nvSpPr>
         <p:spPr>
           <a:xfrm>
-            <a:off x="603504" y="3566160"/>
-            <a:ext cx="5349240" cy="2148840"/>
+            <a:off x="6217920" y="3703320"/>
+            <a:ext cx="5239512" cy="2057400"/>
           </a:xfrm>
           <a:prstGeom prst="roundRect">
             <a:avLst/>
           </a:prstGeom>
           <a:solidFill>
-            <a:srgbClr val="EEF2FF"/>
-          </a:solidFill>
-          <a:ln w="15240">
+            <a:srgbClr val="FFFBEB"/>
+          </a:solidFill>
+          <a:ln w="19050">
             <a:solidFill>
-              <a:srgbClr val="DDD6FE"/>
+              <a:srgbClr val="FDE68A"/>
             </a:solidFill>
           </a:ln>
         </p:spPr>
@@ -9593,12 +9355,12 @@
               </a:defRPr>
             </a:pPr>
             <a:r>
-              <a:t>Hospital Governance</a:t>
+              <a:t>Web3 Wallet Layer</a:t>
             </a:r>
           </a:p>
           <a:p>
             <a:pPr>
-              <a:defRPr sz="1150">
+              <a:defRPr sz="1100">
                 <a:solidFill>
                   <a:srgbClr val="334155"/>
                 </a:solidFill>
@@ -9606,75 +9368,7 @@
               </a:defRPr>
             </a:pPr>
             <a:r>
-              <a:t>Practitioner license verification, smart contract telemetry, and HIPAA audit trail log exports.</a:t>
-            </a:r>
-          </a:p>
-        </p:txBody>
-      </p:sp>
-      <p:sp>
-        <p:nvSpPr>
-          <p:cNvPr id="13" name="Rounded Rectangle 12"/>
-          <p:cNvSpPr/>
-          <p:nvPr/>
-        </p:nvSpPr>
-        <p:spPr>
-          <a:xfrm>
-            <a:off x="6227064" y="3566160"/>
-            <a:ext cx="5349240" cy="2148840"/>
-          </a:xfrm>
-          <a:prstGeom prst="roundRect">
-            <a:avLst/>
-          </a:prstGeom>
-          <a:solidFill>
-            <a:srgbClr val="FFFBEB"/>
-          </a:solidFill>
-          <a:ln w="15240">
-            <a:solidFill>
-              <a:srgbClr val="FDE68A"/>
-            </a:solidFill>
-          </a:ln>
-        </p:spPr>
-        <p:style>
-          <a:lnRef idx="1">
-            <a:schemeClr val="accent1"/>
-          </a:lnRef>
-          <a:fillRef idx="3">
-            <a:schemeClr val="accent1"/>
-          </a:fillRef>
-          <a:effectRef idx="2">
-            <a:schemeClr val="accent1"/>
-          </a:effectRef>
-          <a:fontRef idx="minor">
-            <a:schemeClr val="lt1"/>
-          </a:fontRef>
-        </p:style>
-        <p:txBody>
-          <a:bodyPr rtlCol="0" anchor="ctr" wrap="square"/>
-          <a:lstStyle/>
-          <a:p>
-            <a:pPr algn="ctr">
-              <a:defRPr sz="1500" b="1">
-                <a:solidFill>
-                  <a:srgbClr val="0F172A"/>
-                </a:solidFill>
-                <a:latin typeface="Calibri"/>
-              </a:defRPr>
-            </a:pPr>
-            <a:r>
-              <a:t>Web3 Wallet Layer</a:t>
-            </a:r>
-          </a:p>
-          <a:p>
-            <a:pPr>
-              <a:defRPr sz="1150">
-                <a:solidFill>
-                  <a:srgbClr val="334155"/>
-                </a:solidFill>
-                <a:latin typeface="Calibri"/>
-              </a:defRPr>
-            </a:pPr>
-            <a:r>
-              <a:t>Direct MetaMask provider integration alongside off-chain fallback simulation modes.</a:t>
+              <a:t>Direct MetaMask provider integration alongside off-chain fallback simulation modes for zero-friction evaluation.</a:t>
             </a:r>
           </a:p>
         </p:txBody>

--- a/docs/presentation/CareChain_Presentation.pptx
+++ b/docs/presentation/CareChain_Presentation.pptx
@@ -3149,7 +3149,7 @@
         <p:spPr>
           <a:xfrm>
             <a:off x="0" y="0"/>
-            <a:ext cx="365760" cy="6858000"/>
+            <a:ext cx="228600" cy="6858000"/>
           </a:xfrm>
           <a:prstGeom prst="rect">
             <a:avLst/>
@@ -3185,25 +3185,121 @@
       </p:sp>
       <p:sp>
         <p:nvSpPr>
-          <p:cNvPr id="4" name="Rounded Rectangle 3"/>
+          <p:cNvPr id="4" name="TextBox 3"/>
+          <p:cNvSpPr txBox="1"/>
+          <p:nvPr/>
+        </p:nvSpPr>
+        <p:spPr>
+          <a:xfrm>
+            <a:off x="1005840" y="822960"/>
+            <a:ext cx="9601200" cy="274320"/>
+          </a:xfrm>
+          <a:prstGeom prst="rect">
+            <a:avLst/>
+          </a:prstGeom>
+          <a:noFill/>
+        </p:spPr>
+        <p:txBody>
+          <a:bodyPr wrap="none">
+            <a:spAutoFit/>
+          </a:bodyPr>
+          <a:lstStyle/>
+          <a:p>
+            <a:pPr>
+              <a:defRPr sz="1000" b="1">
+                <a:solidFill>
+                  <a:srgbClr val="0369A1"/>
+                </a:solidFill>
+                <a:latin typeface="Calibri"/>
+              </a:defRPr>
+            </a:pPr>
+            <a:r>
+              <a:t>FALL SEMESTER 2026-27  •  BCSE497J - PROJECT - I  •  SCOPE</a:t>
+            </a:r>
+          </a:p>
+        </p:txBody>
+      </p:sp>
+      <p:sp>
+        <p:nvSpPr>
+          <p:cNvPr id="5" name="TextBox 4"/>
+          <p:cNvSpPr txBox="1"/>
+          <p:nvPr/>
+        </p:nvSpPr>
+        <p:spPr>
+          <a:xfrm>
+            <a:off x="1005840" y="1280160"/>
+            <a:ext cx="9601200" cy="2011680"/>
+          </a:xfrm>
+          <a:prstGeom prst="rect">
+            <a:avLst/>
+          </a:prstGeom>
+          <a:noFill/>
+        </p:spPr>
+        <p:txBody>
+          <a:bodyPr wrap="square">
+            <a:spAutoFit/>
+          </a:bodyPr>
+          <a:lstStyle/>
+          <a:p>
+            <a:pPr>
+              <a:defRPr sz="4800" b="1">
+                <a:solidFill>
+                  <a:srgbClr val="0F172A"/>
+                </a:solidFill>
+                <a:latin typeface="Calibri"/>
+              </a:defRPr>
+            </a:pPr>
+            <a:r>
+              <a:t>CareChain</a:t>
+            </a:r>
+          </a:p>
+          <a:p>
+            <a:pPr>
+              <a:defRPr sz="1800" b="1">
+                <a:solidFill>
+                  <a:srgbClr val="0284C7"/>
+                </a:solidFill>
+                <a:latin typeface="Calibri"/>
+              </a:defRPr>
+            </a:pPr>
+            <a:r>
+              <a:t>Decentralized, Patient-Centric Electronic Health Record Protocol</a:t>
+            </a:r>
+          </a:p>
+          <a:p>
+            <a:pPr>
+              <a:defRPr sz="1200">
+                <a:solidFill>
+                  <a:srgbClr val="64748B"/>
+                </a:solidFill>
+                <a:latin typeface="Calibri"/>
+              </a:defRPr>
+            </a:pPr>
+            <a:r>
+              <a:t>Empowering patient data sovereignty through Ethereum Smart Contracts, AES-256 Client-Side Encryption, and Decentralized IPFS Storage.</a:t>
+            </a:r>
+          </a:p>
+        </p:txBody>
+      </p:sp>
+      <p:sp>
+        <p:nvSpPr>
+          <p:cNvPr id="6" name="Rectangle 5"/>
           <p:cNvSpPr/>
           <p:nvPr/>
         </p:nvSpPr>
         <p:spPr>
           <a:xfrm>
-            <a:off x="1097280" y="731520"/>
-            <a:ext cx="5303520" cy="347472"/>
-          </a:xfrm>
-          <a:prstGeom prst="roundRect">
+            <a:off x="1005840" y="3520440"/>
+            <a:ext cx="10058400" cy="9144"/>
+          </a:xfrm>
+          <a:prstGeom prst="rect">
             <a:avLst/>
           </a:prstGeom>
           <a:solidFill>
-            <a:srgbClr val="F0F9FF"/>
+            <a:srgbClr val="E2E8F0"/>
           </a:solidFill>
-          <a:ln w="12700">
-            <a:solidFill>
-              <a:srgbClr val="BAE6FD"/>
-            </a:solidFill>
+          <a:ln>
+            <a:noFill/>
           </a:ln>
         </p:spPr>
         <p:style>
@@ -3224,30 +3320,20 @@
           <a:bodyPr rtlCol="0" anchor="ctr"/>
           <a:lstStyle/>
           <a:p>
-            <a:pPr algn="ctr">
-              <a:defRPr sz="1000" b="1">
-                <a:solidFill>
-                  <a:srgbClr val="0369A1"/>
-                </a:solidFill>
-                <a:latin typeface="Calibri"/>
-              </a:defRPr>
-            </a:pPr>
-            <a:r>
-              <a:t>FALL SEMESTER 2026-27  •  BCSE497J - PROJECT - I</a:t>
-            </a:r>
-          </a:p>
-        </p:txBody>
-      </p:sp>
-      <p:sp>
-        <p:nvSpPr>
-          <p:cNvPr id="5" name="TextBox 4"/>
+            <a:pPr algn="ctr"/>
+          </a:p>
+        </p:txBody>
+      </p:sp>
+      <p:sp>
+        <p:nvSpPr>
+          <p:cNvPr id="7" name="TextBox 6"/>
           <p:cNvSpPr txBox="1"/>
           <p:nvPr/>
         </p:nvSpPr>
         <p:spPr>
           <a:xfrm>
-            <a:off x="1097280" y="1234440"/>
-            <a:ext cx="10058400" cy="1645920"/>
+            <a:off x="1005840" y="3840480"/>
+            <a:ext cx="4754880" cy="2194560"/>
           </a:xfrm>
           <a:prstGeom prst="rect">
             <a:avLst/>
@@ -3261,7 +3347,20 @@
           <a:lstStyle/>
           <a:p>
             <a:pPr>
-              <a:defRPr sz="4600" b="1">
+              <a:defRPr sz="950" b="1">
+                <a:solidFill>
+                  <a:srgbClr val="0369A1"/>
+                </a:solidFill>
+                <a:latin typeface="Calibri"/>
+              </a:defRPr>
+            </a:pPr>
+            <a:r>
+              <a:t>CANDIDATE DETAILS</a:t>
+            </a:r>
+          </a:p>
+          <a:p>
+            <a:pPr>
+              <a:defRPr sz="2000" b="1">
                 <a:solidFill>
                   <a:srgbClr val="0F172A"/>
                 </a:solidFill>
@@ -3269,79 +3368,55 @@
               </a:defRPr>
             </a:pPr>
             <a:r>
-              <a:t>CareChain</a:t>
-            </a:r>
-          </a:p>
-          <a:p>
-            <a:pPr>
-              <a:defRPr sz="1800" b="1">
-                <a:solidFill>
-                  <a:srgbClr val="0284C7"/>
-                </a:solidFill>
-                <a:latin typeface="Calibri"/>
-              </a:defRPr>
-            </a:pPr>
-            <a:r>
-              <a:t>Decentralized, Patient-Centric Electronic Health Record Protocol</a:t>
-            </a:r>
-          </a:p>
-          <a:p>
-            <a:pPr>
-              <a:defRPr sz="1200">
-                <a:solidFill>
-                  <a:srgbClr val="64748B"/>
-                </a:solidFill>
-                <a:latin typeface="Calibri"/>
-              </a:defRPr>
-            </a:pPr>
-            <a:r>
-              <a:t>Empowering patient data sovereignty through Ethereum Smart Contracts, AES-256 Client-Side Encryption, and Decentralized IPFS Storage.</a:t>
-            </a:r>
-          </a:p>
-        </p:txBody>
-      </p:sp>
-      <p:sp>
-        <p:nvSpPr>
-          <p:cNvPr id="6" name="Rounded Rectangle 5"/>
-          <p:cNvSpPr/>
-          <p:nvPr/>
-        </p:nvSpPr>
-        <p:spPr>
-          <a:xfrm>
-            <a:off x="1097280" y="3337560"/>
-            <a:ext cx="4754880" cy="2468880"/>
-          </a:xfrm>
-          <a:prstGeom prst="roundRect">
-            <a:avLst/>
-          </a:prstGeom>
-          <a:solidFill>
-            <a:srgbClr val="F8FAFC"/>
-          </a:solidFill>
-          <a:ln w="19050">
-            <a:solidFill>
-              <a:srgbClr val="E2E8F0"/>
-            </a:solidFill>
-          </a:ln>
-        </p:spPr>
-        <p:style>
-          <a:lnRef idx="1">
-            <a:schemeClr val="accent1"/>
-          </a:lnRef>
-          <a:fillRef idx="3">
-            <a:schemeClr val="accent1"/>
-          </a:fillRef>
-          <a:effectRef idx="2">
-            <a:schemeClr val="accent1"/>
-          </a:effectRef>
-          <a:fontRef idx="minor">
-            <a:schemeClr val="lt1"/>
-          </a:fontRef>
-        </p:style>
-        <p:txBody>
-          <a:bodyPr rtlCol="0" anchor="ctr" wrap="square"/>
-          <a:lstStyle/>
-          <a:p>
-            <a:pPr algn="ctr">
+              <a:t>Ashish Anil Sikaria</a:t>
+            </a:r>
+          </a:p>
+          <a:p>
+            <a:pPr>
+              <a:defRPr sz="1150">
+                <a:solidFill>
+                  <a:srgbClr val="334155"/>
+                </a:solidFill>
+                <a:latin typeface="Calibri"/>
+              </a:defRPr>
+            </a:pPr>
+            <a:r>
+              <a:t>Register Number: 23BCI0218</a:t>
+            </a:r>
+            <a:br/>
+            <a:r>
+              <a:t>Programme: B.Tech Computer Science &amp; Engineering</a:t>
+            </a:r>
+            <a:br/>
+            <a:r>
+              <a:t>School: SCOPE</a:t>
+            </a:r>
+          </a:p>
+        </p:txBody>
+      </p:sp>
+      <p:sp>
+        <p:nvSpPr>
+          <p:cNvPr id="8" name="TextBox 7"/>
+          <p:cNvSpPr txBox="1"/>
+          <p:nvPr/>
+        </p:nvSpPr>
+        <p:spPr>
+          <a:xfrm>
+            <a:off x="6217920" y="3840480"/>
+            <a:ext cx="4846320" cy="2194560"/>
+          </a:xfrm>
+          <a:prstGeom prst="rect">
+            <a:avLst/>
+          </a:prstGeom>
+          <a:noFill/>
+        </p:spPr>
+        <p:txBody>
+          <a:bodyPr wrap="square">
+            <a:spAutoFit/>
+          </a:bodyPr>
+          <a:lstStyle/>
+          <a:p>
+            <a:pPr>
               <a:defRPr sz="950" b="1">
                 <a:solidFill>
                   <a:srgbClr val="0369A1"/>
@@ -3350,12 +3425,12 @@
               </a:defRPr>
             </a:pPr>
             <a:r>
-              <a:t>SUBMITTED BY</a:t>
-            </a:r>
-          </a:p>
-          <a:p>
-            <a:pPr>
-              <a:defRPr sz="1900" b="1">
+              <a:t>FACULTY GUIDE</a:t>
+            </a:r>
+          </a:p>
+          <a:p>
+            <a:pPr>
+              <a:defRPr sz="2000" b="1">
                 <a:solidFill>
                   <a:srgbClr val="0F172A"/>
                 </a:solidFill>
@@ -3363,12 +3438,12 @@
               </a:defRPr>
             </a:pPr>
             <a:r>
-              <a:t>Ashish Anil Sikaria</a:t>
-            </a:r>
-          </a:p>
-          <a:p>
-            <a:pPr>
-              <a:defRPr sz="1100">
+              <a:t>Prof. SELVI M</a:t>
+            </a:r>
+          </a:p>
+          <a:p>
+            <a:pPr>
+              <a:defRPr sz="1150">
                 <a:solidFill>
                   <a:srgbClr val="334155"/>
                 </a:solidFill>
@@ -3376,104 +3451,15 @@
               </a:defRPr>
             </a:pPr>
             <a:r>
-              <a:t>Register Number: 23BCI0218</a:t>
+              <a:t>Designation: Associate Professor Grade 2</a:t>
             </a:r>
             <a:br/>
             <a:r>
-              <a:t>Programme: B.Tech Computer Science &amp; Engineering</a:t>
+              <a:t>Employee ID: 16106</a:t>
             </a:r>
             <a:br/>
             <a:r>
-              <a:t>School: SCOPE (School of Computer Science &amp; Engineering)</a:t>
-            </a:r>
-          </a:p>
-        </p:txBody>
-      </p:sp>
-      <p:sp>
-        <p:nvSpPr>
-          <p:cNvPr id="7" name="Rounded Rectangle 6"/>
-          <p:cNvSpPr/>
-          <p:nvPr/>
-        </p:nvSpPr>
-        <p:spPr>
-          <a:xfrm>
-            <a:off x="6217920" y="3337560"/>
-            <a:ext cx="4754880" cy="2468880"/>
-          </a:xfrm>
-          <a:prstGeom prst="roundRect">
-            <a:avLst/>
-          </a:prstGeom>
-          <a:solidFill>
-            <a:srgbClr val="F0F9FF"/>
-          </a:solidFill>
-          <a:ln w="19050">
-            <a:solidFill>
-              <a:srgbClr val="BAE6FD"/>
-            </a:solidFill>
-          </a:ln>
-        </p:spPr>
-        <p:style>
-          <a:lnRef idx="1">
-            <a:schemeClr val="accent1"/>
-          </a:lnRef>
-          <a:fillRef idx="3">
-            <a:schemeClr val="accent1"/>
-          </a:fillRef>
-          <a:effectRef idx="2">
-            <a:schemeClr val="accent1"/>
-          </a:effectRef>
-          <a:fontRef idx="minor">
-            <a:schemeClr val="lt1"/>
-          </a:fontRef>
-        </p:style>
-        <p:txBody>
-          <a:bodyPr rtlCol="0" anchor="ctr" wrap="square"/>
-          <a:lstStyle/>
-          <a:p>
-            <a:pPr algn="ctr">
-              <a:defRPr sz="950" b="1">
-                <a:solidFill>
-                  <a:srgbClr val="0369A1"/>
-                </a:solidFill>
-                <a:latin typeface="Calibri"/>
-              </a:defRPr>
-            </a:pPr>
-            <a:r>
-              <a:t>FACULTY GUIDE</a:t>
-            </a:r>
-          </a:p>
-          <a:p>
-            <a:pPr>
-              <a:defRPr sz="1900" b="1">
-                <a:solidFill>
-                  <a:srgbClr val="0F172A"/>
-                </a:solidFill>
-                <a:latin typeface="Calibri"/>
-              </a:defRPr>
-            </a:pPr>
-            <a:r>
-              <a:t>Prof. SELVI M</a:t>
-            </a:r>
-          </a:p>
-          <a:p>
-            <a:pPr>
-              <a:defRPr sz="1100">
-                <a:solidFill>
-                  <a:srgbClr val="334155"/>
-                </a:solidFill>
-                <a:latin typeface="Calibri"/>
-              </a:defRPr>
-            </a:pPr>
-            <a:r>
-              <a:t>Designation: Associate Professor Grade 2</a:t>
-            </a:r>
-            <a:br/>
-            <a:r>
-              <a:t>Employee ID: 16106</a:t>
-            </a:r>
-            <a:br/>
-            <a:r>
-              <a:t>School: SCOPE • Registration Status: Approved by Guide</a:t>
+              <a:t>School: SCOPE • Status: Registered &amp; Approved</a:t>
             </a:r>
           </a:p>
         </p:txBody>
@@ -3548,7 +3534,7 @@
         <p:spPr>
           <a:xfrm>
             <a:off x="0" y="0"/>
-            <a:ext cx="365760" cy="6858000"/>
+            <a:ext cx="228600" cy="6858000"/>
           </a:xfrm>
           <a:prstGeom prst="rect">
             <a:avLst/>
@@ -3590,8 +3576,44 @@
         </p:nvSpPr>
         <p:spPr>
           <a:xfrm>
-            <a:off x="1097280" y="640080"/>
-            <a:ext cx="10058400" cy="1645920"/>
+            <a:off x="1005840" y="822960"/>
+            <a:ext cx="9601200" cy="274320"/>
+          </a:xfrm>
+          <a:prstGeom prst="rect">
+            <a:avLst/>
+          </a:prstGeom>
+          <a:noFill/>
+        </p:spPr>
+        <p:txBody>
+          <a:bodyPr wrap="none">
+            <a:spAutoFit/>
+          </a:bodyPr>
+          <a:lstStyle/>
+          <a:p>
+            <a:pPr>
+              <a:defRPr sz="1000" b="1">
+                <a:solidFill>
+                  <a:srgbClr val="0369A1"/>
+                </a:solidFill>
+                <a:latin typeface="Calibri"/>
+              </a:defRPr>
+            </a:pPr>
+            <a:r>
+              <a:t>CONCLUSION &amp; PROJECT DEFENSE</a:t>
+            </a:r>
+          </a:p>
+        </p:txBody>
+      </p:sp>
+      <p:sp>
+        <p:nvSpPr>
+          <p:cNvPr id="5" name="TextBox 4"/>
+          <p:cNvSpPr txBox="1"/>
+          <p:nvPr/>
+        </p:nvSpPr>
+        <p:spPr>
+          <a:xfrm>
+            <a:off x="1005840" y="1188720"/>
+            <a:ext cx="9601200" cy="1828800"/>
           </a:xfrm>
           <a:prstGeom prst="rect">
             <a:avLst/>
@@ -3605,20 +3627,7 @@
           <a:lstStyle/>
           <a:p>
             <a:pPr>
-              <a:defRPr sz="1000" b="1">
-                <a:solidFill>
-                  <a:srgbClr val="0369A1"/>
-                </a:solidFill>
-                <a:latin typeface="Calibri"/>
-              </a:defRPr>
-            </a:pPr>
-            <a:r>
-              <a:t>CONCLUSION &amp; PROJECT DEFENSE</a:t>
-            </a:r>
-          </a:p>
-          <a:p>
-            <a:pPr>
-              <a:defRPr sz="3200" b="1">
+              <a:defRPr sz="3600" b="1">
                 <a:solidFill>
                   <a:srgbClr val="0F172A"/>
                 </a:solidFill>
@@ -3631,7 +3640,7 @@
           </a:p>
           <a:p>
             <a:pPr>
-              <a:defRPr sz="1150">
+              <a:defRPr sz="1250">
                 <a:solidFill>
                   <a:srgbClr val="64748B"/>
                 </a:solidFill>
@@ -3646,25 +3655,23 @@
       </p:sp>
       <p:sp>
         <p:nvSpPr>
-          <p:cNvPr id="5" name="Rounded Rectangle 4"/>
+          <p:cNvPr id="6" name="Rectangle 5"/>
           <p:cNvSpPr/>
           <p:nvPr/>
         </p:nvSpPr>
         <p:spPr>
           <a:xfrm>
-            <a:off x="1097280" y="2468880"/>
-            <a:ext cx="10058400" cy="3657600"/>
-          </a:xfrm>
-          <a:prstGeom prst="roundRect">
+            <a:off x="1005840" y="3291840"/>
+            <a:ext cx="10058400" cy="9144"/>
+          </a:xfrm>
+          <a:prstGeom prst="rect">
             <a:avLst/>
           </a:prstGeom>
           <a:solidFill>
-            <a:srgbClr val="F8FAFC"/>
+            <a:srgbClr val="E2E8F0"/>
           </a:solidFill>
-          <a:ln w="19050">
-            <a:solidFill>
-              <a:srgbClr val="E2E8F0"/>
-            </a:solidFill>
+          <a:ln>
+            <a:noFill/>
           </a:ln>
         </p:spPr>
         <p:style>
@@ -3691,46 +3698,27 @@
       </p:sp>
       <p:sp>
         <p:nvSpPr>
-          <p:cNvPr id="6" name="Rounded Rectangle 5"/>
-          <p:cNvSpPr/>
-          <p:nvPr/>
-        </p:nvSpPr>
-        <p:spPr>
-          <a:xfrm>
-            <a:off x="1371600" y="2743200"/>
-            <a:ext cx="4572000" cy="868680"/>
-          </a:xfrm>
-          <a:prstGeom prst="roundRect">
-            <a:avLst/>
-          </a:prstGeom>
-          <a:solidFill>
-            <a:srgbClr val="FFFFFF"/>
-          </a:solidFill>
-          <a:ln w="12700">
-            <a:solidFill>
-              <a:srgbClr val="E2E8F0"/>
-            </a:solidFill>
-          </a:ln>
-        </p:spPr>
-        <p:style>
-          <a:lnRef idx="1">
-            <a:schemeClr val="accent1"/>
-          </a:lnRef>
-          <a:fillRef idx="3">
-            <a:schemeClr val="accent1"/>
-          </a:fillRef>
-          <a:effectRef idx="2">
-            <a:schemeClr val="accent1"/>
-          </a:effectRef>
-          <a:fontRef idx="minor">
-            <a:schemeClr val="lt1"/>
-          </a:fontRef>
-        </p:style>
-        <p:txBody>
-          <a:bodyPr rtlCol="0" anchor="ctr" wrap="square"/>
-          <a:lstStyle/>
-          <a:p>
-            <a:pPr algn="ctr">
+          <p:cNvPr id="7" name="TextBox 6"/>
+          <p:cNvSpPr txBox="1"/>
+          <p:nvPr/>
+        </p:nvSpPr>
+        <p:spPr>
+          <a:xfrm>
+            <a:off x="1005840" y="3520440"/>
+            <a:ext cx="4846320" cy="777240"/>
+          </a:xfrm>
+          <a:prstGeom prst="rect">
+            <a:avLst/>
+          </a:prstGeom>
+          <a:noFill/>
+        </p:spPr>
+        <p:txBody>
+          <a:bodyPr wrap="square">
+            <a:spAutoFit/>
+          </a:bodyPr>
+          <a:lstStyle/>
+          <a:p>
+            <a:pPr>
               <a:defRPr sz="850" b="1">
                 <a:solidFill>
                   <a:srgbClr val="64748B"/>
@@ -3744,7 +3732,7 @@
           </a:p>
           <a:p>
             <a:pPr>
-              <a:defRPr sz="1250" b="1">
+              <a:defRPr sz="1200" b="1">
                 <a:solidFill>
                   <a:srgbClr val="0F172A"/>
                 </a:solidFill>
@@ -3752,53 +3740,34 @@
               </a:defRPr>
             </a:pPr>
             <a:r>
-              <a:t>Ashish Anil Sikaria</a:t>
-            </a:r>
-          </a:p>
-        </p:txBody>
-      </p:sp>
-      <p:sp>
-        <p:nvSpPr>
-          <p:cNvPr id="7" name="Rounded Rectangle 6"/>
-          <p:cNvSpPr/>
-          <p:nvPr/>
-        </p:nvSpPr>
-        <p:spPr>
-          <a:xfrm>
-            <a:off x="6217920" y="2743200"/>
-            <a:ext cx="4572000" cy="868680"/>
-          </a:xfrm>
-          <a:prstGeom prst="roundRect">
-            <a:avLst/>
-          </a:prstGeom>
-          <a:solidFill>
-            <a:srgbClr val="FFFFFF"/>
-          </a:solidFill>
-          <a:ln w="12700">
-            <a:solidFill>
-              <a:srgbClr val="E2E8F0"/>
-            </a:solidFill>
-          </a:ln>
-        </p:spPr>
-        <p:style>
-          <a:lnRef idx="1">
-            <a:schemeClr val="accent1"/>
-          </a:lnRef>
-          <a:fillRef idx="3">
-            <a:schemeClr val="accent1"/>
-          </a:fillRef>
-          <a:effectRef idx="2">
-            <a:schemeClr val="accent1"/>
-          </a:effectRef>
-          <a:fontRef idx="minor">
-            <a:schemeClr val="lt1"/>
-          </a:fontRef>
-        </p:style>
-        <p:txBody>
-          <a:bodyPr rtlCol="0" anchor="ctr" wrap="square"/>
-          <a:lstStyle/>
-          <a:p>
-            <a:pPr algn="ctr">
+              <a:t>Ashish Anil Sikaria (23BCI0218)</a:t>
+            </a:r>
+          </a:p>
+        </p:txBody>
+      </p:sp>
+      <p:sp>
+        <p:nvSpPr>
+          <p:cNvPr id="8" name="TextBox 7"/>
+          <p:cNvSpPr txBox="1"/>
+          <p:nvPr/>
+        </p:nvSpPr>
+        <p:spPr>
+          <a:xfrm>
+            <a:off x="6217920" y="3520440"/>
+            <a:ext cx="4846320" cy="777240"/>
+          </a:xfrm>
+          <a:prstGeom prst="rect">
+            <a:avLst/>
+          </a:prstGeom>
+          <a:noFill/>
+        </p:spPr>
+        <p:txBody>
+          <a:bodyPr wrap="square">
+            <a:spAutoFit/>
+          </a:bodyPr>
+          <a:lstStyle/>
+          <a:p>
+            <a:pPr>
               <a:defRPr sz="850" b="1">
                 <a:solidFill>
                   <a:srgbClr val="64748B"/>
@@ -3807,66 +3776,47 @@
               </a:defRPr>
             </a:pPr>
             <a:r>
-              <a:t>REGISTER NUMBER</a:t>
-            </a:r>
-          </a:p>
-          <a:p>
-            <a:pPr>
-              <a:defRPr sz="1250" b="1">
-                <a:solidFill>
-                  <a:srgbClr val="0369A1"/>
-                </a:solidFill>
-                <a:latin typeface="Calibri"/>
-              </a:defRPr>
-            </a:pPr>
-            <a:r>
-              <a:t>23BCI0218</a:t>
-            </a:r>
-          </a:p>
-        </p:txBody>
-      </p:sp>
-      <p:sp>
-        <p:nvSpPr>
-          <p:cNvPr id="8" name="Rounded Rectangle 7"/>
-          <p:cNvSpPr/>
-          <p:nvPr/>
-        </p:nvSpPr>
-        <p:spPr>
-          <a:xfrm>
-            <a:off x="1371600" y="3794760"/>
-            <a:ext cx="4572000" cy="868680"/>
-          </a:xfrm>
-          <a:prstGeom prst="roundRect">
-            <a:avLst/>
-          </a:prstGeom>
-          <a:solidFill>
-            <a:srgbClr val="FFFFFF"/>
-          </a:solidFill>
-          <a:ln w="12700">
-            <a:solidFill>
-              <a:srgbClr val="E2E8F0"/>
-            </a:solidFill>
-          </a:ln>
-        </p:spPr>
-        <p:style>
-          <a:lnRef idx="1">
-            <a:schemeClr val="accent1"/>
-          </a:lnRef>
-          <a:fillRef idx="3">
-            <a:schemeClr val="accent1"/>
-          </a:fillRef>
-          <a:effectRef idx="2">
-            <a:schemeClr val="accent1"/>
-          </a:effectRef>
-          <a:fontRef idx="minor">
-            <a:schemeClr val="lt1"/>
-          </a:fontRef>
-        </p:style>
-        <p:txBody>
-          <a:bodyPr rtlCol="0" anchor="ctr" wrap="square"/>
-          <a:lstStyle/>
-          <a:p>
-            <a:pPr algn="ctr">
+              <a:t>COURSE &amp; SEMESTER</a:t>
+            </a:r>
+          </a:p>
+          <a:p>
+            <a:pPr>
+              <a:defRPr sz="1200" b="1">
+                <a:solidFill>
+                  <a:srgbClr val="0F172A"/>
+                </a:solidFill>
+                <a:latin typeface="Calibri"/>
+              </a:defRPr>
+            </a:pPr>
+            <a:r>
+              <a:t>BCSE497J (Project - I) • Fall Semester 2026-27</a:t>
+            </a:r>
+          </a:p>
+        </p:txBody>
+      </p:sp>
+      <p:sp>
+        <p:nvSpPr>
+          <p:cNvPr id="9" name="TextBox 8"/>
+          <p:cNvSpPr txBox="1"/>
+          <p:nvPr/>
+        </p:nvSpPr>
+        <p:spPr>
+          <a:xfrm>
+            <a:off x="1005840" y="4389120"/>
+            <a:ext cx="4846320" cy="777240"/>
+          </a:xfrm>
+          <a:prstGeom prst="rect">
+            <a:avLst/>
+          </a:prstGeom>
+          <a:noFill/>
+        </p:spPr>
+        <p:txBody>
+          <a:bodyPr wrap="square">
+            <a:spAutoFit/>
+          </a:bodyPr>
+          <a:lstStyle/>
+          <a:p>
+            <a:pPr>
               <a:defRPr sz="850" b="1">
                 <a:solidFill>
                   <a:srgbClr val="64748B"/>
@@ -3875,12 +3825,12 @@
               </a:defRPr>
             </a:pPr>
             <a:r>
-              <a:t>COURSE &amp; SEMESTER</a:t>
-            </a:r>
-          </a:p>
-          <a:p>
-            <a:pPr>
-              <a:defRPr sz="1250" b="1">
+              <a:t>FACULTY GUIDE</a:t>
+            </a:r>
+          </a:p>
+          <a:p>
+            <a:pPr>
+              <a:defRPr sz="1200" b="1">
                 <a:solidFill>
                   <a:srgbClr val="0F172A"/>
                 </a:solidFill>
@@ -3888,53 +3838,34 @@
               </a:defRPr>
             </a:pPr>
             <a:r>
-              <a:t>BCSE497J (Project - I) • Fall 2026-27</a:t>
-            </a:r>
-          </a:p>
-        </p:txBody>
-      </p:sp>
-      <p:sp>
-        <p:nvSpPr>
-          <p:cNvPr id="9" name="Rounded Rectangle 8"/>
-          <p:cNvSpPr/>
-          <p:nvPr/>
-        </p:nvSpPr>
-        <p:spPr>
-          <a:xfrm>
-            <a:off x="6217920" y="3794760"/>
-            <a:ext cx="4572000" cy="868680"/>
-          </a:xfrm>
-          <a:prstGeom prst="roundRect">
-            <a:avLst/>
-          </a:prstGeom>
-          <a:solidFill>
-            <a:srgbClr val="FFFFFF"/>
-          </a:solidFill>
-          <a:ln w="12700">
-            <a:solidFill>
-              <a:srgbClr val="E2E8F0"/>
-            </a:solidFill>
-          </a:ln>
-        </p:spPr>
-        <p:style>
-          <a:lnRef idx="1">
-            <a:schemeClr val="accent1"/>
-          </a:lnRef>
-          <a:fillRef idx="3">
-            <a:schemeClr val="accent1"/>
-          </a:fillRef>
-          <a:effectRef idx="2">
-            <a:schemeClr val="accent1"/>
-          </a:effectRef>
-          <a:fontRef idx="minor">
-            <a:schemeClr val="lt1"/>
-          </a:fontRef>
-        </p:style>
-        <p:txBody>
-          <a:bodyPr rtlCol="0" anchor="ctr" wrap="square"/>
-          <a:lstStyle/>
-          <a:p>
-            <a:pPr algn="ctr">
+              <a:t>Prof. SELVI M (Emp ID: 16106, Associate Professor Grade 2)</a:t>
+            </a:r>
+          </a:p>
+        </p:txBody>
+      </p:sp>
+      <p:sp>
+        <p:nvSpPr>
+          <p:cNvPr id="10" name="TextBox 9"/>
+          <p:cNvSpPr txBox="1"/>
+          <p:nvPr/>
+        </p:nvSpPr>
+        <p:spPr>
+          <a:xfrm>
+            <a:off x="6217920" y="4389120"/>
+            <a:ext cx="4846320" cy="777240"/>
+          </a:xfrm>
+          <a:prstGeom prst="rect">
+            <a:avLst/>
+          </a:prstGeom>
+          <a:noFill/>
+        </p:spPr>
+        <p:txBody>
+          <a:bodyPr wrap="square">
+            <a:spAutoFit/>
+          </a:bodyPr>
+          <a:lstStyle/>
+          <a:p>
+            <a:pPr>
               <a:defRPr sz="850" b="1">
                 <a:solidFill>
                   <a:srgbClr val="64748B"/>
@@ -3943,66 +3874,47 @@
               </a:defRPr>
             </a:pPr>
             <a:r>
-              <a:t>FACULTY GUIDE</a:t>
-            </a:r>
-          </a:p>
-          <a:p>
-            <a:pPr>
-              <a:defRPr sz="1250" b="1">
-                <a:solidFill>
-                  <a:srgbClr val="0369A1"/>
-                </a:solidFill>
-                <a:latin typeface="Calibri"/>
-              </a:defRPr>
-            </a:pPr>
-            <a:r>
-              <a:t>Prof. SELVI M (Emp ID: 16106)</a:t>
-            </a:r>
-          </a:p>
-        </p:txBody>
-      </p:sp>
-      <p:sp>
-        <p:nvSpPr>
-          <p:cNvPr id="10" name="Rounded Rectangle 9"/>
-          <p:cNvSpPr/>
-          <p:nvPr/>
-        </p:nvSpPr>
-        <p:spPr>
-          <a:xfrm>
-            <a:off x="1371600" y="4846320"/>
-            <a:ext cx="4572000" cy="868680"/>
-          </a:xfrm>
-          <a:prstGeom prst="roundRect">
-            <a:avLst/>
-          </a:prstGeom>
-          <a:solidFill>
-            <a:srgbClr val="FFFFFF"/>
-          </a:solidFill>
-          <a:ln w="12700">
-            <a:solidFill>
-              <a:srgbClr val="E2E8F0"/>
-            </a:solidFill>
-          </a:ln>
-        </p:spPr>
-        <p:style>
-          <a:lnRef idx="1">
-            <a:schemeClr val="accent1"/>
-          </a:lnRef>
-          <a:fillRef idx="3">
-            <a:schemeClr val="accent1"/>
-          </a:fillRef>
-          <a:effectRef idx="2">
-            <a:schemeClr val="accent1"/>
-          </a:effectRef>
-          <a:fontRef idx="minor">
-            <a:schemeClr val="lt1"/>
-          </a:fontRef>
-        </p:style>
-        <p:txBody>
-          <a:bodyPr rtlCol="0" anchor="ctr" wrap="square"/>
-          <a:lstStyle/>
-          <a:p>
-            <a:pPr algn="ctr">
+              <a:t>ACADEMIC DEPARTMENT</a:t>
+            </a:r>
+          </a:p>
+          <a:p>
+            <a:pPr>
+              <a:defRPr sz="1200" b="1">
+                <a:solidFill>
+                  <a:srgbClr val="0F172A"/>
+                </a:solidFill>
+                <a:latin typeface="Calibri"/>
+              </a:defRPr>
+            </a:pPr>
+            <a:r>
+              <a:t>SCOPE (School of Computer Science and Engineering)</a:t>
+            </a:r>
+          </a:p>
+        </p:txBody>
+      </p:sp>
+      <p:sp>
+        <p:nvSpPr>
+          <p:cNvPr id="11" name="TextBox 10"/>
+          <p:cNvSpPr txBox="1"/>
+          <p:nvPr/>
+        </p:nvSpPr>
+        <p:spPr>
+          <a:xfrm>
+            <a:off x="1005840" y="5257800"/>
+            <a:ext cx="4846320" cy="777240"/>
+          </a:xfrm>
+          <a:prstGeom prst="rect">
+            <a:avLst/>
+          </a:prstGeom>
+          <a:noFill/>
+        </p:spPr>
+        <p:txBody>
+          <a:bodyPr wrap="square">
+            <a:spAutoFit/>
+          </a:bodyPr>
+          <a:lstStyle/>
+          <a:p>
+            <a:pPr>
               <a:defRPr sz="850" b="1">
                 <a:solidFill>
                   <a:srgbClr val="64748B"/>
@@ -4011,12 +3923,61 @@
               </a:defRPr>
             </a:pPr>
             <a:r>
-              <a:t>ACADEMIC SCHOOL</a:t>
-            </a:r>
-          </a:p>
-          <a:p>
-            <a:pPr>
-              <a:defRPr sz="1250" b="1">
+              <a:t>MATURITY LEVEL</a:t>
+            </a:r>
+          </a:p>
+          <a:p>
+            <a:pPr>
+              <a:defRPr sz="1200" b="1">
+                <a:solidFill>
+                  <a:srgbClr val="059669"/>
+                </a:solidFill>
+                <a:latin typeface="Calibri"/>
+              </a:defRPr>
+            </a:pPr>
+            <a:r>
+              <a:t>TRL 6 (Demonstrated Prototype in Relevant Environment)</a:t>
+            </a:r>
+          </a:p>
+        </p:txBody>
+      </p:sp>
+      <p:sp>
+        <p:nvSpPr>
+          <p:cNvPr id="12" name="TextBox 11"/>
+          <p:cNvSpPr txBox="1"/>
+          <p:nvPr/>
+        </p:nvSpPr>
+        <p:spPr>
+          <a:xfrm>
+            <a:off x="6217920" y="5257800"/>
+            <a:ext cx="4846320" cy="777240"/>
+          </a:xfrm>
+          <a:prstGeom prst="rect">
+            <a:avLst/>
+          </a:prstGeom>
+          <a:noFill/>
+        </p:spPr>
+        <p:txBody>
+          <a:bodyPr wrap="square">
+            <a:spAutoFit/>
+          </a:bodyPr>
+          <a:lstStyle/>
+          <a:p>
+            <a:pPr>
+              <a:defRPr sz="850" b="1">
+                <a:solidFill>
+                  <a:srgbClr val="64748B"/>
+                </a:solidFill>
+                <a:latin typeface="Calibri"/>
+              </a:defRPr>
+            </a:pPr>
+            <a:r>
+              <a:t>GLOBAL IMPACT</a:t>
+            </a:r>
+          </a:p>
+          <a:p>
+            <a:pPr>
+              <a:defRPr sz="1200" b="1">
                 <a:solidFill>
                   <a:srgbClr val="0F172A"/>
                 </a:solidFill>
@@ -4024,75 +3985,7 @@
               </a:defRPr>
             </a:pPr>
             <a:r>
-              <a:t>SCOPE (School of Computer Science &amp; Eng.)</a:t>
-            </a:r>
-          </a:p>
-        </p:txBody>
-      </p:sp>
-      <p:sp>
-        <p:nvSpPr>
-          <p:cNvPr id="11" name="Rounded Rectangle 10"/>
-          <p:cNvSpPr/>
-          <p:nvPr/>
-        </p:nvSpPr>
-        <p:spPr>
-          <a:xfrm>
-            <a:off x="6217920" y="4846320"/>
-            <a:ext cx="4572000" cy="868680"/>
-          </a:xfrm>
-          <a:prstGeom prst="roundRect">
-            <a:avLst/>
-          </a:prstGeom>
-          <a:solidFill>
-            <a:srgbClr val="FFFFFF"/>
-          </a:solidFill>
-          <a:ln w="12700">
-            <a:solidFill>
-              <a:srgbClr val="E2E8F0"/>
-            </a:solidFill>
-          </a:ln>
-        </p:spPr>
-        <p:style>
-          <a:lnRef idx="1">
-            <a:schemeClr val="accent1"/>
-          </a:lnRef>
-          <a:fillRef idx="3">
-            <a:schemeClr val="accent1"/>
-          </a:fillRef>
-          <a:effectRef idx="2">
-            <a:schemeClr val="accent1"/>
-          </a:effectRef>
-          <a:fontRef idx="minor">
-            <a:schemeClr val="lt1"/>
-          </a:fontRef>
-        </p:style>
-        <p:txBody>
-          <a:bodyPr rtlCol="0" anchor="ctr" wrap="square"/>
-          <a:lstStyle/>
-          <a:p>
-            <a:pPr algn="ctr">
-              <a:defRPr sz="850" b="1">
-                <a:solidFill>
-                  <a:srgbClr val="64748B"/>
-                </a:solidFill>
-                <a:latin typeface="Calibri"/>
-              </a:defRPr>
-            </a:pPr>
-            <a:r>
-              <a:t>PROJECT STATUS</a:t>
-            </a:r>
-          </a:p>
-          <a:p>
-            <a:pPr>
-              <a:defRPr sz="1250" b="1">
-                <a:solidFill>
-                  <a:srgbClr val="4C9F38"/>
-                </a:solidFill>
-                <a:latin typeface="Calibri"/>
-              </a:defRPr>
-            </a:pPr>
-            <a:r>
-              <a:t>Registered &amp; Approved by Guide (TRL 6)</a:t>
+              <a:t>UN SDGs 3.8, 9.5, 10.2, 16.6</a:t>
             </a:r>
           </a:p>
         </p:txBody>
@@ -4130,7 +4023,7 @@
             <a:avLst/>
           </a:prstGeom>
           <a:solidFill>
-            <a:srgbClr val="F8FAFC"/>
+            <a:srgbClr val="FCFCFD"/>
           </a:solidFill>
           <a:ln>
             <a:noFill/>
@@ -4166,8 +4059,8 @@
         </p:nvSpPr>
         <p:spPr>
           <a:xfrm>
-            <a:off x="731520" y="365760"/>
-            <a:ext cx="10725912" cy="274320"/>
+            <a:off x="822960" y="411480"/>
+            <a:ext cx="10515600" cy="228600"/>
           </a:xfrm>
           <a:prstGeom prst="rect">
             <a:avLst/>
@@ -4189,7 +4082,7 @@
               </a:defRPr>
             </a:pPr>
             <a:r>
-              <a:t>ACADEMIC FRAMEWORK</a:t>
+              <a:t>ACADEMIC REGISTRATION</a:t>
             </a:r>
           </a:p>
         </p:txBody>
@@ -4202,8 +4095,8 @@
         </p:nvSpPr>
         <p:spPr>
           <a:xfrm>
-            <a:off x="731520" y="621792"/>
-            <a:ext cx="10725912" cy="457200"/>
+            <a:off x="822960" y="658368"/>
+            <a:ext cx="10515600" cy="640080"/>
           </a:xfrm>
           <a:prstGeom prst="rect">
             <a:avLst/>
@@ -4225,12 +4118,12 @@
               </a:defRPr>
             </a:pPr>
             <a:r>
-              <a:t>Institutional Registration &amp; Governance Profile</a:t>
-            </a:r>
-          </a:p>
-          <a:p>
-            <a:pPr>
-              <a:defRPr sz="1100">
+              <a:t>Institutional Framework &amp; Project Governance</a:t>
+            </a:r>
+          </a:p>
+          <a:p>
+            <a:pPr>
+              <a:defRPr sz="1150">
                 <a:solidFill>
                   <a:srgbClr val="64748B"/>
                 </a:solidFill>
@@ -4238,7 +4131,7 @@
               </a:defRPr>
             </a:pPr>
             <a:r>
-              <a:t>Formal curriculum registration specifications approved by faculty guide.</a:t>
+              <a:t>Approved project parameters under the School of Computer Science &amp; Engineering (SCOPE).</a:t>
             </a:r>
           </a:p>
         </p:txBody>
@@ -4251,8 +4144,8 @@
         </p:nvSpPr>
         <p:spPr>
           <a:xfrm>
-            <a:off x="731520" y="1234440"/>
-            <a:ext cx="10725912" cy="9144"/>
+            <a:off x="822960" y="1371600"/>
+            <a:ext cx="10545775" cy="9144"/>
           </a:xfrm>
           <a:prstGeom prst="rect">
             <a:avLst/>
@@ -4294,8 +4187,8 @@
         </p:nvSpPr>
         <p:spPr>
           <a:xfrm>
-            <a:off x="731520" y="6263640"/>
-            <a:ext cx="10725912" cy="9144"/>
+            <a:off x="822960" y="6217920"/>
+            <a:ext cx="10545775" cy="9144"/>
           </a:xfrm>
           <a:prstGeom prst="rect">
             <a:avLst/>
@@ -4337,7 +4230,7 @@
         </p:nvSpPr>
         <p:spPr>
           <a:xfrm>
-            <a:off x="731520" y="6327648"/>
+            <a:off x="822960" y="6272784"/>
             <a:ext cx="6400800" cy="274320"/>
           </a:xfrm>
           <a:prstGeom prst="rect">
@@ -4373,8 +4266,8 @@
         </p:nvSpPr>
         <p:spPr>
           <a:xfrm>
-            <a:off x="7772400" y="6327648"/>
-            <a:ext cx="3685032" cy="274320"/>
+            <a:off x="7772400" y="6272784"/>
+            <a:ext cx="3596335" cy="274320"/>
           </a:xfrm>
           <a:prstGeom prst="rect">
             <a:avLst/>
@@ -4396,32 +4289,108 @@
               </a:defRPr>
             </a:pPr>
             <a:r>
-              <a:t>BCSE497J Project - I • Fall 2026-27</a:t>
-            </a:r>
-          </a:p>
-        </p:txBody>
-      </p:sp>
-      <p:sp>
-        <p:nvSpPr>
-          <p:cNvPr id="9" name="Rounded Rectangle 8"/>
+              <a:t>BCSE497J Project - I • Fall Semester 2026-27</a:t>
+            </a:r>
+          </a:p>
+        </p:txBody>
+      </p:sp>
+      <p:sp>
+        <p:nvSpPr>
+          <p:cNvPr id="9" name="TextBox 8"/>
+          <p:cNvSpPr txBox="1"/>
+          <p:nvPr/>
+        </p:nvSpPr>
+        <p:spPr>
+          <a:xfrm>
+            <a:off x="822960" y="1645920"/>
+            <a:ext cx="4389120" cy="4206240"/>
+          </a:xfrm>
+          <a:prstGeom prst="rect">
+            <a:avLst/>
+          </a:prstGeom>
+          <a:noFill/>
+        </p:spPr>
+        <p:txBody>
+          <a:bodyPr wrap="square">
+            <a:spAutoFit/>
+          </a:bodyPr>
+          <a:lstStyle/>
+          <a:p>
+            <a:pPr>
+              <a:defRPr sz="1500" b="1">
+                <a:solidFill>
+                  <a:srgbClr val="0F172A"/>
+                </a:solidFill>
+                <a:latin typeface="Calibri"/>
+              </a:defRPr>
+            </a:pPr>
+            <a:r>
+              <a:t>Project Scope &amp; Focus</a:t>
+            </a:r>
+          </a:p>
+          <a:p>
+            <a:br/>
+            <a:pPr>
+              <a:defRPr sz="1150">
+                <a:solidFill>
+                  <a:srgbClr val="334155"/>
+                </a:solidFill>
+                <a:latin typeface="Calibri"/>
+              </a:defRPr>
+            </a:pPr>
+            <a:r>
+              <a:t>CareChain addresses fundamental privacy, interoperability, and sovereignty challenges in contemporary Electronic Health Records (EHR).</a:t>
+            </a:r>
+          </a:p>
+          <a:p>
+            <a:br/>
+            <a:pPr>
+              <a:defRPr sz="1150">
+                <a:solidFill>
+                  <a:srgbClr val="334155"/>
+                </a:solidFill>
+                <a:latin typeface="Calibri"/>
+              </a:defRPr>
+            </a:pPr>
+            <a:r>
+              <a:t>By synthesizing client-side AES-256 encryption with decentralized IPFS storage and Ethereum smart contract access lists, the project achieves a zero-trust architecture compliant with HIPAA and GDPR standards.</a:t>
+            </a:r>
+          </a:p>
+          <a:p>
+            <a:br/>
+            <a:pPr>
+              <a:defRPr sz="1150" b="1">
+                <a:solidFill>
+                  <a:srgbClr val="059669"/>
+                </a:solidFill>
+                <a:latin typeface="Calibri"/>
+              </a:defRPr>
+            </a:pPr>
+            <a:r>
+              <a:t>Approval Status: Fully registered and approved under faculty guidance in SCOPE.</a:t>
+            </a:r>
+          </a:p>
+        </p:txBody>
+      </p:sp>
+      <p:sp>
+        <p:nvSpPr>
+          <p:cNvPr id="10" name="Rectangle 9"/>
           <p:cNvSpPr/>
           <p:nvPr/>
         </p:nvSpPr>
         <p:spPr>
           <a:xfrm>
-            <a:off x="731520" y="1463040"/>
-            <a:ext cx="3429000" cy="1234440"/>
-          </a:xfrm>
-          <a:prstGeom prst="roundRect">
+            <a:off x="5486400" y="1645920"/>
+            <a:ext cx="9144" cy="4206240"/>
+          </a:xfrm>
+          <a:prstGeom prst="rect">
             <a:avLst/>
           </a:prstGeom>
           <a:solidFill>
-            <a:srgbClr val="F0F9FF"/>
+            <a:srgbClr val="E2E8F0"/>
           </a:solidFill>
-          <a:ln w="15240">
-            <a:solidFill>
-              <a:srgbClr val="BAE6FD"/>
-            </a:solidFill>
+          <a:ln>
+            <a:noFill/>
           </a:ln>
         </p:spPr>
         <p:style>
@@ -4439,11 +4408,37 @@
           </a:fontRef>
         </p:style>
         <p:txBody>
-          <a:bodyPr rtlCol="0" anchor="ctr" wrap="square"/>
-          <a:lstStyle/>
-          <a:p>
-            <a:pPr algn="ctr">
-              <a:defRPr sz="900" b="1">
+          <a:bodyPr rtlCol="0" anchor="ctr"/>
+          <a:lstStyle/>
+          <a:p>
+            <a:pPr algn="ctr"/>
+          </a:p>
+        </p:txBody>
+      </p:sp>
+      <p:sp>
+        <p:nvSpPr>
+          <p:cNvPr id="11" name="TextBox 10"/>
+          <p:cNvSpPr txBox="1"/>
+          <p:nvPr/>
+        </p:nvSpPr>
+        <p:spPr>
+          <a:xfrm>
+            <a:off x="5852160" y="1645920"/>
+            <a:ext cx="5486400" cy="502920"/>
+          </a:xfrm>
+          <a:prstGeom prst="rect">
+            <a:avLst/>
+          </a:prstGeom>
+          <a:noFill/>
+        </p:spPr>
+        <p:txBody>
+          <a:bodyPr wrap="square">
+            <a:spAutoFit/>
+          </a:bodyPr>
+          <a:lstStyle/>
+          <a:p>
+            <a:pPr>
+              <a:defRPr sz="850" b="1">
                 <a:solidFill>
                   <a:srgbClr val="64748B"/>
                 </a:solidFill>
@@ -4451,67 +4446,48 @@
               </a:defRPr>
             </a:pPr>
             <a:r>
-              <a:t>PROJECT TITLE</a:t>
-            </a:r>
-          </a:p>
-          <a:p>
-            <a:pPr>
-              <a:defRPr sz="1300" b="1">
-                <a:solidFill>
-                  <a:srgbClr val="0369A1"/>
-                </a:solidFill>
-                <a:latin typeface="Calibri"/>
-              </a:defRPr>
-            </a:pPr>
-            <a:r>
-              <a:t>CareChain</a:t>
-            </a:r>
-          </a:p>
-        </p:txBody>
-      </p:sp>
-      <p:sp>
-        <p:nvSpPr>
-          <p:cNvPr id="10" name="Rounded Rectangle 9"/>
-          <p:cNvSpPr/>
-          <p:nvPr/>
-        </p:nvSpPr>
-        <p:spPr>
-          <a:xfrm>
-            <a:off x="4434840" y="1463040"/>
-            <a:ext cx="3429000" cy="1234440"/>
-          </a:xfrm>
-          <a:prstGeom prst="roundRect">
-            <a:avLst/>
-          </a:prstGeom>
-          <a:solidFill>
-            <a:srgbClr val="FFFFFF"/>
-          </a:solidFill>
-          <a:ln w="15240">
-            <a:solidFill>
-              <a:srgbClr val="E2E8F0"/>
-            </a:solidFill>
-          </a:ln>
-        </p:spPr>
-        <p:style>
-          <a:lnRef idx="1">
-            <a:schemeClr val="accent1"/>
-          </a:lnRef>
-          <a:fillRef idx="3">
-            <a:schemeClr val="accent1"/>
-          </a:fillRef>
-          <a:effectRef idx="2">
-            <a:schemeClr val="accent1"/>
-          </a:effectRef>
-          <a:fontRef idx="minor">
-            <a:schemeClr val="lt1"/>
-          </a:fontRef>
-        </p:style>
-        <p:txBody>
-          <a:bodyPr rtlCol="0" anchor="ctr" wrap="square"/>
-          <a:lstStyle/>
-          <a:p>
-            <a:pPr algn="ctr">
-              <a:defRPr sz="900" b="1">
+              <a:t>COURSE CODE &amp; TITLE</a:t>
+            </a:r>
+          </a:p>
+          <a:p>
+            <a:pPr>
+              <a:defRPr sz="1200" b="1">
+                <a:solidFill>
+                  <a:srgbClr val="0F172A"/>
+                </a:solidFill>
+                <a:latin typeface="Calibri"/>
+              </a:defRPr>
+            </a:pPr>
+            <a:r>
+              <a:t>BCSE497J - Project - I</a:t>
+            </a:r>
+          </a:p>
+        </p:txBody>
+      </p:sp>
+      <p:sp>
+        <p:nvSpPr>
+          <p:cNvPr id="12" name="TextBox 11"/>
+          <p:cNvSpPr txBox="1"/>
+          <p:nvPr/>
+        </p:nvSpPr>
+        <p:spPr>
+          <a:xfrm>
+            <a:off x="5852160" y="2240280"/>
+            <a:ext cx="5486400" cy="502920"/>
+          </a:xfrm>
+          <a:prstGeom prst="rect">
+            <a:avLst/>
+          </a:prstGeom>
+          <a:noFill/>
+        </p:spPr>
+        <p:txBody>
+          <a:bodyPr wrap="square">
+            <a:spAutoFit/>
+          </a:bodyPr>
+          <a:lstStyle/>
+          <a:p>
+            <a:pPr>
+              <a:defRPr sz="850" b="1">
                 <a:solidFill>
                   <a:srgbClr val="64748B"/>
                 </a:solidFill>
@@ -4519,12 +4495,12 @@
               </a:defRPr>
             </a:pPr>
             <a:r>
-              <a:t>COURSE DETAILS</a:t>
-            </a:r>
-          </a:p>
-          <a:p>
-            <a:pPr>
-              <a:defRPr sz="1300" b="1">
+              <a:t>ACADEMIC SEMESTER</a:t>
+            </a:r>
+          </a:p>
+          <a:p>
+            <a:pPr>
+              <a:defRPr sz="1200" b="1">
                 <a:solidFill>
                   <a:srgbClr val="0F172A"/>
                 </a:solidFill>
@@ -4532,54 +4508,35 @@
               </a:defRPr>
             </a:pPr>
             <a:r>
-              <a:t>BCSE497J - Project - I</a:t>
-            </a:r>
-          </a:p>
-        </p:txBody>
-      </p:sp>
-      <p:sp>
-        <p:nvSpPr>
-          <p:cNvPr id="11" name="Rounded Rectangle 10"/>
-          <p:cNvSpPr/>
-          <p:nvPr/>
-        </p:nvSpPr>
-        <p:spPr>
-          <a:xfrm>
-            <a:off x="8138160" y="1463040"/>
-            <a:ext cx="3429000" cy="1234440"/>
-          </a:xfrm>
-          <a:prstGeom prst="roundRect">
-            <a:avLst/>
-          </a:prstGeom>
-          <a:solidFill>
-            <a:srgbClr val="FFFFFF"/>
-          </a:solidFill>
-          <a:ln w="15240">
-            <a:solidFill>
-              <a:srgbClr val="E2E8F0"/>
-            </a:solidFill>
-          </a:ln>
-        </p:spPr>
-        <p:style>
-          <a:lnRef idx="1">
-            <a:schemeClr val="accent1"/>
-          </a:lnRef>
-          <a:fillRef idx="3">
-            <a:schemeClr val="accent1"/>
-          </a:fillRef>
-          <a:effectRef idx="2">
-            <a:schemeClr val="accent1"/>
-          </a:effectRef>
-          <a:fontRef idx="minor">
-            <a:schemeClr val="lt1"/>
-          </a:fontRef>
-        </p:style>
-        <p:txBody>
-          <a:bodyPr rtlCol="0" anchor="ctr" wrap="square"/>
-          <a:lstStyle/>
-          <a:p>
-            <a:pPr algn="ctr">
-              <a:defRPr sz="900" b="1">
+              <a:t>Fall Semester 2026-27</a:t>
+            </a:r>
+          </a:p>
+        </p:txBody>
+      </p:sp>
+      <p:sp>
+        <p:nvSpPr>
+          <p:cNvPr id="13" name="TextBox 12"/>
+          <p:cNvSpPr txBox="1"/>
+          <p:nvPr/>
+        </p:nvSpPr>
+        <p:spPr>
+          <a:xfrm>
+            <a:off x="5852160" y="2834640"/>
+            <a:ext cx="5486400" cy="502920"/>
+          </a:xfrm>
+          <a:prstGeom prst="rect">
+            <a:avLst/>
+          </a:prstGeom>
+          <a:noFill/>
+        </p:spPr>
+        <p:txBody>
+          <a:bodyPr wrap="square">
+            <a:spAutoFit/>
+          </a:bodyPr>
+          <a:lstStyle/>
+          <a:p>
+            <a:pPr>
+              <a:defRPr sz="850" b="1">
                 <a:solidFill>
                   <a:srgbClr val="64748B"/>
                 </a:solidFill>
@@ -4587,12 +4544,12 @@
               </a:defRPr>
             </a:pPr>
             <a:r>
-              <a:t>ACADEMIC SESSION</a:t>
-            </a:r>
-          </a:p>
-          <a:p>
-            <a:pPr>
-              <a:defRPr sz="1300" b="1">
+              <a:t>COURSE OPTION &amp; DURATION</a:t>
+            </a:r>
+          </a:p>
+          <a:p>
+            <a:pPr>
+              <a:defRPr sz="1200" b="1">
                 <a:solidFill>
                   <a:srgbClr val="0F172A"/>
                 </a:solidFill>
@@ -4600,54 +4557,35 @@
               </a:defRPr>
             </a:pPr>
             <a:r>
-              <a:t>Fall Semester 2026-27</a:t>
-            </a:r>
-          </a:p>
-        </p:txBody>
-      </p:sp>
-      <p:sp>
-        <p:nvSpPr>
-          <p:cNvPr id="12" name="Rounded Rectangle 11"/>
-          <p:cNvSpPr/>
-          <p:nvPr/>
-        </p:nvSpPr>
-        <p:spPr>
-          <a:xfrm>
-            <a:off x="731520" y="2880360"/>
-            <a:ext cx="3429000" cy="1234440"/>
-          </a:xfrm>
-          <a:prstGeom prst="roundRect">
-            <a:avLst/>
-          </a:prstGeom>
-          <a:solidFill>
-            <a:srgbClr val="F0F9FF"/>
-          </a:solidFill>
-          <a:ln w="15240">
-            <a:solidFill>
-              <a:srgbClr val="BAE6FD"/>
-            </a:solidFill>
-          </a:ln>
-        </p:spPr>
-        <p:style>
-          <a:lnRef idx="1">
-            <a:schemeClr val="accent1"/>
-          </a:lnRef>
-          <a:fillRef idx="3">
-            <a:schemeClr val="accent1"/>
-          </a:fillRef>
-          <a:effectRef idx="2">
-            <a:schemeClr val="accent1"/>
-          </a:effectRef>
-          <a:fontRef idx="minor">
-            <a:schemeClr val="lt1"/>
-          </a:fontRef>
-        </p:style>
-        <p:txBody>
-          <a:bodyPr rtlCol="0" anchor="ctr" wrap="square"/>
-          <a:lstStyle/>
-          <a:p>
-            <a:pPr algn="ctr">
-              <a:defRPr sz="900" b="1">
+              <a:t>Regular • 6 Months (General Option)</a:t>
+            </a:r>
+          </a:p>
+        </p:txBody>
+      </p:sp>
+      <p:sp>
+        <p:nvSpPr>
+          <p:cNvPr id="14" name="TextBox 13"/>
+          <p:cNvSpPr txBox="1"/>
+          <p:nvPr/>
+        </p:nvSpPr>
+        <p:spPr>
+          <a:xfrm>
+            <a:off x="5852160" y="3429000"/>
+            <a:ext cx="5486400" cy="502920"/>
+          </a:xfrm>
+          <a:prstGeom prst="rect">
+            <a:avLst/>
+          </a:prstGeom>
+          <a:noFill/>
+        </p:spPr>
+        <p:txBody>
+          <a:bodyPr wrap="square">
+            <a:spAutoFit/>
+          </a:bodyPr>
+          <a:lstStyle/>
+          <a:p>
+            <a:pPr>
+              <a:defRPr sz="850" b="1">
                 <a:solidFill>
                   <a:srgbClr val="64748B"/>
                 </a:solidFill>
@@ -4655,67 +4593,48 @@
               </a:defRPr>
             </a:pPr>
             <a:r>
-              <a:t>PROJECT OPTION / DURATION</a:t>
-            </a:r>
-          </a:p>
-          <a:p>
-            <a:pPr>
-              <a:defRPr sz="1300" b="1">
-                <a:solidFill>
-                  <a:srgbClr val="0369A1"/>
-                </a:solidFill>
-                <a:latin typeface="Calibri"/>
-              </a:defRPr>
-            </a:pPr>
-            <a:r>
-              <a:t>General • 6 ( Months ) Regular</a:t>
-            </a:r>
-          </a:p>
-        </p:txBody>
-      </p:sp>
-      <p:sp>
-        <p:nvSpPr>
-          <p:cNvPr id="13" name="Rounded Rectangle 12"/>
-          <p:cNvSpPr/>
-          <p:nvPr/>
-        </p:nvSpPr>
-        <p:spPr>
-          <a:xfrm>
-            <a:off x="4434840" y="2880360"/>
-            <a:ext cx="3429000" cy="1234440"/>
-          </a:xfrm>
-          <a:prstGeom prst="roundRect">
-            <a:avLst/>
-          </a:prstGeom>
-          <a:solidFill>
-            <a:srgbClr val="FFFFFF"/>
-          </a:solidFill>
-          <a:ln w="15240">
-            <a:solidFill>
-              <a:srgbClr val="E2E8F0"/>
-            </a:solidFill>
-          </a:ln>
-        </p:spPr>
-        <p:style>
-          <a:lnRef idx="1">
-            <a:schemeClr val="accent1"/>
-          </a:lnRef>
-          <a:fillRef idx="3">
-            <a:schemeClr val="accent1"/>
-          </a:fillRef>
-          <a:effectRef idx="2">
-            <a:schemeClr val="accent1"/>
-          </a:effectRef>
-          <a:fontRef idx="minor">
-            <a:schemeClr val="lt1"/>
-          </a:fontRef>
-        </p:style>
-        <p:txBody>
-          <a:bodyPr rtlCol="0" anchor="ctr" wrap="square"/>
-          <a:lstStyle/>
-          <a:p>
-            <a:pPr algn="ctr">
-              <a:defRPr sz="900" b="1">
+              <a:t>CANDIDATE NAME &amp; REG NO</a:t>
+            </a:r>
+          </a:p>
+          <a:p>
+            <a:pPr>
+              <a:defRPr sz="1200" b="1">
+                <a:solidFill>
+                  <a:srgbClr val="0F172A"/>
+                </a:solidFill>
+                <a:latin typeface="Calibri"/>
+              </a:defRPr>
+            </a:pPr>
+            <a:r>
+              <a:t>Ashish Anil Sikaria (23BCI0218)</a:t>
+            </a:r>
+          </a:p>
+        </p:txBody>
+      </p:sp>
+      <p:sp>
+        <p:nvSpPr>
+          <p:cNvPr id="15" name="TextBox 14"/>
+          <p:cNvSpPr txBox="1"/>
+          <p:nvPr/>
+        </p:nvSpPr>
+        <p:spPr>
+          <a:xfrm>
+            <a:off x="5852160" y="4023360"/>
+            <a:ext cx="5486400" cy="502920"/>
+          </a:xfrm>
+          <a:prstGeom prst="rect">
+            <a:avLst/>
+          </a:prstGeom>
+          <a:noFill/>
+        </p:spPr>
+        <p:txBody>
+          <a:bodyPr wrap="square">
+            <a:spAutoFit/>
+          </a:bodyPr>
+          <a:lstStyle/>
+          <a:p>
+            <a:pPr>
+              <a:defRPr sz="850" b="1">
                 <a:solidFill>
                   <a:srgbClr val="64748B"/>
                 </a:solidFill>
@@ -4723,12 +4642,12 @@
               </a:defRPr>
             </a:pPr>
             <a:r>
-              <a:t>STUDENT NAME</a:t>
-            </a:r>
-          </a:p>
-          <a:p>
-            <a:pPr>
-              <a:defRPr sz="1300" b="1">
+              <a:t>FACULTY GUIDE DETAILS</a:t>
+            </a:r>
+          </a:p>
+          <a:p>
+            <a:pPr>
+              <a:defRPr sz="1200" b="1">
                 <a:solidFill>
                   <a:srgbClr val="0F172A"/>
                 </a:solidFill>
@@ -4736,54 +4655,35 @@
               </a:defRPr>
             </a:pPr>
             <a:r>
-              <a:t>Ashish Anil Sikaria</a:t>
-            </a:r>
-          </a:p>
-        </p:txBody>
-      </p:sp>
-      <p:sp>
-        <p:nvSpPr>
-          <p:cNvPr id="14" name="Rounded Rectangle 13"/>
-          <p:cNvSpPr/>
-          <p:nvPr/>
-        </p:nvSpPr>
-        <p:spPr>
-          <a:xfrm>
-            <a:off x="8138160" y="2880360"/>
-            <a:ext cx="3429000" cy="1234440"/>
-          </a:xfrm>
-          <a:prstGeom prst="roundRect">
-            <a:avLst/>
-          </a:prstGeom>
-          <a:solidFill>
-            <a:srgbClr val="F0F9FF"/>
-          </a:solidFill>
-          <a:ln w="15240">
-            <a:solidFill>
-              <a:srgbClr val="BAE6FD"/>
-            </a:solidFill>
-          </a:ln>
-        </p:spPr>
-        <p:style>
-          <a:lnRef idx="1">
-            <a:schemeClr val="accent1"/>
-          </a:lnRef>
-          <a:fillRef idx="3">
-            <a:schemeClr val="accent1"/>
-          </a:fillRef>
-          <a:effectRef idx="2">
-            <a:schemeClr val="accent1"/>
-          </a:effectRef>
-          <a:fontRef idx="minor">
-            <a:schemeClr val="lt1"/>
-          </a:fontRef>
-        </p:style>
-        <p:txBody>
-          <a:bodyPr rtlCol="0" anchor="ctr" wrap="square"/>
-          <a:lstStyle/>
-          <a:p>
-            <a:pPr algn="ctr">
-              <a:defRPr sz="900" b="1">
+              <a:t>Prof. SELVI M (Emp ID: 16106, Assoc. Prof. Gr. 2)</a:t>
+            </a:r>
+          </a:p>
+        </p:txBody>
+      </p:sp>
+      <p:sp>
+        <p:nvSpPr>
+          <p:cNvPr id="16" name="TextBox 15"/>
+          <p:cNvSpPr txBox="1"/>
+          <p:nvPr/>
+        </p:nvSpPr>
+        <p:spPr>
+          <a:xfrm>
+            <a:off x="5852160" y="4617720"/>
+            <a:ext cx="5486400" cy="502920"/>
+          </a:xfrm>
+          <a:prstGeom prst="rect">
+            <a:avLst/>
+          </a:prstGeom>
+          <a:noFill/>
+        </p:spPr>
+        <p:txBody>
+          <a:bodyPr wrap="square">
+            <a:spAutoFit/>
+          </a:bodyPr>
+          <a:lstStyle/>
+          <a:p>
+            <a:pPr>
+              <a:defRPr sz="850" b="1">
                 <a:solidFill>
                   <a:srgbClr val="64748B"/>
                 </a:solidFill>
@@ -4791,67 +4691,48 @@
               </a:defRPr>
             </a:pPr>
             <a:r>
-              <a:t>REGISTER NUMBER</a:t>
-            </a:r>
-          </a:p>
-          <a:p>
-            <a:pPr>
-              <a:defRPr sz="1300" b="1">
-                <a:solidFill>
-                  <a:srgbClr val="0369A1"/>
-                </a:solidFill>
-                <a:latin typeface="Calibri"/>
-              </a:defRPr>
-            </a:pPr>
-            <a:r>
-              <a:t>23BCI0218</a:t>
-            </a:r>
-          </a:p>
-        </p:txBody>
-      </p:sp>
-      <p:sp>
-        <p:nvSpPr>
-          <p:cNvPr id="15" name="Rounded Rectangle 14"/>
-          <p:cNvSpPr/>
-          <p:nvPr/>
-        </p:nvSpPr>
-        <p:spPr>
-          <a:xfrm>
-            <a:off x="731520" y="4297680"/>
-            <a:ext cx="3429000" cy="1234440"/>
-          </a:xfrm>
-          <a:prstGeom prst="roundRect">
-            <a:avLst/>
-          </a:prstGeom>
-          <a:solidFill>
-            <a:srgbClr val="FFFFFF"/>
-          </a:solidFill>
-          <a:ln w="15240">
-            <a:solidFill>
-              <a:srgbClr val="E2E8F0"/>
-            </a:solidFill>
-          </a:ln>
-        </p:spPr>
-        <p:style>
-          <a:lnRef idx="1">
-            <a:schemeClr val="accent1"/>
-          </a:lnRef>
-          <a:fillRef idx="3">
-            <a:schemeClr val="accent1"/>
-          </a:fillRef>
-          <a:effectRef idx="2">
-            <a:schemeClr val="accent1"/>
-          </a:effectRef>
-          <a:fontRef idx="minor">
-            <a:schemeClr val="lt1"/>
-          </a:fontRef>
-        </p:style>
-        <p:txBody>
-          <a:bodyPr rtlCol="0" anchor="ctr" wrap="square"/>
-          <a:lstStyle/>
-          <a:p>
-            <a:pPr algn="ctr">
-              <a:defRPr sz="900" b="1">
+              <a:t>ACADEMIC SCHOOL</a:t>
+            </a:r>
+          </a:p>
+          <a:p>
+            <a:pPr>
+              <a:defRPr sz="1200" b="1">
+                <a:solidFill>
+                  <a:srgbClr val="0F172A"/>
+                </a:solidFill>
+                <a:latin typeface="Calibri"/>
+              </a:defRPr>
+            </a:pPr>
+            <a:r>
+              <a:t>SCOPE (School of Computer Science &amp; Engineering)</a:t>
+            </a:r>
+          </a:p>
+        </p:txBody>
+      </p:sp>
+      <p:sp>
+        <p:nvSpPr>
+          <p:cNvPr id="17" name="TextBox 16"/>
+          <p:cNvSpPr txBox="1"/>
+          <p:nvPr/>
+        </p:nvSpPr>
+        <p:spPr>
+          <a:xfrm>
+            <a:off x="5852160" y="5212080"/>
+            <a:ext cx="5486400" cy="502920"/>
+          </a:xfrm>
+          <a:prstGeom prst="rect">
+            <a:avLst/>
+          </a:prstGeom>
+          <a:noFill/>
+        </p:spPr>
+        <p:txBody>
+          <a:bodyPr wrap="square">
+            <a:spAutoFit/>
+          </a:bodyPr>
+          <a:lstStyle/>
+          <a:p>
+            <a:pPr>
+              <a:defRPr sz="850" b="1">
                 <a:solidFill>
                   <a:srgbClr val="64748B"/>
                 </a:solidFill>
@@ -4859,12 +4740,12 @@
               </a:defRPr>
             </a:pPr>
             <a:r>
-              <a:t>FACULTY GUIDE</a:t>
-            </a:r>
-          </a:p>
-          <a:p>
-            <a:pPr>
-              <a:defRPr sz="1300" b="1">
+              <a:t>PROJECT STATUS</a:t>
+            </a:r>
+          </a:p>
+          <a:p>
+            <a:pPr>
+              <a:defRPr sz="1200" b="1">
                 <a:solidFill>
                   <a:srgbClr val="0F172A"/>
                 </a:solidFill>
@@ -4872,198 +4753,7 @@
               </a:defRPr>
             </a:pPr>
             <a:r>
-              <a:t>Prof. SELVI M (Emp ID: 16106)</a:t>
-            </a:r>
-          </a:p>
-        </p:txBody>
-      </p:sp>
-      <p:sp>
-        <p:nvSpPr>
-          <p:cNvPr id="16" name="Rounded Rectangle 15"/>
-          <p:cNvSpPr/>
-          <p:nvPr/>
-        </p:nvSpPr>
-        <p:spPr>
-          <a:xfrm>
-            <a:off x="4434840" y="4297680"/>
-            <a:ext cx="3429000" cy="1234440"/>
-          </a:xfrm>
-          <a:prstGeom prst="roundRect">
-            <a:avLst/>
-          </a:prstGeom>
-          <a:solidFill>
-            <a:srgbClr val="FFFFFF"/>
-          </a:solidFill>
-          <a:ln w="15240">
-            <a:solidFill>
-              <a:srgbClr val="E2E8F0"/>
-            </a:solidFill>
-          </a:ln>
-        </p:spPr>
-        <p:style>
-          <a:lnRef idx="1">
-            <a:schemeClr val="accent1"/>
-          </a:lnRef>
-          <a:fillRef idx="3">
-            <a:schemeClr val="accent1"/>
-          </a:fillRef>
-          <a:effectRef idx="2">
-            <a:schemeClr val="accent1"/>
-          </a:effectRef>
-          <a:fontRef idx="minor">
-            <a:schemeClr val="lt1"/>
-          </a:fontRef>
-        </p:style>
-        <p:txBody>
-          <a:bodyPr rtlCol="0" anchor="ctr" wrap="square"/>
-          <a:lstStyle/>
-          <a:p>
-            <a:pPr algn="ctr">
-              <a:defRPr sz="900" b="1">
-                <a:solidFill>
-                  <a:srgbClr val="64748B"/>
-                </a:solidFill>
-                <a:latin typeface="Calibri"/>
-              </a:defRPr>
-            </a:pPr>
-            <a:r>
-              <a:t>ACADEMIC SCHOOL</a:t>
-            </a:r>
-          </a:p>
-          <a:p>
-            <a:pPr>
-              <a:defRPr sz="1300" b="1">
-                <a:solidFill>
-                  <a:srgbClr val="0F172A"/>
-                </a:solidFill>
-                <a:latin typeface="Calibri"/>
-              </a:defRPr>
-            </a:pPr>
-            <a:r>
-              <a:t>SCOPE (Computer Science &amp; Eng.)</a:t>
-            </a:r>
-          </a:p>
-        </p:txBody>
-      </p:sp>
-      <p:sp>
-        <p:nvSpPr>
-          <p:cNvPr id="17" name="Rounded Rectangle 16"/>
-          <p:cNvSpPr/>
-          <p:nvPr/>
-        </p:nvSpPr>
-        <p:spPr>
-          <a:xfrm>
-            <a:off x="8138160" y="4297680"/>
-            <a:ext cx="3429000" cy="1234440"/>
-          </a:xfrm>
-          <a:prstGeom prst="roundRect">
-            <a:avLst/>
-          </a:prstGeom>
-          <a:solidFill>
-            <a:srgbClr val="F0FDFA"/>
-          </a:solidFill>
-          <a:ln w="15240">
-            <a:solidFill>
-              <a:srgbClr val="A7F3D0"/>
-            </a:solidFill>
-          </a:ln>
-        </p:spPr>
-        <p:style>
-          <a:lnRef idx="1">
-            <a:schemeClr val="accent1"/>
-          </a:lnRef>
-          <a:fillRef idx="3">
-            <a:schemeClr val="accent1"/>
-          </a:fillRef>
-          <a:effectRef idx="2">
-            <a:schemeClr val="accent1"/>
-          </a:effectRef>
-          <a:fontRef idx="minor">
-            <a:schemeClr val="lt1"/>
-          </a:fontRef>
-        </p:style>
-        <p:txBody>
-          <a:bodyPr rtlCol="0" anchor="ctr" wrap="square"/>
-          <a:lstStyle/>
-          <a:p>
-            <a:pPr algn="ctr">
-              <a:defRPr sz="900" b="1">
-                <a:solidFill>
-                  <a:srgbClr val="64748B"/>
-                </a:solidFill>
-                <a:latin typeface="Calibri"/>
-              </a:defRPr>
-            </a:pPr>
-            <a:r>
-              <a:t>REGISTRATION STATUS</a:t>
-            </a:r>
-          </a:p>
-          <a:p>
-            <a:pPr>
-              <a:defRPr sz="1300" b="1">
-                <a:solidFill>
-                  <a:srgbClr val="4C9F38"/>
-                </a:solidFill>
-                <a:latin typeface="Calibri"/>
-              </a:defRPr>
-            </a:pPr>
-            <a:r>
               <a:t>Registered &amp; Approved by Guide</a:t>
-            </a:r>
-          </a:p>
-        </p:txBody>
-      </p:sp>
-      <p:sp>
-        <p:nvSpPr>
-          <p:cNvPr id="18" name="Rounded Rectangle 17"/>
-          <p:cNvSpPr/>
-          <p:nvPr/>
-        </p:nvSpPr>
-        <p:spPr>
-          <a:xfrm>
-            <a:off x="731520" y="5532120"/>
-            <a:ext cx="10725912" cy="502920"/>
-          </a:xfrm>
-          <a:prstGeom prst="roundRect">
-            <a:avLst/>
-          </a:prstGeom>
-          <a:solidFill>
-            <a:srgbClr val="F0FDFA"/>
-          </a:solidFill>
-          <a:ln w="12700">
-            <a:solidFill>
-              <a:srgbClr val="A7F3D0"/>
-            </a:solidFill>
-          </a:ln>
-        </p:spPr>
-        <p:style>
-          <a:lnRef idx="1">
-            <a:schemeClr val="accent1"/>
-          </a:lnRef>
-          <a:fillRef idx="3">
-            <a:schemeClr val="accent1"/>
-          </a:fillRef>
-          <a:effectRef idx="2">
-            <a:schemeClr val="accent1"/>
-          </a:effectRef>
-          <a:fontRef idx="minor">
-            <a:schemeClr val="lt1"/>
-          </a:fontRef>
-        </p:style>
-        <p:txBody>
-          <a:bodyPr rtlCol="0" anchor="ctr"/>
-          <a:lstStyle/>
-          <a:p>
-            <a:pPr algn="ctr">
-              <a:defRPr sz="1050" b="1">
-                <a:solidFill>
-                  <a:srgbClr val="4C9F38"/>
-                </a:solidFill>
-                <a:latin typeface="Calibri"/>
-              </a:defRPr>
-            </a:pPr>
-            <a:r>
-              <a:t>OFFICIAL REGISTRATION VERIFIED: Approved under faculty supervision in SCOPE for Fall 2026-27.</a:t>
             </a:r>
           </a:p>
         </p:txBody>
@@ -5101,7 +4791,7 @@
             <a:avLst/>
           </a:prstGeom>
           <a:solidFill>
-            <a:srgbClr val="F8FAFC"/>
+            <a:srgbClr val="FCFCFD"/>
           </a:solidFill>
           <a:ln>
             <a:noFill/>
@@ -5137,8 +4827,8 @@
         </p:nvSpPr>
         <p:spPr>
           <a:xfrm>
-            <a:off x="731520" y="365760"/>
-            <a:ext cx="10725912" cy="274320"/>
+            <a:off x="822960" y="411480"/>
+            <a:ext cx="10515600" cy="228600"/>
           </a:xfrm>
           <a:prstGeom prst="rect">
             <a:avLst/>
@@ -5173,8 +4863,8 @@
         </p:nvSpPr>
         <p:spPr>
           <a:xfrm>
-            <a:off x="731520" y="621792"/>
-            <a:ext cx="10725912" cy="457200"/>
+            <a:off x="822960" y="658368"/>
+            <a:ext cx="10515600" cy="640080"/>
           </a:xfrm>
           <a:prstGeom prst="rect">
             <a:avLst/>
@@ -5196,12 +4886,12 @@
               </a:defRPr>
             </a:pPr>
             <a:r>
-              <a:t>The Fundamental Failure of Centralized Healthcare Data</a:t>
-            </a:r>
-          </a:p>
-          <a:p>
-            <a:pPr>
-              <a:defRPr sz="1100">
+              <a:t>The Crisis in Centralized Healthcare Data</a:t>
+            </a:r>
+          </a:p>
+          <a:p>
+            <a:pPr>
+              <a:defRPr sz="1150">
                 <a:solidFill>
                   <a:srgbClr val="64748B"/>
                 </a:solidFill>
@@ -5209,7 +4899,7 @@
               </a:defRPr>
             </a:pPr>
             <a:r>
-              <a:t>Ransomware targets, non-interoperable hospital silos, and zero patient sovereignty.</a:t>
+              <a:t>Why traditional hospital electronic record systems fail patients and clinicians alike.</a:t>
             </a:r>
           </a:p>
         </p:txBody>
@@ -5222,8 +4912,8 @@
         </p:nvSpPr>
         <p:spPr>
           <a:xfrm>
-            <a:off x="731520" y="1234440"/>
-            <a:ext cx="10725912" cy="9144"/>
+            <a:off x="822960" y="1371600"/>
+            <a:ext cx="10545775" cy="9144"/>
           </a:xfrm>
           <a:prstGeom prst="rect">
             <a:avLst/>
@@ -5265,8 +4955,8 @@
         </p:nvSpPr>
         <p:spPr>
           <a:xfrm>
-            <a:off x="731520" y="6263640"/>
-            <a:ext cx="10725912" cy="9144"/>
+            <a:off x="822960" y="6217920"/>
+            <a:ext cx="10545775" cy="9144"/>
           </a:xfrm>
           <a:prstGeom prst="rect">
             <a:avLst/>
@@ -5308,7 +4998,7 @@
         </p:nvSpPr>
         <p:spPr>
           <a:xfrm>
-            <a:off x="731520" y="6327648"/>
+            <a:off x="822960" y="6272784"/>
             <a:ext cx="6400800" cy="274320"/>
           </a:xfrm>
           <a:prstGeom prst="rect">
@@ -5344,8 +5034,8 @@
         </p:nvSpPr>
         <p:spPr>
           <a:xfrm>
-            <a:off x="7772400" y="6327648"/>
-            <a:ext cx="3685032" cy="274320"/>
+            <a:off x="7772400" y="6272784"/>
+            <a:ext cx="3596335" cy="274320"/>
           </a:xfrm>
           <a:prstGeom prst="rect">
             <a:avLst/>
@@ -5367,32 +5057,93 @@
               </a:defRPr>
             </a:pPr>
             <a:r>
-              <a:t>BCSE497J Project - I • Fall 2026-27</a:t>
-            </a:r>
-          </a:p>
-        </p:txBody>
-      </p:sp>
-      <p:sp>
-        <p:nvSpPr>
-          <p:cNvPr id="9" name="Rounded Rectangle 8"/>
+              <a:t>BCSE497J Project - I • Fall Semester 2026-27</a:t>
+            </a:r>
+          </a:p>
+        </p:txBody>
+      </p:sp>
+      <p:sp>
+        <p:nvSpPr>
+          <p:cNvPr id="9" name="TextBox 8"/>
+          <p:cNvSpPr txBox="1"/>
+          <p:nvPr/>
+        </p:nvSpPr>
+        <p:spPr>
+          <a:xfrm>
+            <a:off x="822960" y="1737360"/>
+            <a:ext cx="3840480" cy="4114800"/>
+          </a:xfrm>
+          <a:prstGeom prst="rect">
+            <a:avLst/>
+          </a:prstGeom>
+          <a:noFill/>
+        </p:spPr>
+        <p:txBody>
+          <a:bodyPr wrap="square">
+            <a:spAutoFit/>
+          </a:bodyPr>
+          <a:lstStyle/>
+          <a:p>
+            <a:pPr>
+              <a:defRPr sz="5400" b="1">
+                <a:solidFill>
+                  <a:srgbClr val="E11D48"/>
+                </a:solidFill>
+                <a:latin typeface="Calibri"/>
+              </a:defRPr>
+            </a:pPr>
+            <a:r>
+              <a:t>133M+</a:t>
+            </a:r>
+          </a:p>
+          <a:p>
+            <a:pPr>
+              <a:defRPr sz="1300" b="1">
+                <a:solidFill>
+                  <a:srgbClr val="0F172A"/>
+                </a:solidFill>
+                <a:latin typeface="Calibri"/>
+              </a:defRPr>
+            </a:pPr>
+            <a:r>
+              <a:t>Healthcare Records Breached (2023–2025)</a:t>
+            </a:r>
+          </a:p>
+          <a:p>
+            <a:br/>
+            <a:pPr>
+              <a:defRPr sz="1150">
+                <a:solidFill>
+                  <a:srgbClr val="64748B"/>
+                </a:solidFill>
+                <a:latin typeface="Calibri"/>
+              </a:defRPr>
+            </a:pPr>
+            <a:r>
+              <a:t>Centralized databases in hospitals and clinics remain the single highest-value targets for ransomware attacks, exposing private patient histories to extortion and black-market monetization.</a:t>
+            </a:r>
+          </a:p>
+        </p:txBody>
+      </p:sp>
+      <p:sp>
+        <p:nvSpPr>
+          <p:cNvPr id="10" name="Rectangle 9"/>
           <p:cNvSpPr/>
           <p:nvPr/>
         </p:nvSpPr>
         <p:spPr>
           <a:xfrm>
-            <a:off x="731520" y="1463040"/>
-            <a:ext cx="3840480" cy="4480560"/>
-          </a:xfrm>
-          <a:prstGeom prst="roundRect">
+            <a:off x="5120640" y="1737360"/>
+            <a:ext cx="36576" cy="1143000"/>
+          </a:xfrm>
+          <a:prstGeom prst="rect">
             <a:avLst/>
           </a:prstGeom>
           <a:solidFill>
-            <a:srgbClr val="FFF1F2"/>
+            <a:srgbClr val="E11D48"/>
           </a:solidFill>
-          <a:ln w="19050">
-            <a:solidFill>
-              <a:srgbClr val="FECDD3"/>
-            </a:solidFill>
+          <a:ln>
+            <a:noFill/>
           </a:ln>
         </p:spPr>
         <p:style>
@@ -5410,24 +5161,37 @@
           </a:fontRef>
         </p:style>
         <p:txBody>
-          <a:bodyPr rtlCol="0" anchor="ctr" wrap="square"/>
-          <a:lstStyle/>
-          <a:p>
-            <a:pPr algn="ctr">
-              <a:defRPr sz="950" b="1">
-                <a:solidFill>
-                  <a:srgbClr val="E11D48"/>
-                </a:solidFill>
-                <a:latin typeface="Calibri"/>
-              </a:defRPr>
-            </a:pPr>
-            <a:r>
-              <a:t>HEALTHCARE DATA CRISIS</a:t>
-            </a:r>
-          </a:p>
-          <a:p>
-            <a:pPr>
-              <a:defRPr sz="4400" b="1">
+          <a:bodyPr rtlCol="0" anchor="ctr"/>
+          <a:lstStyle/>
+          <a:p>
+            <a:pPr algn="ctr"/>
+          </a:p>
+        </p:txBody>
+      </p:sp>
+      <p:sp>
+        <p:nvSpPr>
+          <p:cNvPr id="11" name="TextBox 10"/>
+          <p:cNvSpPr txBox="1"/>
+          <p:nvPr/>
+        </p:nvSpPr>
+        <p:spPr>
+          <a:xfrm>
+            <a:off x="5303520" y="1691640"/>
+            <a:ext cx="6035040" cy="1188720"/>
+          </a:xfrm>
+          <a:prstGeom prst="rect">
+            <a:avLst/>
+          </a:prstGeom>
+          <a:noFill/>
+        </p:spPr>
+        <p:txBody>
+          <a:bodyPr wrap="square">
+            <a:spAutoFit/>
+          </a:bodyPr>
+          <a:lstStyle/>
+          <a:p>
+            <a:pPr>
+              <a:defRPr sz="1400" b="1">
                 <a:solidFill>
                   <a:srgbClr val="0F172A"/>
                 </a:solidFill>
@@ -5435,24 +5199,10 @@
               </a:defRPr>
             </a:pPr>
             <a:r>
-              <a:t>133M+</a:t>
-            </a:r>
-          </a:p>
-          <a:p>
-            <a:pPr>
-              <a:defRPr sz="1300" b="1">
-                <a:solidFill>
-                  <a:srgbClr val="E11D48"/>
-                </a:solidFill>
-                <a:latin typeface="Calibri"/>
-              </a:defRPr>
-            </a:pPr>
-            <a:r>
-              <a:t>Patient Records Breached in 2023–2025</a:t>
-            </a:r>
-          </a:p>
-          <a:p>
-            <a:br/>
+              <a:t>Zero Patient Sovereignty</a:t>
+            </a:r>
+          </a:p>
+          <a:p>
             <a:pPr>
               <a:defRPr sz="1100">
                 <a:solidFill>
@@ -5462,32 +5212,30 @@
               </a:defRPr>
             </a:pPr>
             <a:r>
-              <a:t>Centralized hospital database servers remain the #1 prime target for global ransomware cartels, causing catastrophic identity leakage and medical fraud.</a:t>
-            </a:r>
-          </a:p>
-        </p:txBody>
-      </p:sp>
-      <p:sp>
-        <p:nvSpPr>
-          <p:cNvPr id="10" name="Rounded Rectangle 9"/>
+              <a:t>Patients have no direct ownership or real-time visibility into who decrypts, shares, or commercializes their sensitive diagnostic records among third-party brokers.</a:t>
+            </a:r>
+          </a:p>
+        </p:txBody>
+      </p:sp>
+      <p:sp>
+        <p:nvSpPr>
+          <p:cNvPr id="12" name="Rectangle 11"/>
           <p:cNvSpPr/>
           <p:nvPr/>
         </p:nvSpPr>
         <p:spPr>
           <a:xfrm>
-            <a:off x="4754880" y="1463040"/>
-            <a:ext cx="6702552" cy="1371600"/>
-          </a:xfrm>
-          <a:prstGeom prst="roundRect">
+            <a:off x="5120640" y="3154680"/>
+            <a:ext cx="36576" cy="1143000"/>
+          </a:xfrm>
+          <a:prstGeom prst="rect">
             <a:avLst/>
           </a:prstGeom>
           <a:solidFill>
-            <a:srgbClr val="FFFBEB"/>
+            <a:srgbClr val="0284C7"/>
           </a:solidFill>
-          <a:ln w="15240">
-            <a:solidFill>
-              <a:srgbClr val="FDE68A"/>
-            </a:solidFill>
+          <a:ln>
+            <a:noFill/>
           </a:ln>
         </p:spPr>
         <p:style>
@@ -5505,10 +5253,36 @@
           </a:fontRef>
         </p:style>
         <p:txBody>
-          <a:bodyPr rtlCol="0" anchor="ctr" wrap="square"/>
-          <a:lstStyle/>
-          <a:p>
-            <a:pPr algn="ctr">
+          <a:bodyPr rtlCol="0" anchor="ctr"/>
+          <a:lstStyle/>
+          <a:p>
+            <a:pPr algn="ctr"/>
+          </a:p>
+        </p:txBody>
+      </p:sp>
+      <p:sp>
+        <p:nvSpPr>
+          <p:cNvPr id="13" name="TextBox 12"/>
+          <p:cNvSpPr txBox="1"/>
+          <p:nvPr/>
+        </p:nvSpPr>
+        <p:spPr>
+          <a:xfrm>
+            <a:off x="5303520" y="3108960"/>
+            <a:ext cx="6035040" cy="1188720"/>
+          </a:xfrm>
+          <a:prstGeom prst="rect">
+            <a:avLst/>
+          </a:prstGeom>
+          <a:noFill/>
+        </p:spPr>
+        <p:txBody>
+          <a:bodyPr wrap="square">
+            <a:spAutoFit/>
+          </a:bodyPr>
+          <a:lstStyle/>
+          <a:p>
+            <a:pPr>
               <a:defRPr sz="1400" b="1">
                 <a:solidFill>
                   <a:srgbClr val="0F172A"/>
@@ -5517,7 +5291,7 @@
               </a:defRPr>
             </a:pPr>
             <a:r>
-              <a:t>01   Zero Patient Sovereignty</a:t>
+              <a:t>Fragmented Interoperability Silos</a:t>
             </a:r>
           </a:p>
           <a:p>
@@ -5530,32 +5304,30 @@
               </a:defRPr>
             </a:pPr>
             <a:r>
-              <a:t>Patients have zero visibility into who accesses, shares, or commercializes their diagnostic records among third-party commercial brokers.</a:t>
-            </a:r>
-          </a:p>
-        </p:txBody>
-      </p:sp>
-      <p:sp>
-        <p:nvSpPr>
-          <p:cNvPr id="11" name="Rounded Rectangle 10"/>
+              <a:t>Incompatible software architectures across regional clinics cause life-threatening information blind spots in emergency trauma care, forcing redundant tests.</a:t>
+            </a:r>
+          </a:p>
+        </p:txBody>
+      </p:sp>
+      <p:sp>
+        <p:nvSpPr>
+          <p:cNvPr id="14" name="Rectangle 13"/>
           <p:cNvSpPr/>
           <p:nvPr/>
         </p:nvSpPr>
         <p:spPr>
           <a:xfrm>
-            <a:off x="4754880" y="2999232"/>
-            <a:ext cx="6702552" cy="1371600"/>
-          </a:xfrm>
-          <a:prstGeom prst="roundRect">
+            <a:off x="5120640" y="4572000"/>
+            <a:ext cx="36576" cy="1143000"/>
+          </a:xfrm>
+          <a:prstGeom prst="rect">
             <a:avLst/>
           </a:prstGeom>
           <a:solidFill>
-            <a:srgbClr val="F0F9FF"/>
+            <a:srgbClr val="0284C7"/>
           </a:solidFill>
-          <a:ln w="15240">
-            <a:solidFill>
-              <a:srgbClr val="BAE6FD"/>
-            </a:solidFill>
+          <a:ln>
+            <a:noFill/>
           </a:ln>
         </p:spPr>
         <p:style>
@@ -5573,10 +5345,36 @@
           </a:fontRef>
         </p:style>
         <p:txBody>
-          <a:bodyPr rtlCol="0" anchor="ctr" wrap="square"/>
-          <a:lstStyle/>
-          <a:p>
-            <a:pPr algn="ctr">
+          <a:bodyPr rtlCol="0" anchor="ctr"/>
+          <a:lstStyle/>
+          <a:p>
+            <a:pPr algn="ctr"/>
+          </a:p>
+        </p:txBody>
+      </p:sp>
+      <p:sp>
+        <p:nvSpPr>
+          <p:cNvPr id="15" name="TextBox 14"/>
+          <p:cNvSpPr txBox="1"/>
+          <p:nvPr/>
+        </p:nvSpPr>
+        <p:spPr>
+          <a:xfrm>
+            <a:off x="5303520" y="4526280"/>
+            <a:ext cx="6035040" cy="1188720"/>
+          </a:xfrm>
+          <a:prstGeom prst="rect">
+            <a:avLst/>
+          </a:prstGeom>
+          <a:noFill/>
+        </p:spPr>
+        <p:txBody>
+          <a:bodyPr wrap="square">
+            <a:spAutoFit/>
+          </a:bodyPr>
+          <a:lstStyle/>
+          <a:p>
+            <a:pPr>
               <a:defRPr sz="1400" b="1">
                 <a:solidFill>
                   <a:srgbClr val="0F172A"/>
@@ -5585,7 +5383,7 @@
               </a:defRPr>
             </a:pPr>
             <a:r>
-              <a:t>02   Fragmented Interoperability Silos</a:t>
+              <a:t>Lack of Tamper-Evident Auditing</a:t>
             </a:r>
           </a:p>
           <a:p>
@@ -5598,75 +5396,7 @@
               </a:defRPr>
             </a:pPr>
             <a:r>
-              <a:t>Incompatible hospital software systems create life-threatening information blind spots in emergency trauma care, forcing duplicate diagnostics.</a:t>
-            </a:r>
-          </a:p>
-        </p:txBody>
-      </p:sp>
-      <p:sp>
-        <p:nvSpPr>
-          <p:cNvPr id="12" name="Rounded Rectangle 11"/>
-          <p:cNvSpPr/>
-          <p:nvPr/>
-        </p:nvSpPr>
-        <p:spPr>
-          <a:xfrm>
-            <a:off x="4754880" y="4535424"/>
-            <a:ext cx="6702552" cy="1371600"/>
-          </a:xfrm>
-          <a:prstGeom prst="roundRect">
-            <a:avLst/>
-          </a:prstGeom>
-          <a:solidFill>
-            <a:srgbClr val="EEF2FF"/>
-          </a:solidFill>
-          <a:ln w="15240">
-            <a:solidFill>
-              <a:srgbClr val="C7D2FE"/>
-            </a:solidFill>
-          </a:ln>
-        </p:spPr>
-        <p:style>
-          <a:lnRef idx="1">
-            <a:schemeClr val="accent1"/>
-          </a:lnRef>
-          <a:fillRef idx="3">
-            <a:schemeClr val="accent1"/>
-          </a:fillRef>
-          <a:effectRef idx="2">
-            <a:schemeClr val="accent1"/>
-          </a:effectRef>
-          <a:fontRef idx="minor">
-            <a:schemeClr val="lt1"/>
-          </a:fontRef>
-        </p:style>
-        <p:txBody>
-          <a:bodyPr rtlCol="0" anchor="ctr" wrap="square"/>
-          <a:lstStyle/>
-          <a:p>
-            <a:pPr algn="ctr">
-              <a:defRPr sz="1400" b="1">
-                <a:solidFill>
-                  <a:srgbClr val="0F172A"/>
-                </a:solidFill>
-                <a:latin typeface="Calibri"/>
-              </a:defRPr>
-            </a:pPr>
-            <a:r>
-              <a:t>03   Lack of Tamper-Evident Audits</a:t>
-            </a:r>
-          </a:p>
-          <a:p>
-            <a:pPr>
-              <a:defRPr sz="1100">
-                <a:solidFill>
-                  <a:srgbClr val="334155"/>
-                </a:solidFill>
-                <a:latin typeface="Calibri"/>
-              </a:defRPr>
-            </a:pPr>
-            <a:r>
-              <a:t>Legacy relational databases lack cryptographic non-repudiation, allowing retrospective record alterations and untraceable access logs.</a:t>
+              <a:t>Relational databases lack cryptographic non-repudiation, permitting unauthorized retrospective alterations of diagnostic records and untraceable access logs.</a:t>
             </a:r>
           </a:p>
         </p:txBody>
@@ -5704,7 +5434,7 @@
             <a:avLst/>
           </a:prstGeom>
           <a:solidFill>
-            <a:srgbClr val="F8FAFC"/>
+            <a:srgbClr val="FCFCFD"/>
           </a:solidFill>
           <a:ln>
             <a:noFill/>
@@ -5740,8 +5470,8 @@
         </p:nvSpPr>
         <p:spPr>
           <a:xfrm>
-            <a:off x="731520" y="365760"/>
-            <a:ext cx="10725912" cy="274320"/>
+            <a:off x="822960" y="411480"/>
+            <a:ext cx="10515600" cy="228600"/>
           </a:xfrm>
           <a:prstGeom prst="rect">
             <a:avLst/>
@@ -5776,8 +5506,8 @@
         </p:nvSpPr>
         <p:spPr>
           <a:xfrm>
-            <a:off x="731520" y="621792"/>
-            <a:ext cx="10725912" cy="457200"/>
+            <a:off x="822960" y="658368"/>
+            <a:ext cx="10515600" cy="640080"/>
           </a:xfrm>
           <a:prstGeom prst="rect">
             <a:avLst/>
@@ -5799,12 +5529,12 @@
               </a:defRPr>
             </a:pPr>
             <a:r>
-              <a:t>The CareChain Zero-Trust Healthcare Protocol</a:t>
-            </a:r>
-          </a:p>
-          <a:p>
-            <a:pPr>
-              <a:defRPr sz="1100">
+              <a:t>The CareChain Zero-Trust Healthcare Solution</a:t>
+            </a:r>
+          </a:p>
+          <a:p>
+            <a:pPr>
+              <a:defRPr sz="1150">
                 <a:solidFill>
                   <a:srgbClr val="64748B"/>
                 </a:solidFill>
@@ -5812,7 +5542,7 @@
               </a:defRPr>
             </a:pPr>
             <a:r>
-              <a:t>A layered Web2/Web3 architecture separating cryptography, decentralized storage, and access control.</a:t>
+              <a:t>A 3-layer hybrid protocol separating client cryptography, decentralized storage, and on-chain access.</a:t>
             </a:r>
           </a:p>
         </p:txBody>
@@ -5825,8 +5555,8 @@
         </p:nvSpPr>
         <p:spPr>
           <a:xfrm>
-            <a:off x="731520" y="1234440"/>
-            <a:ext cx="10725912" cy="9144"/>
+            <a:off x="822960" y="1371600"/>
+            <a:ext cx="10545775" cy="9144"/>
           </a:xfrm>
           <a:prstGeom prst="rect">
             <a:avLst/>
@@ -5868,8 +5598,8 @@
         </p:nvSpPr>
         <p:spPr>
           <a:xfrm>
-            <a:off x="731520" y="6263640"/>
-            <a:ext cx="10725912" cy="9144"/>
+            <a:off x="822960" y="6217920"/>
+            <a:ext cx="10545775" cy="9144"/>
           </a:xfrm>
           <a:prstGeom prst="rect">
             <a:avLst/>
@@ -5911,7 +5641,7 @@
         </p:nvSpPr>
         <p:spPr>
           <a:xfrm>
-            <a:off x="731520" y="6327648"/>
+            <a:off x="822960" y="6272784"/>
             <a:ext cx="6400800" cy="274320"/>
           </a:xfrm>
           <a:prstGeom prst="rect">
@@ -5947,8 +5677,8 @@
         </p:nvSpPr>
         <p:spPr>
           <a:xfrm>
-            <a:off x="7772400" y="6327648"/>
-            <a:ext cx="3685032" cy="274320"/>
+            <a:off x="7772400" y="6272784"/>
+            <a:ext cx="3596335" cy="274320"/>
           </a:xfrm>
           <a:prstGeom prst="rect">
             <a:avLst/>
@@ -5970,32 +5700,30 @@
               </a:defRPr>
             </a:pPr>
             <a:r>
-              <a:t>BCSE497J Project - I • Fall 2026-27</a:t>
-            </a:r>
-          </a:p>
-        </p:txBody>
-      </p:sp>
-      <p:sp>
-        <p:nvSpPr>
-          <p:cNvPr id="9" name="Rounded Rectangle 8"/>
+              <a:t>BCSE497J Project - I • Fall Semester 2026-27</a:t>
+            </a:r>
+          </a:p>
+        </p:txBody>
+      </p:sp>
+      <p:sp>
+        <p:nvSpPr>
+          <p:cNvPr id="9" name="Rectangle 8"/>
           <p:cNvSpPr/>
           <p:nvPr/>
         </p:nvSpPr>
         <p:spPr>
           <a:xfrm>
-            <a:off x="731520" y="1463040"/>
-            <a:ext cx="3429000" cy="3931920"/>
-          </a:xfrm>
-          <a:prstGeom prst="roundRect">
+            <a:off x="822960" y="1691640"/>
+            <a:ext cx="3200400" cy="27432"/>
+          </a:xfrm>
+          <a:prstGeom prst="rect">
             <a:avLst/>
           </a:prstGeom>
           <a:solidFill>
-            <a:srgbClr val="F0F9FF"/>
+            <a:srgbClr val="0284C7"/>
           </a:solidFill>
-          <a:ln w="15240">
-            <a:solidFill>
-              <a:srgbClr val="BAE6FD"/>
-            </a:solidFill>
+          <a:ln>
+            <a:noFill/>
           </a:ln>
         </p:spPr>
         <p:style>
@@ -6013,11 +5741,37 @@
           </a:fontRef>
         </p:style>
         <p:txBody>
-          <a:bodyPr rtlCol="0" anchor="ctr" wrap="square"/>
-          <a:lstStyle/>
-          <a:p>
-            <a:pPr algn="ctr">
-              <a:defRPr sz="850" b="1">
+          <a:bodyPr rtlCol="0" anchor="ctr"/>
+          <a:lstStyle/>
+          <a:p>
+            <a:pPr algn="ctr"/>
+          </a:p>
+        </p:txBody>
+      </p:sp>
+      <p:sp>
+        <p:nvSpPr>
+          <p:cNvPr id="10" name="TextBox 9"/>
+          <p:cNvSpPr txBox="1"/>
+          <p:nvPr/>
+        </p:nvSpPr>
+        <p:spPr>
+          <a:xfrm>
+            <a:off x="822960" y="1783080"/>
+            <a:ext cx="3200400" cy="3931920"/>
+          </a:xfrm>
+          <a:prstGeom prst="rect">
+            <a:avLst/>
+          </a:prstGeom>
+          <a:noFill/>
+        </p:spPr>
+        <p:txBody>
+          <a:bodyPr wrap="square">
+            <a:spAutoFit/>
+          </a:bodyPr>
+          <a:lstStyle/>
+          <a:p>
+            <a:pPr>
+              <a:defRPr sz="900" b="1">
                 <a:solidFill>
                   <a:srgbClr val="0369A1"/>
                 </a:solidFill>
@@ -6052,32 +5806,30 @@
               </a:defRPr>
             </a:pPr>
             <a:r>
-              <a:t>All medical files and diagnostic scans are encrypted locally in the browser with unique 256-bit symmetric keys, 12-byte IVs, and 16-byte auth tags before leaving the device.</a:t>
-            </a:r>
-          </a:p>
-        </p:txBody>
-      </p:sp>
-      <p:sp>
-        <p:nvSpPr>
-          <p:cNvPr id="10" name="Rounded Rectangle 9"/>
+              <a:t>All medical files and diagnostic scans are encrypted locally in the patient's browser with unique 256-bit symmetric keys, 12-byte IVs, and 16-byte authentication tags before leaving the device.</a:t>
+            </a:r>
+          </a:p>
+        </p:txBody>
+      </p:sp>
+      <p:sp>
+        <p:nvSpPr>
+          <p:cNvPr id="11" name="Rectangle 10"/>
           <p:cNvSpPr/>
           <p:nvPr/>
         </p:nvSpPr>
         <p:spPr>
           <a:xfrm>
-            <a:off x="4434840" y="1463040"/>
-            <a:ext cx="3429000" cy="3931920"/>
-          </a:xfrm>
-          <a:prstGeom prst="roundRect">
+            <a:off x="4480560" y="1691640"/>
+            <a:ext cx="3200400" cy="27432"/>
+          </a:xfrm>
+          <a:prstGeom prst="rect">
             <a:avLst/>
           </a:prstGeom>
           <a:solidFill>
-            <a:srgbClr val="EEF2FF"/>
+            <a:srgbClr val="0284C7"/>
           </a:solidFill>
-          <a:ln w="15240">
-            <a:solidFill>
-              <a:srgbClr val="C7D2FE"/>
-            </a:solidFill>
+          <a:ln>
+            <a:noFill/>
           </a:ln>
         </p:spPr>
         <p:style>
@@ -6095,19 +5847,45 @@
           </a:fontRef>
         </p:style>
         <p:txBody>
-          <a:bodyPr rtlCol="0" anchor="ctr" wrap="square"/>
-          <a:lstStyle/>
-          <a:p>
-            <a:pPr algn="ctr">
-              <a:defRPr sz="850" b="1">
-                <a:solidFill>
-                  <a:srgbClr val="00689D"/>
-                </a:solidFill>
-                <a:latin typeface="Calibri"/>
-              </a:defRPr>
-            </a:pPr>
-            <a:r>
-              <a:t>LAYER 02 : DECENTRALIZED PINNING</a:t>
+          <a:bodyPr rtlCol="0" anchor="ctr"/>
+          <a:lstStyle/>
+          <a:p>
+            <a:pPr algn="ctr"/>
+          </a:p>
+        </p:txBody>
+      </p:sp>
+      <p:sp>
+        <p:nvSpPr>
+          <p:cNvPr id="12" name="TextBox 11"/>
+          <p:cNvSpPr txBox="1"/>
+          <p:nvPr/>
+        </p:nvSpPr>
+        <p:spPr>
+          <a:xfrm>
+            <a:off x="4480560" y="1783080"/>
+            <a:ext cx="3200400" cy="3931920"/>
+          </a:xfrm>
+          <a:prstGeom prst="rect">
+            <a:avLst/>
+          </a:prstGeom>
+          <a:noFill/>
+        </p:spPr>
+        <p:txBody>
+          <a:bodyPr wrap="square">
+            <a:spAutoFit/>
+          </a:bodyPr>
+          <a:lstStyle/>
+          <a:p>
+            <a:pPr>
+              <a:defRPr sz="900" b="1">
+                <a:solidFill>
+                  <a:srgbClr val="0369A1"/>
+                </a:solidFill>
+                <a:latin typeface="Calibri"/>
+              </a:defRPr>
+            </a:pPr>
+            <a:r>
+              <a:t>LAYER 02 : DISTRIBUTED PINNING</a:t>
             </a:r>
           </a:p>
           <a:p>
@@ -6141,25 +5919,23 @@
       </p:sp>
       <p:sp>
         <p:nvSpPr>
-          <p:cNvPr id="11" name="Rounded Rectangle 10"/>
+          <p:cNvPr id="13" name="Rectangle 12"/>
           <p:cNvSpPr/>
           <p:nvPr/>
         </p:nvSpPr>
         <p:spPr>
           <a:xfrm>
-            <a:off x="8138160" y="1463040"/>
-            <a:ext cx="3429000" cy="3931920"/>
-          </a:xfrm>
-          <a:prstGeom prst="roundRect">
+            <a:off x="8138160" y="1691640"/>
+            <a:ext cx="3200400" cy="27432"/>
+          </a:xfrm>
+          <a:prstGeom prst="rect">
             <a:avLst/>
           </a:prstGeom>
           <a:solidFill>
-            <a:srgbClr val="F0FDFA"/>
+            <a:srgbClr val="0284C7"/>
           </a:solidFill>
-          <a:ln w="15240">
-            <a:solidFill>
-              <a:srgbClr val="A7F3D0"/>
-            </a:solidFill>
+          <a:ln>
+            <a:noFill/>
           </a:ln>
         </p:spPr>
         <p:style>
@@ -6177,93 +5953,100 @@
           </a:fontRef>
         </p:style>
         <p:txBody>
-          <a:bodyPr rtlCol="0" anchor="ctr" wrap="square"/>
+          <a:bodyPr rtlCol="0" anchor="ctr"/>
+          <a:lstStyle/>
+          <a:p>
+            <a:pPr algn="ctr"/>
+          </a:p>
+        </p:txBody>
+      </p:sp>
+      <p:sp>
+        <p:nvSpPr>
+          <p:cNvPr id="14" name="TextBox 13"/>
+          <p:cNvSpPr txBox="1"/>
+          <p:nvPr/>
+        </p:nvSpPr>
+        <p:spPr>
+          <a:xfrm>
+            <a:off x="8138160" y="1783080"/>
+            <a:ext cx="3200400" cy="3931920"/>
+          </a:xfrm>
+          <a:prstGeom prst="rect">
+            <a:avLst/>
+          </a:prstGeom>
+          <a:noFill/>
+        </p:spPr>
+        <p:txBody>
+          <a:bodyPr wrap="square">
+            <a:spAutoFit/>
+          </a:bodyPr>
+          <a:lstStyle/>
+          <a:p>
+            <a:pPr>
+              <a:defRPr sz="900" b="1">
+                <a:solidFill>
+                  <a:srgbClr val="0369A1"/>
+                </a:solidFill>
+                <a:latin typeface="Calibri"/>
+              </a:defRPr>
+            </a:pPr>
+            <a:r>
+              <a:t>LAYER 03 : ACCESS GOVERNANCE</a:t>
+            </a:r>
+          </a:p>
+          <a:p>
+            <a:pPr>
+              <a:defRPr sz="1600" b="1">
+                <a:solidFill>
+                  <a:srgbClr val="0F172A"/>
+                </a:solidFill>
+                <a:latin typeface="Calibri"/>
+              </a:defRPr>
+            </a:pPr>
+            <a:r>
+              <a:t>Smart Contract RBAC</a:t>
+            </a:r>
+          </a:p>
+          <a:p>
+            <a:br/>
+            <a:pPr>
+              <a:defRPr sz="1150">
+                <a:solidFill>
+                  <a:srgbClr val="334155"/>
+                </a:solidFill>
+                <a:latin typeface="Calibri"/>
+              </a:defRPr>
+            </a:pPr>
+            <a:r>
+              <a:t>Solidity smart contracts enforce isolated patient access matrices (doctorPermissions[p][d]) and emit indexed blockchain events for a verifiable regulatory audit trail.</a:t>
+            </a:r>
+          </a:p>
+        </p:txBody>
+      </p:sp>
+      <p:sp>
+        <p:nvSpPr>
+          <p:cNvPr id="15" name="TextBox 14"/>
+          <p:cNvSpPr txBox="1"/>
+          <p:nvPr/>
+        </p:nvSpPr>
+        <p:spPr>
+          <a:xfrm>
+            <a:off x="822960" y="5623560"/>
+            <a:ext cx="10545775" cy="365760"/>
+          </a:xfrm>
+          <a:prstGeom prst="rect">
+            <a:avLst/>
+          </a:prstGeom>
+          <a:noFill/>
+        </p:spPr>
+        <p:txBody>
+          <a:bodyPr wrap="none">
+            <a:spAutoFit/>
+          </a:bodyPr>
           <a:lstStyle/>
           <a:p>
             <a:pPr algn="ctr">
-              <a:defRPr sz="850" b="1">
-                <a:solidFill>
-                  <a:srgbClr val="4C9F38"/>
-                </a:solidFill>
-                <a:latin typeface="Calibri"/>
-              </a:defRPr>
-            </a:pPr>
-            <a:r>
-              <a:t>LAYER 03 : ACCESS GOVERNANCE</a:t>
-            </a:r>
-          </a:p>
-          <a:p>
-            <a:pPr>
-              <a:defRPr sz="1600" b="1">
-                <a:solidFill>
-                  <a:srgbClr val="0F172A"/>
-                </a:solidFill>
-                <a:latin typeface="Calibri"/>
-              </a:defRPr>
-            </a:pPr>
-            <a:r>
-              <a:t>Smart Contract RBAC</a:t>
-            </a:r>
-          </a:p>
-          <a:p>
-            <a:br/>
-            <a:pPr>
-              <a:defRPr sz="1150">
-                <a:solidFill>
-                  <a:srgbClr val="334155"/>
-                </a:solidFill>
-                <a:latin typeface="Calibri"/>
-              </a:defRPr>
-            </a:pPr>
-            <a:r>
-              <a:t>Solidity contracts enforce isolated patient access matrices (doctorPermissions[p][d]) and emit indexed blockchain events for an immutable regulatory audit trail.</a:t>
-            </a:r>
-          </a:p>
-        </p:txBody>
-      </p:sp>
-      <p:sp>
-        <p:nvSpPr>
-          <p:cNvPr id="12" name="Rounded Rectangle 11"/>
-          <p:cNvSpPr/>
-          <p:nvPr/>
-        </p:nvSpPr>
-        <p:spPr>
-          <a:xfrm>
-            <a:off x="731520" y="5532120"/>
-            <a:ext cx="10725912" cy="502920"/>
-          </a:xfrm>
-          <a:prstGeom prst="roundRect">
-            <a:avLst/>
-          </a:prstGeom>
-          <a:solidFill>
-            <a:srgbClr val="F0F9FF"/>
-          </a:solidFill>
-          <a:ln w="12700">
-            <a:solidFill>
-              <a:srgbClr val="BAE6FD"/>
-            </a:solidFill>
-          </a:ln>
-        </p:spPr>
-        <p:style>
-          <a:lnRef idx="1">
-            <a:schemeClr val="accent1"/>
-          </a:lnRef>
-          <a:fillRef idx="3">
-            <a:schemeClr val="accent1"/>
-          </a:fillRef>
-          <a:effectRef idx="2">
-            <a:schemeClr val="accent1"/>
-          </a:effectRef>
-          <a:fontRef idx="minor">
-            <a:schemeClr val="lt1"/>
-          </a:fontRef>
-        </p:style>
-        <p:txBody>
-          <a:bodyPr rtlCol="0" anchor="ctr"/>
-          <a:lstStyle/>
-          <a:p>
-            <a:pPr algn="ctr">
-              <a:defRPr sz="1050" b="1">
+              <a:defRPr sz="1000" b="1">
                 <a:solidFill>
                   <a:srgbClr val="0369A1"/>
                 </a:solidFill>
@@ -6309,7 +6092,7 @@
             <a:avLst/>
           </a:prstGeom>
           <a:solidFill>
-            <a:srgbClr val="F8FAFC"/>
+            <a:srgbClr val="FCFCFD"/>
           </a:solidFill>
           <a:ln>
             <a:noFill/>
@@ -6345,8 +6128,8 @@
         </p:nvSpPr>
         <p:spPr>
           <a:xfrm>
-            <a:off x="731520" y="365760"/>
-            <a:ext cx="10725912" cy="274320"/>
+            <a:off x="822960" y="411480"/>
+            <a:ext cx="10515600" cy="228600"/>
           </a:xfrm>
           <a:prstGeom prst="rect">
             <a:avLst/>
@@ -6381,8 +6164,8 @@
         </p:nvSpPr>
         <p:spPr>
           <a:xfrm>
-            <a:off x="731520" y="621792"/>
-            <a:ext cx="10725912" cy="457200"/>
+            <a:off x="822960" y="658368"/>
+            <a:ext cx="10515600" cy="640080"/>
           </a:xfrm>
           <a:prstGeom prst="rect">
             <a:avLst/>
@@ -6404,12 +6187,12 @@
               </a:defRPr>
             </a:pPr>
             <a:r>
-              <a:t>Alignment with UN Sustainable Development Goals (SDGs)</a:t>
-            </a:r>
-          </a:p>
-          <a:p>
-            <a:pPr>
-              <a:defRPr sz="1100">
+              <a:t>Alignment with UN Sustainable Development Goals</a:t>
+            </a:r>
+          </a:p>
+          <a:p>
+            <a:pPr>
+              <a:defRPr sz="1150">
                 <a:solidFill>
                   <a:srgbClr val="64748B"/>
                 </a:solidFill>
@@ -6417,7 +6200,7 @@
               </a:defRPr>
             </a:pPr>
             <a:r>
-              <a:t>CareChain directly contributes to 4 major United Nations 2030 Agenda targets.</a:t>
+              <a:t>Direct contributions to four primary United Nations 2030 Agenda targets.</a:t>
             </a:r>
           </a:p>
         </p:txBody>
@@ -6430,8 +6213,8 @@
         </p:nvSpPr>
         <p:spPr>
           <a:xfrm>
-            <a:off x="731520" y="1234440"/>
-            <a:ext cx="10725912" cy="9144"/>
+            <a:off x="822960" y="1371600"/>
+            <a:ext cx="10545775" cy="9144"/>
           </a:xfrm>
           <a:prstGeom prst="rect">
             <a:avLst/>
@@ -6473,8 +6256,8 @@
         </p:nvSpPr>
         <p:spPr>
           <a:xfrm>
-            <a:off x="731520" y="6263640"/>
-            <a:ext cx="10725912" cy="9144"/>
+            <a:off x="822960" y="6217920"/>
+            <a:ext cx="10545775" cy="9144"/>
           </a:xfrm>
           <a:prstGeom prst="rect">
             <a:avLst/>
@@ -6516,7 +6299,7 @@
         </p:nvSpPr>
         <p:spPr>
           <a:xfrm>
-            <a:off x="731520" y="6327648"/>
+            <a:off x="822960" y="6272784"/>
             <a:ext cx="6400800" cy="274320"/>
           </a:xfrm>
           <a:prstGeom prst="rect">
@@ -6552,8 +6335,8 @@
         </p:nvSpPr>
         <p:spPr>
           <a:xfrm>
-            <a:off x="7772400" y="6327648"/>
-            <a:ext cx="3685032" cy="274320"/>
+            <a:off x="7772400" y="6272784"/>
+            <a:ext cx="3596335" cy="274320"/>
           </a:xfrm>
           <a:prstGeom prst="rect">
             <a:avLst/>
@@ -6575,7 +6358,7 @@
               </a:defRPr>
             </a:pPr>
             <a:r>
-              <a:t>BCSE497J Project - I • Fall 2026-27</a:t>
+              <a:t>BCSE497J Project - I • Fall Semester 2026-27</a:t>
             </a:r>
           </a:p>
         </p:txBody>
@@ -6588,19 +6371,17 @@
         </p:nvSpPr>
         <p:spPr>
           <a:xfrm>
-            <a:off x="731520" y="1463040"/>
-            <a:ext cx="5239512" cy="2057400"/>
+            <a:off x="822960" y="1691640"/>
+            <a:ext cx="1005840" cy="320040"/>
           </a:xfrm>
           <a:prstGeom prst="roundRect">
             <a:avLst/>
           </a:prstGeom>
           <a:solidFill>
-            <a:srgbClr val="F0FDF4"/>
+            <a:srgbClr val="4C9F38"/>
           </a:solidFill>
-          <a:ln w="19050">
-            <a:solidFill>
-              <a:srgbClr val="BBF7D0"/>
-            </a:solidFill>
+          <a:ln>
+            <a:noFill/>
           </a:ln>
         </p:spPr>
         <p:style>
@@ -6618,24 +6399,47 @@
           </a:fontRef>
         </p:style>
         <p:txBody>
-          <a:bodyPr rtlCol="0" anchor="ctr" wrap="square"/>
+          <a:bodyPr rtlCol="0" anchor="ctr"/>
           <a:lstStyle/>
           <a:p>
             <a:pPr algn="ctr">
               <a:defRPr sz="1000" b="1">
                 <a:solidFill>
-                  <a:srgbClr val="4C9F38"/>
-                </a:solidFill>
-                <a:latin typeface="Calibri"/>
-              </a:defRPr>
-            </a:pPr>
-            <a:r>
-              <a:t>SDG 3   •   TARGET 3.8</a:t>
-            </a:r>
-          </a:p>
-          <a:p>
-            <a:pPr>
-              <a:defRPr sz="1500" b="1">
+                  <a:srgbClr val="FFFFFF"/>
+                </a:solidFill>
+                <a:latin typeface="Calibri"/>
+              </a:defRPr>
+            </a:pPr>
+            <a:r>
+              <a:t>SDG 3</a:t>
+            </a:r>
+          </a:p>
+        </p:txBody>
+      </p:sp>
+      <p:sp>
+        <p:nvSpPr>
+          <p:cNvPr id="10" name="TextBox 9"/>
+          <p:cNvSpPr txBox="1"/>
+          <p:nvPr/>
+        </p:nvSpPr>
+        <p:spPr>
+          <a:xfrm>
+            <a:off x="1965960" y="1645920"/>
+            <a:ext cx="3931920" cy="1920240"/>
+          </a:xfrm>
+          <a:prstGeom prst="rect">
+            <a:avLst/>
+          </a:prstGeom>
+          <a:noFill/>
+        </p:spPr>
+        <p:txBody>
+          <a:bodyPr wrap="square">
+            <a:spAutoFit/>
+          </a:bodyPr>
+          <a:lstStyle/>
+          <a:p>
+            <a:pPr>
+              <a:defRPr sz="1350" b="1">
                 <a:solidFill>
                   <a:srgbClr val="0F172A"/>
                 </a:solidFill>
@@ -6643,7 +6447,7 @@
               </a:defRPr>
             </a:pPr>
             <a:r>
-              <a:t>Good Health and Well-Being</a:t>
+              <a:t>TARGET 3.8  •  Good Health and Well-Being</a:t>
             </a:r>
           </a:p>
           <a:p>
@@ -6663,25 +6467,23 @@
       </p:sp>
       <p:sp>
         <p:nvSpPr>
-          <p:cNvPr id="10" name="Rounded Rectangle 9"/>
+          <p:cNvPr id="11" name="Rounded Rectangle 10"/>
           <p:cNvSpPr/>
           <p:nvPr/>
         </p:nvSpPr>
         <p:spPr>
           <a:xfrm>
-            <a:off x="6217920" y="1463040"/>
-            <a:ext cx="5239512" cy="2057400"/>
+            <a:off x="6217920" y="1691640"/>
+            <a:ext cx="1005840" cy="320040"/>
           </a:xfrm>
           <a:prstGeom prst="roundRect">
             <a:avLst/>
           </a:prstGeom>
           <a:solidFill>
-            <a:srgbClr val="FFF7ED"/>
+            <a:srgbClr val="FD6925"/>
           </a:solidFill>
-          <a:ln w="19050">
-            <a:solidFill>
-              <a:srgbClr val="FED7AA"/>
-            </a:solidFill>
+          <a:ln>
+            <a:noFill/>
           </a:ln>
         </p:spPr>
         <p:style>
@@ -6699,24 +6501,47 @@
           </a:fontRef>
         </p:style>
         <p:txBody>
-          <a:bodyPr rtlCol="0" anchor="ctr" wrap="square"/>
+          <a:bodyPr rtlCol="0" anchor="ctr"/>
           <a:lstStyle/>
           <a:p>
             <a:pPr algn="ctr">
               <a:defRPr sz="1000" b="1">
                 <a:solidFill>
-                  <a:srgbClr val="FD6925"/>
-                </a:solidFill>
-                <a:latin typeface="Calibri"/>
-              </a:defRPr>
-            </a:pPr>
-            <a:r>
-              <a:t>SDG 9   •   TARGET 9.5</a:t>
-            </a:r>
-          </a:p>
-          <a:p>
-            <a:pPr>
-              <a:defRPr sz="1500" b="1">
+                  <a:srgbClr val="FFFFFF"/>
+                </a:solidFill>
+                <a:latin typeface="Calibri"/>
+              </a:defRPr>
+            </a:pPr>
+            <a:r>
+              <a:t>SDG 9</a:t>
+            </a:r>
+          </a:p>
+        </p:txBody>
+      </p:sp>
+      <p:sp>
+        <p:nvSpPr>
+          <p:cNvPr id="12" name="TextBox 11"/>
+          <p:cNvSpPr txBox="1"/>
+          <p:nvPr/>
+        </p:nvSpPr>
+        <p:spPr>
+          <a:xfrm>
+            <a:off x="7360920" y="1645920"/>
+            <a:ext cx="3931920" cy="1920240"/>
+          </a:xfrm>
+          <a:prstGeom prst="rect">
+            <a:avLst/>
+          </a:prstGeom>
+          <a:noFill/>
+        </p:spPr>
+        <p:txBody>
+          <a:bodyPr wrap="square">
+            <a:spAutoFit/>
+          </a:bodyPr>
+          <a:lstStyle/>
+          <a:p>
+            <a:pPr>
+              <a:defRPr sz="1350" b="1">
                 <a:solidFill>
                   <a:srgbClr val="0F172A"/>
                 </a:solidFill>
@@ -6724,7 +6549,7 @@
               </a:defRPr>
             </a:pPr>
             <a:r>
-              <a:t>Industry, Innovation &amp; Infrastructure</a:t>
+              <a:t>TARGET 9.5  •  Industry, Innovation &amp; Infrastructure</a:t>
             </a:r>
           </a:p>
           <a:p>
@@ -6744,25 +6569,23 @@
       </p:sp>
       <p:sp>
         <p:nvSpPr>
-          <p:cNvPr id="11" name="Rounded Rectangle 10"/>
+          <p:cNvPr id="13" name="Rounded Rectangle 12"/>
           <p:cNvSpPr/>
           <p:nvPr/>
         </p:nvSpPr>
         <p:spPr>
           <a:xfrm>
-            <a:off x="731520" y="3703320"/>
-            <a:ext cx="5239512" cy="2057400"/>
+            <a:off x="822960" y="3840480"/>
+            <a:ext cx="1005840" cy="320040"/>
           </a:xfrm>
           <a:prstGeom prst="roundRect">
             <a:avLst/>
           </a:prstGeom>
           <a:solidFill>
-            <a:srgbClr val="FDF2F8"/>
+            <a:srgbClr val="DD1367"/>
           </a:solidFill>
-          <a:ln w="19050">
-            <a:solidFill>
-              <a:srgbClr val="FBCFE8"/>
-            </a:solidFill>
+          <a:ln>
+            <a:noFill/>
           </a:ln>
         </p:spPr>
         <p:style>
@@ -6780,24 +6603,47 @@
           </a:fontRef>
         </p:style>
         <p:txBody>
-          <a:bodyPr rtlCol="0" anchor="ctr" wrap="square"/>
+          <a:bodyPr rtlCol="0" anchor="ctr"/>
           <a:lstStyle/>
           <a:p>
             <a:pPr algn="ctr">
               <a:defRPr sz="1000" b="1">
                 <a:solidFill>
-                  <a:srgbClr val="DD1367"/>
-                </a:solidFill>
-                <a:latin typeface="Calibri"/>
-              </a:defRPr>
-            </a:pPr>
-            <a:r>
-              <a:t>SDG 10   •   TARGET 10.2</a:t>
-            </a:r>
-          </a:p>
-          <a:p>
-            <a:pPr>
-              <a:defRPr sz="1500" b="1">
+                  <a:srgbClr val="FFFFFF"/>
+                </a:solidFill>
+                <a:latin typeface="Calibri"/>
+              </a:defRPr>
+            </a:pPr>
+            <a:r>
+              <a:t>SDG 10</a:t>
+            </a:r>
+          </a:p>
+        </p:txBody>
+      </p:sp>
+      <p:sp>
+        <p:nvSpPr>
+          <p:cNvPr id="14" name="TextBox 13"/>
+          <p:cNvSpPr txBox="1"/>
+          <p:nvPr/>
+        </p:nvSpPr>
+        <p:spPr>
+          <a:xfrm>
+            <a:off x="1965960" y="3794760"/>
+            <a:ext cx="3931920" cy="1920240"/>
+          </a:xfrm>
+          <a:prstGeom prst="rect">
+            <a:avLst/>
+          </a:prstGeom>
+          <a:noFill/>
+        </p:spPr>
+        <p:txBody>
+          <a:bodyPr wrap="square">
+            <a:spAutoFit/>
+          </a:bodyPr>
+          <a:lstStyle/>
+          <a:p>
+            <a:pPr>
+              <a:defRPr sz="1350" b="1">
                 <a:solidFill>
                   <a:srgbClr val="0F172A"/>
                 </a:solidFill>
@@ -6805,7 +6651,7 @@
               </a:defRPr>
             </a:pPr>
             <a:r>
-              <a:t>Reduced Inequalities</a:t>
+              <a:t>TARGET 10.2  •  Reduced Inequalities</a:t>
             </a:r>
           </a:p>
           <a:p>
@@ -6825,25 +6671,23 @@
       </p:sp>
       <p:sp>
         <p:nvSpPr>
-          <p:cNvPr id="12" name="Rounded Rectangle 11"/>
+          <p:cNvPr id="15" name="Rounded Rectangle 14"/>
           <p:cNvSpPr/>
           <p:nvPr/>
         </p:nvSpPr>
         <p:spPr>
           <a:xfrm>
-            <a:off x="6217920" y="3703320"/>
-            <a:ext cx="5239512" cy="2057400"/>
+            <a:off x="6217920" y="3840480"/>
+            <a:ext cx="1005840" cy="320040"/>
           </a:xfrm>
           <a:prstGeom prst="roundRect">
             <a:avLst/>
           </a:prstGeom>
           <a:solidFill>
-            <a:srgbClr val="F0F9FF"/>
+            <a:srgbClr val="00689D"/>
           </a:solidFill>
-          <a:ln w="19050">
-            <a:solidFill>
-              <a:srgbClr val="BAE6FD"/>
-            </a:solidFill>
+          <a:ln>
+            <a:noFill/>
           </a:ln>
         </p:spPr>
         <p:style>
@@ -6861,24 +6705,47 @@
           </a:fontRef>
         </p:style>
         <p:txBody>
-          <a:bodyPr rtlCol="0" anchor="ctr" wrap="square"/>
+          <a:bodyPr rtlCol="0" anchor="ctr"/>
           <a:lstStyle/>
           <a:p>
             <a:pPr algn="ctr">
               <a:defRPr sz="1000" b="1">
                 <a:solidFill>
-                  <a:srgbClr val="00689D"/>
-                </a:solidFill>
-                <a:latin typeface="Calibri"/>
-              </a:defRPr>
-            </a:pPr>
-            <a:r>
-              <a:t>SDG 16   •   TARGET 16.6</a:t>
-            </a:r>
-          </a:p>
-          <a:p>
-            <a:pPr>
-              <a:defRPr sz="1500" b="1">
+                  <a:srgbClr val="FFFFFF"/>
+                </a:solidFill>
+                <a:latin typeface="Calibri"/>
+              </a:defRPr>
+            </a:pPr>
+            <a:r>
+              <a:t>SDG 16</a:t>
+            </a:r>
+          </a:p>
+        </p:txBody>
+      </p:sp>
+      <p:sp>
+        <p:nvSpPr>
+          <p:cNvPr id="16" name="TextBox 15"/>
+          <p:cNvSpPr txBox="1"/>
+          <p:nvPr/>
+        </p:nvSpPr>
+        <p:spPr>
+          <a:xfrm>
+            <a:off x="7360920" y="3794760"/>
+            <a:ext cx="3931920" cy="1920240"/>
+          </a:xfrm>
+          <a:prstGeom prst="rect">
+            <a:avLst/>
+          </a:prstGeom>
+          <a:noFill/>
+        </p:spPr>
+        <p:txBody>
+          <a:bodyPr wrap="square">
+            <a:spAutoFit/>
+          </a:bodyPr>
+          <a:lstStyle/>
+          <a:p>
+            <a:pPr>
+              <a:defRPr sz="1350" b="1">
                 <a:solidFill>
                   <a:srgbClr val="0F172A"/>
                 </a:solidFill>
@@ -6886,7 +6753,7 @@
               </a:defRPr>
             </a:pPr>
             <a:r>
-              <a:t>Peace, Justice &amp; Strong Institutions</a:t>
+              <a:t>TARGET 16.6  •  Peace, Justice &amp; Strong Institutions</a:t>
             </a:r>
           </a:p>
           <a:p>
@@ -6937,7 +6804,7 @@
             <a:avLst/>
           </a:prstGeom>
           <a:solidFill>
-            <a:srgbClr val="F8FAFC"/>
+            <a:srgbClr val="FCFCFD"/>
           </a:solidFill>
           <a:ln>
             <a:noFill/>
@@ -6973,8 +6840,8 @@
         </p:nvSpPr>
         <p:spPr>
           <a:xfrm>
-            <a:off x="731520" y="365760"/>
-            <a:ext cx="10725912" cy="274320"/>
+            <a:off x="822960" y="411480"/>
+            <a:ext cx="10515600" cy="228600"/>
           </a:xfrm>
           <a:prstGeom prst="rect">
             <a:avLst/>
@@ -6996,7 +6863,7 @@
               </a:defRPr>
             </a:pPr>
             <a:r>
-              <a:t>TECHNICAL MATURITY SCORECARD</a:t>
+              <a:t>TECHNICAL MATURITY</a:t>
             </a:r>
           </a:p>
         </p:txBody>
@@ -7009,8 +6876,8 @@
         </p:nvSpPr>
         <p:spPr>
           <a:xfrm>
-            <a:off x="731520" y="621792"/>
-            <a:ext cx="10725912" cy="457200"/>
+            <a:off x="822960" y="658368"/>
+            <a:ext cx="10515600" cy="640080"/>
           </a:xfrm>
           <a:prstGeom prst="rect">
             <a:avLst/>
@@ -7032,12 +6899,12 @@
               </a:defRPr>
             </a:pPr>
             <a:r>
-              <a:t>Technology Readiness Level (TRL 6 Verified Prototype)</a:t>
-            </a:r>
-          </a:p>
-          <a:p>
-            <a:pPr>
-              <a:defRPr sz="1100">
+              <a:t>Technology Readiness Level (TRL 6 Prototype)</a:t>
+            </a:r>
+          </a:p>
+          <a:p>
+            <a:pPr>
+              <a:defRPr sz="1150">
                 <a:solidFill>
                   <a:srgbClr val="64748B"/>
                 </a:solidFill>
@@ -7045,7 +6912,7 @@
               </a:defRPr>
             </a:pPr>
             <a:r>
-              <a:t>Maturity benchmarking mapped against NASA and Horizon Europe readiness standards.</a:t>
+              <a:t>System maturity assessment benchmarked against NASA and EU Horizon frameworks.</a:t>
             </a:r>
           </a:p>
         </p:txBody>
@@ -7058,8 +6925,8 @@
         </p:nvSpPr>
         <p:spPr>
           <a:xfrm>
-            <a:off x="731520" y="1234440"/>
-            <a:ext cx="10725912" cy="9144"/>
+            <a:off x="822960" y="1371600"/>
+            <a:ext cx="10545775" cy="9144"/>
           </a:xfrm>
           <a:prstGeom prst="rect">
             <a:avLst/>
@@ -7101,8 +6968,8 @@
         </p:nvSpPr>
         <p:spPr>
           <a:xfrm>
-            <a:off x="731520" y="6263640"/>
-            <a:ext cx="10725912" cy="9144"/>
+            <a:off x="822960" y="6217920"/>
+            <a:ext cx="10545775" cy="9144"/>
           </a:xfrm>
           <a:prstGeom prst="rect">
             <a:avLst/>
@@ -7144,7 +7011,7 @@
         </p:nvSpPr>
         <p:spPr>
           <a:xfrm>
-            <a:off x="731520" y="6327648"/>
+            <a:off x="822960" y="6272784"/>
             <a:ext cx="6400800" cy="274320"/>
           </a:xfrm>
           <a:prstGeom prst="rect">
@@ -7180,8 +7047,8 @@
         </p:nvSpPr>
         <p:spPr>
           <a:xfrm>
-            <a:off x="7772400" y="6327648"/>
-            <a:ext cx="3685032" cy="274320"/>
+            <a:off x="7772400" y="6272784"/>
+            <a:ext cx="3596335" cy="274320"/>
           </a:xfrm>
           <a:prstGeom prst="rect">
             <a:avLst/>
@@ -7203,32 +7070,30 @@
               </a:defRPr>
             </a:pPr>
             <a:r>
-              <a:t>BCSE497J Project - I • Fall 2026-27</a:t>
-            </a:r>
-          </a:p>
-        </p:txBody>
-      </p:sp>
-      <p:sp>
-        <p:nvSpPr>
-          <p:cNvPr id="9" name="Rounded Rectangle 8"/>
+              <a:t>BCSE497J Project - I • Fall Semester 2026-27</a:t>
+            </a:r>
+          </a:p>
+        </p:txBody>
+      </p:sp>
+      <p:sp>
+        <p:nvSpPr>
+          <p:cNvPr id="9" name="Rectangle 8"/>
           <p:cNvSpPr/>
           <p:nvPr/>
         </p:nvSpPr>
         <p:spPr>
           <a:xfrm>
-            <a:off x="731520" y="1417320"/>
-            <a:ext cx="2496312" cy="914400"/>
-          </a:xfrm>
-          <a:prstGeom prst="roundRect">
+            <a:off x="822960" y="1645920"/>
+            <a:ext cx="2468880" cy="36576"/>
+          </a:xfrm>
+          <a:prstGeom prst="rect">
             <a:avLst/>
           </a:prstGeom>
           <a:solidFill>
-            <a:srgbClr val="FFFFFF"/>
+            <a:srgbClr val="E2E8F0"/>
           </a:solidFill>
-          <a:ln w="12700">
-            <a:solidFill>
-              <a:srgbClr val="E2E8F0"/>
-            </a:solidFill>
+          <a:ln>
+            <a:noFill/>
           </a:ln>
         </p:spPr>
         <p:style>
@@ -7246,10 +7111,36 @@
           </a:fontRef>
         </p:style>
         <p:txBody>
-          <a:bodyPr rtlCol="0" anchor="ctr" wrap="square"/>
-          <a:lstStyle/>
-          <a:p>
-            <a:pPr algn="ctr">
+          <a:bodyPr rtlCol="0" anchor="ctr"/>
+          <a:lstStyle/>
+          <a:p>
+            <a:pPr algn="ctr"/>
+          </a:p>
+        </p:txBody>
+      </p:sp>
+      <p:sp>
+        <p:nvSpPr>
+          <p:cNvPr id="10" name="TextBox 9"/>
+          <p:cNvSpPr txBox="1"/>
+          <p:nvPr/>
+        </p:nvSpPr>
+        <p:spPr>
+          <a:xfrm>
+            <a:off x="822960" y="1719072"/>
+            <a:ext cx="2468880" cy="685800"/>
+          </a:xfrm>
+          <a:prstGeom prst="rect">
+            <a:avLst/>
+          </a:prstGeom>
+          <a:noFill/>
+        </p:spPr>
+        <p:txBody>
+          <a:bodyPr wrap="square">
+            <a:spAutoFit/>
+          </a:bodyPr>
+          <a:lstStyle/>
+          <a:p>
+            <a:pPr>
               <a:defRPr sz="1100" b="1">
                 <a:solidFill>
                   <a:srgbClr val="64748B"/>
@@ -7262,8 +7153,8 @@
             </a:r>
           </a:p>
           <a:p>
-            <a:pPr algn="ctr">
-              <a:defRPr sz="850">
+            <a:pPr>
+              <a:defRPr sz="900">
                 <a:solidFill>
                   <a:srgbClr val="64748B"/>
                 </a:solidFill>
@@ -7271,32 +7162,30 @@
               </a:defRPr>
             </a:pPr>
             <a:r>
-              <a:t>Basic Research &amp; Concept Formulation</a:t>
-            </a:r>
-          </a:p>
-        </p:txBody>
-      </p:sp>
-      <p:sp>
-        <p:nvSpPr>
-          <p:cNvPr id="10" name="Rounded Rectangle 9"/>
+              <a:t>Concept Formulation</a:t>
+            </a:r>
+          </a:p>
+        </p:txBody>
+      </p:sp>
+      <p:sp>
+        <p:nvSpPr>
+          <p:cNvPr id="11" name="Rectangle 10"/>
           <p:cNvSpPr/>
           <p:nvPr/>
         </p:nvSpPr>
         <p:spPr>
           <a:xfrm>
-            <a:off x="3474720" y="1417320"/>
-            <a:ext cx="2496312" cy="914400"/>
-          </a:xfrm>
-          <a:prstGeom prst="roundRect">
+            <a:off x="3520440" y="1645920"/>
+            <a:ext cx="2468880" cy="36576"/>
+          </a:xfrm>
+          <a:prstGeom prst="rect">
             <a:avLst/>
           </a:prstGeom>
           <a:solidFill>
-            <a:srgbClr val="FFFFFF"/>
+            <a:srgbClr val="E2E8F0"/>
           </a:solidFill>
-          <a:ln w="12700">
-            <a:solidFill>
-              <a:srgbClr val="E2E8F0"/>
-            </a:solidFill>
+          <a:ln>
+            <a:noFill/>
           </a:ln>
         </p:spPr>
         <p:style>
@@ -7314,10 +7203,36 @@
           </a:fontRef>
         </p:style>
         <p:txBody>
-          <a:bodyPr rtlCol="0" anchor="ctr" wrap="square"/>
-          <a:lstStyle/>
-          <a:p>
-            <a:pPr algn="ctr">
+          <a:bodyPr rtlCol="0" anchor="ctr"/>
+          <a:lstStyle/>
+          <a:p>
+            <a:pPr algn="ctr"/>
+          </a:p>
+        </p:txBody>
+      </p:sp>
+      <p:sp>
+        <p:nvSpPr>
+          <p:cNvPr id="12" name="TextBox 11"/>
+          <p:cNvSpPr txBox="1"/>
+          <p:nvPr/>
+        </p:nvSpPr>
+        <p:spPr>
+          <a:xfrm>
+            <a:off x="3520440" y="1719072"/>
+            <a:ext cx="2468880" cy="685800"/>
+          </a:xfrm>
+          <a:prstGeom prst="rect">
+            <a:avLst/>
+          </a:prstGeom>
+          <a:noFill/>
+        </p:spPr>
+        <p:txBody>
+          <a:bodyPr wrap="square">
+            <a:spAutoFit/>
+          </a:bodyPr>
+          <a:lstStyle/>
+          <a:p>
+            <a:pPr>
               <a:defRPr sz="1100" b="1">
                 <a:solidFill>
                   <a:srgbClr val="64748B"/>
@@ -7330,8 +7245,8 @@
             </a:r>
           </a:p>
           <a:p>
-            <a:pPr algn="ctr">
-              <a:defRPr sz="850">
+            <a:pPr>
+              <a:defRPr sz="900">
                 <a:solidFill>
                   <a:srgbClr val="64748B"/>
                 </a:solidFill>
@@ -7339,32 +7254,30 @@
               </a:defRPr>
             </a:pPr>
             <a:r>
-              <a:t>Lab Component Validation</a:t>
-            </a:r>
-          </a:p>
-        </p:txBody>
-      </p:sp>
-      <p:sp>
-        <p:nvSpPr>
-          <p:cNvPr id="11" name="Rounded Rectangle 10"/>
+              <a:t>Lab Component Testing</a:t>
+            </a:r>
+          </a:p>
+        </p:txBody>
+      </p:sp>
+      <p:sp>
+        <p:nvSpPr>
+          <p:cNvPr id="13" name="Rectangle 12"/>
           <p:cNvSpPr/>
           <p:nvPr/>
         </p:nvSpPr>
         <p:spPr>
           <a:xfrm>
-            <a:off x="6217920" y="1417320"/>
-            <a:ext cx="2496312" cy="914400"/>
-          </a:xfrm>
-          <a:prstGeom prst="roundRect">
+            <a:off x="6217920" y="1645920"/>
+            <a:ext cx="2468880" cy="36576"/>
+          </a:xfrm>
+          <a:prstGeom prst="rect">
             <a:avLst/>
           </a:prstGeom>
           <a:solidFill>
-            <a:srgbClr val="F0F9FF"/>
+            <a:srgbClr val="0284C7"/>
           </a:solidFill>
-          <a:ln w="25400">
-            <a:solidFill>
-              <a:srgbClr val="0284C7"/>
-            </a:solidFill>
+          <a:ln>
+            <a:noFill/>
           </a:ln>
         </p:spPr>
         <p:style>
@@ -7382,10 +7295,36 @@
           </a:fontRef>
         </p:style>
         <p:txBody>
-          <a:bodyPr rtlCol="0" anchor="ctr" wrap="square"/>
-          <a:lstStyle/>
-          <a:p>
-            <a:pPr algn="ctr">
+          <a:bodyPr rtlCol="0" anchor="ctr"/>
+          <a:lstStyle/>
+          <a:p>
+            <a:pPr algn="ctr"/>
+          </a:p>
+        </p:txBody>
+      </p:sp>
+      <p:sp>
+        <p:nvSpPr>
+          <p:cNvPr id="14" name="TextBox 13"/>
+          <p:cNvSpPr txBox="1"/>
+          <p:nvPr/>
+        </p:nvSpPr>
+        <p:spPr>
+          <a:xfrm>
+            <a:off x="6217920" y="1719072"/>
+            <a:ext cx="2468880" cy="685800"/>
+          </a:xfrm>
+          <a:prstGeom prst="rect">
+            <a:avLst/>
+          </a:prstGeom>
+          <a:noFill/>
+        </p:spPr>
+        <p:txBody>
+          <a:bodyPr wrap="square">
+            <a:spAutoFit/>
+          </a:bodyPr>
+          <a:lstStyle/>
+          <a:p>
+            <a:pPr>
               <a:defRPr sz="1100" b="1">
                 <a:solidFill>
                   <a:srgbClr val="0369A1"/>
@@ -7398,8 +7337,8 @@
             </a:r>
           </a:p>
           <a:p>
-            <a:pPr algn="ctr">
-              <a:defRPr sz="850">
+            <a:pPr>
+              <a:defRPr sz="900">
                 <a:solidFill>
                   <a:srgbClr val="0F172A"/>
                 </a:solidFill>
@@ -7414,25 +7353,23 @@
       </p:sp>
       <p:sp>
         <p:nvSpPr>
-          <p:cNvPr id="12" name="Rounded Rectangle 11"/>
+          <p:cNvPr id="15" name="Rectangle 14"/>
           <p:cNvSpPr/>
           <p:nvPr/>
         </p:nvSpPr>
         <p:spPr>
           <a:xfrm>
-            <a:off x="8961120" y="1417320"/>
-            <a:ext cx="2496312" cy="914400"/>
-          </a:xfrm>
-          <a:prstGeom prst="roundRect">
+            <a:off x="8915400" y="1645920"/>
+            <a:ext cx="2468880" cy="36576"/>
+          </a:xfrm>
+          <a:prstGeom prst="rect">
             <a:avLst/>
           </a:prstGeom>
           <a:solidFill>
-            <a:srgbClr val="FFFFFF"/>
+            <a:srgbClr val="E2E8F0"/>
           </a:solidFill>
-          <a:ln w="12700">
-            <a:solidFill>
-              <a:srgbClr val="E2E8F0"/>
-            </a:solidFill>
+          <a:ln>
+            <a:noFill/>
           </a:ln>
         </p:spPr>
         <p:style>
@@ -7450,10 +7387,36 @@
           </a:fontRef>
         </p:style>
         <p:txBody>
-          <a:bodyPr rtlCol="0" anchor="ctr" wrap="square"/>
-          <a:lstStyle/>
-          <a:p>
-            <a:pPr algn="ctr">
+          <a:bodyPr rtlCol="0" anchor="ctr"/>
+          <a:lstStyle/>
+          <a:p>
+            <a:pPr algn="ctr"/>
+          </a:p>
+        </p:txBody>
+      </p:sp>
+      <p:sp>
+        <p:nvSpPr>
+          <p:cNvPr id="16" name="TextBox 15"/>
+          <p:cNvSpPr txBox="1"/>
+          <p:nvPr/>
+        </p:nvSpPr>
+        <p:spPr>
+          <a:xfrm>
+            <a:off x="8915400" y="1719072"/>
+            <a:ext cx="2468880" cy="685800"/>
+          </a:xfrm>
+          <a:prstGeom prst="rect">
+            <a:avLst/>
+          </a:prstGeom>
+          <a:noFill/>
+        </p:spPr>
+        <p:txBody>
+          <a:bodyPr wrap="square">
+            <a:spAutoFit/>
+          </a:bodyPr>
+          <a:lstStyle/>
+          <a:p>
+            <a:pPr>
               <a:defRPr sz="1100" b="1">
                 <a:solidFill>
                   <a:srgbClr val="64748B"/>
@@ -7466,8 +7429,8 @@
             </a:r>
           </a:p>
           <a:p>
-            <a:pPr algn="ctr">
-              <a:defRPr sz="850">
+            <a:pPr>
+              <a:defRPr sz="900">
                 <a:solidFill>
                   <a:srgbClr val="64748B"/>
                 </a:solidFill>
@@ -7475,67 +7438,49 @@
               </a:defRPr>
             </a:pPr>
             <a:r>
-              <a:t>Clinical Trials &amp; Mainnet Deployment</a:t>
-            </a:r>
-          </a:p>
-        </p:txBody>
-      </p:sp>
-      <p:sp>
-        <p:nvSpPr>
-          <p:cNvPr id="13" name="Rounded Rectangle 12"/>
-          <p:cNvSpPr/>
-          <p:nvPr/>
-        </p:nvSpPr>
-        <p:spPr>
-          <a:xfrm>
-            <a:off x="731520" y="2468880"/>
-            <a:ext cx="5239512" cy="3566160"/>
-          </a:xfrm>
-          <a:prstGeom prst="roundRect">
-            <a:avLst/>
-          </a:prstGeom>
-          <a:solidFill>
-            <a:srgbClr val="F0FDFA"/>
-          </a:solidFill>
-          <a:ln w="19050">
-            <a:solidFill>
-              <a:srgbClr val="A7F3D0"/>
-            </a:solidFill>
-          </a:ln>
-        </p:spPr>
-        <p:style>
-          <a:lnRef idx="1">
-            <a:schemeClr val="accent1"/>
-          </a:lnRef>
-          <a:fillRef idx="3">
-            <a:schemeClr val="accent1"/>
-          </a:fillRef>
-          <a:effectRef idx="2">
-            <a:schemeClr val="accent1"/>
-          </a:effectRef>
-          <a:fontRef idx="minor">
-            <a:schemeClr val="lt1"/>
-          </a:fontRef>
-        </p:style>
-        <p:txBody>
-          <a:bodyPr rtlCol="0" anchor="ctr" wrap="square"/>
-          <a:lstStyle/>
-          <a:p>
-            <a:pPr algn="ctr">
-              <a:defRPr sz="1150" b="1">
-                <a:solidFill>
-                  <a:srgbClr val="4C9F38"/>
-                </a:solidFill>
-                <a:latin typeface="Calibri"/>
-              </a:defRPr>
-            </a:pPr>
-            <a:r>
-              <a:t>✓ TRL 6 VERIFIED DELIVERABLES</a:t>
-            </a:r>
-          </a:p>
-          <a:p>
-            <a:pPr>
-              <a:defRPr sz="1050">
+              <a:t>Clinical Trials &amp; Mainnet</a:t>
+            </a:r>
+          </a:p>
+        </p:txBody>
+      </p:sp>
+      <p:sp>
+        <p:nvSpPr>
+          <p:cNvPr id="17" name="TextBox 16"/>
+          <p:cNvSpPr txBox="1"/>
+          <p:nvPr/>
+        </p:nvSpPr>
+        <p:spPr>
+          <a:xfrm>
+            <a:off x="822960" y="2606040"/>
+            <a:ext cx="5029200" cy="3474720"/>
+          </a:xfrm>
+          <a:prstGeom prst="rect">
+            <a:avLst/>
+          </a:prstGeom>
+          <a:noFill/>
+        </p:spPr>
+        <p:txBody>
+          <a:bodyPr wrap="square">
+            <a:spAutoFit/>
+          </a:bodyPr>
+          <a:lstStyle/>
+          <a:p>
+            <a:pPr>
+              <a:defRPr sz="1300" b="1">
+                <a:solidFill>
+                  <a:srgbClr val="059669"/>
+                </a:solidFill>
+                <a:latin typeface="Calibri"/>
+              </a:defRPr>
+            </a:pPr>
+            <a:r>
+              <a:t>✓ TRL 6 Verified Deliverables (Today)</a:t>
+            </a:r>
+          </a:p>
+          <a:p>
+            <a:br/>
+            <a:pPr>
+              <a:defRPr sz="1100">
                 <a:solidFill>
                   <a:srgbClr val="334155"/>
                 </a:solidFill>
@@ -7548,64 +7493,45 @@
             <a:br/>
             <a:br/>
             <a:r>
-              <a:t>• Cryptographic Pipeline: Client-side AES-256-GCM buffer encryption and IPFS pinning via Pinata live.</a:t>
+              <a:t>• Cryptographic Gateway: Client-side AES-256-GCM symmetric buffer encryption and IPFS pinning via Pinata live.</a:t>
             </a:r>
             <a:br/>
             <a:br/>
             <a:r>
-              <a:t>• Role Portals: Production Web3 UI for Patients, Doctors, and Hospital Governance with MetaMask wallet syncing.</a:t>
+              <a:t>• Role Portals: Production Web3 UI for Patients, Doctors, and Hospital Governance with MetaMask wallet integration.</a:t>
             </a:r>
             <a:br/>
             <a:br/>
             <a:r>
-              <a:t>• Enterprise Scaffolding: Monorepo with CI/CD automation, Docker orchestration, and RBAC middleware.</a:t>
-            </a:r>
-          </a:p>
-        </p:txBody>
-      </p:sp>
-      <p:sp>
-        <p:nvSpPr>
-          <p:cNvPr id="14" name="Rounded Rectangle 13"/>
-          <p:cNvSpPr/>
-          <p:nvPr/>
-        </p:nvSpPr>
-        <p:spPr>
-          <a:xfrm>
-            <a:off x="6217920" y="2468880"/>
-            <a:ext cx="5239512" cy="3566160"/>
-          </a:xfrm>
-          <a:prstGeom prst="roundRect">
-            <a:avLst/>
-          </a:prstGeom>
-          <a:solidFill>
-            <a:srgbClr val="F0F9FF"/>
-          </a:solidFill>
-          <a:ln w="19050">
-            <a:solidFill>
-              <a:srgbClr val="BAE6FD"/>
-            </a:solidFill>
-          </a:ln>
-        </p:spPr>
-        <p:style>
-          <a:lnRef idx="1">
-            <a:schemeClr val="accent1"/>
-          </a:lnRef>
-          <a:fillRef idx="3">
-            <a:schemeClr val="accent1"/>
-          </a:fillRef>
-          <a:effectRef idx="2">
-            <a:schemeClr val="accent1"/>
-          </a:effectRef>
-          <a:fontRef idx="minor">
-            <a:schemeClr val="lt1"/>
-          </a:fontRef>
-        </p:style>
-        <p:txBody>
-          <a:bodyPr rtlCol="0" anchor="ctr" wrap="square"/>
-          <a:lstStyle/>
-          <a:p>
-            <a:pPr algn="ctr">
-              <a:defRPr sz="1150" b="1">
+              <a:t>• Enterprise Architecture: Monorepo with CI/CD automation, Docker orchestration, and RBAC middleware.</a:t>
+            </a:r>
+          </a:p>
+        </p:txBody>
+      </p:sp>
+      <p:sp>
+        <p:nvSpPr>
+          <p:cNvPr id="18" name="TextBox 17"/>
+          <p:cNvSpPr txBox="1"/>
+          <p:nvPr/>
+        </p:nvSpPr>
+        <p:spPr>
+          <a:xfrm>
+            <a:off x="6217920" y="2606040"/>
+            <a:ext cx="5120640" cy="3474720"/>
+          </a:xfrm>
+          <a:prstGeom prst="rect">
+            <a:avLst/>
+          </a:prstGeom>
+          <a:noFill/>
+        </p:spPr>
+        <p:txBody>
+          <a:bodyPr wrap="square">
+            <a:spAutoFit/>
+          </a:bodyPr>
+          <a:lstStyle/>
+          <a:p>
+            <a:pPr>
+              <a:defRPr sz="1300" b="1">
                 <a:solidFill>
                   <a:srgbClr val="0369A1"/>
                 </a:solidFill>
@@ -7613,12 +7539,13 @@
               </a:defRPr>
             </a:pPr>
             <a:r>
-              <a:t>➔ ROADMAP TO TRL 9 (COMMERCIAL CLINICAL)</a:t>
-            </a:r>
-          </a:p>
-          <a:p>
-            <a:pPr>
-              <a:defRPr sz="1050">
+              <a:t>➔ Roadmap to TRL 9 (Commercial Deployment)</a:t>
+            </a:r>
+          </a:p>
+          <a:p>
+            <a:br/>
+            <a:pPr>
+              <a:defRPr sz="1100">
                 <a:solidFill>
                   <a:srgbClr val="334155"/>
                 </a:solidFill>
@@ -7626,17 +7553,17 @@
               </a:defRPr>
             </a:pPr>
             <a:r>
-              <a:t>• TRL 7 (Operational Sandbox): Multi-hospital sandbox testing with HL7 FHIR structured data and ERC-4337 Passkey relayers.</a:t>
+              <a:t>• TRL 7 (Operational Sandbox): Multi-hospital sandbox testing with HL7 FHIR structured data schemas and ERC-4337 Passkeys.</a:t>
             </a:r>
             <a:br/>
             <a:br/>
             <a:r>
-              <a:t>• TRL 8 (System Qualification): Formal smart contract verification by CertiK/OpenZeppelin and HIPAA/GDPR certification.</a:t>
+              <a:t>• TRL 8 (System Qualification): Formal smart contract security audit (CertiK/OpenZeppelin) and HIPAA/GDPR commercial certification.</a:t>
             </a:r>
             <a:br/>
             <a:br/>
             <a:r>
-              <a:t>• TRL 9 (Full Clinical Deployment): Live production mainnet rollout across participating hospital networks and insurance nodes.</a:t>
+              <a:t>• TRL 9 (Full Clinical Deployment): Live production mainnet deployment across partner hospital networks and insurance nodes.</a:t>
             </a:r>
           </a:p>
         </p:txBody>
@@ -7674,7 +7601,7 @@
             <a:avLst/>
           </a:prstGeom>
           <a:solidFill>
-            <a:srgbClr val="F8FAFC"/>
+            <a:srgbClr val="FCFCFD"/>
           </a:solidFill>
           <a:ln>
             <a:noFill/>
@@ -7710,8 +7637,8 @@
         </p:nvSpPr>
         <p:spPr>
           <a:xfrm>
-            <a:off x="731520" y="365760"/>
-            <a:ext cx="10725912" cy="274320"/>
+            <a:off x="822960" y="411480"/>
+            <a:ext cx="10515600" cy="228600"/>
           </a:xfrm>
           <a:prstGeom prst="rect">
             <a:avLst/>
@@ -7746,8 +7673,8 @@
         </p:nvSpPr>
         <p:spPr>
           <a:xfrm>
-            <a:off x="731520" y="621792"/>
-            <a:ext cx="10725912" cy="457200"/>
+            <a:off x="822960" y="658368"/>
+            <a:ext cx="10515600" cy="640080"/>
           </a:xfrm>
           <a:prstGeom prst="rect">
             <a:avLst/>
@@ -7774,7 +7701,7 @@
           </a:p>
           <a:p>
             <a:pPr>
-              <a:defRPr sz="1100">
+              <a:defRPr sz="1150">
                 <a:solidFill>
                   <a:srgbClr val="64748B"/>
                 </a:solidFill>
@@ -7782,7 +7709,7 @@
               </a:defRPr>
             </a:pPr>
             <a:r>
-              <a:t>Key cryptographic and architectural features solving real-world healthcare challenges.</a:t>
+              <a:t>Key cryptographic and architectural features solving real-world clinical challenges.</a:t>
             </a:r>
           </a:p>
         </p:txBody>
@@ -7795,8 +7722,8 @@
         </p:nvSpPr>
         <p:spPr>
           <a:xfrm>
-            <a:off x="731520" y="1234440"/>
-            <a:ext cx="10725912" cy="9144"/>
+            <a:off x="822960" y="1371600"/>
+            <a:ext cx="10545775" cy="9144"/>
           </a:xfrm>
           <a:prstGeom prst="rect">
             <a:avLst/>
@@ -7838,8 +7765,8 @@
         </p:nvSpPr>
         <p:spPr>
           <a:xfrm>
-            <a:off x="731520" y="6263640"/>
-            <a:ext cx="10725912" cy="9144"/>
+            <a:off x="822960" y="6217920"/>
+            <a:ext cx="10545775" cy="9144"/>
           </a:xfrm>
           <a:prstGeom prst="rect">
             <a:avLst/>
@@ -7881,7 +7808,7 @@
         </p:nvSpPr>
         <p:spPr>
           <a:xfrm>
-            <a:off x="731520" y="6327648"/>
+            <a:off x="822960" y="6272784"/>
             <a:ext cx="6400800" cy="274320"/>
           </a:xfrm>
           <a:prstGeom prst="rect">
@@ -7917,8 +7844,8 @@
         </p:nvSpPr>
         <p:spPr>
           <a:xfrm>
-            <a:off x="7772400" y="6327648"/>
-            <a:ext cx="3685032" cy="274320"/>
+            <a:off x="7772400" y="6272784"/>
+            <a:ext cx="3596335" cy="274320"/>
           </a:xfrm>
           <a:prstGeom prst="rect">
             <a:avLst/>
@@ -7940,32 +7867,30 @@
               </a:defRPr>
             </a:pPr>
             <a:r>
-              <a:t>BCSE497J Project - I • Fall 2026-27</a:t>
-            </a:r>
-          </a:p>
-        </p:txBody>
-      </p:sp>
-      <p:sp>
-        <p:nvSpPr>
-          <p:cNvPr id="9" name="Rounded Rectangle 8"/>
+              <a:t>BCSE497J Project - I • Fall Semester 2026-27</a:t>
+            </a:r>
+          </a:p>
+        </p:txBody>
+      </p:sp>
+      <p:sp>
+        <p:nvSpPr>
+          <p:cNvPr id="9" name="Rectangle 8"/>
           <p:cNvSpPr/>
           <p:nvPr/>
         </p:nvSpPr>
         <p:spPr>
           <a:xfrm>
-            <a:off x="731520" y="1463040"/>
-            <a:ext cx="5239512" cy="2057400"/>
-          </a:xfrm>
-          <a:prstGeom prst="roundRect">
+            <a:off x="822960" y="1691640"/>
+            <a:ext cx="36576" cy="1645920"/>
+          </a:xfrm>
+          <a:prstGeom prst="rect">
             <a:avLst/>
           </a:prstGeom>
           <a:solidFill>
-            <a:srgbClr val="FFF1F2"/>
+            <a:srgbClr val="0284C7"/>
           </a:solidFill>
-          <a:ln w="19050">
-            <a:solidFill>
-              <a:srgbClr val="FECDD3"/>
-            </a:solidFill>
+          <a:ln>
+            <a:noFill/>
           </a:ln>
         </p:spPr>
         <p:style>
@@ -7983,11 +7908,37 @@
           </a:fontRef>
         </p:style>
         <p:txBody>
-          <a:bodyPr rtlCol="0" anchor="ctr" wrap="square"/>
-          <a:lstStyle/>
-          <a:p>
-            <a:pPr algn="ctr">
-              <a:defRPr sz="1450" b="1">
+          <a:bodyPr rtlCol="0" anchor="ctr"/>
+          <a:lstStyle/>
+          <a:p>
+            <a:pPr algn="ctr"/>
+          </a:p>
+        </p:txBody>
+      </p:sp>
+      <p:sp>
+        <p:nvSpPr>
+          <p:cNvPr id="10" name="TextBox 9"/>
+          <p:cNvSpPr txBox="1"/>
+          <p:nvPr/>
+        </p:nvSpPr>
+        <p:spPr>
+          <a:xfrm>
+            <a:off x="987552" y="1645920"/>
+            <a:ext cx="4937760" cy="1737360"/>
+          </a:xfrm>
+          <a:prstGeom prst="rect">
+            <a:avLst/>
+          </a:prstGeom>
+          <a:noFill/>
+        </p:spPr>
+        <p:txBody>
+          <a:bodyPr wrap="square">
+            <a:spAutoFit/>
+          </a:bodyPr>
+          <a:lstStyle/>
+          <a:p>
+            <a:pPr>
+              <a:defRPr sz="1400" b="1">
                 <a:solidFill>
                   <a:srgbClr val="0F172A"/>
                 </a:solidFill>
@@ -8008,32 +7959,30 @@
               </a:defRPr>
             </a:pPr>
             <a:r>
-              <a:t>Solves the unconscious ER patient dilemma: Verified physicians trigger time-delayed cryptographic challenges or multi-guardian signatures backed by on-chain audit penalties.</a:t>
-            </a:r>
-          </a:p>
-        </p:txBody>
-      </p:sp>
-      <p:sp>
-        <p:nvSpPr>
-          <p:cNvPr id="10" name="Rounded Rectangle 9"/>
+              <a:t>Solves the unconscious ER patient dilemma: Verified trauma physicians trigger time-delayed cryptographic challenges or multi-guardian signatures backed by on-chain audit penalties.</a:t>
+            </a:r>
+          </a:p>
+        </p:txBody>
+      </p:sp>
+      <p:sp>
+        <p:nvSpPr>
+          <p:cNvPr id="11" name="Rectangle 10"/>
           <p:cNvSpPr/>
           <p:nvPr/>
         </p:nvSpPr>
         <p:spPr>
           <a:xfrm>
-            <a:off x="6217920" y="1463040"/>
-            <a:ext cx="5239512" cy="2057400"/>
-          </a:xfrm>
-          <a:prstGeom prst="roundRect">
+            <a:off x="6217920" y="1691640"/>
+            <a:ext cx="36576" cy="1645920"/>
+          </a:xfrm>
+          <a:prstGeom prst="rect">
             <a:avLst/>
           </a:prstGeom>
           <a:solidFill>
-            <a:srgbClr val="EEF2FF"/>
+            <a:srgbClr val="0284C7"/>
           </a:solidFill>
-          <a:ln w="19050">
-            <a:solidFill>
-              <a:srgbClr val="C7D2FE"/>
-            </a:solidFill>
+          <a:ln>
+            <a:noFill/>
           </a:ln>
         </p:spPr>
         <p:style>
@@ -8051,11 +8000,37 @@
           </a:fontRef>
         </p:style>
         <p:txBody>
-          <a:bodyPr rtlCol="0" anchor="ctr" wrap="square"/>
-          <a:lstStyle/>
-          <a:p>
-            <a:pPr algn="ctr">
-              <a:defRPr sz="1450" b="1">
+          <a:bodyPr rtlCol="0" anchor="ctr"/>
+          <a:lstStyle/>
+          <a:p>
+            <a:pPr algn="ctr"/>
+          </a:p>
+        </p:txBody>
+      </p:sp>
+      <p:sp>
+        <p:nvSpPr>
+          <p:cNvPr id="12" name="TextBox 11"/>
+          <p:cNvSpPr txBox="1"/>
+          <p:nvPr/>
+        </p:nvSpPr>
+        <p:spPr>
+          <a:xfrm>
+            <a:off x="6382512" y="1645920"/>
+            <a:ext cx="4937760" cy="1737360"/>
+          </a:xfrm>
+          <a:prstGeom prst="rect">
+            <a:avLst/>
+          </a:prstGeom>
+          <a:noFill/>
+        </p:spPr>
+        <p:txBody>
+          <a:bodyPr wrap="square">
+            <a:spAutoFit/>
+          </a:bodyPr>
+          <a:lstStyle/>
+          <a:p>
+            <a:pPr>
+              <a:defRPr sz="1400" b="1">
                 <a:solidFill>
                   <a:srgbClr val="0F172A"/>
                 </a:solidFill>
@@ -8083,25 +8058,23 @@
       </p:sp>
       <p:sp>
         <p:nvSpPr>
-          <p:cNvPr id="11" name="Rounded Rectangle 10"/>
+          <p:cNvPr id="13" name="Rectangle 12"/>
           <p:cNvSpPr/>
           <p:nvPr/>
         </p:nvSpPr>
         <p:spPr>
           <a:xfrm>
-            <a:off x="731520" y="3703320"/>
-            <a:ext cx="5239512" cy="2057400"/>
-          </a:xfrm>
-          <a:prstGeom prst="roundRect">
+            <a:off x="822960" y="3840480"/>
+            <a:ext cx="36576" cy="1645920"/>
+          </a:xfrm>
+          <a:prstGeom prst="rect">
             <a:avLst/>
           </a:prstGeom>
           <a:solidFill>
-            <a:srgbClr val="F0F9FF"/>
+            <a:srgbClr val="0284C7"/>
           </a:solidFill>
-          <a:ln w="19050">
-            <a:solidFill>
-              <a:srgbClr val="BAE6FD"/>
-            </a:solidFill>
+          <a:ln>
+            <a:noFill/>
           </a:ln>
         </p:spPr>
         <p:style>
@@ -8119,11 +8092,37 @@
           </a:fontRef>
         </p:style>
         <p:txBody>
-          <a:bodyPr rtlCol="0" anchor="ctr" wrap="square"/>
-          <a:lstStyle/>
-          <a:p>
-            <a:pPr algn="ctr">
-              <a:defRPr sz="1450" b="1">
+          <a:bodyPr rtlCol="0" anchor="ctr"/>
+          <a:lstStyle/>
+          <a:p>
+            <a:pPr algn="ctr"/>
+          </a:p>
+        </p:txBody>
+      </p:sp>
+      <p:sp>
+        <p:nvSpPr>
+          <p:cNvPr id="14" name="TextBox 13"/>
+          <p:cNvSpPr txBox="1"/>
+          <p:nvPr/>
+        </p:nvSpPr>
+        <p:spPr>
+          <a:xfrm>
+            <a:off x="987552" y="3794760"/>
+            <a:ext cx="4937760" cy="1737360"/>
+          </a:xfrm>
+          <a:prstGeom prst="rect">
+            <a:avLst/>
+          </a:prstGeom>
+          <a:noFill/>
+        </p:spPr>
+        <p:txBody>
+          <a:bodyPr wrap="square">
+            <a:spAutoFit/>
+          </a:bodyPr>
+          <a:lstStyle/>
+          <a:p>
+            <a:pPr>
+              <a:defRPr sz="1400" b="1">
                 <a:solidFill>
                   <a:srgbClr val="0F172A"/>
                 </a:solidFill>
@@ -8144,32 +8143,30 @@
               </a:defRPr>
             </a:pPr>
             <a:r>
-              <a:t>Replaces seed phrases and gas tokens with WebAuthn Passkeys (TouchID / FaceID), sponsored by hospital Paymaster relayers.</a:t>
-            </a:r>
-          </a:p>
-        </p:txBody>
-      </p:sp>
-      <p:sp>
-        <p:nvSpPr>
-          <p:cNvPr id="12" name="Rounded Rectangle 11"/>
+              <a:t>Replaces complex seed phrases and gas tokens with WebAuthn Passkeys (TouchID / FaceID), sponsored by hospital Paymaster relayers.</a:t>
+            </a:r>
+          </a:p>
+        </p:txBody>
+      </p:sp>
+      <p:sp>
+        <p:nvSpPr>
+          <p:cNvPr id="15" name="Rectangle 14"/>
           <p:cNvSpPr/>
           <p:nvPr/>
         </p:nvSpPr>
         <p:spPr>
           <a:xfrm>
-            <a:off x="6217920" y="3703320"/>
-            <a:ext cx="5239512" cy="2057400"/>
-          </a:xfrm>
-          <a:prstGeom prst="roundRect">
+            <a:off x="6217920" y="3840480"/>
+            <a:ext cx="36576" cy="1645920"/>
+          </a:xfrm>
+          <a:prstGeom prst="rect">
             <a:avLst/>
           </a:prstGeom>
           <a:solidFill>
-            <a:srgbClr val="F0FDFA"/>
+            <a:srgbClr val="0284C7"/>
           </a:solidFill>
-          <a:ln w="19050">
-            <a:solidFill>
-              <a:srgbClr val="A7F3D0"/>
-            </a:solidFill>
+          <a:ln>
+            <a:noFill/>
           </a:ln>
         </p:spPr>
         <p:style>
@@ -8187,11 +8184,37 @@
           </a:fontRef>
         </p:style>
         <p:txBody>
-          <a:bodyPr rtlCol="0" anchor="ctr" wrap="square"/>
-          <a:lstStyle/>
-          <a:p>
-            <a:pPr algn="ctr">
-              <a:defRPr sz="1450" b="1">
+          <a:bodyPr rtlCol="0" anchor="ctr"/>
+          <a:lstStyle/>
+          <a:p>
+            <a:pPr algn="ctr"/>
+          </a:p>
+        </p:txBody>
+      </p:sp>
+      <p:sp>
+        <p:nvSpPr>
+          <p:cNvPr id="16" name="TextBox 15"/>
+          <p:cNvSpPr txBox="1"/>
+          <p:nvPr/>
+        </p:nvSpPr>
+        <p:spPr>
+          <a:xfrm>
+            <a:off x="6382512" y="3794760"/>
+            <a:ext cx="4937760" cy="1737360"/>
+          </a:xfrm>
+          <a:prstGeom prst="rect">
+            <a:avLst/>
+          </a:prstGeom>
+          <a:noFill/>
+        </p:spPr>
+        <p:txBody>
+          <a:bodyPr wrap="square">
+            <a:spAutoFit/>
+          </a:bodyPr>
+          <a:lstStyle/>
+          <a:p>
+            <a:pPr>
+              <a:defRPr sz="1400" b="1">
                 <a:solidFill>
                   <a:srgbClr val="0F172A"/>
                 </a:solidFill>
@@ -8250,7 +8273,7 @@
             <a:avLst/>
           </a:prstGeom>
           <a:solidFill>
-            <a:srgbClr val="F8FAFC"/>
+            <a:srgbClr val="FCFCFD"/>
           </a:solidFill>
           <a:ln>
             <a:noFill/>
@@ -8286,8 +8309,8 @@
         </p:nvSpPr>
         <p:spPr>
           <a:xfrm>
-            <a:off x="731520" y="365760"/>
-            <a:ext cx="10725912" cy="274320"/>
+            <a:off x="822960" y="411480"/>
+            <a:ext cx="10515600" cy="228600"/>
           </a:xfrm>
           <a:prstGeom prst="rect">
             <a:avLst/>
@@ -8309,7 +8332,7 @@
               </a:defRPr>
             </a:pPr>
             <a:r>
-              <a:t>VALUE PROPOSITION</a:t>
+              <a:t>VALUE CREATION</a:t>
             </a:r>
           </a:p>
         </p:txBody>
@@ -8322,8 +8345,8 @@
         </p:nvSpPr>
         <p:spPr>
           <a:xfrm>
-            <a:off x="731520" y="621792"/>
-            <a:ext cx="10725912" cy="457200"/>
+            <a:off x="822960" y="658368"/>
+            <a:ext cx="10515600" cy="640080"/>
           </a:xfrm>
           <a:prstGeom prst="rect">
             <a:avLst/>
@@ -8345,12 +8368,12 @@
               </a:defRPr>
             </a:pPr>
             <a:r>
-              <a:t>Multi-Sided Healthcare Economic Proposition</a:t>
-            </a:r>
-          </a:p>
-          <a:p>
-            <a:pPr>
-              <a:defRPr sz="1100">
+              <a:t>Multi-Sided Healthcare Economic Impact</a:t>
+            </a:r>
+          </a:p>
+          <a:p>
+            <a:pPr>
+              <a:defRPr sz="1150">
                 <a:solidFill>
                   <a:srgbClr val="64748B"/>
                 </a:solidFill>
@@ -8371,8 +8394,8 @@
         </p:nvSpPr>
         <p:spPr>
           <a:xfrm>
-            <a:off x="731520" y="1234440"/>
-            <a:ext cx="10725912" cy="9144"/>
+            <a:off x="822960" y="1371600"/>
+            <a:ext cx="10545775" cy="9144"/>
           </a:xfrm>
           <a:prstGeom prst="rect">
             <a:avLst/>
@@ -8414,8 +8437,8 @@
         </p:nvSpPr>
         <p:spPr>
           <a:xfrm>
-            <a:off x="731520" y="6263640"/>
-            <a:ext cx="10725912" cy="9144"/>
+            <a:off x="822960" y="6217920"/>
+            <a:ext cx="10545775" cy="9144"/>
           </a:xfrm>
           <a:prstGeom prst="rect">
             <a:avLst/>
@@ -8457,7 +8480,7 @@
         </p:nvSpPr>
         <p:spPr>
           <a:xfrm>
-            <a:off x="731520" y="6327648"/>
+            <a:off x="822960" y="6272784"/>
             <a:ext cx="6400800" cy="274320"/>
           </a:xfrm>
           <a:prstGeom prst="rect">
@@ -8493,8 +8516,8 @@
         </p:nvSpPr>
         <p:spPr>
           <a:xfrm>
-            <a:off x="7772400" y="6327648"/>
-            <a:ext cx="3685032" cy="274320"/>
+            <a:off x="7772400" y="6272784"/>
+            <a:ext cx="3596335" cy="274320"/>
           </a:xfrm>
           <a:prstGeom prst="rect">
             <a:avLst/>
@@ -8516,32 +8539,30 @@
               </a:defRPr>
             </a:pPr>
             <a:r>
-              <a:t>BCSE497J Project - I • Fall 2026-27</a:t>
-            </a:r>
-          </a:p>
-        </p:txBody>
-      </p:sp>
-      <p:sp>
-        <p:nvSpPr>
-          <p:cNvPr id="9" name="Rounded Rectangle 8"/>
+              <a:t>BCSE497J Project - I • Fall Semester 2026-27</a:t>
+            </a:r>
+          </a:p>
+        </p:txBody>
+      </p:sp>
+      <p:sp>
+        <p:nvSpPr>
+          <p:cNvPr id="9" name="Rectangle 8"/>
           <p:cNvSpPr/>
           <p:nvPr/>
         </p:nvSpPr>
         <p:spPr>
           <a:xfrm>
-            <a:off x="731520" y="1463040"/>
-            <a:ext cx="2496312" cy="4480560"/>
-          </a:xfrm>
-          <a:prstGeom prst="roundRect">
+            <a:off x="822960" y="1691640"/>
+            <a:ext cx="2377440" cy="27432"/>
+          </a:xfrm>
+          <a:prstGeom prst="rect">
             <a:avLst/>
           </a:prstGeom>
           <a:solidFill>
-            <a:srgbClr val="F0F9FF"/>
+            <a:srgbClr val="0284C7"/>
           </a:solidFill>
-          <a:ln w="19050">
-            <a:solidFill>
-              <a:srgbClr val="BAE6FD"/>
-            </a:solidFill>
+          <a:ln>
+            <a:noFill/>
           </a:ln>
         </p:spPr>
         <p:style>
@@ -8559,11 +8580,37 @@
           </a:fontRef>
         </p:style>
         <p:txBody>
-          <a:bodyPr rtlCol="0" anchor="ctr" wrap="square"/>
-          <a:lstStyle/>
-          <a:p>
-            <a:pPr algn="ctr">
-              <a:defRPr sz="1700" b="1">
+          <a:bodyPr rtlCol="0" anchor="ctr"/>
+          <a:lstStyle/>
+          <a:p>
+            <a:pPr algn="ctr"/>
+          </a:p>
+        </p:txBody>
+      </p:sp>
+      <p:sp>
+        <p:nvSpPr>
+          <p:cNvPr id="10" name="TextBox 9"/>
+          <p:cNvSpPr txBox="1"/>
+          <p:nvPr/>
+        </p:nvSpPr>
+        <p:spPr>
+          <a:xfrm>
+            <a:off x="822960" y="1783080"/>
+            <a:ext cx="2377440" cy="4114800"/>
+          </a:xfrm>
+          <a:prstGeom prst="rect">
+            <a:avLst/>
+          </a:prstGeom>
+          <a:noFill/>
+        </p:spPr>
+        <p:txBody>
+          <a:bodyPr wrap="square">
+            <a:spAutoFit/>
+          </a:bodyPr>
+          <a:lstStyle/>
+          <a:p>
+            <a:pPr>
+              <a:defRPr sz="1600" b="1">
                 <a:solidFill>
                   <a:srgbClr val="0F172A"/>
                 </a:solidFill>
@@ -8575,7 +8622,8 @@
             </a:r>
           </a:p>
           <a:p>
-            <a:pPr algn="ctr">
+            <a:br/>
+            <a:pPr>
               <a:defRPr sz="1150">
                 <a:solidFill>
                   <a:srgbClr val="334155"/>
@@ -8583,7 +8631,6 @@
                 <a:latin typeface="Calibri"/>
               </a:defRPr>
             </a:pPr>
-            <a:br/>
             <a:r>
               <a:t>Complete data sovereignty, zero corporate exploitation, and seamless portable access across medical facilities.</a:t>
             </a:r>
@@ -8592,25 +8639,23 @@
       </p:sp>
       <p:sp>
         <p:nvSpPr>
-          <p:cNvPr id="10" name="Rounded Rectangle 9"/>
+          <p:cNvPr id="11" name="Rectangle 10"/>
           <p:cNvSpPr/>
           <p:nvPr/>
         </p:nvSpPr>
         <p:spPr>
           <a:xfrm>
-            <a:off x="3474720" y="1463040"/>
-            <a:ext cx="2496312" cy="4480560"/>
-          </a:xfrm>
-          <a:prstGeom prst="roundRect">
+            <a:off x="3520440" y="1691640"/>
+            <a:ext cx="2377440" cy="27432"/>
+          </a:xfrm>
+          <a:prstGeom prst="rect">
             <a:avLst/>
           </a:prstGeom>
           <a:solidFill>
-            <a:srgbClr val="F0FDFA"/>
+            <a:srgbClr val="0284C7"/>
           </a:solidFill>
-          <a:ln w="19050">
-            <a:solidFill>
-              <a:srgbClr val="A7F3D0"/>
-            </a:solidFill>
+          <a:ln>
+            <a:noFill/>
           </a:ln>
         </p:spPr>
         <p:style>
@@ -8628,11 +8673,37 @@
           </a:fontRef>
         </p:style>
         <p:txBody>
-          <a:bodyPr rtlCol="0" anchor="ctr" wrap="square"/>
-          <a:lstStyle/>
-          <a:p>
-            <a:pPr algn="ctr">
-              <a:defRPr sz="1700" b="1">
+          <a:bodyPr rtlCol="0" anchor="ctr"/>
+          <a:lstStyle/>
+          <a:p>
+            <a:pPr algn="ctr"/>
+          </a:p>
+        </p:txBody>
+      </p:sp>
+      <p:sp>
+        <p:nvSpPr>
+          <p:cNvPr id="12" name="TextBox 11"/>
+          <p:cNvSpPr txBox="1"/>
+          <p:nvPr/>
+        </p:nvSpPr>
+        <p:spPr>
+          <a:xfrm>
+            <a:off x="3520440" y="1783080"/>
+            <a:ext cx="2377440" cy="4114800"/>
+          </a:xfrm>
+          <a:prstGeom prst="rect">
+            <a:avLst/>
+          </a:prstGeom>
+          <a:noFill/>
+        </p:spPr>
+        <p:txBody>
+          <a:bodyPr wrap="square">
+            <a:spAutoFit/>
+          </a:bodyPr>
+          <a:lstStyle/>
+          <a:p>
+            <a:pPr>
+              <a:defRPr sz="1600" b="1">
                 <a:solidFill>
                   <a:srgbClr val="0F172A"/>
                 </a:solidFill>
@@ -8644,7 +8715,8 @@
             </a:r>
           </a:p>
           <a:p>
-            <a:pPr algn="ctr">
+            <a:br/>
+            <a:pPr>
               <a:defRPr sz="1150">
                 <a:solidFill>
                   <a:srgbClr val="334155"/>
@@ -8652,7 +8724,6 @@
                 <a:latin typeface="Calibri"/>
               </a:defRPr>
             </a:pPr>
-            <a:br/>
             <a:r>
               <a:t>Instant verified medical histories, zero diagnostic redundancy, and reduced malpractice liability.</a:t>
             </a:r>
@@ -8661,25 +8732,23 @@
       </p:sp>
       <p:sp>
         <p:nvSpPr>
-          <p:cNvPr id="11" name="Rounded Rectangle 10"/>
+          <p:cNvPr id="13" name="Rectangle 12"/>
           <p:cNvSpPr/>
           <p:nvPr/>
         </p:nvSpPr>
         <p:spPr>
           <a:xfrm>
-            <a:off x="6217920" y="1463040"/>
-            <a:ext cx="2496312" cy="4480560"/>
-          </a:xfrm>
-          <a:prstGeom prst="roundRect">
+            <a:off x="6217920" y="1691640"/>
+            <a:ext cx="2377440" cy="27432"/>
+          </a:xfrm>
+          <a:prstGeom prst="rect">
             <a:avLst/>
           </a:prstGeom>
           <a:solidFill>
-            <a:srgbClr val="EEF2FF"/>
+            <a:srgbClr val="0284C7"/>
           </a:solidFill>
-          <a:ln w="19050">
-            <a:solidFill>
-              <a:srgbClr val="C7D2FE"/>
-            </a:solidFill>
+          <a:ln>
+            <a:noFill/>
           </a:ln>
         </p:spPr>
         <p:style>
@@ -8697,11 +8766,37 @@
           </a:fontRef>
         </p:style>
         <p:txBody>
-          <a:bodyPr rtlCol="0" anchor="ctr" wrap="square"/>
-          <a:lstStyle/>
-          <a:p>
-            <a:pPr algn="ctr">
-              <a:defRPr sz="1700" b="1">
+          <a:bodyPr rtlCol="0" anchor="ctr"/>
+          <a:lstStyle/>
+          <a:p>
+            <a:pPr algn="ctr"/>
+          </a:p>
+        </p:txBody>
+      </p:sp>
+      <p:sp>
+        <p:nvSpPr>
+          <p:cNvPr id="14" name="TextBox 13"/>
+          <p:cNvSpPr txBox="1"/>
+          <p:nvPr/>
+        </p:nvSpPr>
+        <p:spPr>
+          <a:xfrm>
+            <a:off x="6217920" y="1783080"/>
+            <a:ext cx="2377440" cy="4114800"/>
+          </a:xfrm>
+          <a:prstGeom prst="rect">
+            <a:avLst/>
+          </a:prstGeom>
+          <a:noFill/>
+        </p:spPr>
+        <p:txBody>
+          <a:bodyPr wrap="square">
+            <a:spAutoFit/>
+          </a:bodyPr>
+          <a:lstStyle/>
+          <a:p>
+            <a:pPr>
+              <a:defRPr sz="1600" b="1">
                 <a:solidFill>
                   <a:srgbClr val="0F172A"/>
                 </a:solidFill>
@@ -8713,7 +8808,8 @@
             </a:r>
           </a:p>
           <a:p>
-            <a:pPr algn="ctr">
+            <a:br/>
+            <a:pPr>
               <a:defRPr sz="1150">
                 <a:solidFill>
                   <a:srgbClr val="334155"/>
@@ -8721,7 +8817,6 @@
                 <a:latin typeface="Calibri"/>
               </a:defRPr>
             </a:pPr>
-            <a:br/>
             <a:r>
               <a:t>Opt-in Compute-to-Data research pools with automated cryptographic patient micro-rewards.</a:t>
             </a:r>
@@ -8730,25 +8825,23 @@
       </p:sp>
       <p:sp>
         <p:nvSpPr>
-          <p:cNvPr id="12" name="Rounded Rectangle 11"/>
+          <p:cNvPr id="15" name="Rectangle 14"/>
           <p:cNvSpPr/>
           <p:nvPr/>
         </p:nvSpPr>
         <p:spPr>
           <a:xfrm>
-            <a:off x="8961120" y="1463040"/>
-            <a:ext cx="2496312" cy="4480560"/>
-          </a:xfrm>
-          <a:prstGeom prst="roundRect">
+            <a:off x="8915400" y="1691640"/>
+            <a:ext cx="2377440" cy="27432"/>
+          </a:xfrm>
+          <a:prstGeom prst="rect">
             <a:avLst/>
           </a:prstGeom>
           <a:solidFill>
-            <a:srgbClr val="FFFBEB"/>
+            <a:srgbClr val="0284C7"/>
           </a:solidFill>
-          <a:ln w="19050">
-            <a:solidFill>
-              <a:srgbClr val="FDE68A"/>
-            </a:solidFill>
+          <a:ln>
+            <a:noFill/>
           </a:ln>
         </p:spPr>
         <p:style>
@@ -8766,11 +8859,37 @@
           </a:fontRef>
         </p:style>
         <p:txBody>
-          <a:bodyPr rtlCol="0" anchor="ctr" wrap="square"/>
-          <a:lstStyle/>
-          <a:p>
-            <a:pPr algn="ctr">
-              <a:defRPr sz="1700" b="1">
+          <a:bodyPr rtlCol="0" anchor="ctr"/>
+          <a:lstStyle/>
+          <a:p>
+            <a:pPr algn="ctr"/>
+          </a:p>
+        </p:txBody>
+      </p:sp>
+      <p:sp>
+        <p:nvSpPr>
+          <p:cNvPr id="16" name="TextBox 15"/>
+          <p:cNvSpPr txBox="1"/>
+          <p:nvPr/>
+        </p:nvSpPr>
+        <p:spPr>
+          <a:xfrm>
+            <a:off x="8915400" y="1783080"/>
+            <a:ext cx="2377440" cy="4114800"/>
+          </a:xfrm>
+          <a:prstGeom prst="rect">
+            <a:avLst/>
+          </a:prstGeom>
+          <a:noFill/>
+        </p:spPr>
+        <p:txBody>
+          <a:bodyPr wrap="square">
+            <a:spAutoFit/>
+          </a:bodyPr>
+          <a:lstStyle/>
+          <a:p>
+            <a:pPr>
+              <a:defRPr sz="1600" b="1">
                 <a:solidFill>
                   <a:srgbClr val="0F172A"/>
                 </a:solidFill>
@@ -8782,7 +8901,8 @@
             </a:r>
           </a:p>
           <a:p>
-            <a:pPr algn="ctr">
+            <a:br/>
+            <a:pPr>
               <a:defRPr sz="1150">
                 <a:solidFill>
                   <a:srgbClr val="334155"/>
@@ -8790,7 +8910,6 @@
                 <a:latin typeface="Calibri"/>
               </a:defRPr>
             </a:pPr>
-            <a:br/>
             <a:r>
               <a:t>Tamper-proof smart contract claims verification, eliminating fraudulent billing and administrative overhead.</a:t>
             </a:r>
@@ -8830,7 +8949,7 @@
             <a:avLst/>
           </a:prstGeom>
           <a:solidFill>
-            <a:srgbClr val="F8FAFC"/>
+            <a:srgbClr val="FCFCFD"/>
           </a:solidFill>
           <a:ln>
             <a:noFill/>
@@ -8866,8 +8985,8 @@
         </p:nvSpPr>
         <p:spPr>
           <a:xfrm>
-            <a:off x="731520" y="365760"/>
-            <a:ext cx="10725912" cy="274320"/>
+            <a:off x="822960" y="411480"/>
+            <a:ext cx="10515600" cy="228600"/>
           </a:xfrm>
           <a:prstGeom prst="rect">
             <a:avLst/>
@@ -8889,7 +9008,7 @@
               </a:defRPr>
             </a:pPr>
             <a:r>
-              <a:t>SYSTEM SHOWCASE</a:t>
+              <a:t>SYSTEM DEMONSTRATION</a:t>
             </a:r>
           </a:p>
         </p:txBody>
@@ -8902,8 +9021,8 @@
         </p:nvSpPr>
         <p:spPr>
           <a:xfrm>
-            <a:off x="731520" y="621792"/>
-            <a:ext cx="10725912" cy="457200"/>
+            <a:off x="822960" y="658368"/>
+            <a:ext cx="10515600" cy="640080"/>
           </a:xfrm>
           <a:prstGeom prst="rect">
             <a:avLst/>
@@ -8925,12 +9044,12 @@
               </a:defRPr>
             </a:pPr>
             <a:r>
-              <a:t>Functional Prototype Demonstration &amp; Core Modules</a:t>
-            </a:r>
-          </a:p>
-          <a:p>
-            <a:pPr>
-              <a:defRPr sz="1100">
+              <a:t>Functional Prototype Modules &amp; Architecture</a:t>
+            </a:r>
+          </a:p>
+          <a:p>
+            <a:pPr>
+              <a:defRPr sz="1150">
                 <a:solidFill>
                   <a:srgbClr val="64748B"/>
                 </a:solidFill>
@@ -8951,8 +9070,8 @@
         </p:nvSpPr>
         <p:spPr>
           <a:xfrm>
-            <a:off x="731520" y="1234440"/>
-            <a:ext cx="10725912" cy="9144"/>
+            <a:off x="822960" y="1371600"/>
+            <a:ext cx="10545775" cy="9144"/>
           </a:xfrm>
           <a:prstGeom prst="rect">
             <a:avLst/>
@@ -8994,8 +9113,8 @@
         </p:nvSpPr>
         <p:spPr>
           <a:xfrm>
-            <a:off x="731520" y="6263640"/>
-            <a:ext cx="10725912" cy="9144"/>
+            <a:off x="822960" y="6217920"/>
+            <a:ext cx="10545775" cy="9144"/>
           </a:xfrm>
           <a:prstGeom prst="rect">
             <a:avLst/>
@@ -9037,7 +9156,7 @@
         </p:nvSpPr>
         <p:spPr>
           <a:xfrm>
-            <a:off x="731520" y="6327648"/>
+            <a:off x="822960" y="6272784"/>
             <a:ext cx="6400800" cy="274320"/>
           </a:xfrm>
           <a:prstGeom prst="rect">
@@ -9073,8 +9192,8 @@
         </p:nvSpPr>
         <p:spPr>
           <a:xfrm>
-            <a:off x="7772400" y="6327648"/>
-            <a:ext cx="3685032" cy="274320"/>
+            <a:off x="7772400" y="6272784"/>
+            <a:ext cx="3596335" cy="274320"/>
           </a:xfrm>
           <a:prstGeom prst="rect">
             <a:avLst/>
@@ -9096,32 +9215,30 @@
               </a:defRPr>
             </a:pPr>
             <a:r>
-              <a:t>BCSE497J Project - I • Fall 2026-27</a:t>
-            </a:r>
-          </a:p>
-        </p:txBody>
-      </p:sp>
-      <p:sp>
-        <p:nvSpPr>
-          <p:cNvPr id="9" name="Rounded Rectangle 8"/>
+              <a:t>BCSE497J Project - I • Fall Semester 2026-27</a:t>
+            </a:r>
+          </a:p>
+        </p:txBody>
+      </p:sp>
+      <p:sp>
+        <p:nvSpPr>
+          <p:cNvPr id="9" name="Rectangle 8"/>
           <p:cNvSpPr/>
           <p:nvPr/>
         </p:nvSpPr>
         <p:spPr>
           <a:xfrm>
-            <a:off x="731520" y="1463040"/>
-            <a:ext cx="5239512" cy="2057400"/>
-          </a:xfrm>
-          <a:prstGeom prst="roundRect">
+            <a:off x="822960" y="1691640"/>
+            <a:ext cx="36576" cy="1645920"/>
+          </a:xfrm>
+          <a:prstGeom prst="rect">
             <a:avLst/>
           </a:prstGeom>
           <a:solidFill>
-            <a:srgbClr val="F0F9FF"/>
+            <a:srgbClr val="0284C7"/>
           </a:solidFill>
-          <a:ln w="19050">
-            <a:solidFill>
-              <a:srgbClr val="BAE6FD"/>
-            </a:solidFill>
+          <a:ln>
+            <a:noFill/>
           </a:ln>
         </p:spPr>
         <p:style>
@@ -9139,11 +9256,37 @@
           </a:fontRef>
         </p:style>
         <p:txBody>
-          <a:bodyPr rtlCol="0" anchor="ctr" wrap="square"/>
-          <a:lstStyle/>
-          <a:p>
-            <a:pPr algn="ctr">
-              <a:defRPr sz="1500" b="1">
+          <a:bodyPr rtlCol="0" anchor="ctr"/>
+          <a:lstStyle/>
+          <a:p>
+            <a:pPr algn="ctr"/>
+          </a:p>
+        </p:txBody>
+      </p:sp>
+      <p:sp>
+        <p:nvSpPr>
+          <p:cNvPr id="10" name="TextBox 9"/>
+          <p:cNvSpPr txBox="1"/>
+          <p:nvPr/>
+        </p:nvSpPr>
+        <p:spPr>
+          <a:xfrm>
+            <a:off x="987552" y="1645920"/>
+            <a:ext cx="4937760" cy="1737360"/>
+          </a:xfrm>
+          <a:prstGeom prst="rect">
+            <a:avLst/>
+          </a:prstGeom>
+          <a:noFill/>
+        </p:spPr>
+        <p:txBody>
+          <a:bodyPr wrap="square">
+            <a:spAutoFit/>
+          </a:bodyPr>
+          <a:lstStyle/>
+          <a:p>
+            <a:pPr>
+              <a:defRPr sz="1400" b="1">
                 <a:solidFill>
                   <a:srgbClr val="0F172A"/>
                 </a:solidFill>
@@ -9171,25 +9314,23 @@
       </p:sp>
       <p:sp>
         <p:nvSpPr>
-          <p:cNvPr id="10" name="Rounded Rectangle 9"/>
+          <p:cNvPr id="11" name="Rectangle 10"/>
           <p:cNvSpPr/>
           <p:nvPr/>
         </p:nvSpPr>
         <p:spPr>
           <a:xfrm>
-            <a:off x="6217920" y="1463040"/>
-            <a:ext cx="5239512" cy="2057400"/>
-          </a:xfrm>
-          <a:prstGeom prst="roundRect">
+            <a:off x="6217920" y="1691640"/>
+            <a:ext cx="36576" cy="1645920"/>
+          </a:xfrm>
+          <a:prstGeom prst="rect">
             <a:avLst/>
           </a:prstGeom>
           <a:solidFill>
-            <a:srgbClr val="F0FDFA"/>
+            <a:srgbClr val="0284C7"/>
           </a:solidFill>
-          <a:ln w="19050">
-            <a:solidFill>
-              <a:srgbClr val="A7F3D0"/>
-            </a:solidFill>
+          <a:ln>
+            <a:noFill/>
           </a:ln>
         </p:spPr>
         <p:style>
@@ -9207,11 +9348,37 @@
           </a:fontRef>
         </p:style>
         <p:txBody>
-          <a:bodyPr rtlCol="0" anchor="ctr" wrap="square"/>
-          <a:lstStyle/>
-          <a:p>
-            <a:pPr algn="ctr">
-              <a:defRPr sz="1500" b="1">
+          <a:bodyPr rtlCol="0" anchor="ctr"/>
+          <a:lstStyle/>
+          <a:p>
+            <a:pPr algn="ctr"/>
+          </a:p>
+        </p:txBody>
+      </p:sp>
+      <p:sp>
+        <p:nvSpPr>
+          <p:cNvPr id="12" name="TextBox 11"/>
+          <p:cNvSpPr txBox="1"/>
+          <p:nvPr/>
+        </p:nvSpPr>
+        <p:spPr>
+          <a:xfrm>
+            <a:off x="6382512" y="1645920"/>
+            <a:ext cx="4937760" cy="1737360"/>
+          </a:xfrm>
+          <a:prstGeom prst="rect">
+            <a:avLst/>
+          </a:prstGeom>
+          <a:noFill/>
+        </p:spPr>
+        <p:txBody>
+          <a:bodyPr wrap="square">
+            <a:spAutoFit/>
+          </a:bodyPr>
+          <a:lstStyle/>
+          <a:p>
+            <a:pPr>
+              <a:defRPr sz="1400" b="1">
                 <a:solidFill>
                   <a:srgbClr val="0F172A"/>
                 </a:solidFill>
@@ -9239,25 +9406,23 @@
       </p:sp>
       <p:sp>
         <p:nvSpPr>
-          <p:cNvPr id="11" name="Rounded Rectangle 10"/>
+          <p:cNvPr id="13" name="Rectangle 12"/>
           <p:cNvSpPr/>
           <p:nvPr/>
         </p:nvSpPr>
         <p:spPr>
           <a:xfrm>
-            <a:off x="731520" y="3703320"/>
-            <a:ext cx="5239512" cy="2057400"/>
-          </a:xfrm>
-          <a:prstGeom prst="roundRect">
+            <a:off x="822960" y="3840480"/>
+            <a:ext cx="36576" cy="1645920"/>
+          </a:xfrm>
+          <a:prstGeom prst="rect">
             <a:avLst/>
           </a:prstGeom>
           <a:solidFill>
-            <a:srgbClr val="EEF2FF"/>
+            <a:srgbClr val="0284C7"/>
           </a:solidFill>
-          <a:ln w="19050">
-            <a:solidFill>
-              <a:srgbClr val="C7D2FE"/>
-            </a:solidFill>
+          <a:ln>
+            <a:noFill/>
           </a:ln>
         </p:spPr>
         <p:style>
@@ -9275,11 +9440,37 @@
           </a:fontRef>
         </p:style>
         <p:txBody>
-          <a:bodyPr rtlCol="0" anchor="ctr" wrap="square"/>
-          <a:lstStyle/>
-          <a:p>
-            <a:pPr algn="ctr">
-              <a:defRPr sz="1500" b="1">
+          <a:bodyPr rtlCol="0" anchor="ctr"/>
+          <a:lstStyle/>
+          <a:p>
+            <a:pPr algn="ctr"/>
+          </a:p>
+        </p:txBody>
+      </p:sp>
+      <p:sp>
+        <p:nvSpPr>
+          <p:cNvPr id="14" name="TextBox 13"/>
+          <p:cNvSpPr txBox="1"/>
+          <p:nvPr/>
+        </p:nvSpPr>
+        <p:spPr>
+          <a:xfrm>
+            <a:off x="987552" y="3794760"/>
+            <a:ext cx="4937760" cy="1737360"/>
+          </a:xfrm>
+          <a:prstGeom prst="rect">
+            <a:avLst/>
+          </a:prstGeom>
+          <a:noFill/>
+        </p:spPr>
+        <p:txBody>
+          <a:bodyPr wrap="square">
+            <a:spAutoFit/>
+          </a:bodyPr>
+          <a:lstStyle/>
+          <a:p>
+            <a:pPr>
+              <a:defRPr sz="1400" b="1">
                 <a:solidFill>
                   <a:srgbClr val="0F172A"/>
                 </a:solidFill>
@@ -9307,25 +9498,23 @@
       </p:sp>
       <p:sp>
         <p:nvSpPr>
-          <p:cNvPr id="12" name="Rounded Rectangle 11"/>
+          <p:cNvPr id="15" name="Rectangle 14"/>
           <p:cNvSpPr/>
           <p:nvPr/>
         </p:nvSpPr>
         <p:spPr>
           <a:xfrm>
-            <a:off x="6217920" y="3703320"/>
-            <a:ext cx="5239512" cy="2057400"/>
-          </a:xfrm>
-          <a:prstGeom prst="roundRect">
+            <a:off x="6217920" y="3840480"/>
+            <a:ext cx="36576" cy="1645920"/>
+          </a:xfrm>
+          <a:prstGeom prst="rect">
             <a:avLst/>
           </a:prstGeom>
           <a:solidFill>
-            <a:srgbClr val="FFFBEB"/>
+            <a:srgbClr val="0284C7"/>
           </a:solidFill>
-          <a:ln w="19050">
-            <a:solidFill>
-              <a:srgbClr val="FDE68A"/>
-            </a:solidFill>
+          <a:ln>
+            <a:noFill/>
           </a:ln>
         </p:spPr>
         <p:style>
@@ -9343,11 +9532,37 @@
           </a:fontRef>
         </p:style>
         <p:txBody>
-          <a:bodyPr rtlCol="0" anchor="ctr" wrap="square"/>
-          <a:lstStyle/>
-          <a:p>
-            <a:pPr algn="ctr">
-              <a:defRPr sz="1500" b="1">
+          <a:bodyPr rtlCol="0" anchor="ctr"/>
+          <a:lstStyle/>
+          <a:p>
+            <a:pPr algn="ctr"/>
+          </a:p>
+        </p:txBody>
+      </p:sp>
+      <p:sp>
+        <p:nvSpPr>
+          <p:cNvPr id="16" name="TextBox 15"/>
+          <p:cNvSpPr txBox="1"/>
+          <p:nvPr/>
+        </p:nvSpPr>
+        <p:spPr>
+          <a:xfrm>
+            <a:off x="6382512" y="3794760"/>
+            <a:ext cx="4937760" cy="1737360"/>
+          </a:xfrm>
+          <a:prstGeom prst="rect">
+            <a:avLst/>
+          </a:prstGeom>
+          <a:noFill/>
+        </p:spPr>
+        <p:txBody>
+          <a:bodyPr wrap="square">
+            <a:spAutoFit/>
+          </a:bodyPr>
+          <a:lstStyle/>
+          <a:p>
+            <a:pPr>
+              <a:defRPr sz="1400" b="1">
                 <a:solidFill>
                   <a:srgbClr val="0F172A"/>
                 </a:solidFill>
